--- a/docs/pptx/whole/jx-linsubhr-ratio-hosp3.pptx
+++ b/docs/pptx/whole/jx-linsubhr-ratio-hosp3.pptx
@@ -2271,7 +2271,7 @@
           </p:nvSpPr>
           <p:spPr>
             <a:xfrm>
-              <a:off x="817517" y="5114368"/>
+              <a:off x="817517" y="5142518"/>
               <a:ext cx="7799693" cy="0"/>
             </a:xfrm>
             <a:custGeom>
@@ -2314,7 +2314,7 @@
           </p:nvSpPr>
           <p:spPr>
             <a:xfrm>
-              <a:off x="817517" y="4244691"/>
+              <a:off x="817517" y="4313054"/>
               <a:ext cx="7799693" cy="0"/>
             </a:xfrm>
             <a:custGeom>
@@ -2357,7 +2357,7 @@
           </p:nvSpPr>
           <p:spPr>
             <a:xfrm>
-              <a:off x="817517" y="3375014"/>
+              <a:off x="817517" y="3483591"/>
               <a:ext cx="7799693" cy="0"/>
             </a:xfrm>
             <a:custGeom>
@@ -2400,7 +2400,7 @@
           </p:nvSpPr>
           <p:spPr>
             <a:xfrm>
-              <a:off x="817517" y="2505337"/>
+              <a:off x="817517" y="2654127"/>
               <a:ext cx="7799693" cy="0"/>
             </a:xfrm>
             <a:custGeom>
@@ -2443,15 +2443,15 @@
           </p:nvSpPr>
           <p:spPr>
             <a:xfrm>
-              <a:off x="1615213" y="1896563"/>
-              <a:ext cx="0" cy="3826579"/>
+              <a:off x="1615213" y="2073503"/>
+              <a:ext cx="0" cy="3649639"/>
             </a:xfrm>
             <a:custGeom>
               <a:avLst/>
               <a:pathLst>
-                <a:path w="0" h="3826579">
+                <a:path w="0" h="3649639">
                   <a:moveTo>
-                    <a:pt x="0" y="3826579"/>
+                    <a:pt x="0" y="3649639"/>
                   </a:moveTo>
                   <a:lnTo>
                     <a:pt x="0" y="0"/>
@@ -2486,15 +2486,15 @@
           </p:nvSpPr>
           <p:spPr>
             <a:xfrm>
-              <a:off x="3387871" y="1896563"/>
-              <a:ext cx="0" cy="3826579"/>
+              <a:off x="3387871" y="2073503"/>
+              <a:ext cx="0" cy="3649639"/>
             </a:xfrm>
             <a:custGeom>
               <a:avLst/>
               <a:pathLst>
-                <a:path w="0" h="3826579">
+                <a:path w="0" h="3649639">
                   <a:moveTo>
-                    <a:pt x="0" y="3826579"/>
+                    <a:pt x="0" y="3649639"/>
                   </a:moveTo>
                   <a:lnTo>
                     <a:pt x="0" y="0"/>
@@ -2529,15 +2529,15 @@
           </p:nvSpPr>
           <p:spPr>
             <a:xfrm>
-              <a:off x="5160528" y="1896563"/>
-              <a:ext cx="0" cy="3826579"/>
+              <a:off x="5160528" y="2073503"/>
+              <a:ext cx="0" cy="3649639"/>
             </a:xfrm>
             <a:custGeom>
               <a:avLst/>
               <a:pathLst>
-                <a:path w="0" h="3826579">
+                <a:path w="0" h="3649639">
                   <a:moveTo>
-                    <a:pt x="0" y="3826579"/>
+                    <a:pt x="0" y="3649639"/>
                   </a:moveTo>
                   <a:lnTo>
                     <a:pt x="0" y="0"/>
@@ -2572,15 +2572,15 @@
           </p:nvSpPr>
           <p:spPr>
             <a:xfrm>
-              <a:off x="6933186" y="1896563"/>
-              <a:ext cx="0" cy="3826579"/>
+              <a:off x="6933186" y="2073503"/>
+              <a:ext cx="0" cy="3649639"/>
             </a:xfrm>
             <a:custGeom>
               <a:avLst/>
               <a:pathLst>
-                <a:path w="0" h="3826579">
+                <a:path w="0" h="3649639">
                   <a:moveTo>
-                    <a:pt x="0" y="3826579"/>
+                    <a:pt x="0" y="3649639"/>
                   </a:moveTo>
                   <a:lnTo>
                     <a:pt x="0" y="0"/>
@@ -2615,7 +2615,7 @@
           </p:nvSpPr>
           <p:spPr>
             <a:xfrm>
-              <a:off x="817517" y="5549207"/>
+              <a:off x="817517" y="5557249"/>
               <a:ext cx="7799693" cy="0"/>
             </a:xfrm>
             <a:custGeom>
@@ -2658,7 +2658,7 @@
           </p:nvSpPr>
           <p:spPr>
             <a:xfrm>
-              <a:off x="817517" y="4679530"/>
+              <a:off x="817517" y="4727786"/>
               <a:ext cx="7799693" cy="0"/>
             </a:xfrm>
             <a:custGeom>
@@ -2701,7 +2701,7 @@
           </p:nvSpPr>
           <p:spPr>
             <a:xfrm>
-              <a:off x="817517" y="3809853"/>
+              <a:off x="817517" y="3898322"/>
               <a:ext cx="7799693" cy="0"/>
             </a:xfrm>
             <a:custGeom>
@@ -2744,7 +2744,7 @@
           </p:nvSpPr>
           <p:spPr>
             <a:xfrm>
-              <a:off x="817517" y="2940175"/>
+              <a:off x="817517" y="3068859"/>
               <a:ext cx="7799693" cy="0"/>
             </a:xfrm>
             <a:custGeom>
@@ -2787,7 +2787,7 @@
           </p:nvSpPr>
           <p:spPr>
             <a:xfrm>
-              <a:off x="817517" y="2070498"/>
+              <a:off x="817517" y="2239395"/>
               <a:ext cx="7799693" cy="0"/>
             </a:xfrm>
             <a:custGeom>
@@ -2830,15 +2830,15 @@
           </p:nvSpPr>
           <p:spPr>
             <a:xfrm>
-              <a:off x="2501542" y="1896563"/>
-              <a:ext cx="0" cy="3826579"/>
+              <a:off x="2501542" y="2073503"/>
+              <a:ext cx="0" cy="3649639"/>
             </a:xfrm>
             <a:custGeom>
               <a:avLst/>
               <a:pathLst>
-                <a:path w="0" h="3826579">
+                <a:path w="0" h="3649639">
                   <a:moveTo>
-                    <a:pt x="0" y="3826579"/>
+                    <a:pt x="0" y="3649639"/>
                   </a:moveTo>
                   <a:lnTo>
                     <a:pt x="0" y="0"/>
@@ -2873,15 +2873,15 @@
           </p:nvSpPr>
           <p:spPr>
             <a:xfrm>
-              <a:off x="4274200" y="1896563"/>
-              <a:ext cx="0" cy="3826579"/>
+              <a:off x="4274200" y="2073503"/>
+              <a:ext cx="0" cy="3649639"/>
             </a:xfrm>
             <a:custGeom>
               <a:avLst/>
               <a:pathLst>
-                <a:path w="0" h="3826579">
+                <a:path w="0" h="3649639">
                   <a:moveTo>
-                    <a:pt x="0" y="3826579"/>
+                    <a:pt x="0" y="3649639"/>
                   </a:moveTo>
                   <a:lnTo>
                     <a:pt x="0" y="0"/>
@@ -2916,15 +2916,15 @@
           </p:nvSpPr>
           <p:spPr>
             <a:xfrm>
-              <a:off x="6046857" y="1896563"/>
-              <a:ext cx="0" cy="3826579"/>
+              <a:off x="6046857" y="2073503"/>
+              <a:ext cx="0" cy="3649639"/>
             </a:xfrm>
             <a:custGeom>
               <a:avLst/>
               <a:pathLst>
-                <a:path w="0" h="3826579">
+                <a:path w="0" h="3649639">
                   <a:moveTo>
-                    <a:pt x="0" y="3826579"/>
+                    <a:pt x="0" y="3649639"/>
                   </a:moveTo>
                   <a:lnTo>
                     <a:pt x="0" y="0"/>
@@ -2959,15 +2959,15 @@
           </p:nvSpPr>
           <p:spPr>
             <a:xfrm>
-              <a:off x="7819515" y="1896563"/>
-              <a:ext cx="0" cy="3826579"/>
+              <a:off x="7819515" y="2073503"/>
+              <a:ext cx="0" cy="3649639"/>
             </a:xfrm>
             <a:custGeom>
               <a:avLst/>
               <a:pathLst>
-                <a:path w="0" h="3826579">
+                <a:path w="0" h="3649639">
                   <a:moveTo>
-                    <a:pt x="0" y="3826579"/>
+                    <a:pt x="0" y="3649639"/>
                   </a:moveTo>
                   <a:lnTo>
                     <a:pt x="0" y="0"/>
@@ -3002,510 +3002,510 @@
           </p:nvSpPr>
           <p:spPr>
             <a:xfrm>
-              <a:off x="845354" y="1896563"/>
-              <a:ext cx="7207992" cy="3646536"/>
+              <a:off x="845354" y="2073503"/>
+              <a:ext cx="7207992" cy="3477921"/>
             </a:xfrm>
             <a:custGeom>
               <a:avLst/>
               <a:pathLst>
-                <a:path w="7207992" h="3646536">
+                <a:path w="7207992" h="3477921">
                   <a:moveTo>
                     <a:pt x="2329065" y="0"/>
                   </a:moveTo>
                   <a:lnTo>
-                    <a:pt x="2339831" y="53311"/>
-                  </a:lnTo>
-                  <a:lnTo>
-                    <a:pt x="2413591" y="384909"/>
-                  </a:lnTo>
-                  <a:lnTo>
-                    <a:pt x="2487351" y="685957"/>
-                  </a:lnTo>
-                  <a:lnTo>
-                    <a:pt x="2561111" y="959271"/>
-                  </a:lnTo>
-                  <a:lnTo>
-                    <a:pt x="2634871" y="1207405"/>
-                  </a:lnTo>
-                  <a:lnTo>
-                    <a:pt x="2708631" y="1432679"/>
-                  </a:lnTo>
-                  <a:lnTo>
-                    <a:pt x="2782391" y="1637199"/>
-                  </a:lnTo>
-                  <a:lnTo>
-                    <a:pt x="2856151" y="1822877"/>
-                  </a:lnTo>
-                  <a:lnTo>
-                    <a:pt x="2929911" y="1991449"/>
-                  </a:lnTo>
-                  <a:lnTo>
-                    <a:pt x="3003671" y="2144491"/>
-                  </a:lnTo>
-                  <a:lnTo>
-                    <a:pt x="3077431" y="2283433"/>
-                  </a:lnTo>
-                  <a:lnTo>
-                    <a:pt x="3151191" y="2409575"/>
-                  </a:lnTo>
-                  <a:lnTo>
-                    <a:pt x="3224951" y="2524096"/>
-                  </a:lnTo>
-                  <a:lnTo>
-                    <a:pt x="3298711" y="2628066"/>
-                  </a:lnTo>
-                  <a:lnTo>
-                    <a:pt x="3372471" y="2722458"/>
-                  </a:lnTo>
-                  <a:lnTo>
-                    <a:pt x="3446231" y="2791103"/>
-                  </a:lnTo>
-                  <a:lnTo>
-                    <a:pt x="3519991" y="2817330"/>
-                  </a:lnTo>
-                  <a:lnTo>
-                    <a:pt x="3593751" y="2842758"/>
-                  </a:lnTo>
-                  <a:lnTo>
-                    <a:pt x="3667511" y="2867412"/>
-                  </a:lnTo>
-                  <a:lnTo>
-                    <a:pt x="3741271" y="2891316"/>
-                  </a:lnTo>
-                  <a:lnTo>
-                    <a:pt x="3815031" y="2914492"/>
-                  </a:lnTo>
-                  <a:lnTo>
-                    <a:pt x="3888791" y="2936962"/>
-                  </a:lnTo>
-                  <a:lnTo>
-                    <a:pt x="3962551" y="2958748"/>
-                  </a:lnTo>
-                  <a:lnTo>
-                    <a:pt x="4036311" y="2979871"/>
-                  </a:lnTo>
-                  <a:lnTo>
-                    <a:pt x="4110071" y="3000352"/>
-                  </a:lnTo>
-                  <a:lnTo>
-                    <a:pt x="4183831" y="3020208"/>
-                  </a:lnTo>
-                  <a:lnTo>
-                    <a:pt x="4257591" y="3039461"/>
-                  </a:lnTo>
-                  <a:lnTo>
-                    <a:pt x="4331351" y="3058127"/>
-                  </a:lnTo>
-                  <a:lnTo>
-                    <a:pt x="4405111" y="3076225"/>
-                  </a:lnTo>
-                  <a:lnTo>
-                    <a:pt x="4478872" y="3093772"/>
-                  </a:lnTo>
-                  <a:lnTo>
-                    <a:pt x="4552632" y="3110785"/>
-                  </a:lnTo>
-                  <a:lnTo>
-                    <a:pt x="4626392" y="3127279"/>
-                  </a:lnTo>
-                  <a:lnTo>
-                    <a:pt x="4700152" y="3143272"/>
-                  </a:lnTo>
-                  <a:lnTo>
-                    <a:pt x="4773912" y="3158778"/>
-                  </a:lnTo>
-                  <a:lnTo>
-                    <a:pt x="4847672" y="3173812"/>
-                  </a:lnTo>
-                  <a:lnTo>
-                    <a:pt x="4921432" y="3188389"/>
-                  </a:lnTo>
-                  <a:lnTo>
-                    <a:pt x="4995192" y="3202521"/>
-                  </a:lnTo>
-                  <a:lnTo>
-                    <a:pt x="5068952" y="3216224"/>
-                  </a:lnTo>
-                  <a:lnTo>
-                    <a:pt x="5142712" y="3229509"/>
-                  </a:lnTo>
-                  <a:lnTo>
-                    <a:pt x="5216472" y="3242390"/>
-                  </a:lnTo>
-                  <a:lnTo>
-                    <a:pt x="5290232" y="3254878"/>
-                  </a:lnTo>
-                  <a:lnTo>
-                    <a:pt x="5363992" y="3266987"/>
-                  </a:lnTo>
-                  <a:lnTo>
-                    <a:pt x="5437752" y="3278727"/>
-                  </a:lnTo>
-                  <a:lnTo>
-                    <a:pt x="5511512" y="3290109"/>
-                  </a:lnTo>
-                  <a:lnTo>
-                    <a:pt x="5585272" y="3301145"/>
-                  </a:lnTo>
-                  <a:lnTo>
-                    <a:pt x="5659032" y="3311846"/>
-                  </a:lnTo>
-                  <a:lnTo>
-                    <a:pt x="5732792" y="3322220"/>
-                  </a:lnTo>
-                  <a:lnTo>
-                    <a:pt x="5806552" y="3332278"/>
-                  </a:lnTo>
-                  <a:lnTo>
-                    <a:pt x="5880312" y="3342031"/>
-                  </a:lnTo>
-                  <a:lnTo>
-                    <a:pt x="5954072" y="3351486"/>
-                  </a:lnTo>
-                  <a:lnTo>
-                    <a:pt x="6027832" y="3360654"/>
-                  </a:lnTo>
-                  <a:lnTo>
-                    <a:pt x="6101592" y="3369543"/>
-                  </a:lnTo>
-                  <a:lnTo>
-                    <a:pt x="6175352" y="3378161"/>
-                  </a:lnTo>
-                  <a:lnTo>
-                    <a:pt x="6249112" y="3386516"/>
-                  </a:lnTo>
-                  <a:lnTo>
-                    <a:pt x="6322872" y="3394617"/>
-                  </a:lnTo>
-                  <a:lnTo>
-                    <a:pt x="6396632" y="3402472"/>
-                  </a:lnTo>
-                  <a:lnTo>
-                    <a:pt x="6470392" y="3410088"/>
-                  </a:lnTo>
-                  <a:lnTo>
-                    <a:pt x="6544152" y="3417471"/>
-                  </a:lnTo>
-                  <a:lnTo>
-                    <a:pt x="6617912" y="3424630"/>
-                  </a:lnTo>
-                  <a:lnTo>
-                    <a:pt x="6691672" y="3431571"/>
-                  </a:lnTo>
-                  <a:lnTo>
-                    <a:pt x="6765432" y="3438301"/>
-                  </a:lnTo>
-                  <a:lnTo>
-                    <a:pt x="6839192" y="3444826"/>
-                  </a:lnTo>
-                  <a:lnTo>
-                    <a:pt x="6912952" y="3451152"/>
-                  </a:lnTo>
-                  <a:lnTo>
-                    <a:pt x="6986712" y="3457286"/>
-                  </a:lnTo>
-                  <a:lnTo>
-                    <a:pt x="7060472" y="3463233"/>
-                  </a:lnTo>
-                  <a:lnTo>
-                    <a:pt x="7134232" y="3468999"/>
-                  </a:lnTo>
-                  <a:lnTo>
-                    <a:pt x="7207992" y="3474589"/>
-                  </a:lnTo>
-                  <a:lnTo>
-                    <a:pt x="7207992" y="3646536"/>
-                  </a:lnTo>
-                  <a:lnTo>
-                    <a:pt x="7134232" y="3645916"/>
-                  </a:lnTo>
-                  <a:lnTo>
-                    <a:pt x="7060472" y="3645233"/>
-                  </a:lnTo>
-                  <a:lnTo>
-                    <a:pt x="6986712" y="3644482"/>
-                  </a:lnTo>
-                  <a:lnTo>
-                    <a:pt x="6912952" y="3643653"/>
-                  </a:lnTo>
-                  <a:lnTo>
-                    <a:pt x="6839192" y="3642741"/>
-                  </a:lnTo>
-                  <a:lnTo>
-                    <a:pt x="6765432" y="3641736"/>
-                  </a:lnTo>
-                  <a:lnTo>
-                    <a:pt x="6691672" y="3640629"/>
-                  </a:lnTo>
-                  <a:lnTo>
-                    <a:pt x="6617912" y="3639410"/>
-                  </a:lnTo>
-                  <a:lnTo>
-                    <a:pt x="6544152" y="3638067"/>
-                  </a:lnTo>
-                  <a:lnTo>
-                    <a:pt x="6470392" y="3636588"/>
-                  </a:lnTo>
-                  <a:lnTo>
-                    <a:pt x="6396632" y="3634959"/>
-                  </a:lnTo>
-                  <a:lnTo>
-                    <a:pt x="6322872" y="3633165"/>
-                  </a:lnTo>
-                  <a:lnTo>
-                    <a:pt x="6249112" y="3631188"/>
-                  </a:lnTo>
-                  <a:lnTo>
-                    <a:pt x="6175352" y="3629011"/>
-                  </a:lnTo>
-                  <a:lnTo>
-                    <a:pt x="6101592" y="3626612"/>
-                  </a:lnTo>
-                  <a:lnTo>
-                    <a:pt x="6027832" y="3623971"/>
-                  </a:lnTo>
-                  <a:lnTo>
-                    <a:pt x="5954072" y="3621061"/>
-                  </a:lnTo>
-                  <a:lnTo>
-                    <a:pt x="5880312" y="3617857"/>
-                  </a:lnTo>
-                  <a:lnTo>
-                    <a:pt x="5806552" y="3614327"/>
-                  </a:lnTo>
-                  <a:lnTo>
-                    <a:pt x="5732792" y="3610438"/>
-                  </a:lnTo>
-                  <a:lnTo>
-                    <a:pt x="5659032" y="3606156"/>
-                  </a:lnTo>
-                  <a:lnTo>
-                    <a:pt x="5585272" y="3601438"/>
-                  </a:lnTo>
-                  <a:lnTo>
-                    <a:pt x="5511512" y="3596242"/>
-                  </a:lnTo>
-                  <a:lnTo>
-                    <a:pt x="5437752" y="3590519"/>
-                  </a:lnTo>
-                  <a:lnTo>
-                    <a:pt x="5363992" y="3584214"/>
-                  </a:lnTo>
-                  <a:lnTo>
-                    <a:pt x="5290232" y="3577270"/>
-                  </a:lnTo>
-                  <a:lnTo>
-                    <a:pt x="5216472" y="3569622"/>
-                  </a:lnTo>
-                  <a:lnTo>
-                    <a:pt x="5142712" y="3561197"/>
-                  </a:lnTo>
-                  <a:lnTo>
-                    <a:pt x="5068952" y="3551918"/>
-                  </a:lnTo>
-                  <a:lnTo>
-                    <a:pt x="4995192" y="3541696"/>
-                  </a:lnTo>
-                  <a:lnTo>
-                    <a:pt x="4921432" y="3530438"/>
-                  </a:lnTo>
-                  <a:lnTo>
-                    <a:pt x="4847672" y="3518037"/>
-                  </a:lnTo>
-                  <a:lnTo>
-                    <a:pt x="4773912" y="3504378"/>
-                  </a:lnTo>
-                  <a:lnTo>
-                    <a:pt x="4700152" y="3489332"/>
-                  </a:lnTo>
-                  <a:lnTo>
-                    <a:pt x="4626392" y="3472760"/>
-                  </a:lnTo>
-                  <a:lnTo>
-                    <a:pt x="4552632" y="3454506"/>
-                  </a:lnTo>
-                  <a:lnTo>
-                    <a:pt x="4478872" y="3434400"/>
-                  </a:lnTo>
-                  <a:lnTo>
-                    <a:pt x="4405111" y="3412253"/>
-                  </a:lnTo>
-                  <a:lnTo>
-                    <a:pt x="4331351" y="3387859"/>
-                  </a:lnTo>
-                  <a:lnTo>
-                    <a:pt x="4257591" y="3360990"/>
-                  </a:lnTo>
-                  <a:lnTo>
-                    <a:pt x="4183831" y="3331394"/>
-                  </a:lnTo>
-                  <a:lnTo>
-                    <a:pt x="4110071" y="3298795"/>
-                  </a:lnTo>
-                  <a:lnTo>
-                    <a:pt x="4036311" y="3262887"/>
-                  </a:lnTo>
-                  <a:lnTo>
-                    <a:pt x="3962551" y="3223336"/>
-                  </a:lnTo>
-                  <a:lnTo>
-                    <a:pt x="3888791" y="3179772"/>
-                  </a:lnTo>
-                  <a:lnTo>
-                    <a:pt x="3815031" y="3131787"/>
-                  </a:lnTo>
-                  <a:lnTo>
-                    <a:pt x="3741271" y="3078932"/>
-                  </a:lnTo>
-                  <a:lnTo>
-                    <a:pt x="3667511" y="3020714"/>
-                  </a:lnTo>
-                  <a:lnTo>
-                    <a:pt x="3593751" y="2956588"/>
-                  </a:lnTo>
-                  <a:lnTo>
-                    <a:pt x="3519991" y="2885955"/>
-                  </a:lnTo>
-                  <a:lnTo>
-                    <a:pt x="3446231" y="2808154"/>
-                  </a:lnTo>
-                  <a:lnTo>
-                    <a:pt x="3372471" y="2764053"/>
-                  </a:lnTo>
-                  <a:lnTo>
-                    <a:pt x="3298711" y="2736154"/>
-                  </a:lnTo>
-                  <a:lnTo>
-                    <a:pt x="3224951" y="2707379"/>
-                  </a:lnTo>
-                  <a:lnTo>
-                    <a:pt x="3151191" y="2677700"/>
-                  </a:lnTo>
-                  <a:lnTo>
-                    <a:pt x="3077431" y="2647090"/>
-                  </a:lnTo>
-                  <a:lnTo>
-                    <a:pt x="3003671" y="2615518"/>
-                  </a:lnTo>
-                  <a:lnTo>
-                    <a:pt x="2929911" y="2582955"/>
-                  </a:lnTo>
-                  <a:lnTo>
-                    <a:pt x="2856151" y="2549370"/>
-                  </a:lnTo>
-                  <a:lnTo>
-                    <a:pt x="2782391" y="2514730"/>
-                  </a:lnTo>
-                  <a:lnTo>
-                    <a:pt x="2708631" y="2479003"/>
-                  </a:lnTo>
-                  <a:lnTo>
-                    <a:pt x="2634871" y="2442154"/>
-                  </a:lnTo>
-                  <a:lnTo>
-                    <a:pt x="2561111" y="2404148"/>
-                  </a:lnTo>
-                  <a:lnTo>
-                    <a:pt x="2487351" y="2364949"/>
-                  </a:lnTo>
-                  <a:lnTo>
-                    <a:pt x="2413591" y="2324519"/>
-                  </a:lnTo>
-                  <a:lnTo>
-                    <a:pt x="2339831" y="2282819"/>
-                  </a:lnTo>
-                  <a:lnTo>
-                    <a:pt x="2266071" y="2239810"/>
-                  </a:lnTo>
-                  <a:lnTo>
-                    <a:pt x="2192311" y="2195451"/>
-                  </a:lnTo>
-                  <a:lnTo>
-                    <a:pt x="2118551" y="2149700"/>
-                  </a:lnTo>
-                  <a:lnTo>
-                    <a:pt x="2044791" y="2102511"/>
-                  </a:lnTo>
-                  <a:lnTo>
-                    <a:pt x="1971031" y="2053842"/>
-                  </a:lnTo>
-                  <a:lnTo>
-                    <a:pt x="1897271" y="2003644"/>
-                  </a:lnTo>
-                  <a:lnTo>
-                    <a:pt x="1823511" y="1951870"/>
-                  </a:lnTo>
-                  <a:lnTo>
-                    <a:pt x="1749751" y="1898470"/>
-                  </a:lnTo>
-                  <a:lnTo>
-                    <a:pt x="1675991" y="1843394"/>
-                  </a:lnTo>
-                  <a:lnTo>
-                    <a:pt x="1602231" y="1786589"/>
-                  </a:lnTo>
-                  <a:lnTo>
-                    <a:pt x="1528471" y="1728000"/>
-                  </a:lnTo>
-                  <a:lnTo>
-                    <a:pt x="1454710" y="1667571"/>
-                  </a:lnTo>
-                  <a:lnTo>
-                    <a:pt x="1380950" y="1605245"/>
-                  </a:lnTo>
-                  <a:lnTo>
-                    <a:pt x="1307190" y="1540963"/>
-                  </a:lnTo>
-                  <a:lnTo>
-                    <a:pt x="1233430" y="1474662"/>
-                  </a:lnTo>
-                  <a:lnTo>
-                    <a:pt x="1159670" y="1406279"/>
-                  </a:lnTo>
-                  <a:lnTo>
-                    <a:pt x="1085910" y="1335750"/>
-                  </a:lnTo>
-                  <a:lnTo>
-                    <a:pt x="1012150" y="1263006"/>
-                  </a:lnTo>
-                  <a:lnTo>
-                    <a:pt x="938390" y="1187978"/>
-                  </a:lnTo>
-                  <a:lnTo>
-                    <a:pt x="864630" y="1110594"/>
-                  </a:lnTo>
-                  <a:lnTo>
-                    <a:pt x="790870" y="1030781"/>
-                  </a:lnTo>
-                  <a:lnTo>
-                    <a:pt x="717110" y="948462"/>
-                  </a:lnTo>
-                  <a:lnTo>
-                    <a:pt x="643350" y="863558"/>
-                  </a:lnTo>
-                  <a:lnTo>
-                    <a:pt x="569590" y="775988"/>
-                  </a:lnTo>
-                  <a:lnTo>
-                    <a:pt x="495830" y="685669"/>
-                  </a:lnTo>
-                  <a:lnTo>
-                    <a:pt x="422070" y="592515"/>
-                  </a:lnTo>
-                  <a:lnTo>
-                    <a:pt x="348310" y="496435"/>
-                  </a:lnTo>
-                  <a:lnTo>
-                    <a:pt x="274550" y="397339"/>
-                  </a:lnTo>
-                  <a:lnTo>
-                    <a:pt x="200790" y="295131"/>
-                  </a:lnTo>
-                  <a:lnTo>
-                    <a:pt x="127030" y="189715"/>
-                  </a:lnTo>
-                  <a:lnTo>
-                    <a:pt x="53270" y="80989"/>
+                    <a:pt x="2339831" y="50846"/>
+                  </a:lnTo>
+                  <a:lnTo>
+                    <a:pt x="2413591" y="367111"/>
+                  </a:lnTo>
+                  <a:lnTo>
+                    <a:pt x="2487351" y="654239"/>
+                  </a:lnTo>
+                  <a:lnTo>
+                    <a:pt x="2561111" y="914915"/>
+                  </a:lnTo>
+                  <a:lnTo>
+                    <a:pt x="2634871" y="1151575"/>
+                  </a:lnTo>
+                  <a:lnTo>
+                    <a:pt x="2708631" y="1366432"/>
+                  </a:lnTo>
+                  <a:lnTo>
+                    <a:pt x="2782391" y="1561495"/>
+                  </a:lnTo>
+                  <a:lnTo>
+                    <a:pt x="2856151" y="1738588"/>
+                  </a:lnTo>
+                  <a:lnTo>
+                    <a:pt x="2929911" y="1899365"/>
+                  </a:lnTo>
+                  <a:lnTo>
+                    <a:pt x="3003671" y="2045330"/>
+                  </a:lnTo>
+                  <a:lnTo>
+                    <a:pt x="3077431" y="2177848"/>
+                  </a:lnTo>
+                  <a:lnTo>
+                    <a:pt x="3151191" y="2298157"/>
+                  </a:lnTo>
+                  <a:lnTo>
+                    <a:pt x="3224951" y="2407383"/>
+                  </a:lnTo>
+                  <a:lnTo>
+                    <a:pt x="3298711" y="2506546"/>
+                  </a:lnTo>
+                  <a:lnTo>
+                    <a:pt x="3372471" y="2596573"/>
+                  </a:lnTo>
+                  <a:lnTo>
+                    <a:pt x="3446231" y="2662044"/>
+                  </a:lnTo>
+                  <a:lnTo>
+                    <a:pt x="3519991" y="2687057"/>
+                  </a:lnTo>
+                  <a:lnTo>
+                    <a:pt x="3593751" y="2711310"/>
+                  </a:lnTo>
+                  <a:lnTo>
+                    <a:pt x="3667511" y="2734824"/>
+                  </a:lnTo>
+                  <a:lnTo>
+                    <a:pt x="3741271" y="2757622"/>
+                  </a:lnTo>
+                  <a:lnTo>
+                    <a:pt x="3815031" y="2779726"/>
+                  </a:lnTo>
+                  <a:lnTo>
+                    <a:pt x="3888791" y="2801158"/>
+                  </a:lnTo>
+                  <a:lnTo>
+                    <a:pt x="3962551" y="2821937"/>
+                  </a:lnTo>
+                  <a:lnTo>
+                    <a:pt x="4036311" y="2842083"/>
+                  </a:lnTo>
+                  <a:lnTo>
+                    <a:pt x="4110071" y="2861616"/>
+                  </a:lnTo>
+                  <a:lnTo>
+                    <a:pt x="4183831" y="2880555"/>
+                  </a:lnTo>
+                  <a:lnTo>
+                    <a:pt x="4257591" y="2898917"/>
+                  </a:lnTo>
+                  <a:lnTo>
+                    <a:pt x="4331351" y="2916720"/>
+                  </a:lnTo>
+                  <a:lnTo>
+                    <a:pt x="4405111" y="2933981"/>
+                  </a:lnTo>
+                  <a:lnTo>
+                    <a:pt x="4478872" y="2950717"/>
+                  </a:lnTo>
+                  <a:lnTo>
+                    <a:pt x="4552632" y="2966943"/>
+                  </a:lnTo>
+                  <a:lnTo>
+                    <a:pt x="4626392" y="2982675"/>
+                  </a:lnTo>
+                  <a:lnTo>
+                    <a:pt x="4700152" y="2997929"/>
+                  </a:lnTo>
+                  <a:lnTo>
+                    <a:pt x="4773912" y="3012718"/>
+                  </a:lnTo>
+                  <a:lnTo>
+                    <a:pt x="4847672" y="3027056"/>
+                  </a:lnTo>
+                  <a:lnTo>
+                    <a:pt x="4921432" y="3040959"/>
+                  </a:lnTo>
+                  <a:lnTo>
+                    <a:pt x="4995192" y="3054438"/>
+                  </a:lnTo>
+                  <a:lnTo>
+                    <a:pt x="5068952" y="3067507"/>
+                  </a:lnTo>
+                  <a:lnTo>
+                    <a:pt x="5142712" y="3080177"/>
+                  </a:lnTo>
+                  <a:lnTo>
+                    <a:pt x="5216472" y="3092463"/>
+                  </a:lnTo>
+                  <a:lnTo>
+                    <a:pt x="5290232" y="3104374"/>
+                  </a:lnTo>
+                  <a:lnTo>
+                    <a:pt x="5363992" y="3115923"/>
+                  </a:lnTo>
+                  <a:lnTo>
+                    <a:pt x="5437752" y="3127120"/>
+                  </a:lnTo>
+                  <a:lnTo>
+                    <a:pt x="5511512" y="3137976"/>
+                  </a:lnTo>
+                  <a:lnTo>
+                    <a:pt x="5585272" y="3148502"/>
+                  </a:lnTo>
+                  <a:lnTo>
+                    <a:pt x="5659032" y="3158707"/>
+                  </a:lnTo>
+                  <a:lnTo>
+                    <a:pt x="5732792" y="3168602"/>
+                  </a:lnTo>
+                  <a:lnTo>
+                    <a:pt x="5806552" y="3178195"/>
+                  </a:lnTo>
+                  <a:lnTo>
+                    <a:pt x="5880312" y="3187497"/>
+                  </a:lnTo>
+                  <a:lnTo>
+                    <a:pt x="5954072" y="3196515"/>
+                  </a:lnTo>
+                  <a:lnTo>
+                    <a:pt x="6027832" y="3205259"/>
+                  </a:lnTo>
+                  <a:lnTo>
+                    <a:pt x="6101592" y="3213736"/>
+                  </a:lnTo>
+                  <a:lnTo>
+                    <a:pt x="6175352" y="3221956"/>
+                  </a:lnTo>
+                  <a:lnTo>
+                    <a:pt x="6249112" y="3229925"/>
+                  </a:lnTo>
+                  <a:lnTo>
+                    <a:pt x="6322872" y="3237652"/>
+                  </a:lnTo>
+                  <a:lnTo>
+                    <a:pt x="6396632" y="3245143"/>
+                  </a:lnTo>
+                  <a:lnTo>
+                    <a:pt x="6470392" y="3252407"/>
+                  </a:lnTo>
+                  <a:lnTo>
+                    <a:pt x="6544152" y="3259449"/>
+                  </a:lnTo>
+                  <a:lnTo>
+                    <a:pt x="6617912" y="3266277"/>
+                  </a:lnTo>
+                  <a:lnTo>
+                    <a:pt x="6691672" y="3272897"/>
+                  </a:lnTo>
+                  <a:lnTo>
+                    <a:pt x="6765432" y="3279315"/>
+                  </a:lnTo>
+                  <a:lnTo>
+                    <a:pt x="6839192" y="3285539"/>
+                  </a:lnTo>
+                  <a:lnTo>
+                    <a:pt x="6912952" y="3291572"/>
+                  </a:lnTo>
+                  <a:lnTo>
+                    <a:pt x="6986712" y="3297422"/>
+                  </a:lnTo>
+                  <a:lnTo>
+                    <a:pt x="7060472" y="3303094"/>
+                  </a:lnTo>
+                  <a:lnTo>
+                    <a:pt x="7134232" y="3308594"/>
+                  </a:lnTo>
+                  <a:lnTo>
+                    <a:pt x="7207992" y="3313926"/>
+                  </a:lnTo>
+                  <a:lnTo>
+                    <a:pt x="7207992" y="3477921"/>
+                  </a:lnTo>
+                  <a:lnTo>
+                    <a:pt x="7134232" y="3477330"/>
+                  </a:lnTo>
+                  <a:lnTo>
+                    <a:pt x="7060472" y="3476679"/>
+                  </a:lnTo>
+                  <a:lnTo>
+                    <a:pt x="6986712" y="3475962"/>
+                  </a:lnTo>
+                  <a:lnTo>
+                    <a:pt x="6912952" y="3475172"/>
+                  </a:lnTo>
+                  <a:lnTo>
+                    <a:pt x="6839192" y="3474302"/>
+                  </a:lnTo>
+                  <a:lnTo>
+                    <a:pt x="6765432" y="3473344"/>
+                  </a:lnTo>
+                  <a:lnTo>
+                    <a:pt x="6691672" y="3472288"/>
+                  </a:lnTo>
+                  <a:lnTo>
+                    <a:pt x="6617912" y="3471125"/>
+                  </a:lnTo>
+                  <a:lnTo>
+                    <a:pt x="6544152" y="3469844"/>
+                  </a:lnTo>
+                  <a:lnTo>
+                    <a:pt x="6470392" y="3468434"/>
+                  </a:lnTo>
+                  <a:lnTo>
+                    <a:pt x="6396632" y="3466880"/>
+                  </a:lnTo>
+                  <a:lnTo>
+                    <a:pt x="6322872" y="3465168"/>
+                  </a:lnTo>
+                  <a:lnTo>
+                    <a:pt x="6249112" y="3463283"/>
+                  </a:lnTo>
+                  <a:lnTo>
+                    <a:pt x="6175352" y="3461207"/>
+                  </a:lnTo>
+                  <a:lnTo>
+                    <a:pt x="6101592" y="3458919"/>
+                  </a:lnTo>
+                  <a:lnTo>
+                    <a:pt x="6027832" y="3456400"/>
+                  </a:lnTo>
+                  <a:lnTo>
+                    <a:pt x="5954072" y="3453625"/>
+                  </a:lnTo>
+                  <a:lnTo>
+                    <a:pt x="5880312" y="3450568"/>
+                  </a:lnTo>
+                  <a:lnTo>
+                    <a:pt x="5806552" y="3447201"/>
+                  </a:lnTo>
+                  <a:lnTo>
+                    <a:pt x="5732792" y="3443493"/>
+                  </a:lnTo>
+                  <a:lnTo>
+                    <a:pt x="5659032" y="3439408"/>
+                  </a:lnTo>
+                  <a:lnTo>
+                    <a:pt x="5585272" y="3434909"/>
+                  </a:lnTo>
+                  <a:lnTo>
+                    <a:pt x="5511512" y="3429953"/>
+                  </a:lnTo>
+                  <a:lnTo>
+                    <a:pt x="5437752" y="3424494"/>
+                  </a:lnTo>
+                  <a:lnTo>
+                    <a:pt x="5363992" y="3418482"/>
+                  </a:lnTo>
+                  <a:lnTo>
+                    <a:pt x="5290232" y="3411859"/>
+                  </a:lnTo>
+                  <a:lnTo>
+                    <a:pt x="5216472" y="3404564"/>
+                  </a:lnTo>
+                  <a:lnTo>
+                    <a:pt x="5142712" y="3396529"/>
+                  </a:lnTo>
+                  <a:lnTo>
+                    <a:pt x="5068952" y="3387678"/>
+                  </a:lnTo>
+                  <a:lnTo>
+                    <a:pt x="4995192" y="3377930"/>
+                  </a:lnTo>
+                  <a:lnTo>
+                    <a:pt x="4921432" y="3367192"/>
+                  </a:lnTo>
+                  <a:lnTo>
+                    <a:pt x="4847672" y="3355364"/>
+                  </a:lnTo>
+                  <a:lnTo>
+                    <a:pt x="4773912" y="3342336"/>
+                  </a:lnTo>
+                  <a:lnTo>
+                    <a:pt x="4700152" y="3327987"/>
+                  </a:lnTo>
+                  <a:lnTo>
+                    <a:pt x="4626392" y="3312181"/>
+                  </a:lnTo>
+                  <a:lnTo>
+                    <a:pt x="4552632" y="3294771"/>
+                  </a:lnTo>
+                  <a:lnTo>
+                    <a:pt x="4478872" y="3275594"/>
+                  </a:lnTo>
+                  <a:lnTo>
+                    <a:pt x="4405111" y="3254472"/>
+                  </a:lnTo>
+                  <a:lnTo>
+                    <a:pt x="4331351" y="3231206"/>
+                  </a:lnTo>
+                  <a:lnTo>
+                    <a:pt x="4257591" y="3205579"/>
+                  </a:lnTo>
+                  <a:lnTo>
+                    <a:pt x="4183831" y="3177351"/>
+                  </a:lnTo>
+                  <a:lnTo>
+                    <a:pt x="4110071" y="3146260"/>
+                  </a:lnTo>
+                  <a:lnTo>
+                    <a:pt x="4036311" y="3112013"/>
+                  </a:lnTo>
+                  <a:lnTo>
+                    <a:pt x="3962551" y="3074290"/>
+                  </a:lnTo>
+                  <a:lnTo>
+                    <a:pt x="3888791" y="3032740"/>
+                  </a:lnTo>
+                  <a:lnTo>
+                    <a:pt x="3815031" y="2986974"/>
+                  </a:lnTo>
+                  <a:lnTo>
+                    <a:pt x="3741271" y="2936563"/>
+                  </a:lnTo>
+                  <a:lnTo>
+                    <a:pt x="3667511" y="2881037"/>
+                  </a:lnTo>
+                  <a:lnTo>
+                    <a:pt x="3593751" y="2819876"/>
+                  </a:lnTo>
+                  <a:lnTo>
+                    <a:pt x="3519991" y="2752509"/>
+                  </a:lnTo>
+                  <a:lnTo>
+                    <a:pt x="3446231" y="2678306"/>
+                  </a:lnTo>
+                  <a:lnTo>
+                    <a:pt x="3372471" y="2636244"/>
+                  </a:lnTo>
+                  <a:lnTo>
+                    <a:pt x="3298711" y="2609635"/>
+                  </a:lnTo>
+                  <a:lnTo>
+                    <a:pt x="3224951" y="2582191"/>
+                  </a:lnTo>
+                  <a:lnTo>
+                    <a:pt x="3151191" y="2553884"/>
+                  </a:lnTo>
+                  <a:lnTo>
+                    <a:pt x="3077431" y="2524689"/>
+                  </a:lnTo>
+                  <a:lnTo>
+                    <a:pt x="3003671" y="2494577"/>
+                  </a:lnTo>
+                  <a:lnTo>
+                    <a:pt x="2929911" y="2463520"/>
+                  </a:lnTo>
+                  <a:lnTo>
+                    <a:pt x="2856151" y="2431488"/>
+                  </a:lnTo>
+                  <a:lnTo>
+                    <a:pt x="2782391" y="2398450"/>
+                  </a:lnTo>
+                  <a:lnTo>
+                    <a:pt x="2708631" y="2364375"/>
+                  </a:lnTo>
+                  <a:lnTo>
+                    <a:pt x="2634871" y="2329230"/>
+                  </a:lnTo>
+                  <a:lnTo>
+                    <a:pt x="2561111" y="2292981"/>
+                  </a:lnTo>
+                  <a:lnTo>
+                    <a:pt x="2487351" y="2255594"/>
+                  </a:lnTo>
+                  <a:lnTo>
+                    <a:pt x="2413591" y="2217034"/>
+                  </a:lnTo>
+                  <a:lnTo>
+                    <a:pt x="2339831" y="2177262"/>
+                  </a:lnTo>
+                  <a:lnTo>
+                    <a:pt x="2266071" y="2136242"/>
+                  </a:lnTo>
+                  <a:lnTo>
+                    <a:pt x="2192311" y="2093935"/>
+                  </a:lnTo>
+                  <a:lnTo>
+                    <a:pt x="2118551" y="2050298"/>
+                  </a:lnTo>
+                  <a:lnTo>
+                    <a:pt x="2044791" y="2005292"/>
+                  </a:lnTo>
+                  <a:lnTo>
+                    <a:pt x="1971031" y="1958873"/>
+                  </a:lnTo>
+                  <a:lnTo>
+                    <a:pt x="1897271" y="1910996"/>
+                  </a:lnTo>
+                  <a:lnTo>
+                    <a:pt x="1823511" y="1861616"/>
+                  </a:lnTo>
+                  <a:lnTo>
+                    <a:pt x="1749751" y="1810686"/>
+                  </a:lnTo>
+                  <a:lnTo>
+                    <a:pt x="1675991" y="1758156"/>
+                  </a:lnTo>
+                  <a:lnTo>
+                    <a:pt x="1602231" y="1703977"/>
+                  </a:lnTo>
+                  <a:lnTo>
+                    <a:pt x="1528471" y="1648098"/>
+                  </a:lnTo>
+                  <a:lnTo>
+                    <a:pt x="1454710" y="1590463"/>
+                  </a:lnTo>
+                  <a:lnTo>
+                    <a:pt x="1380950" y="1531019"/>
+                  </a:lnTo>
+                  <a:lnTo>
+                    <a:pt x="1307190" y="1469709"/>
+                  </a:lnTo>
+                  <a:lnTo>
+                    <a:pt x="1233430" y="1406474"/>
+                  </a:lnTo>
+                  <a:lnTo>
+                    <a:pt x="1159670" y="1341253"/>
+                  </a:lnTo>
+                  <a:lnTo>
+                    <a:pt x="1085910" y="1273985"/>
+                  </a:lnTo>
+                  <a:lnTo>
+                    <a:pt x="1012150" y="1204605"/>
+                  </a:lnTo>
+                  <a:lnTo>
+                    <a:pt x="938390" y="1133046"/>
+                  </a:lnTo>
+                  <a:lnTo>
+                    <a:pt x="864630" y="1059241"/>
+                  </a:lnTo>
+                  <a:lnTo>
+                    <a:pt x="790870" y="983118"/>
+                  </a:lnTo>
+                  <a:lnTo>
+                    <a:pt x="717110" y="904605"/>
+                  </a:lnTo>
+                  <a:lnTo>
+                    <a:pt x="643350" y="823627"/>
+                  </a:lnTo>
+                  <a:lnTo>
+                    <a:pt x="569590" y="740107"/>
+                  </a:lnTo>
+                  <a:lnTo>
+                    <a:pt x="495830" y="653964"/>
+                  </a:lnTo>
+                  <a:lnTo>
+                    <a:pt x="422070" y="565117"/>
+                  </a:lnTo>
+                  <a:lnTo>
+                    <a:pt x="348310" y="473480"/>
+                  </a:lnTo>
+                  <a:lnTo>
+                    <a:pt x="274550" y="378966"/>
+                  </a:lnTo>
+                  <a:lnTo>
+                    <a:pt x="200790" y="281485"/>
+                  </a:lnTo>
+                  <a:lnTo>
+                    <a:pt x="127030" y="180943"/>
+                  </a:lnTo>
+                  <a:lnTo>
+                    <a:pt x="53270" y="77244"/>
                   </a:lnTo>
                   <a:lnTo>
                     <a:pt x="0" y="0"/>
@@ -3534,216 +3534,216 @@
           </p:nvSpPr>
           <p:spPr>
             <a:xfrm>
-              <a:off x="3174420" y="1896563"/>
-              <a:ext cx="4878927" cy="3474589"/>
+              <a:off x="3174420" y="2073503"/>
+              <a:ext cx="4878927" cy="3313926"/>
             </a:xfrm>
             <a:custGeom>
               <a:avLst/>
               <a:pathLst>
-                <a:path w="4878927" h="3474589">
+                <a:path w="4878927" h="3313926">
                   <a:moveTo>
                     <a:pt x="0" y="0"/>
                   </a:moveTo>
                   <a:lnTo>
-                    <a:pt x="10766" y="53311"/>
-                  </a:lnTo>
-                  <a:lnTo>
-                    <a:pt x="84526" y="384909"/>
-                  </a:lnTo>
-                  <a:lnTo>
-                    <a:pt x="158286" y="685957"/>
-                  </a:lnTo>
-                  <a:lnTo>
-                    <a:pt x="232046" y="959271"/>
-                  </a:lnTo>
-                  <a:lnTo>
-                    <a:pt x="305806" y="1207405"/>
-                  </a:lnTo>
-                  <a:lnTo>
-                    <a:pt x="379566" y="1432679"/>
-                  </a:lnTo>
-                  <a:lnTo>
-                    <a:pt x="453326" y="1637199"/>
-                  </a:lnTo>
-                  <a:lnTo>
-                    <a:pt x="527086" y="1822877"/>
-                  </a:lnTo>
-                  <a:lnTo>
-                    <a:pt x="600846" y="1991449"/>
-                  </a:lnTo>
-                  <a:lnTo>
-                    <a:pt x="674606" y="2144491"/>
-                  </a:lnTo>
-                  <a:lnTo>
-                    <a:pt x="748366" y="2283433"/>
-                  </a:lnTo>
-                  <a:lnTo>
-                    <a:pt x="822126" y="2409575"/>
-                  </a:lnTo>
-                  <a:lnTo>
-                    <a:pt x="895886" y="2524096"/>
-                  </a:lnTo>
-                  <a:lnTo>
-                    <a:pt x="969646" y="2628066"/>
-                  </a:lnTo>
-                  <a:lnTo>
-                    <a:pt x="1043406" y="2722458"/>
-                  </a:lnTo>
-                  <a:lnTo>
-                    <a:pt x="1117166" y="2791103"/>
-                  </a:lnTo>
-                  <a:lnTo>
-                    <a:pt x="1190926" y="2817330"/>
-                  </a:lnTo>
-                  <a:lnTo>
-                    <a:pt x="1264686" y="2842758"/>
-                  </a:lnTo>
-                  <a:lnTo>
-                    <a:pt x="1338446" y="2867412"/>
-                  </a:lnTo>
-                  <a:lnTo>
-                    <a:pt x="1412206" y="2891316"/>
-                  </a:lnTo>
-                  <a:lnTo>
-                    <a:pt x="1485966" y="2914492"/>
-                  </a:lnTo>
-                  <a:lnTo>
-                    <a:pt x="1559726" y="2936962"/>
-                  </a:lnTo>
-                  <a:lnTo>
-                    <a:pt x="1633486" y="2958748"/>
-                  </a:lnTo>
-                  <a:lnTo>
-                    <a:pt x="1707246" y="2979871"/>
-                  </a:lnTo>
-                  <a:lnTo>
-                    <a:pt x="1781006" y="3000352"/>
-                  </a:lnTo>
-                  <a:lnTo>
-                    <a:pt x="1854766" y="3020208"/>
-                  </a:lnTo>
-                  <a:lnTo>
-                    <a:pt x="1928526" y="3039461"/>
-                  </a:lnTo>
-                  <a:lnTo>
-                    <a:pt x="2002286" y="3058127"/>
-                  </a:lnTo>
-                  <a:lnTo>
-                    <a:pt x="2076046" y="3076225"/>
-                  </a:lnTo>
-                  <a:lnTo>
-                    <a:pt x="2149806" y="3093772"/>
-                  </a:lnTo>
-                  <a:lnTo>
-                    <a:pt x="2223566" y="3110785"/>
-                  </a:lnTo>
-                  <a:lnTo>
-                    <a:pt x="2297326" y="3127279"/>
-                  </a:lnTo>
-                  <a:lnTo>
-                    <a:pt x="2371086" y="3143272"/>
-                  </a:lnTo>
-                  <a:lnTo>
-                    <a:pt x="2444846" y="3158778"/>
-                  </a:lnTo>
-                  <a:lnTo>
-                    <a:pt x="2518606" y="3173812"/>
-                  </a:lnTo>
-                  <a:lnTo>
-                    <a:pt x="2592366" y="3188389"/>
-                  </a:lnTo>
-                  <a:lnTo>
-                    <a:pt x="2666126" y="3202521"/>
-                  </a:lnTo>
-                  <a:lnTo>
-                    <a:pt x="2739887" y="3216224"/>
-                  </a:lnTo>
-                  <a:lnTo>
-                    <a:pt x="2813647" y="3229509"/>
-                  </a:lnTo>
-                  <a:lnTo>
-                    <a:pt x="2887407" y="3242390"/>
-                  </a:lnTo>
-                  <a:lnTo>
-                    <a:pt x="2961167" y="3254878"/>
-                  </a:lnTo>
-                  <a:lnTo>
-                    <a:pt x="3034927" y="3266987"/>
-                  </a:lnTo>
-                  <a:lnTo>
-                    <a:pt x="3108687" y="3278727"/>
-                  </a:lnTo>
-                  <a:lnTo>
-                    <a:pt x="3182447" y="3290109"/>
-                  </a:lnTo>
-                  <a:lnTo>
-                    <a:pt x="3256207" y="3301145"/>
-                  </a:lnTo>
-                  <a:lnTo>
-                    <a:pt x="3329967" y="3311846"/>
-                  </a:lnTo>
-                  <a:lnTo>
-                    <a:pt x="3403727" y="3322220"/>
-                  </a:lnTo>
-                  <a:lnTo>
-                    <a:pt x="3477487" y="3332278"/>
-                  </a:lnTo>
-                  <a:lnTo>
-                    <a:pt x="3551247" y="3342031"/>
-                  </a:lnTo>
-                  <a:lnTo>
-                    <a:pt x="3625007" y="3351486"/>
-                  </a:lnTo>
-                  <a:lnTo>
-                    <a:pt x="3698767" y="3360654"/>
-                  </a:lnTo>
-                  <a:lnTo>
-                    <a:pt x="3772527" y="3369543"/>
-                  </a:lnTo>
-                  <a:lnTo>
-                    <a:pt x="3846287" y="3378161"/>
-                  </a:lnTo>
-                  <a:lnTo>
-                    <a:pt x="3920047" y="3386516"/>
-                  </a:lnTo>
-                  <a:lnTo>
-                    <a:pt x="3993807" y="3394617"/>
-                  </a:lnTo>
-                  <a:lnTo>
-                    <a:pt x="4067567" y="3402472"/>
-                  </a:lnTo>
-                  <a:lnTo>
-                    <a:pt x="4141327" y="3410088"/>
-                  </a:lnTo>
-                  <a:lnTo>
-                    <a:pt x="4215087" y="3417471"/>
-                  </a:lnTo>
-                  <a:lnTo>
-                    <a:pt x="4288847" y="3424630"/>
-                  </a:lnTo>
-                  <a:lnTo>
-                    <a:pt x="4362607" y="3431571"/>
-                  </a:lnTo>
-                  <a:lnTo>
-                    <a:pt x="4436367" y="3438301"/>
-                  </a:lnTo>
-                  <a:lnTo>
-                    <a:pt x="4510127" y="3444826"/>
-                  </a:lnTo>
-                  <a:lnTo>
-                    <a:pt x="4583887" y="3451152"/>
-                  </a:lnTo>
-                  <a:lnTo>
-                    <a:pt x="4657647" y="3457286"/>
-                  </a:lnTo>
-                  <a:lnTo>
-                    <a:pt x="4731407" y="3463233"/>
-                  </a:lnTo>
-                  <a:lnTo>
-                    <a:pt x="4805167" y="3468999"/>
-                  </a:lnTo>
-                  <a:lnTo>
-                    <a:pt x="4878927" y="3474589"/>
+                    <a:pt x="10766" y="50846"/>
+                  </a:lnTo>
+                  <a:lnTo>
+                    <a:pt x="84526" y="367111"/>
+                  </a:lnTo>
+                  <a:lnTo>
+                    <a:pt x="158286" y="654239"/>
+                  </a:lnTo>
+                  <a:lnTo>
+                    <a:pt x="232046" y="914915"/>
+                  </a:lnTo>
+                  <a:lnTo>
+                    <a:pt x="305806" y="1151575"/>
+                  </a:lnTo>
+                  <a:lnTo>
+                    <a:pt x="379566" y="1366432"/>
+                  </a:lnTo>
+                  <a:lnTo>
+                    <a:pt x="453326" y="1561495"/>
+                  </a:lnTo>
+                  <a:lnTo>
+                    <a:pt x="527086" y="1738588"/>
+                  </a:lnTo>
+                  <a:lnTo>
+                    <a:pt x="600846" y="1899365"/>
+                  </a:lnTo>
+                  <a:lnTo>
+                    <a:pt x="674606" y="2045330"/>
+                  </a:lnTo>
+                  <a:lnTo>
+                    <a:pt x="748366" y="2177848"/>
+                  </a:lnTo>
+                  <a:lnTo>
+                    <a:pt x="822126" y="2298157"/>
+                  </a:lnTo>
+                  <a:lnTo>
+                    <a:pt x="895886" y="2407383"/>
+                  </a:lnTo>
+                  <a:lnTo>
+                    <a:pt x="969646" y="2506546"/>
+                  </a:lnTo>
+                  <a:lnTo>
+                    <a:pt x="1043406" y="2596573"/>
+                  </a:lnTo>
+                  <a:lnTo>
+                    <a:pt x="1117166" y="2662044"/>
+                  </a:lnTo>
+                  <a:lnTo>
+                    <a:pt x="1190926" y="2687057"/>
+                  </a:lnTo>
+                  <a:lnTo>
+                    <a:pt x="1264686" y="2711310"/>
+                  </a:lnTo>
+                  <a:lnTo>
+                    <a:pt x="1338446" y="2734824"/>
+                  </a:lnTo>
+                  <a:lnTo>
+                    <a:pt x="1412206" y="2757622"/>
+                  </a:lnTo>
+                  <a:lnTo>
+                    <a:pt x="1485966" y="2779726"/>
+                  </a:lnTo>
+                  <a:lnTo>
+                    <a:pt x="1559726" y="2801158"/>
+                  </a:lnTo>
+                  <a:lnTo>
+                    <a:pt x="1633486" y="2821937"/>
+                  </a:lnTo>
+                  <a:lnTo>
+                    <a:pt x="1707246" y="2842083"/>
+                  </a:lnTo>
+                  <a:lnTo>
+                    <a:pt x="1781006" y="2861616"/>
+                  </a:lnTo>
+                  <a:lnTo>
+                    <a:pt x="1854766" y="2880555"/>
+                  </a:lnTo>
+                  <a:lnTo>
+                    <a:pt x="1928526" y="2898917"/>
+                  </a:lnTo>
+                  <a:lnTo>
+                    <a:pt x="2002286" y="2916720"/>
+                  </a:lnTo>
+                  <a:lnTo>
+                    <a:pt x="2076046" y="2933981"/>
+                  </a:lnTo>
+                  <a:lnTo>
+                    <a:pt x="2149806" y="2950717"/>
+                  </a:lnTo>
+                  <a:lnTo>
+                    <a:pt x="2223566" y="2966943"/>
+                  </a:lnTo>
+                  <a:lnTo>
+                    <a:pt x="2297326" y="2982675"/>
+                  </a:lnTo>
+                  <a:lnTo>
+                    <a:pt x="2371086" y="2997929"/>
+                  </a:lnTo>
+                  <a:lnTo>
+                    <a:pt x="2444846" y="3012718"/>
+                  </a:lnTo>
+                  <a:lnTo>
+                    <a:pt x="2518606" y="3027056"/>
+                  </a:lnTo>
+                  <a:lnTo>
+                    <a:pt x="2592366" y="3040959"/>
+                  </a:lnTo>
+                  <a:lnTo>
+                    <a:pt x="2666126" y="3054438"/>
+                  </a:lnTo>
+                  <a:lnTo>
+                    <a:pt x="2739887" y="3067507"/>
+                  </a:lnTo>
+                  <a:lnTo>
+                    <a:pt x="2813647" y="3080177"/>
+                  </a:lnTo>
+                  <a:lnTo>
+                    <a:pt x="2887407" y="3092463"/>
+                  </a:lnTo>
+                  <a:lnTo>
+                    <a:pt x="2961167" y="3104374"/>
+                  </a:lnTo>
+                  <a:lnTo>
+                    <a:pt x="3034927" y="3115923"/>
+                  </a:lnTo>
+                  <a:lnTo>
+                    <a:pt x="3108687" y="3127120"/>
+                  </a:lnTo>
+                  <a:lnTo>
+                    <a:pt x="3182447" y="3137976"/>
+                  </a:lnTo>
+                  <a:lnTo>
+                    <a:pt x="3256207" y="3148502"/>
+                  </a:lnTo>
+                  <a:lnTo>
+                    <a:pt x="3329967" y="3158707"/>
+                  </a:lnTo>
+                  <a:lnTo>
+                    <a:pt x="3403727" y="3168602"/>
+                  </a:lnTo>
+                  <a:lnTo>
+                    <a:pt x="3477487" y="3178195"/>
+                  </a:lnTo>
+                  <a:lnTo>
+                    <a:pt x="3551247" y="3187497"/>
+                  </a:lnTo>
+                  <a:lnTo>
+                    <a:pt x="3625007" y="3196515"/>
+                  </a:lnTo>
+                  <a:lnTo>
+                    <a:pt x="3698767" y="3205259"/>
+                  </a:lnTo>
+                  <a:lnTo>
+                    <a:pt x="3772527" y="3213736"/>
+                  </a:lnTo>
+                  <a:lnTo>
+                    <a:pt x="3846287" y="3221956"/>
+                  </a:lnTo>
+                  <a:lnTo>
+                    <a:pt x="3920047" y="3229925"/>
+                  </a:lnTo>
+                  <a:lnTo>
+                    <a:pt x="3993807" y="3237652"/>
+                  </a:lnTo>
+                  <a:lnTo>
+                    <a:pt x="4067567" y="3245143"/>
+                  </a:lnTo>
+                  <a:lnTo>
+                    <a:pt x="4141327" y="3252407"/>
+                  </a:lnTo>
+                  <a:lnTo>
+                    <a:pt x="4215087" y="3259449"/>
+                  </a:lnTo>
+                  <a:lnTo>
+                    <a:pt x="4288847" y="3266277"/>
+                  </a:lnTo>
+                  <a:lnTo>
+                    <a:pt x="4362607" y="3272897"/>
+                  </a:lnTo>
+                  <a:lnTo>
+                    <a:pt x="4436367" y="3279315"/>
+                  </a:lnTo>
+                  <a:lnTo>
+                    <a:pt x="4510127" y="3285539"/>
+                  </a:lnTo>
+                  <a:lnTo>
+                    <a:pt x="4583887" y="3291572"/>
+                  </a:lnTo>
+                  <a:lnTo>
+                    <a:pt x="4657647" y="3297422"/>
+                  </a:lnTo>
+                  <a:lnTo>
+                    <a:pt x="4731407" y="3303094"/>
+                  </a:lnTo>
+                  <a:lnTo>
+                    <a:pt x="4805167" y="3308594"/>
+                  </a:lnTo>
+                  <a:lnTo>
+                    <a:pt x="4878927" y="3313926"/>
                   </a:lnTo>
                 </a:path>
               </a:pathLst>
@@ -3763,306 +3763,306 @@
           </p:nvSpPr>
           <p:spPr>
             <a:xfrm>
-              <a:off x="845354" y="1896563"/>
-              <a:ext cx="7207992" cy="3646536"/>
+              <a:off x="845354" y="2073503"/>
+              <a:ext cx="7207992" cy="3477921"/>
             </a:xfrm>
             <a:custGeom>
               <a:avLst/>
               <a:pathLst>
-                <a:path w="7207992" h="3646536">
+                <a:path w="7207992" h="3477921">
                   <a:moveTo>
-                    <a:pt x="7207992" y="3646536"/>
+                    <a:pt x="7207992" y="3477921"/>
                   </a:moveTo>
                   <a:lnTo>
-                    <a:pt x="7134232" y="3645916"/>
-                  </a:lnTo>
-                  <a:lnTo>
-                    <a:pt x="7060472" y="3645233"/>
-                  </a:lnTo>
-                  <a:lnTo>
-                    <a:pt x="6986712" y="3644482"/>
-                  </a:lnTo>
-                  <a:lnTo>
-                    <a:pt x="6912952" y="3643653"/>
-                  </a:lnTo>
-                  <a:lnTo>
-                    <a:pt x="6839192" y="3642741"/>
-                  </a:lnTo>
-                  <a:lnTo>
-                    <a:pt x="6765432" y="3641736"/>
-                  </a:lnTo>
-                  <a:lnTo>
-                    <a:pt x="6691672" y="3640629"/>
-                  </a:lnTo>
-                  <a:lnTo>
-                    <a:pt x="6617912" y="3639410"/>
-                  </a:lnTo>
-                  <a:lnTo>
-                    <a:pt x="6544152" y="3638067"/>
-                  </a:lnTo>
-                  <a:lnTo>
-                    <a:pt x="6470392" y="3636588"/>
-                  </a:lnTo>
-                  <a:lnTo>
-                    <a:pt x="6396632" y="3634959"/>
-                  </a:lnTo>
-                  <a:lnTo>
-                    <a:pt x="6322872" y="3633165"/>
-                  </a:lnTo>
-                  <a:lnTo>
-                    <a:pt x="6249112" y="3631188"/>
-                  </a:lnTo>
-                  <a:lnTo>
-                    <a:pt x="6175352" y="3629011"/>
-                  </a:lnTo>
-                  <a:lnTo>
-                    <a:pt x="6101592" y="3626612"/>
-                  </a:lnTo>
-                  <a:lnTo>
-                    <a:pt x="6027832" y="3623971"/>
-                  </a:lnTo>
-                  <a:lnTo>
-                    <a:pt x="5954072" y="3621061"/>
-                  </a:lnTo>
-                  <a:lnTo>
-                    <a:pt x="5880312" y="3617857"/>
-                  </a:lnTo>
-                  <a:lnTo>
-                    <a:pt x="5806552" y="3614327"/>
-                  </a:lnTo>
-                  <a:lnTo>
-                    <a:pt x="5732792" y="3610438"/>
-                  </a:lnTo>
-                  <a:lnTo>
-                    <a:pt x="5659032" y="3606156"/>
-                  </a:lnTo>
-                  <a:lnTo>
-                    <a:pt x="5585272" y="3601438"/>
-                  </a:lnTo>
-                  <a:lnTo>
-                    <a:pt x="5511512" y="3596242"/>
-                  </a:lnTo>
-                  <a:lnTo>
-                    <a:pt x="5437752" y="3590519"/>
-                  </a:lnTo>
-                  <a:lnTo>
-                    <a:pt x="5363992" y="3584214"/>
-                  </a:lnTo>
-                  <a:lnTo>
-                    <a:pt x="5290232" y="3577270"/>
-                  </a:lnTo>
-                  <a:lnTo>
-                    <a:pt x="5216472" y="3569622"/>
-                  </a:lnTo>
-                  <a:lnTo>
-                    <a:pt x="5142712" y="3561197"/>
-                  </a:lnTo>
-                  <a:lnTo>
-                    <a:pt x="5068952" y="3551918"/>
-                  </a:lnTo>
-                  <a:lnTo>
-                    <a:pt x="4995192" y="3541696"/>
-                  </a:lnTo>
-                  <a:lnTo>
-                    <a:pt x="4921432" y="3530438"/>
-                  </a:lnTo>
-                  <a:lnTo>
-                    <a:pt x="4847672" y="3518037"/>
-                  </a:lnTo>
-                  <a:lnTo>
-                    <a:pt x="4773912" y="3504378"/>
-                  </a:lnTo>
-                  <a:lnTo>
-                    <a:pt x="4700152" y="3489332"/>
-                  </a:lnTo>
-                  <a:lnTo>
-                    <a:pt x="4626392" y="3472760"/>
-                  </a:lnTo>
-                  <a:lnTo>
-                    <a:pt x="4552632" y="3454506"/>
-                  </a:lnTo>
-                  <a:lnTo>
-                    <a:pt x="4478872" y="3434400"/>
-                  </a:lnTo>
-                  <a:lnTo>
-                    <a:pt x="4405111" y="3412253"/>
-                  </a:lnTo>
-                  <a:lnTo>
-                    <a:pt x="4331351" y="3387859"/>
-                  </a:lnTo>
-                  <a:lnTo>
-                    <a:pt x="4257591" y="3360990"/>
-                  </a:lnTo>
-                  <a:lnTo>
-                    <a:pt x="4183831" y="3331394"/>
-                  </a:lnTo>
-                  <a:lnTo>
-                    <a:pt x="4110071" y="3298795"/>
-                  </a:lnTo>
-                  <a:lnTo>
-                    <a:pt x="4036311" y="3262887"/>
-                  </a:lnTo>
-                  <a:lnTo>
-                    <a:pt x="3962551" y="3223336"/>
-                  </a:lnTo>
-                  <a:lnTo>
-                    <a:pt x="3888791" y="3179772"/>
-                  </a:lnTo>
-                  <a:lnTo>
-                    <a:pt x="3815031" y="3131787"/>
-                  </a:lnTo>
-                  <a:lnTo>
-                    <a:pt x="3741271" y="3078932"/>
-                  </a:lnTo>
-                  <a:lnTo>
-                    <a:pt x="3667511" y="3020714"/>
-                  </a:lnTo>
-                  <a:lnTo>
-                    <a:pt x="3593751" y="2956588"/>
-                  </a:lnTo>
-                  <a:lnTo>
-                    <a:pt x="3519991" y="2885955"/>
-                  </a:lnTo>
-                  <a:lnTo>
-                    <a:pt x="3446231" y="2808154"/>
-                  </a:lnTo>
-                  <a:lnTo>
-                    <a:pt x="3372471" y="2764053"/>
-                  </a:lnTo>
-                  <a:lnTo>
-                    <a:pt x="3298711" y="2736154"/>
-                  </a:lnTo>
-                  <a:lnTo>
-                    <a:pt x="3224951" y="2707379"/>
-                  </a:lnTo>
-                  <a:lnTo>
-                    <a:pt x="3151191" y="2677700"/>
-                  </a:lnTo>
-                  <a:lnTo>
-                    <a:pt x="3077431" y="2647090"/>
-                  </a:lnTo>
-                  <a:lnTo>
-                    <a:pt x="3003671" y="2615518"/>
-                  </a:lnTo>
-                  <a:lnTo>
-                    <a:pt x="2929911" y="2582955"/>
-                  </a:lnTo>
-                  <a:lnTo>
-                    <a:pt x="2856151" y="2549370"/>
-                  </a:lnTo>
-                  <a:lnTo>
-                    <a:pt x="2782391" y="2514730"/>
-                  </a:lnTo>
-                  <a:lnTo>
-                    <a:pt x="2708631" y="2479003"/>
-                  </a:lnTo>
-                  <a:lnTo>
-                    <a:pt x="2634871" y="2442154"/>
-                  </a:lnTo>
-                  <a:lnTo>
-                    <a:pt x="2561111" y="2404148"/>
-                  </a:lnTo>
-                  <a:lnTo>
-                    <a:pt x="2487351" y="2364949"/>
-                  </a:lnTo>
-                  <a:lnTo>
-                    <a:pt x="2413591" y="2324519"/>
-                  </a:lnTo>
-                  <a:lnTo>
-                    <a:pt x="2339831" y="2282819"/>
-                  </a:lnTo>
-                  <a:lnTo>
-                    <a:pt x="2266071" y="2239810"/>
-                  </a:lnTo>
-                  <a:lnTo>
-                    <a:pt x="2192311" y="2195451"/>
-                  </a:lnTo>
-                  <a:lnTo>
-                    <a:pt x="2118551" y="2149700"/>
-                  </a:lnTo>
-                  <a:lnTo>
-                    <a:pt x="2044791" y="2102511"/>
-                  </a:lnTo>
-                  <a:lnTo>
-                    <a:pt x="1971031" y="2053842"/>
-                  </a:lnTo>
-                  <a:lnTo>
-                    <a:pt x="1897271" y="2003644"/>
-                  </a:lnTo>
-                  <a:lnTo>
-                    <a:pt x="1823511" y="1951870"/>
-                  </a:lnTo>
-                  <a:lnTo>
-                    <a:pt x="1749751" y="1898470"/>
-                  </a:lnTo>
-                  <a:lnTo>
-                    <a:pt x="1675991" y="1843394"/>
-                  </a:lnTo>
-                  <a:lnTo>
-                    <a:pt x="1602231" y="1786589"/>
-                  </a:lnTo>
-                  <a:lnTo>
-                    <a:pt x="1528471" y="1728000"/>
-                  </a:lnTo>
-                  <a:lnTo>
-                    <a:pt x="1454710" y="1667571"/>
-                  </a:lnTo>
-                  <a:lnTo>
-                    <a:pt x="1380950" y="1605245"/>
-                  </a:lnTo>
-                  <a:lnTo>
-                    <a:pt x="1307190" y="1540963"/>
-                  </a:lnTo>
-                  <a:lnTo>
-                    <a:pt x="1233430" y="1474662"/>
-                  </a:lnTo>
-                  <a:lnTo>
-                    <a:pt x="1159670" y="1406279"/>
-                  </a:lnTo>
-                  <a:lnTo>
-                    <a:pt x="1085910" y="1335750"/>
-                  </a:lnTo>
-                  <a:lnTo>
-                    <a:pt x="1012150" y="1263006"/>
-                  </a:lnTo>
-                  <a:lnTo>
-                    <a:pt x="938390" y="1187978"/>
-                  </a:lnTo>
-                  <a:lnTo>
-                    <a:pt x="864630" y="1110594"/>
-                  </a:lnTo>
-                  <a:lnTo>
-                    <a:pt x="790870" y="1030781"/>
-                  </a:lnTo>
-                  <a:lnTo>
-                    <a:pt x="717110" y="948462"/>
-                  </a:lnTo>
-                  <a:lnTo>
-                    <a:pt x="643350" y="863558"/>
-                  </a:lnTo>
-                  <a:lnTo>
-                    <a:pt x="569590" y="775988"/>
-                  </a:lnTo>
-                  <a:lnTo>
-                    <a:pt x="495830" y="685669"/>
-                  </a:lnTo>
-                  <a:lnTo>
-                    <a:pt x="422070" y="592515"/>
-                  </a:lnTo>
-                  <a:lnTo>
-                    <a:pt x="348310" y="496435"/>
-                  </a:lnTo>
-                  <a:lnTo>
-                    <a:pt x="274550" y="397339"/>
-                  </a:lnTo>
-                  <a:lnTo>
-                    <a:pt x="200790" y="295131"/>
-                  </a:lnTo>
-                  <a:lnTo>
-                    <a:pt x="127030" y="189715"/>
-                  </a:lnTo>
-                  <a:lnTo>
-                    <a:pt x="53270" y="80989"/>
+                    <a:pt x="7134232" y="3477330"/>
+                  </a:lnTo>
+                  <a:lnTo>
+                    <a:pt x="7060472" y="3476679"/>
+                  </a:lnTo>
+                  <a:lnTo>
+                    <a:pt x="6986712" y="3475962"/>
+                  </a:lnTo>
+                  <a:lnTo>
+                    <a:pt x="6912952" y="3475172"/>
+                  </a:lnTo>
+                  <a:lnTo>
+                    <a:pt x="6839192" y="3474302"/>
+                  </a:lnTo>
+                  <a:lnTo>
+                    <a:pt x="6765432" y="3473344"/>
+                  </a:lnTo>
+                  <a:lnTo>
+                    <a:pt x="6691672" y="3472288"/>
+                  </a:lnTo>
+                  <a:lnTo>
+                    <a:pt x="6617912" y="3471125"/>
+                  </a:lnTo>
+                  <a:lnTo>
+                    <a:pt x="6544152" y="3469844"/>
+                  </a:lnTo>
+                  <a:lnTo>
+                    <a:pt x="6470392" y="3468434"/>
+                  </a:lnTo>
+                  <a:lnTo>
+                    <a:pt x="6396632" y="3466880"/>
+                  </a:lnTo>
+                  <a:lnTo>
+                    <a:pt x="6322872" y="3465168"/>
+                  </a:lnTo>
+                  <a:lnTo>
+                    <a:pt x="6249112" y="3463283"/>
+                  </a:lnTo>
+                  <a:lnTo>
+                    <a:pt x="6175352" y="3461207"/>
+                  </a:lnTo>
+                  <a:lnTo>
+                    <a:pt x="6101592" y="3458919"/>
+                  </a:lnTo>
+                  <a:lnTo>
+                    <a:pt x="6027832" y="3456400"/>
+                  </a:lnTo>
+                  <a:lnTo>
+                    <a:pt x="5954072" y="3453625"/>
+                  </a:lnTo>
+                  <a:lnTo>
+                    <a:pt x="5880312" y="3450568"/>
+                  </a:lnTo>
+                  <a:lnTo>
+                    <a:pt x="5806552" y="3447201"/>
+                  </a:lnTo>
+                  <a:lnTo>
+                    <a:pt x="5732792" y="3443493"/>
+                  </a:lnTo>
+                  <a:lnTo>
+                    <a:pt x="5659032" y="3439408"/>
+                  </a:lnTo>
+                  <a:lnTo>
+                    <a:pt x="5585272" y="3434909"/>
+                  </a:lnTo>
+                  <a:lnTo>
+                    <a:pt x="5511512" y="3429953"/>
+                  </a:lnTo>
+                  <a:lnTo>
+                    <a:pt x="5437752" y="3424494"/>
+                  </a:lnTo>
+                  <a:lnTo>
+                    <a:pt x="5363992" y="3418482"/>
+                  </a:lnTo>
+                  <a:lnTo>
+                    <a:pt x="5290232" y="3411859"/>
+                  </a:lnTo>
+                  <a:lnTo>
+                    <a:pt x="5216472" y="3404564"/>
+                  </a:lnTo>
+                  <a:lnTo>
+                    <a:pt x="5142712" y="3396529"/>
+                  </a:lnTo>
+                  <a:lnTo>
+                    <a:pt x="5068952" y="3387678"/>
+                  </a:lnTo>
+                  <a:lnTo>
+                    <a:pt x="4995192" y="3377930"/>
+                  </a:lnTo>
+                  <a:lnTo>
+                    <a:pt x="4921432" y="3367192"/>
+                  </a:lnTo>
+                  <a:lnTo>
+                    <a:pt x="4847672" y="3355364"/>
+                  </a:lnTo>
+                  <a:lnTo>
+                    <a:pt x="4773912" y="3342336"/>
+                  </a:lnTo>
+                  <a:lnTo>
+                    <a:pt x="4700152" y="3327987"/>
+                  </a:lnTo>
+                  <a:lnTo>
+                    <a:pt x="4626392" y="3312181"/>
+                  </a:lnTo>
+                  <a:lnTo>
+                    <a:pt x="4552632" y="3294771"/>
+                  </a:lnTo>
+                  <a:lnTo>
+                    <a:pt x="4478872" y="3275594"/>
+                  </a:lnTo>
+                  <a:lnTo>
+                    <a:pt x="4405111" y="3254472"/>
+                  </a:lnTo>
+                  <a:lnTo>
+                    <a:pt x="4331351" y="3231206"/>
+                  </a:lnTo>
+                  <a:lnTo>
+                    <a:pt x="4257591" y="3205579"/>
+                  </a:lnTo>
+                  <a:lnTo>
+                    <a:pt x="4183831" y="3177351"/>
+                  </a:lnTo>
+                  <a:lnTo>
+                    <a:pt x="4110071" y="3146260"/>
+                  </a:lnTo>
+                  <a:lnTo>
+                    <a:pt x="4036311" y="3112013"/>
+                  </a:lnTo>
+                  <a:lnTo>
+                    <a:pt x="3962551" y="3074290"/>
+                  </a:lnTo>
+                  <a:lnTo>
+                    <a:pt x="3888791" y="3032740"/>
+                  </a:lnTo>
+                  <a:lnTo>
+                    <a:pt x="3815031" y="2986974"/>
+                  </a:lnTo>
+                  <a:lnTo>
+                    <a:pt x="3741271" y="2936563"/>
+                  </a:lnTo>
+                  <a:lnTo>
+                    <a:pt x="3667511" y="2881037"/>
+                  </a:lnTo>
+                  <a:lnTo>
+                    <a:pt x="3593751" y="2819876"/>
+                  </a:lnTo>
+                  <a:lnTo>
+                    <a:pt x="3519991" y="2752509"/>
+                  </a:lnTo>
+                  <a:lnTo>
+                    <a:pt x="3446231" y="2678306"/>
+                  </a:lnTo>
+                  <a:lnTo>
+                    <a:pt x="3372471" y="2636244"/>
+                  </a:lnTo>
+                  <a:lnTo>
+                    <a:pt x="3298711" y="2609635"/>
+                  </a:lnTo>
+                  <a:lnTo>
+                    <a:pt x="3224951" y="2582191"/>
+                  </a:lnTo>
+                  <a:lnTo>
+                    <a:pt x="3151191" y="2553884"/>
+                  </a:lnTo>
+                  <a:lnTo>
+                    <a:pt x="3077431" y="2524689"/>
+                  </a:lnTo>
+                  <a:lnTo>
+                    <a:pt x="3003671" y="2494577"/>
+                  </a:lnTo>
+                  <a:lnTo>
+                    <a:pt x="2929911" y="2463520"/>
+                  </a:lnTo>
+                  <a:lnTo>
+                    <a:pt x="2856151" y="2431488"/>
+                  </a:lnTo>
+                  <a:lnTo>
+                    <a:pt x="2782391" y="2398450"/>
+                  </a:lnTo>
+                  <a:lnTo>
+                    <a:pt x="2708631" y="2364375"/>
+                  </a:lnTo>
+                  <a:lnTo>
+                    <a:pt x="2634871" y="2329230"/>
+                  </a:lnTo>
+                  <a:lnTo>
+                    <a:pt x="2561111" y="2292981"/>
+                  </a:lnTo>
+                  <a:lnTo>
+                    <a:pt x="2487351" y="2255594"/>
+                  </a:lnTo>
+                  <a:lnTo>
+                    <a:pt x="2413591" y="2217034"/>
+                  </a:lnTo>
+                  <a:lnTo>
+                    <a:pt x="2339831" y="2177262"/>
+                  </a:lnTo>
+                  <a:lnTo>
+                    <a:pt x="2266071" y="2136242"/>
+                  </a:lnTo>
+                  <a:lnTo>
+                    <a:pt x="2192311" y="2093935"/>
+                  </a:lnTo>
+                  <a:lnTo>
+                    <a:pt x="2118551" y="2050298"/>
+                  </a:lnTo>
+                  <a:lnTo>
+                    <a:pt x="2044791" y="2005292"/>
+                  </a:lnTo>
+                  <a:lnTo>
+                    <a:pt x="1971031" y="1958873"/>
+                  </a:lnTo>
+                  <a:lnTo>
+                    <a:pt x="1897271" y="1910996"/>
+                  </a:lnTo>
+                  <a:lnTo>
+                    <a:pt x="1823511" y="1861616"/>
+                  </a:lnTo>
+                  <a:lnTo>
+                    <a:pt x="1749751" y="1810686"/>
+                  </a:lnTo>
+                  <a:lnTo>
+                    <a:pt x="1675991" y="1758156"/>
+                  </a:lnTo>
+                  <a:lnTo>
+                    <a:pt x="1602231" y="1703977"/>
+                  </a:lnTo>
+                  <a:lnTo>
+                    <a:pt x="1528471" y="1648098"/>
+                  </a:lnTo>
+                  <a:lnTo>
+                    <a:pt x="1454710" y="1590463"/>
+                  </a:lnTo>
+                  <a:lnTo>
+                    <a:pt x="1380950" y="1531019"/>
+                  </a:lnTo>
+                  <a:lnTo>
+                    <a:pt x="1307190" y="1469709"/>
+                  </a:lnTo>
+                  <a:lnTo>
+                    <a:pt x="1233430" y="1406474"/>
+                  </a:lnTo>
+                  <a:lnTo>
+                    <a:pt x="1159670" y="1341253"/>
+                  </a:lnTo>
+                  <a:lnTo>
+                    <a:pt x="1085910" y="1273985"/>
+                  </a:lnTo>
+                  <a:lnTo>
+                    <a:pt x="1012150" y="1204605"/>
+                  </a:lnTo>
+                  <a:lnTo>
+                    <a:pt x="938390" y="1133046"/>
+                  </a:lnTo>
+                  <a:lnTo>
+                    <a:pt x="864630" y="1059241"/>
+                  </a:lnTo>
+                  <a:lnTo>
+                    <a:pt x="790870" y="983118"/>
+                  </a:lnTo>
+                  <a:lnTo>
+                    <a:pt x="717110" y="904605"/>
+                  </a:lnTo>
+                  <a:lnTo>
+                    <a:pt x="643350" y="823627"/>
+                  </a:lnTo>
+                  <a:lnTo>
+                    <a:pt x="569590" y="740107"/>
+                  </a:lnTo>
+                  <a:lnTo>
+                    <a:pt x="495830" y="653964"/>
+                  </a:lnTo>
+                  <a:lnTo>
+                    <a:pt x="422070" y="565117"/>
+                  </a:lnTo>
+                  <a:lnTo>
+                    <a:pt x="348310" y="473480"/>
+                  </a:lnTo>
+                  <a:lnTo>
+                    <a:pt x="274550" y="378966"/>
+                  </a:lnTo>
+                  <a:lnTo>
+                    <a:pt x="200790" y="281485"/>
+                  </a:lnTo>
+                  <a:lnTo>
+                    <a:pt x="127030" y="180943"/>
+                  </a:lnTo>
+                  <a:lnTo>
+                    <a:pt x="53270" y="77244"/>
                   </a:lnTo>
                   <a:lnTo>
                     <a:pt x="0" y="0"/>
@@ -4085,237 +4085,237 @@
           </p:nvSpPr>
           <p:spPr>
             <a:xfrm>
-              <a:off x="2609966" y="1896563"/>
-              <a:ext cx="5443381" cy="3619667"/>
+              <a:off x="2609966" y="2073503"/>
+              <a:ext cx="5443381" cy="3452295"/>
             </a:xfrm>
             <a:custGeom>
               <a:avLst/>
               <a:pathLst>
-                <a:path w="5443381" h="3619667">
+                <a:path w="5443381" h="3452295">
                   <a:moveTo>
                     <a:pt x="0" y="0"/>
                   </a:moveTo>
                   <a:lnTo>
-                    <a:pt x="58899" y="182501"/>
-                  </a:lnTo>
-                  <a:lnTo>
-                    <a:pt x="132659" y="396925"/>
-                  </a:lnTo>
-                  <a:lnTo>
-                    <a:pt x="206419" y="598101"/>
-                  </a:lnTo>
-                  <a:lnTo>
-                    <a:pt x="280179" y="786845"/>
-                  </a:lnTo>
-                  <a:lnTo>
-                    <a:pt x="353939" y="963926"/>
-                  </a:lnTo>
-                  <a:lnTo>
-                    <a:pt x="427699" y="1130066"/>
-                  </a:lnTo>
-                  <a:lnTo>
-                    <a:pt x="501459" y="1285939"/>
-                  </a:lnTo>
-                  <a:lnTo>
-                    <a:pt x="575219" y="1432181"/>
-                  </a:lnTo>
-                  <a:lnTo>
-                    <a:pt x="648979" y="1569387"/>
-                  </a:lnTo>
-                  <a:lnTo>
-                    <a:pt x="722739" y="1698114"/>
-                  </a:lnTo>
-                  <a:lnTo>
-                    <a:pt x="796499" y="1818887"/>
-                  </a:lnTo>
-                  <a:lnTo>
-                    <a:pt x="870259" y="1932197"/>
-                  </a:lnTo>
-                  <a:lnTo>
-                    <a:pt x="944019" y="2038506"/>
-                  </a:lnTo>
-                  <a:lnTo>
-                    <a:pt x="1017779" y="2138246"/>
-                  </a:lnTo>
-                  <a:lnTo>
-                    <a:pt x="1091539" y="2231822"/>
-                  </a:lnTo>
-                  <a:lnTo>
-                    <a:pt x="1165299" y="2319617"/>
-                  </a:lnTo>
-                  <a:lnTo>
-                    <a:pt x="1239059" y="2401986"/>
-                  </a:lnTo>
-                  <a:lnTo>
-                    <a:pt x="1312819" y="2479266"/>
-                  </a:lnTo>
-                  <a:lnTo>
-                    <a:pt x="1386579" y="2551771"/>
-                  </a:lnTo>
-                  <a:lnTo>
-                    <a:pt x="1460339" y="2619795"/>
-                  </a:lnTo>
-                  <a:lnTo>
-                    <a:pt x="1534099" y="2683616"/>
-                  </a:lnTo>
-                  <a:lnTo>
-                    <a:pt x="1607859" y="2743494"/>
-                  </a:lnTo>
-                  <a:lnTo>
-                    <a:pt x="1681619" y="2799671"/>
-                  </a:lnTo>
-                  <a:lnTo>
-                    <a:pt x="1755379" y="2852377"/>
-                  </a:lnTo>
-                  <a:lnTo>
-                    <a:pt x="1829139" y="2901827"/>
-                  </a:lnTo>
-                  <a:lnTo>
-                    <a:pt x="1902900" y="2948221"/>
-                  </a:lnTo>
-                  <a:lnTo>
-                    <a:pt x="1976660" y="2991748"/>
-                  </a:lnTo>
-                  <a:lnTo>
-                    <a:pt x="2050420" y="3032586"/>
-                  </a:lnTo>
-                  <a:lnTo>
-                    <a:pt x="2124180" y="3070900"/>
-                  </a:lnTo>
-                  <a:lnTo>
-                    <a:pt x="2197940" y="3106847"/>
-                  </a:lnTo>
-                  <a:lnTo>
-                    <a:pt x="2271700" y="3140572"/>
-                  </a:lnTo>
-                  <a:lnTo>
-                    <a:pt x="2345460" y="3172214"/>
-                  </a:lnTo>
-                  <a:lnTo>
-                    <a:pt x="2419220" y="3201900"/>
-                  </a:lnTo>
-                  <a:lnTo>
-                    <a:pt x="2492980" y="3229752"/>
-                  </a:lnTo>
-                  <a:lnTo>
-                    <a:pt x="2566740" y="3255883"/>
-                  </a:lnTo>
-                  <a:lnTo>
-                    <a:pt x="2640500" y="3280400"/>
-                  </a:lnTo>
-                  <a:lnTo>
-                    <a:pt x="2714260" y="3303401"/>
-                  </a:lnTo>
-                  <a:lnTo>
-                    <a:pt x="2788020" y="3324981"/>
-                  </a:lnTo>
-                  <a:lnTo>
-                    <a:pt x="2861780" y="3345228"/>
-                  </a:lnTo>
-                  <a:lnTo>
-                    <a:pt x="2935540" y="3364223"/>
-                  </a:lnTo>
-                  <a:lnTo>
-                    <a:pt x="3009300" y="3382045"/>
-                  </a:lnTo>
-                  <a:lnTo>
-                    <a:pt x="3083060" y="3398766"/>
-                  </a:lnTo>
-                  <a:lnTo>
-                    <a:pt x="3156820" y="3414453"/>
-                  </a:lnTo>
-                  <a:lnTo>
-                    <a:pt x="3230580" y="3429171"/>
-                  </a:lnTo>
-                  <a:lnTo>
-                    <a:pt x="3304340" y="3442980"/>
-                  </a:lnTo>
-                  <a:lnTo>
-                    <a:pt x="3378100" y="3455935"/>
-                  </a:lnTo>
-                  <a:lnTo>
-                    <a:pt x="3451860" y="3468090"/>
-                  </a:lnTo>
-                  <a:lnTo>
-                    <a:pt x="3525620" y="3479494"/>
-                  </a:lnTo>
-                  <a:lnTo>
-                    <a:pt x="3599380" y="3490193"/>
-                  </a:lnTo>
-                  <a:lnTo>
-                    <a:pt x="3673140" y="3500231"/>
-                  </a:lnTo>
-                  <a:lnTo>
-                    <a:pt x="3746900" y="3509649"/>
-                  </a:lnTo>
-                  <a:lnTo>
-                    <a:pt x="3820660" y="3518485"/>
-                  </a:lnTo>
-                  <a:lnTo>
-                    <a:pt x="3894420" y="3526775"/>
-                  </a:lnTo>
-                  <a:lnTo>
-                    <a:pt x="3968180" y="3534552"/>
-                  </a:lnTo>
-                  <a:lnTo>
-                    <a:pt x="4041940" y="3541849"/>
-                  </a:lnTo>
-                  <a:lnTo>
-                    <a:pt x="4115700" y="3548695"/>
-                  </a:lnTo>
-                  <a:lnTo>
-                    <a:pt x="4189460" y="3555118"/>
-                  </a:lnTo>
-                  <a:lnTo>
-                    <a:pt x="4263220" y="3561145"/>
-                  </a:lnTo>
-                  <a:lnTo>
-                    <a:pt x="4336980" y="3566798"/>
-                  </a:lnTo>
-                  <a:lnTo>
-                    <a:pt x="4410740" y="3572103"/>
-                  </a:lnTo>
-                  <a:lnTo>
-                    <a:pt x="4484500" y="3577080"/>
-                  </a:lnTo>
-                  <a:lnTo>
-                    <a:pt x="4558260" y="3581749"/>
-                  </a:lnTo>
-                  <a:lnTo>
-                    <a:pt x="4632020" y="3586129"/>
-                  </a:lnTo>
-                  <a:lnTo>
-                    <a:pt x="4705780" y="3590239"/>
-                  </a:lnTo>
-                  <a:lnTo>
-                    <a:pt x="4779541" y="3594095"/>
-                  </a:lnTo>
-                  <a:lnTo>
-                    <a:pt x="4853301" y="3597713"/>
-                  </a:lnTo>
-                  <a:lnTo>
-                    <a:pt x="4927061" y="3601107"/>
-                  </a:lnTo>
-                  <a:lnTo>
-                    <a:pt x="5000821" y="3604292"/>
-                  </a:lnTo>
-                  <a:lnTo>
-                    <a:pt x="5074581" y="3607280"/>
-                  </a:lnTo>
-                  <a:lnTo>
-                    <a:pt x="5148341" y="3610083"/>
-                  </a:lnTo>
-                  <a:lnTo>
-                    <a:pt x="5222101" y="3612713"/>
-                  </a:lnTo>
-                  <a:lnTo>
-                    <a:pt x="5295861" y="3615180"/>
-                  </a:lnTo>
-                  <a:lnTo>
-                    <a:pt x="5369621" y="3617495"/>
-                  </a:lnTo>
-                  <a:lnTo>
-                    <a:pt x="5443381" y="3619667"/>
+                    <a:pt x="58899" y="174062"/>
+                  </a:lnTo>
+                  <a:lnTo>
+                    <a:pt x="132659" y="378572"/>
+                  </a:lnTo>
+                  <a:lnTo>
+                    <a:pt x="206419" y="570445"/>
+                  </a:lnTo>
+                  <a:lnTo>
+                    <a:pt x="280179" y="750461"/>
+                  </a:lnTo>
+                  <a:lnTo>
+                    <a:pt x="353939" y="919355"/>
+                  </a:lnTo>
+                  <a:lnTo>
+                    <a:pt x="427699" y="1077812"/>
+                  </a:lnTo>
+                  <a:lnTo>
+                    <a:pt x="501459" y="1226478"/>
+                  </a:lnTo>
+                  <a:lnTo>
+                    <a:pt x="575219" y="1365958"/>
+                  </a:lnTo>
+                  <a:lnTo>
+                    <a:pt x="648979" y="1496819"/>
+                  </a:lnTo>
+                  <a:lnTo>
+                    <a:pt x="722739" y="1619594"/>
+                  </a:lnTo>
+                  <a:lnTo>
+                    <a:pt x="796499" y="1734782"/>
+                  </a:lnTo>
+                  <a:lnTo>
+                    <a:pt x="870259" y="1842853"/>
+                  </a:lnTo>
+                  <a:lnTo>
+                    <a:pt x="944019" y="1944246"/>
+                  </a:lnTo>
+                  <a:lnTo>
+                    <a:pt x="1017779" y="2039374"/>
+                  </a:lnTo>
+                  <a:lnTo>
+                    <a:pt x="1091539" y="2128624"/>
+                  </a:lnTo>
+                  <a:lnTo>
+                    <a:pt x="1165299" y="2212358"/>
+                  </a:lnTo>
+                  <a:lnTo>
+                    <a:pt x="1239059" y="2290919"/>
+                  </a:lnTo>
+                  <a:lnTo>
+                    <a:pt x="1312819" y="2364626"/>
+                  </a:lnTo>
+                  <a:lnTo>
+                    <a:pt x="1386579" y="2433778"/>
+                  </a:lnTo>
+                  <a:lnTo>
+                    <a:pt x="1460339" y="2498657"/>
+                  </a:lnTo>
+                  <a:lnTo>
+                    <a:pt x="1534099" y="2559527"/>
+                  </a:lnTo>
+                  <a:lnTo>
+                    <a:pt x="1607859" y="2616635"/>
+                  </a:lnTo>
+                  <a:lnTo>
+                    <a:pt x="1681619" y="2670215"/>
+                  </a:lnTo>
+                  <a:lnTo>
+                    <a:pt x="1755379" y="2720485"/>
+                  </a:lnTo>
+                  <a:lnTo>
+                    <a:pt x="1829139" y="2767648"/>
+                  </a:lnTo>
+                  <a:lnTo>
+                    <a:pt x="1902900" y="2811896"/>
+                  </a:lnTo>
+                  <a:lnTo>
+                    <a:pt x="1976660" y="2853411"/>
+                  </a:lnTo>
+                  <a:lnTo>
+                    <a:pt x="2050420" y="2892360"/>
+                  </a:lnTo>
+                  <a:lnTo>
+                    <a:pt x="2124180" y="2928903"/>
+                  </a:lnTo>
+                  <a:lnTo>
+                    <a:pt x="2197940" y="2963187"/>
+                  </a:lnTo>
+                  <a:lnTo>
+                    <a:pt x="2271700" y="2995353"/>
+                  </a:lnTo>
+                  <a:lnTo>
+                    <a:pt x="2345460" y="3025532"/>
+                  </a:lnTo>
+                  <a:lnTo>
+                    <a:pt x="2419220" y="3053845"/>
+                  </a:lnTo>
+                  <a:lnTo>
+                    <a:pt x="2492980" y="3080410"/>
+                  </a:lnTo>
+                  <a:lnTo>
+                    <a:pt x="2566740" y="3105332"/>
+                  </a:lnTo>
+                  <a:lnTo>
+                    <a:pt x="2640500" y="3128715"/>
+                  </a:lnTo>
+                  <a:lnTo>
+                    <a:pt x="2714260" y="3150653"/>
+                  </a:lnTo>
+                  <a:lnTo>
+                    <a:pt x="2788020" y="3171235"/>
+                  </a:lnTo>
+                  <a:lnTo>
+                    <a:pt x="2861780" y="3190546"/>
+                  </a:lnTo>
+                  <a:lnTo>
+                    <a:pt x="2935540" y="3208663"/>
+                  </a:lnTo>
+                  <a:lnTo>
+                    <a:pt x="3009300" y="3225661"/>
+                  </a:lnTo>
+                  <a:lnTo>
+                    <a:pt x="3083060" y="3241608"/>
+                  </a:lnTo>
+                  <a:lnTo>
+                    <a:pt x="3156820" y="3256570"/>
+                  </a:lnTo>
+                  <a:lnTo>
+                    <a:pt x="3230580" y="3270608"/>
+                  </a:lnTo>
+                  <a:lnTo>
+                    <a:pt x="3304340" y="3283778"/>
+                  </a:lnTo>
+                  <a:lnTo>
+                    <a:pt x="3378100" y="3296134"/>
+                  </a:lnTo>
+                  <a:lnTo>
+                    <a:pt x="3451860" y="3307727"/>
+                  </a:lnTo>
+                  <a:lnTo>
+                    <a:pt x="3525620" y="3318604"/>
+                  </a:lnTo>
+                  <a:lnTo>
+                    <a:pt x="3599380" y="3328808"/>
+                  </a:lnTo>
+                  <a:lnTo>
+                    <a:pt x="3673140" y="3338382"/>
+                  </a:lnTo>
+                  <a:lnTo>
+                    <a:pt x="3746900" y="3347364"/>
+                  </a:lnTo>
+                  <a:lnTo>
+                    <a:pt x="3820660" y="3355791"/>
+                  </a:lnTo>
+                  <a:lnTo>
+                    <a:pt x="3894420" y="3363698"/>
+                  </a:lnTo>
+                  <a:lnTo>
+                    <a:pt x="3968180" y="3371116"/>
+                  </a:lnTo>
+                  <a:lnTo>
+                    <a:pt x="4041940" y="3378075"/>
+                  </a:lnTo>
+                  <a:lnTo>
+                    <a:pt x="4115700" y="3384605"/>
+                  </a:lnTo>
+                  <a:lnTo>
+                    <a:pt x="4189460" y="3390731"/>
+                  </a:lnTo>
+                  <a:lnTo>
+                    <a:pt x="4263220" y="3396479"/>
+                  </a:lnTo>
+                  <a:lnTo>
+                    <a:pt x="4336980" y="3401871"/>
+                  </a:lnTo>
+                  <a:lnTo>
+                    <a:pt x="4410740" y="3406930"/>
+                  </a:lnTo>
+                  <a:lnTo>
+                    <a:pt x="4484500" y="3411677"/>
+                  </a:lnTo>
+                  <a:lnTo>
+                    <a:pt x="4558260" y="3416130"/>
+                  </a:lnTo>
+                  <a:lnTo>
+                    <a:pt x="4632020" y="3420308"/>
+                  </a:lnTo>
+                  <a:lnTo>
+                    <a:pt x="4705780" y="3424228"/>
+                  </a:lnTo>
+                  <a:lnTo>
+                    <a:pt x="4779541" y="3427906"/>
+                  </a:lnTo>
+                  <a:lnTo>
+                    <a:pt x="4853301" y="3431356"/>
+                  </a:lnTo>
+                  <a:lnTo>
+                    <a:pt x="4927061" y="3434594"/>
+                  </a:lnTo>
+                  <a:lnTo>
+                    <a:pt x="5000821" y="3437631"/>
+                  </a:lnTo>
+                  <a:lnTo>
+                    <a:pt x="5074581" y="3440480"/>
+                  </a:lnTo>
+                  <a:lnTo>
+                    <a:pt x="5148341" y="3443154"/>
+                  </a:lnTo>
+                  <a:lnTo>
+                    <a:pt x="5222101" y="3445662"/>
+                  </a:lnTo>
+                  <a:lnTo>
+                    <a:pt x="5295861" y="3448015"/>
+                  </a:lnTo>
+                  <a:lnTo>
+                    <a:pt x="5369621" y="3450223"/>
+                  </a:lnTo>
+                  <a:lnTo>
+                    <a:pt x="5443381" y="3452295"/>
                   </a:lnTo>
                 </a:path>
               </a:pathLst>
@@ -4344,7 +4344,7 @@
           </p:nvSpPr>
           <p:spPr>
             <a:xfrm>
-              <a:off x="817517" y="4679530"/>
+              <a:off x="817517" y="4727786"/>
               <a:ext cx="7799693" cy="0"/>
             </a:xfrm>
             <a:custGeom>
@@ -4387,15 +4387,15 @@
           </p:nvSpPr>
           <p:spPr>
             <a:xfrm>
-              <a:off x="4269157" y="1896563"/>
-              <a:ext cx="0" cy="3826579"/>
+              <a:off x="4269157" y="2073503"/>
+              <a:ext cx="0" cy="3649639"/>
             </a:xfrm>
             <a:custGeom>
               <a:avLst/>
               <a:pathLst>
-                <a:path w="0" h="3826579">
+                <a:path w="0" h="3649639">
                   <a:moveTo>
-                    <a:pt x="0" y="3826579"/>
+                    <a:pt x="0" y="3649639"/>
                   </a:moveTo>
                   <a:lnTo>
                     <a:pt x="0" y="0"/>
@@ -4430,7 +4430,7 @@
           </p:nvSpPr>
           <p:spPr>
             <a:xfrm>
-              <a:off x="692708" y="5509156"/>
+              <a:off x="692708" y="5517199"/>
               <a:ext cx="62179" cy="80101"/>
             </a:xfrm>
             <a:prstGeom prst="rect">
@@ -4476,7 +4476,7 @@
           </p:nvSpPr>
           <p:spPr>
             <a:xfrm>
-              <a:off x="692708" y="4639479"/>
+              <a:off x="692708" y="4687735"/>
               <a:ext cx="62179" cy="80101"/>
             </a:xfrm>
             <a:prstGeom prst="rect">
@@ -4522,7 +4522,7 @@
           </p:nvSpPr>
           <p:spPr>
             <a:xfrm>
-              <a:off x="692708" y="3769802"/>
+              <a:off x="692708" y="3858272"/>
               <a:ext cx="62179" cy="80101"/>
             </a:xfrm>
             <a:prstGeom prst="rect">
@@ -4568,7 +4568,7 @@
           </p:nvSpPr>
           <p:spPr>
             <a:xfrm>
-              <a:off x="692708" y="2900125"/>
+              <a:off x="692708" y="3028808"/>
               <a:ext cx="62179" cy="80101"/>
             </a:xfrm>
             <a:prstGeom prst="rect">
@@ -4614,7 +4614,7 @@
           </p:nvSpPr>
           <p:spPr>
             <a:xfrm>
-              <a:off x="692708" y="2030448"/>
+              <a:off x="692708" y="2199345"/>
               <a:ext cx="62179" cy="80101"/>
             </a:xfrm>
             <a:prstGeom prst="rect">
@@ -4890,7 +4890,7 @@
           </p:nvSpPr>
           <p:spPr>
             <a:xfrm rot="-5400000">
-              <a:off x="68446" y="3759743"/>
+              <a:off x="68446" y="3848213"/>
               <a:ext cx="1016904" cy="100218"/>
             </a:xfrm>
             <a:prstGeom prst="rect">
@@ -4931,6 +4931,52 @@
         <p:sp>
           <p:nvSpPr>
             <p:cNvPr id="38" name="tx38"/>
+            <p:cNvSpPr/>
+            <p:nvPr/>
+          </p:nvSpPr>
+          <p:spPr>
+            <a:xfrm>
+              <a:off x="817517" y="1896563"/>
+              <a:ext cx="5689762" cy="82021"/>
+            </a:xfrm>
+            <a:prstGeom prst="rect">
+              <a:avLst/>
+            </a:prstGeom>
+            <a:noFill/>
+          </p:spPr>
+          <p:txBody>
+            <a:bodyPr lIns="0" rIns="0" tIns="0" bIns="0" anchorCtr="1" anchor="ctr" wrap="none"/>
+            <a:lstStyle/>
+            <a:p>
+              <a:pPr algn="l" marL="0" marR="0" indent="0">
+                <a:lnSpc>
+                  <a:spcPts val="900"/>
+                </a:lnSpc>
+                <a:spcBef>
+                  <a:spcPts val="0"/>
+                </a:spcBef>
+                <a:spcAft>
+                  <a:spcPts val="0"/>
+                </a:spcAft>
+              </a:pPr>
+              <a:r>
+                <a:rPr sz="900">
+                  <a:solidFill>
+                    <a:srgbClr val="404040">
+                      <a:alpha val="100000"/>
+                    </a:srgbClr>
+                  </a:solidFill>
+                  <a:latin typeface="Helvetica"/>
+                  <a:cs typeface="Helvetica"/>
+                </a:rPr>
+                <a:t>subHR per 0.1 ratio decline: 2.15 (1.45-3.19)  |  per IQR decline (Δ = 0.29): 9.43 (2.97-29.95)  |  IQR: [0.85, 1.15]</a:t>
+              </a:r>
+            </a:p>
+          </p:txBody>
+        </p:sp>
+        <p:sp>
+          <p:nvSpPr>
+            <p:cNvPr id="39" name="tx39"/>
             <p:cNvSpPr/>
             <p:nvPr/>
           </p:nvSpPr>

--- a/docs/pptx/whole/jx-linsubhr-ratio-hosp3.pptx
+++ b/docs/pptx/whole/jx-linsubhr-ratio-hosp3.pptx
@@ -4937,7 +4937,7 @@
           <p:spPr>
             <a:xfrm>
               <a:off x="817517" y="1896563"/>
-              <a:ext cx="5689762" cy="82021"/>
+              <a:ext cx="6299667" cy="82021"/>
             </a:xfrm>
             <a:prstGeom prst="rect">
               <a:avLst/>
@@ -4969,7 +4969,7 @@
                   <a:latin typeface="Helvetica"/>
                   <a:cs typeface="Helvetica"/>
                 </a:rPr>
-                <a:t>subHR per 0.1 ratio decline: 2.15 (1.45-3.19)  |  per IQR decline (Δ = 0.29): 9.43 (2.97-29.95)  |  IQR: [0.85, 1.15]</a:t>
+                <a:t>subHR per 0.1 ratio decline: 2.15 (1.45-3.19), p = &lt;0.001  |  per IQR decline (Δ = 0.29): 9.43 (2.97-29.95)  |  IQR: [0.85, 1.15]</a:t>
               </a:r>
             </a:p>
           </p:txBody>

--- a/docs/pptx/whole/jx-linsubhr-ratio-hosp3.pptx
+++ b/docs/pptx/whole/jx-linsubhr-ratio-hosp3.pptx
@@ -2443,7 +2443,7 @@
           </p:nvSpPr>
           <p:spPr>
             <a:xfrm>
-              <a:off x="1615213" y="2073503"/>
+              <a:off x="1365633" y="2073503"/>
               <a:ext cx="0" cy="3649639"/>
             </a:xfrm>
             <a:custGeom>
@@ -2486,7 +2486,7 @@
           </p:nvSpPr>
           <p:spPr>
             <a:xfrm>
-              <a:off x="3387871" y="2073503"/>
+              <a:off x="3517243" y="2073503"/>
               <a:ext cx="0" cy="3649639"/>
             </a:xfrm>
             <a:custGeom>
@@ -2529,7 +2529,7 @@
           </p:nvSpPr>
           <p:spPr>
             <a:xfrm>
-              <a:off x="5160528" y="2073503"/>
+              <a:off x="5668852" y="2073503"/>
               <a:ext cx="0" cy="3649639"/>
             </a:xfrm>
             <a:custGeom>
@@ -2572,7 +2572,7 @@
           </p:nvSpPr>
           <p:spPr>
             <a:xfrm>
-              <a:off x="6933186" y="2073503"/>
+              <a:off x="7820461" y="2073503"/>
               <a:ext cx="0" cy="3649639"/>
             </a:xfrm>
             <a:custGeom>
@@ -2830,7 +2830,7 @@
           </p:nvSpPr>
           <p:spPr>
             <a:xfrm>
-              <a:off x="2501542" y="2073503"/>
+              <a:off x="2441438" y="2073503"/>
               <a:ext cx="0" cy="3649639"/>
             </a:xfrm>
             <a:custGeom>
@@ -2873,7 +2873,7 @@
           </p:nvSpPr>
           <p:spPr>
             <a:xfrm>
-              <a:off x="4274200" y="2073503"/>
+              <a:off x="4593047" y="2073503"/>
               <a:ext cx="0" cy="3649639"/>
             </a:xfrm>
             <a:custGeom>
@@ -2916,7 +2916,7 @@
           </p:nvSpPr>
           <p:spPr>
             <a:xfrm>
-              <a:off x="6046857" y="2073503"/>
+              <a:off x="6744657" y="2073503"/>
               <a:ext cx="0" cy="3649639"/>
             </a:xfrm>
             <a:custGeom>
@@ -2953,559 +2953,516 @@
         </p:sp>
         <p:sp>
           <p:nvSpPr>
-            <p:cNvPr id="20" name="pl20"/>
+            <p:cNvPr id="20" name="pg20"/>
             <p:cNvSpPr/>
             <p:nvPr/>
           </p:nvSpPr>
           <p:spPr>
             <a:xfrm>
-              <a:off x="7819515" y="2073503"/>
-              <a:ext cx="0" cy="3649639"/>
+              <a:off x="1263567" y="2073503"/>
+              <a:ext cx="6999111" cy="3477921"/>
             </a:xfrm>
             <a:custGeom>
               <a:avLst/>
               <a:pathLst>
-                <a:path w="0" h="3649639">
+                <a:path w="6999111" h="3477921">
                   <a:moveTo>
-                    <a:pt x="0" y="3649639"/>
+                    <a:pt x="2261571" y="0"/>
                   </a:moveTo>
                   <a:lnTo>
-                    <a:pt x="0" y="0"/>
-                  </a:lnTo>
-                  <a:lnTo>
-                    <a:pt x="0" y="0"/>
-                  </a:lnTo>
-                </a:path>
-              </a:pathLst>
-            </a:custGeom>
-            <a:ln w="13550" cap="flat">
-              <a:solidFill>
-                <a:srgbClr val="EBEBEB">
-                  <a:alpha val="100000"/>
-                </a:srgbClr>
-              </a:solidFill>
-              <a:prstDash val="solid"/>
-              <a:round/>
-            </a:ln>
-          </p:spPr>
-          <p:txBody>
-            <a:bodyPr/>
-            <a:lstStyle/>
-            <a:p/>
-          </p:txBody>
-        </p:sp>
-        <p:sp>
-          <p:nvSpPr>
-            <p:cNvPr id="21" name="pg21"/>
-            <p:cNvSpPr/>
-            <p:nvPr/>
-          </p:nvSpPr>
-          <p:spPr>
-            <a:xfrm>
-              <a:off x="845354" y="2073503"/>
-              <a:ext cx="7207992" cy="3477921"/>
-            </a:xfrm>
-            <a:custGeom>
-              <a:avLst/>
-              <a:pathLst>
-                <a:path w="7207992" h="3477921">
-                  <a:moveTo>
-                    <a:pt x="2329065" y="0"/>
-                  </a:moveTo>
-                  <a:lnTo>
-                    <a:pt x="2339831" y="50846"/>
-                  </a:lnTo>
-                  <a:lnTo>
-                    <a:pt x="2413591" y="367111"/>
-                  </a:lnTo>
-                  <a:lnTo>
-                    <a:pt x="2487351" y="654239"/>
-                  </a:lnTo>
-                  <a:lnTo>
-                    <a:pt x="2561111" y="914915"/>
-                  </a:lnTo>
-                  <a:lnTo>
-                    <a:pt x="2634871" y="1151575"/>
-                  </a:lnTo>
-                  <a:lnTo>
-                    <a:pt x="2708631" y="1366432"/>
-                  </a:lnTo>
-                  <a:lnTo>
-                    <a:pt x="2782391" y="1561495"/>
-                  </a:lnTo>
-                  <a:lnTo>
-                    <a:pt x="2856151" y="1738588"/>
-                  </a:lnTo>
-                  <a:lnTo>
-                    <a:pt x="2929911" y="1899365"/>
-                  </a:lnTo>
-                  <a:lnTo>
-                    <a:pt x="3003671" y="2045330"/>
-                  </a:lnTo>
-                  <a:lnTo>
-                    <a:pt x="3077431" y="2177848"/>
-                  </a:lnTo>
-                  <a:lnTo>
-                    <a:pt x="3151191" y="2298157"/>
-                  </a:lnTo>
-                  <a:lnTo>
-                    <a:pt x="3224951" y="2407383"/>
-                  </a:lnTo>
-                  <a:lnTo>
-                    <a:pt x="3298711" y="2506546"/>
-                  </a:lnTo>
-                  <a:lnTo>
-                    <a:pt x="3372471" y="2596573"/>
-                  </a:lnTo>
-                  <a:lnTo>
-                    <a:pt x="3446231" y="2662044"/>
-                  </a:lnTo>
-                  <a:lnTo>
-                    <a:pt x="3519991" y="2687057"/>
-                  </a:lnTo>
-                  <a:lnTo>
-                    <a:pt x="3593751" y="2711310"/>
-                  </a:lnTo>
-                  <a:lnTo>
-                    <a:pt x="3667511" y="2734824"/>
-                  </a:lnTo>
-                  <a:lnTo>
-                    <a:pt x="3741271" y="2757622"/>
-                  </a:lnTo>
-                  <a:lnTo>
-                    <a:pt x="3815031" y="2779726"/>
-                  </a:lnTo>
-                  <a:lnTo>
-                    <a:pt x="3888791" y="2801158"/>
-                  </a:lnTo>
-                  <a:lnTo>
-                    <a:pt x="3962551" y="2821937"/>
-                  </a:lnTo>
-                  <a:lnTo>
-                    <a:pt x="4036311" y="2842083"/>
-                  </a:lnTo>
-                  <a:lnTo>
-                    <a:pt x="4110071" y="2861616"/>
-                  </a:lnTo>
-                  <a:lnTo>
-                    <a:pt x="4183831" y="2880555"/>
-                  </a:lnTo>
-                  <a:lnTo>
-                    <a:pt x="4257591" y="2898917"/>
-                  </a:lnTo>
-                  <a:lnTo>
-                    <a:pt x="4331351" y="2916720"/>
-                  </a:lnTo>
-                  <a:lnTo>
-                    <a:pt x="4405111" y="2933981"/>
-                  </a:lnTo>
-                  <a:lnTo>
-                    <a:pt x="4478872" y="2950717"/>
-                  </a:lnTo>
-                  <a:lnTo>
-                    <a:pt x="4552632" y="2966943"/>
-                  </a:lnTo>
-                  <a:lnTo>
-                    <a:pt x="4626392" y="2982675"/>
-                  </a:lnTo>
-                  <a:lnTo>
-                    <a:pt x="4700152" y="2997929"/>
-                  </a:lnTo>
-                  <a:lnTo>
-                    <a:pt x="4773912" y="3012718"/>
-                  </a:lnTo>
-                  <a:lnTo>
-                    <a:pt x="4847672" y="3027056"/>
-                  </a:lnTo>
-                  <a:lnTo>
-                    <a:pt x="4921432" y="3040959"/>
-                  </a:lnTo>
-                  <a:lnTo>
-                    <a:pt x="4995192" y="3054438"/>
-                  </a:lnTo>
-                  <a:lnTo>
-                    <a:pt x="5068952" y="3067507"/>
-                  </a:lnTo>
-                  <a:lnTo>
-                    <a:pt x="5142712" y="3080177"/>
-                  </a:lnTo>
-                  <a:lnTo>
-                    <a:pt x="5216472" y="3092463"/>
-                  </a:lnTo>
-                  <a:lnTo>
-                    <a:pt x="5290232" y="3104374"/>
-                  </a:lnTo>
-                  <a:lnTo>
-                    <a:pt x="5363992" y="3115923"/>
-                  </a:lnTo>
-                  <a:lnTo>
-                    <a:pt x="5437752" y="3127120"/>
-                  </a:lnTo>
-                  <a:lnTo>
-                    <a:pt x="5511512" y="3137976"/>
-                  </a:lnTo>
-                  <a:lnTo>
-                    <a:pt x="5585272" y="3148502"/>
-                  </a:lnTo>
-                  <a:lnTo>
-                    <a:pt x="5659032" y="3158707"/>
-                  </a:lnTo>
-                  <a:lnTo>
-                    <a:pt x="5732792" y="3168602"/>
-                  </a:lnTo>
-                  <a:lnTo>
-                    <a:pt x="5806552" y="3178195"/>
-                  </a:lnTo>
-                  <a:lnTo>
-                    <a:pt x="5880312" y="3187497"/>
-                  </a:lnTo>
-                  <a:lnTo>
-                    <a:pt x="5954072" y="3196515"/>
-                  </a:lnTo>
-                  <a:lnTo>
-                    <a:pt x="6027832" y="3205259"/>
-                  </a:lnTo>
-                  <a:lnTo>
-                    <a:pt x="6101592" y="3213736"/>
-                  </a:lnTo>
-                  <a:lnTo>
-                    <a:pt x="6175352" y="3221956"/>
-                  </a:lnTo>
-                  <a:lnTo>
-                    <a:pt x="6249112" y="3229925"/>
-                  </a:lnTo>
-                  <a:lnTo>
-                    <a:pt x="6322872" y="3237652"/>
-                  </a:lnTo>
-                  <a:lnTo>
-                    <a:pt x="6396632" y="3245143"/>
-                  </a:lnTo>
-                  <a:lnTo>
-                    <a:pt x="6470392" y="3252407"/>
-                  </a:lnTo>
-                  <a:lnTo>
-                    <a:pt x="6544152" y="3259449"/>
-                  </a:lnTo>
-                  <a:lnTo>
-                    <a:pt x="6617912" y="3266277"/>
-                  </a:lnTo>
-                  <a:lnTo>
-                    <a:pt x="6691672" y="3272897"/>
-                  </a:lnTo>
-                  <a:lnTo>
-                    <a:pt x="6765432" y="3279315"/>
-                  </a:lnTo>
-                  <a:lnTo>
-                    <a:pt x="6839192" y="3285539"/>
-                  </a:lnTo>
-                  <a:lnTo>
-                    <a:pt x="6912952" y="3291572"/>
-                  </a:lnTo>
-                  <a:lnTo>
-                    <a:pt x="6986712" y="3297422"/>
-                  </a:lnTo>
-                  <a:lnTo>
-                    <a:pt x="7060472" y="3303094"/>
-                  </a:lnTo>
-                  <a:lnTo>
-                    <a:pt x="7134232" y="3308594"/>
-                  </a:lnTo>
-                  <a:lnTo>
-                    <a:pt x="7207992" y="3313926"/>
-                  </a:lnTo>
-                  <a:lnTo>
-                    <a:pt x="7207992" y="3477921"/>
-                  </a:lnTo>
-                  <a:lnTo>
-                    <a:pt x="7134232" y="3477330"/>
-                  </a:lnTo>
-                  <a:lnTo>
-                    <a:pt x="7060472" y="3476679"/>
-                  </a:lnTo>
-                  <a:lnTo>
-                    <a:pt x="6986712" y="3475962"/>
-                  </a:lnTo>
-                  <a:lnTo>
-                    <a:pt x="6912952" y="3475172"/>
-                  </a:lnTo>
-                  <a:lnTo>
-                    <a:pt x="6839192" y="3474302"/>
-                  </a:lnTo>
-                  <a:lnTo>
-                    <a:pt x="6765432" y="3473344"/>
-                  </a:lnTo>
-                  <a:lnTo>
-                    <a:pt x="6691672" y="3472288"/>
-                  </a:lnTo>
-                  <a:lnTo>
-                    <a:pt x="6617912" y="3471125"/>
-                  </a:lnTo>
-                  <a:lnTo>
-                    <a:pt x="6544152" y="3469844"/>
-                  </a:lnTo>
-                  <a:lnTo>
-                    <a:pt x="6470392" y="3468434"/>
-                  </a:lnTo>
-                  <a:lnTo>
-                    <a:pt x="6396632" y="3466880"/>
-                  </a:lnTo>
-                  <a:lnTo>
-                    <a:pt x="6322872" y="3465168"/>
-                  </a:lnTo>
-                  <a:lnTo>
-                    <a:pt x="6249112" y="3463283"/>
-                  </a:lnTo>
-                  <a:lnTo>
-                    <a:pt x="6175352" y="3461207"/>
-                  </a:lnTo>
-                  <a:lnTo>
-                    <a:pt x="6101592" y="3458919"/>
-                  </a:lnTo>
-                  <a:lnTo>
-                    <a:pt x="6027832" y="3456400"/>
-                  </a:lnTo>
-                  <a:lnTo>
-                    <a:pt x="5954072" y="3453625"/>
-                  </a:lnTo>
-                  <a:lnTo>
-                    <a:pt x="5880312" y="3450568"/>
-                  </a:lnTo>
-                  <a:lnTo>
-                    <a:pt x="5806552" y="3447201"/>
-                  </a:lnTo>
-                  <a:lnTo>
-                    <a:pt x="5732792" y="3443493"/>
-                  </a:lnTo>
-                  <a:lnTo>
-                    <a:pt x="5659032" y="3439408"/>
-                  </a:lnTo>
-                  <a:lnTo>
-                    <a:pt x="5585272" y="3434909"/>
-                  </a:lnTo>
-                  <a:lnTo>
-                    <a:pt x="5511512" y="3429953"/>
-                  </a:lnTo>
-                  <a:lnTo>
-                    <a:pt x="5437752" y="3424494"/>
-                  </a:lnTo>
-                  <a:lnTo>
-                    <a:pt x="5363992" y="3418482"/>
-                  </a:lnTo>
-                  <a:lnTo>
-                    <a:pt x="5290232" y="3411859"/>
-                  </a:lnTo>
-                  <a:lnTo>
-                    <a:pt x="5216472" y="3404564"/>
-                  </a:lnTo>
-                  <a:lnTo>
-                    <a:pt x="5142712" y="3396529"/>
-                  </a:lnTo>
-                  <a:lnTo>
-                    <a:pt x="5068952" y="3387678"/>
-                  </a:lnTo>
-                  <a:lnTo>
-                    <a:pt x="4995192" y="3377930"/>
-                  </a:lnTo>
-                  <a:lnTo>
-                    <a:pt x="4921432" y="3367192"/>
-                  </a:lnTo>
-                  <a:lnTo>
-                    <a:pt x="4847672" y="3355364"/>
-                  </a:lnTo>
-                  <a:lnTo>
-                    <a:pt x="4773912" y="3342336"/>
-                  </a:lnTo>
-                  <a:lnTo>
-                    <a:pt x="4700152" y="3327987"/>
-                  </a:lnTo>
-                  <a:lnTo>
-                    <a:pt x="4626392" y="3312181"/>
-                  </a:lnTo>
-                  <a:lnTo>
-                    <a:pt x="4552632" y="3294771"/>
-                  </a:lnTo>
-                  <a:lnTo>
-                    <a:pt x="4478872" y="3275594"/>
-                  </a:lnTo>
-                  <a:lnTo>
-                    <a:pt x="4405111" y="3254472"/>
-                  </a:lnTo>
-                  <a:lnTo>
-                    <a:pt x="4331351" y="3231206"/>
-                  </a:lnTo>
-                  <a:lnTo>
-                    <a:pt x="4257591" y="3205579"/>
-                  </a:lnTo>
-                  <a:lnTo>
-                    <a:pt x="4183831" y="3177351"/>
-                  </a:lnTo>
-                  <a:lnTo>
-                    <a:pt x="4110071" y="3146260"/>
-                  </a:lnTo>
-                  <a:lnTo>
-                    <a:pt x="4036311" y="3112013"/>
-                  </a:lnTo>
-                  <a:lnTo>
-                    <a:pt x="3962551" y="3074290"/>
-                  </a:lnTo>
-                  <a:lnTo>
-                    <a:pt x="3888791" y="3032740"/>
-                  </a:lnTo>
-                  <a:lnTo>
-                    <a:pt x="3815031" y="2986974"/>
-                  </a:lnTo>
-                  <a:lnTo>
-                    <a:pt x="3741271" y="2936563"/>
-                  </a:lnTo>
-                  <a:lnTo>
-                    <a:pt x="3667511" y="2881037"/>
-                  </a:lnTo>
-                  <a:lnTo>
-                    <a:pt x="3593751" y="2819876"/>
-                  </a:lnTo>
-                  <a:lnTo>
-                    <a:pt x="3519991" y="2752509"/>
-                  </a:lnTo>
-                  <a:lnTo>
-                    <a:pt x="3446231" y="2678306"/>
-                  </a:lnTo>
-                  <a:lnTo>
-                    <a:pt x="3372471" y="2636244"/>
-                  </a:lnTo>
-                  <a:lnTo>
-                    <a:pt x="3298711" y="2609635"/>
-                  </a:lnTo>
-                  <a:lnTo>
-                    <a:pt x="3224951" y="2582191"/>
-                  </a:lnTo>
-                  <a:lnTo>
-                    <a:pt x="3151191" y="2553884"/>
-                  </a:lnTo>
-                  <a:lnTo>
-                    <a:pt x="3077431" y="2524689"/>
-                  </a:lnTo>
-                  <a:lnTo>
-                    <a:pt x="3003671" y="2494577"/>
-                  </a:lnTo>
-                  <a:lnTo>
-                    <a:pt x="2929911" y="2463520"/>
-                  </a:lnTo>
-                  <a:lnTo>
-                    <a:pt x="2856151" y="2431488"/>
-                  </a:lnTo>
-                  <a:lnTo>
-                    <a:pt x="2782391" y="2398450"/>
-                  </a:lnTo>
-                  <a:lnTo>
-                    <a:pt x="2708631" y="2364375"/>
-                  </a:lnTo>
-                  <a:lnTo>
-                    <a:pt x="2634871" y="2329230"/>
-                  </a:lnTo>
-                  <a:lnTo>
-                    <a:pt x="2561111" y="2292981"/>
-                  </a:lnTo>
-                  <a:lnTo>
-                    <a:pt x="2487351" y="2255594"/>
-                  </a:lnTo>
-                  <a:lnTo>
-                    <a:pt x="2413591" y="2217034"/>
-                  </a:lnTo>
-                  <a:lnTo>
-                    <a:pt x="2339831" y="2177262"/>
-                  </a:lnTo>
-                  <a:lnTo>
-                    <a:pt x="2266071" y="2136242"/>
-                  </a:lnTo>
-                  <a:lnTo>
-                    <a:pt x="2192311" y="2093935"/>
-                  </a:lnTo>
-                  <a:lnTo>
-                    <a:pt x="2118551" y="2050298"/>
-                  </a:lnTo>
-                  <a:lnTo>
-                    <a:pt x="2044791" y="2005292"/>
-                  </a:lnTo>
-                  <a:lnTo>
-                    <a:pt x="1971031" y="1958873"/>
-                  </a:lnTo>
-                  <a:lnTo>
-                    <a:pt x="1897271" y="1910996"/>
-                  </a:lnTo>
-                  <a:lnTo>
-                    <a:pt x="1823511" y="1861616"/>
-                  </a:lnTo>
-                  <a:lnTo>
-                    <a:pt x="1749751" y="1810686"/>
-                  </a:lnTo>
-                  <a:lnTo>
-                    <a:pt x="1675991" y="1758156"/>
-                  </a:lnTo>
-                  <a:lnTo>
-                    <a:pt x="1602231" y="1703977"/>
-                  </a:lnTo>
-                  <a:lnTo>
-                    <a:pt x="1528471" y="1648098"/>
-                  </a:lnTo>
-                  <a:lnTo>
-                    <a:pt x="1454710" y="1590463"/>
-                  </a:lnTo>
-                  <a:lnTo>
-                    <a:pt x="1380950" y="1531019"/>
-                  </a:lnTo>
-                  <a:lnTo>
-                    <a:pt x="1307190" y="1469709"/>
-                  </a:lnTo>
-                  <a:lnTo>
-                    <a:pt x="1233430" y="1406474"/>
-                  </a:lnTo>
-                  <a:lnTo>
-                    <a:pt x="1159670" y="1341253"/>
-                  </a:lnTo>
-                  <a:lnTo>
-                    <a:pt x="1085910" y="1273985"/>
-                  </a:lnTo>
-                  <a:lnTo>
-                    <a:pt x="1012150" y="1204605"/>
-                  </a:lnTo>
-                  <a:lnTo>
-                    <a:pt x="938390" y="1133046"/>
-                  </a:lnTo>
-                  <a:lnTo>
-                    <a:pt x="864630" y="1059241"/>
-                  </a:lnTo>
-                  <a:lnTo>
-                    <a:pt x="790870" y="983118"/>
-                  </a:lnTo>
-                  <a:lnTo>
-                    <a:pt x="717110" y="904605"/>
-                  </a:lnTo>
-                  <a:lnTo>
-                    <a:pt x="643350" y="823627"/>
-                  </a:lnTo>
-                  <a:lnTo>
-                    <a:pt x="569590" y="740107"/>
-                  </a:lnTo>
-                  <a:lnTo>
-                    <a:pt x="495830" y="653964"/>
-                  </a:lnTo>
-                  <a:lnTo>
-                    <a:pt x="422070" y="565117"/>
-                  </a:lnTo>
-                  <a:lnTo>
-                    <a:pt x="348310" y="473480"/>
-                  </a:lnTo>
-                  <a:lnTo>
-                    <a:pt x="274550" y="378966"/>
-                  </a:lnTo>
-                  <a:lnTo>
-                    <a:pt x="200790" y="281485"/>
-                  </a:lnTo>
-                  <a:lnTo>
-                    <a:pt x="127030" y="180943"/>
-                  </a:lnTo>
-                  <a:lnTo>
-                    <a:pt x="53270" y="77244"/>
+                    <a:pt x="2272025" y="50846"/>
+                  </a:lnTo>
+                  <a:lnTo>
+                    <a:pt x="2343647" y="367111"/>
+                  </a:lnTo>
+                  <a:lnTo>
+                    <a:pt x="2415270" y="654239"/>
+                  </a:lnTo>
+                  <a:lnTo>
+                    <a:pt x="2486892" y="914915"/>
+                  </a:lnTo>
+                  <a:lnTo>
+                    <a:pt x="2558515" y="1151575"/>
+                  </a:lnTo>
+                  <a:lnTo>
+                    <a:pt x="2630137" y="1366432"/>
+                  </a:lnTo>
+                  <a:lnTo>
+                    <a:pt x="2701760" y="1561495"/>
+                  </a:lnTo>
+                  <a:lnTo>
+                    <a:pt x="2773382" y="1738588"/>
+                  </a:lnTo>
+                  <a:lnTo>
+                    <a:pt x="2845005" y="1899365"/>
+                  </a:lnTo>
+                  <a:lnTo>
+                    <a:pt x="2916627" y="2045330"/>
+                  </a:lnTo>
+                  <a:lnTo>
+                    <a:pt x="2988250" y="2177848"/>
+                  </a:lnTo>
+                  <a:lnTo>
+                    <a:pt x="3059872" y="2298157"/>
+                  </a:lnTo>
+                  <a:lnTo>
+                    <a:pt x="3131495" y="2407383"/>
+                  </a:lnTo>
+                  <a:lnTo>
+                    <a:pt x="3203117" y="2506546"/>
+                  </a:lnTo>
+                  <a:lnTo>
+                    <a:pt x="3274740" y="2596573"/>
+                  </a:lnTo>
+                  <a:lnTo>
+                    <a:pt x="3346362" y="2662044"/>
+                  </a:lnTo>
+                  <a:lnTo>
+                    <a:pt x="3417985" y="2687057"/>
+                  </a:lnTo>
+                  <a:lnTo>
+                    <a:pt x="3489608" y="2711310"/>
+                  </a:lnTo>
+                  <a:lnTo>
+                    <a:pt x="3561230" y="2734824"/>
+                  </a:lnTo>
+                  <a:lnTo>
+                    <a:pt x="3632853" y="2757622"/>
+                  </a:lnTo>
+                  <a:lnTo>
+                    <a:pt x="3704475" y="2779726"/>
+                  </a:lnTo>
+                  <a:lnTo>
+                    <a:pt x="3776098" y="2801158"/>
+                  </a:lnTo>
+                  <a:lnTo>
+                    <a:pt x="3847720" y="2821937"/>
+                  </a:lnTo>
+                  <a:lnTo>
+                    <a:pt x="3919343" y="2842083"/>
+                  </a:lnTo>
+                  <a:lnTo>
+                    <a:pt x="3990965" y="2861616"/>
+                  </a:lnTo>
+                  <a:lnTo>
+                    <a:pt x="4062588" y="2880555"/>
+                  </a:lnTo>
+                  <a:lnTo>
+                    <a:pt x="4134210" y="2898917"/>
+                  </a:lnTo>
+                  <a:lnTo>
+                    <a:pt x="4205833" y="2916720"/>
+                  </a:lnTo>
+                  <a:lnTo>
+                    <a:pt x="4277455" y="2933981"/>
+                  </a:lnTo>
+                  <a:lnTo>
+                    <a:pt x="4349078" y="2950717"/>
+                  </a:lnTo>
+                  <a:lnTo>
+                    <a:pt x="4420700" y="2966943"/>
+                  </a:lnTo>
+                  <a:lnTo>
+                    <a:pt x="4492323" y="2982675"/>
+                  </a:lnTo>
+                  <a:lnTo>
+                    <a:pt x="4563945" y="2997929"/>
+                  </a:lnTo>
+                  <a:lnTo>
+                    <a:pt x="4635568" y="3012718"/>
+                  </a:lnTo>
+                  <a:lnTo>
+                    <a:pt x="4707190" y="3027056"/>
+                  </a:lnTo>
+                  <a:lnTo>
+                    <a:pt x="4778813" y="3040959"/>
+                  </a:lnTo>
+                  <a:lnTo>
+                    <a:pt x="4850436" y="3054438"/>
+                  </a:lnTo>
+                  <a:lnTo>
+                    <a:pt x="4922058" y="3067507"/>
+                  </a:lnTo>
+                  <a:lnTo>
+                    <a:pt x="4993681" y="3080177"/>
+                  </a:lnTo>
+                  <a:lnTo>
+                    <a:pt x="5065303" y="3092463"/>
+                  </a:lnTo>
+                  <a:lnTo>
+                    <a:pt x="5136926" y="3104374"/>
+                  </a:lnTo>
+                  <a:lnTo>
+                    <a:pt x="5208548" y="3115923"/>
+                  </a:lnTo>
+                  <a:lnTo>
+                    <a:pt x="5280171" y="3127120"/>
+                  </a:lnTo>
+                  <a:lnTo>
+                    <a:pt x="5351793" y="3137976"/>
+                  </a:lnTo>
+                  <a:lnTo>
+                    <a:pt x="5423416" y="3148502"/>
+                  </a:lnTo>
+                  <a:lnTo>
+                    <a:pt x="5495038" y="3158707"/>
+                  </a:lnTo>
+                  <a:lnTo>
+                    <a:pt x="5566661" y="3168602"/>
+                  </a:lnTo>
+                  <a:lnTo>
+                    <a:pt x="5638283" y="3178195"/>
+                  </a:lnTo>
+                  <a:lnTo>
+                    <a:pt x="5709906" y="3187497"/>
+                  </a:lnTo>
+                  <a:lnTo>
+                    <a:pt x="5781528" y="3196515"/>
+                  </a:lnTo>
+                  <a:lnTo>
+                    <a:pt x="5853151" y="3205259"/>
+                  </a:lnTo>
+                  <a:lnTo>
+                    <a:pt x="5924773" y="3213736"/>
+                  </a:lnTo>
+                  <a:lnTo>
+                    <a:pt x="5996396" y="3221956"/>
+                  </a:lnTo>
+                  <a:lnTo>
+                    <a:pt x="6068018" y="3229925"/>
+                  </a:lnTo>
+                  <a:lnTo>
+                    <a:pt x="6139641" y="3237652"/>
+                  </a:lnTo>
+                  <a:lnTo>
+                    <a:pt x="6211264" y="3245143"/>
+                  </a:lnTo>
+                  <a:lnTo>
+                    <a:pt x="6282886" y="3252407"/>
+                  </a:lnTo>
+                  <a:lnTo>
+                    <a:pt x="6354509" y="3259449"/>
+                  </a:lnTo>
+                  <a:lnTo>
+                    <a:pt x="6426131" y="3266277"/>
+                  </a:lnTo>
+                  <a:lnTo>
+                    <a:pt x="6497754" y="3272897"/>
+                  </a:lnTo>
+                  <a:lnTo>
+                    <a:pt x="6569376" y="3279315"/>
+                  </a:lnTo>
+                  <a:lnTo>
+                    <a:pt x="6640999" y="3285539"/>
+                  </a:lnTo>
+                  <a:lnTo>
+                    <a:pt x="6712621" y="3291572"/>
+                  </a:lnTo>
+                  <a:lnTo>
+                    <a:pt x="6784244" y="3297422"/>
+                  </a:lnTo>
+                  <a:lnTo>
+                    <a:pt x="6855866" y="3303094"/>
+                  </a:lnTo>
+                  <a:lnTo>
+                    <a:pt x="6927489" y="3308594"/>
+                  </a:lnTo>
+                  <a:lnTo>
+                    <a:pt x="6999111" y="3313926"/>
+                  </a:lnTo>
+                  <a:lnTo>
+                    <a:pt x="6999111" y="3477921"/>
+                  </a:lnTo>
+                  <a:lnTo>
+                    <a:pt x="6927489" y="3477330"/>
+                  </a:lnTo>
+                  <a:lnTo>
+                    <a:pt x="6855866" y="3476679"/>
+                  </a:lnTo>
+                  <a:lnTo>
+                    <a:pt x="6784244" y="3475962"/>
+                  </a:lnTo>
+                  <a:lnTo>
+                    <a:pt x="6712621" y="3475172"/>
+                  </a:lnTo>
+                  <a:lnTo>
+                    <a:pt x="6640999" y="3474302"/>
+                  </a:lnTo>
+                  <a:lnTo>
+                    <a:pt x="6569376" y="3473344"/>
+                  </a:lnTo>
+                  <a:lnTo>
+                    <a:pt x="6497754" y="3472288"/>
+                  </a:lnTo>
+                  <a:lnTo>
+                    <a:pt x="6426131" y="3471125"/>
+                  </a:lnTo>
+                  <a:lnTo>
+                    <a:pt x="6354509" y="3469844"/>
+                  </a:lnTo>
+                  <a:lnTo>
+                    <a:pt x="6282886" y="3468434"/>
+                  </a:lnTo>
+                  <a:lnTo>
+                    <a:pt x="6211264" y="3466880"/>
+                  </a:lnTo>
+                  <a:lnTo>
+                    <a:pt x="6139641" y="3465168"/>
+                  </a:lnTo>
+                  <a:lnTo>
+                    <a:pt x="6068018" y="3463283"/>
+                  </a:lnTo>
+                  <a:lnTo>
+                    <a:pt x="5996396" y="3461207"/>
+                  </a:lnTo>
+                  <a:lnTo>
+                    <a:pt x="5924773" y="3458919"/>
+                  </a:lnTo>
+                  <a:lnTo>
+                    <a:pt x="5853151" y="3456400"/>
+                  </a:lnTo>
+                  <a:lnTo>
+                    <a:pt x="5781528" y="3453625"/>
+                  </a:lnTo>
+                  <a:lnTo>
+                    <a:pt x="5709906" y="3450568"/>
+                  </a:lnTo>
+                  <a:lnTo>
+                    <a:pt x="5638283" y="3447201"/>
+                  </a:lnTo>
+                  <a:lnTo>
+                    <a:pt x="5566661" y="3443493"/>
+                  </a:lnTo>
+                  <a:lnTo>
+                    <a:pt x="5495038" y="3439408"/>
+                  </a:lnTo>
+                  <a:lnTo>
+                    <a:pt x="5423416" y="3434909"/>
+                  </a:lnTo>
+                  <a:lnTo>
+                    <a:pt x="5351793" y="3429953"/>
+                  </a:lnTo>
+                  <a:lnTo>
+                    <a:pt x="5280171" y="3424494"/>
+                  </a:lnTo>
+                  <a:lnTo>
+                    <a:pt x="5208548" y="3418482"/>
+                  </a:lnTo>
+                  <a:lnTo>
+                    <a:pt x="5136926" y="3411859"/>
+                  </a:lnTo>
+                  <a:lnTo>
+                    <a:pt x="5065303" y="3404564"/>
+                  </a:lnTo>
+                  <a:lnTo>
+                    <a:pt x="4993681" y="3396529"/>
+                  </a:lnTo>
+                  <a:lnTo>
+                    <a:pt x="4922058" y="3387678"/>
+                  </a:lnTo>
+                  <a:lnTo>
+                    <a:pt x="4850436" y="3377930"/>
+                  </a:lnTo>
+                  <a:lnTo>
+                    <a:pt x="4778813" y="3367192"/>
+                  </a:lnTo>
+                  <a:lnTo>
+                    <a:pt x="4707190" y="3355364"/>
+                  </a:lnTo>
+                  <a:lnTo>
+                    <a:pt x="4635568" y="3342336"/>
+                  </a:lnTo>
+                  <a:lnTo>
+                    <a:pt x="4563945" y="3327987"/>
+                  </a:lnTo>
+                  <a:lnTo>
+                    <a:pt x="4492323" y="3312181"/>
+                  </a:lnTo>
+                  <a:lnTo>
+                    <a:pt x="4420700" y="3294771"/>
+                  </a:lnTo>
+                  <a:lnTo>
+                    <a:pt x="4349078" y="3275594"/>
+                  </a:lnTo>
+                  <a:lnTo>
+                    <a:pt x="4277455" y="3254472"/>
+                  </a:lnTo>
+                  <a:lnTo>
+                    <a:pt x="4205833" y="3231206"/>
+                  </a:lnTo>
+                  <a:lnTo>
+                    <a:pt x="4134210" y="3205579"/>
+                  </a:lnTo>
+                  <a:lnTo>
+                    <a:pt x="4062588" y="3177351"/>
+                  </a:lnTo>
+                  <a:lnTo>
+                    <a:pt x="3990965" y="3146260"/>
+                  </a:lnTo>
+                  <a:lnTo>
+                    <a:pt x="3919343" y="3112013"/>
+                  </a:lnTo>
+                  <a:lnTo>
+                    <a:pt x="3847720" y="3074290"/>
+                  </a:lnTo>
+                  <a:lnTo>
+                    <a:pt x="3776098" y="3032740"/>
+                  </a:lnTo>
+                  <a:lnTo>
+                    <a:pt x="3704475" y="2986974"/>
+                  </a:lnTo>
+                  <a:lnTo>
+                    <a:pt x="3632853" y="2936563"/>
+                  </a:lnTo>
+                  <a:lnTo>
+                    <a:pt x="3561230" y="2881037"/>
+                  </a:lnTo>
+                  <a:lnTo>
+                    <a:pt x="3489608" y="2819876"/>
+                  </a:lnTo>
+                  <a:lnTo>
+                    <a:pt x="3417985" y="2752509"/>
+                  </a:lnTo>
+                  <a:lnTo>
+                    <a:pt x="3346362" y="2678306"/>
+                  </a:lnTo>
+                  <a:lnTo>
+                    <a:pt x="3274740" y="2636244"/>
+                  </a:lnTo>
+                  <a:lnTo>
+                    <a:pt x="3203117" y="2609635"/>
+                  </a:lnTo>
+                  <a:lnTo>
+                    <a:pt x="3131495" y="2582191"/>
+                  </a:lnTo>
+                  <a:lnTo>
+                    <a:pt x="3059872" y="2553884"/>
+                  </a:lnTo>
+                  <a:lnTo>
+                    <a:pt x="2988250" y="2524689"/>
+                  </a:lnTo>
+                  <a:lnTo>
+                    <a:pt x="2916627" y="2494577"/>
+                  </a:lnTo>
+                  <a:lnTo>
+                    <a:pt x="2845005" y="2463520"/>
+                  </a:lnTo>
+                  <a:lnTo>
+                    <a:pt x="2773382" y="2431488"/>
+                  </a:lnTo>
+                  <a:lnTo>
+                    <a:pt x="2701760" y="2398450"/>
+                  </a:lnTo>
+                  <a:lnTo>
+                    <a:pt x="2630137" y="2364375"/>
+                  </a:lnTo>
+                  <a:lnTo>
+                    <a:pt x="2558515" y="2329230"/>
+                  </a:lnTo>
+                  <a:lnTo>
+                    <a:pt x="2486892" y="2292981"/>
+                  </a:lnTo>
+                  <a:lnTo>
+                    <a:pt x="2415270" y="2255594"/>
+                  </a:lnTo>
+                  <a:lnTo>
+                    <a:pt x="2343647" y="2217034"/>
+                  </a:lnTo>
+                  <a:lnTo>
+                    <a:pt x="2272025" y="2177262"/>
+                  </a:lnTo>
+                  <a:lnTo>
+                    <a:pt x="2200402" y="2136242"/>
+                  </a:lnTo>
+                  <a:lnTo>
+                    <a:pt x="2128780" y="2093935"/>
+                  </a:lnTo>
+                  <a:lnTo>
+                    <a:pt x="2057157" y="2050298"/>
+                  </a:lnTo>
+                  <a:lnTo>
+                    <a:pt x="1985534" y="2005292"/>
+                  </a:lnTo>
+                  <a:lnTo>
+                    <a:pt x="1913912" y="1958873"/>
+                  </a:lnTo>
+                  <a:lnTo>
+                    <a:pt x="1842289" y="1910996"/>
+                  </a:lnTo>
+                  <a:lnTo>
+                    <a:pt x="1770667" y="1861616"/>
+                  </a:lnTo>
+                  <a:lnTo>
+                    <a:pt x="1699044" y="1810686"/>
+                  </a:lnTo>
+                  <a:lnTo>
+                    <a:pt x="1627422" y="1758156"/>
+                  </a:lnTo>
+                  <a:lnTo>
+                    <a:pt x="1555799" y="1703977"/>
+                  </a:lnTo>
+                  <a:lnTo>
+                    <a:pt x="1484177" y="1648098"/>
+                  </a:lnTo>
+                  <a:lnTo>
+                    <a:pt x="1412554" y="1590463"/>
+                  </a:lnTo>
+                  <a:lnTo>
+                    <a:pt x="1340932" y="1531019"/>
+                  </a:lnTo>
+                  <a:lnTo>
+                    <a:pt x="1269309" y="1469709"/>
+                  </a:lnTo>
+                  <a:lnTo>
+                    <a:pt x="1197687" y="1406474"/>
+                  </a:lnTo>
+                  <a:lnTo>
+                    <a:pt x="1126064" y="1341253"/>
+                  </a:lnTo>
+                  <a:lnTo>
+                    <a:pt x="1054442" y="1273985"/>
+                  </a:lnTo>
+                  <a:lnTo>
+                    <a:pt x="982819" y="1204605"/>
+                  </a:lnTo>
+                  <a:lnTo>
+                    <a:pt x="911197" y="1133046"/>
+                  </a:lnTo>
+                  <a:lnTo>
+                    <a:pt x="839574" y="1059241"/>
+                  </a:lnTo>
+                  <a:lnTo>
+                    <a:pt x="767952" y="983118"/>
+                  </a:lnTo>
+                  <a:lnTo>
+                    <a:pt x="696329" y="904605"/>
+                  </a:lnTo>
+                  <a:lnTo>
+                    <a:pt x="624706" y="823627"/>
+                  </a:lnTo>
+                  <a:lnTo>
+                    <a:pt x="553084" y="740107"/>
+                  </a:lnTo>
+                  <a:lnTo>
+                    <a:pt x="481461" y="653964"/>
+                  </a:lnTo>
+                  <a:lnTo>
+                    <a:pt x="409839" y="565117"/>
+                  </a:lnTo>
+                  <a:lnTo>
+                    <a:pt x="338216" y="473480"/>
+                  </a:lnTo>
+                  <a:lnTo>
+                    <a:pt x="266594" y="378966"/>
+                  </a:lnTo>
+                  <a:lnTo>
+                    <a:pt x="194971" y="281485"/>
+                  </a:lnTo>
+                  <a:lnTo>
+                    <a:pt x="123349" y="180943"/>
+                  </a:lnTo>
+                  <a:lnTo>
+                    <a:pt x="51726" y="77244"/>
                   </a:lnTo>
                   <a:lnTo>
                     <a:pt x="0" y="0"/>
@@ -3528,222 +3485,544 @@
         </p:sp>
         <p:sp>
           <p:nvSpPr>
+            <p:cNvPr id="21" name="pl21"/>
+            <p:cNvSpPr/>
+            <p:nvPr/>
+          </p:nvSpPr>
+          <p:spPr>
+            <a:xfrm>
+              <a:off x="3525138" y="2073503"/>
+              <a:ext cx="4737540" cy="3313926"/>
+            </a:xfrm>
+            <a:custGeom>
+              <a:avLst/>
+              <a:pathLst>
+                <a:path w="4737540" h="3313926">
+                  <a:moveTo>
+                    <a:pt x="0" y="0"/>
+                  </a:moveTo>
+                  <a:lnTo>
+                    <a:pt x="10454" y="50846"/>
+                  </a:lnTo>
+                  <a:lnTo>
+                    <a:pt x="82076" y="367111"/>
+                  </a:lnTo>
+                  <a:lnTo>
+                    <a:pt x="153699" y="654239"/>
+                  </a:lnTo>
+                  <a:lnTo>
+                    <a:pt x="225321" y="914915"/>
+                  </a:lnTo>
+                  <a:lnTo>
+                    <a:pt x="296944" y="1151575"/>
+                  </a:lnTo>
+                  <a:lnTo>
+                    <a:pt x="368566" y="1366432"/>
+                  </a:lnTo>
+                  <a:lnTo>
+                    <a:pt x="440189" y="1561495"/>
+                  </a:lnTo>
+                  <a:lnTo>
+                    <a:pt x="511811" y="1738588"/>
+                  </a:lnTo>
+                  <a:lnTo>
+                    <a:pt x="583434" y="1899365"/>
+                  </a:lnTo>
+                  <a:lnTo>
+                    <a:pt x="655056" y="2045330"/>
+                  </a:lnTo>
+                  <a:lnTo>
+                    <a:pt x="726679" y="2177848"/>
+                  </a:lnTo>
+                  <a:lnTo>
+                    <a:pt x="798301" y="2298157"/>
+                  </a:lnTo>
+                  <a:lnTo>
+                    <a:pt x="869924" y="2407383"/>
+                  </a:lnTo>
+                  <a:lnTo>
+                    <a:pt x="941546" y="2506546"/>
+                  </a:lnTo>
+                  <a:lnTo>
+                    <a:pt x="1013169" y="2596573"/>
+                  </a:lnTo>
+                  <a:lnTo>
+                    <a:pt x="1084791" y="2662044"/>
+                  </a:lnTo>
+                  <a:lnTo>
+                    <a:pt x="1156414" y="2687057"/>
+                  </a:lnTo>
+                  <a:lnTo>
+                    <a:pt x="1228037" y="2711310"/>
+                  </a:lnTo>
+                  <a:lnTo>
+                    <a:pt x="1299659" y="2734824"/>
+                  </a:lnTo>
+                  <a:lnTo>
+                    <a:pt x="1371282" y="2757622"/>
+                  </a:lnTo>
+                  <a:lnTo>
+                    <a:pt x="1442904" y="2779726"/>
+                  </a:lnTo>
+                  <a:lnTo>
+                    <a:pt x="1514527" y="2801158"/>
+                  </a:lnTo>
+                  <a:lnTo>
+                    <a:pt x="1586149" y="2821937"/>
+                  </a:lnTo>
+                  <a:lnTo>
+                    <a:pt x="1657772" y="2842083"/>
+                  </a:lnTo>
+                  <a:lnTo>
+                    <a:pt x="1729394" y="2861616"/>
+                  </a:lnTo>
+                  <a:lnTo>
+                    <a:pt x="1801017" y="2880555"/>
+                  </a:lnTo>
+                  <a:lnTo>
+                    <a:pt x="1872639" y="2898917"/>
+                  </a:lnTo>
+                  <a:lnTo>
+                    <a:pt x="1944262" y="2916720"/>
+                  </a:lnTo>
+                  <a:lnTo>
+                    <a:pt x="2015884" y="2933981"/>
+                  </a:lnTo>
+                  <a:lnTo>
+                    <a:pt x="2087507" y="2950717"/>
+                  </a:lnTo>
+                  <a:lnTo>
+                    <a:pt x="2159129" y="2966943"/>
+                  </a:lnTo>
+                  <a:lnTo>
+                    <a:pt x="2230752" y="2982675"/>
+                  </a:lnTo>
+                  <a:lnTo>
+                    <a:pt x="2302374" y="2997929"/>
+                  </a:lnTo>
+                  <a:lnTo>
+                    <a:pt x="2373997" y="3012718"/>
+                  </a:lnTo>
+                  <a:lnTo>
+                    <a:pt x="2445619" y="3027056"/>
+                  </a:lnTo>
+                  <a:lnTo>
+                    <a:pt x="2517242" y="3040959"/>
+                  </a:lnTo>
+                  <a:lnTo>
+                    <a:pt x="2588865" y="3054438"/>
+                  </a:lnTo>
+                  <a:lnTo>
+                    <a:pt x="2660487" y="3067507"/>
+                  </a:lnTo>
+                  <a:lnTo>
+                    <a:pt x="2732110" y="3080177"/>
+                  </a:lnTo>
+                  <a:lnTo>
+                    <a:pt x="2803732" y="3092463"/>
+                  </a:lnTo>
+                  <a:lnTo>
+                    <a:pt x="2875355" y="3104374"/>
+                  </a:lnTo>
+                  <a:lnTo>
+                    <a:pt x="2946977" y="3115923"/>
+                  </a:lnTo>
+                  <a:lnTo>
+                    <a:pt x="3018600" y="3127120"/>
+                  </a:lnTo>
+                  <a:lnTo>
+                    <a:pt x="3090222" y="3137976"/>
+                  </a:lnTo>
+                  <a:lnTo>
+                    <a:pt x="3161845" y="3148502"/>
+                  </a:lnTo>
+                  <a:lnTo>
+                    <a:pt x="3233467" y="3158707"/>
+                  </a:lnTo>
+                  <a:lnTo>
+                    <a:pt x="3305090" y="3168602"/>
+                  </a:lnTo>
+                  <a:lnTo>
+                    <a:pt x="3376712" y="3178195"/>
+                  </a:lnTo>
+                  <a:lnTo>
+                    <a:pt x="3448335" y="3187497"/>
+                  </a:lnTo>
+                  <a:lnTo>
+                    <a:pt x="3519957" y="3196515"/>
+                  </a:lnTo>
+                  <a:lnTo>
+                    <a:pt x="3591580" y="3205259"/>
+                  </a:lnTo>
+                  <a:lnTo>
+                    <a:pt x="3663202" y="3213736"/>
+                  </a:lnTo>
+                  <a:lnTo>
+                    <a:pt x="3734825" y="3221956"/>
+                  </a:lnTo>
+                  <a:lnTo>
+                    <a:pt x="3806447" y="3229925"/>
+                  </a:lnTo>
+                  <a:lnTo>
+                    <a:pt x="3878070" y="3237652"/>
+                  </a:lnTo>
+                  <a:lnTo>
+                    <a:pt x="3949693" y="3245143"/>
+                  </a:lnTo>
+                  <a:lnTo>
+                    <a:pt x="4021315" y="3252407"/>
+                  </a:lnTo>
+                  <a:lnTo>
+                    <a:pt x="4092938" y="3259449"/>
+                  </a:lnTo>
+                  <a:lnTo>
+                    <a:pt x="4164560" y="3266277"/>
+                  </a:lnTo>
+                  <a:lnTo>
+                    <a:pt x="4236183" y="3272897"/>
+                  </a:lnTo>
+                  <a:lnTo>
+                    <a:pt x="4307805" y="3279315"/>
+                  </a:lnTo>
+                  <a:lnTo>
+                    <a:pt x="4379428" y="3285539"/>
+                  </a:lnTo>
+                  <a:lnTo>
+                    <a:pt x="4451050" y="3291572"/>
+                  </a:lnTo>
+                  <a:lnTo>
+                    <a:pt x="4522673" y="3297422"/>
+                  </a:lnTo>
+                  <a:lnTo>
+                    <a:pt x="4594295" y="3303094"/>
+                  </a:lnTo>
+                  <a:lnTo>
+                    <a:pt x="4665918" y="3308594"/>
+                  </a:lnTo>
+                  <a:lnTo>
+                    <a:pt x="4737540" y="3313926"/>
+                  </a:lnTo>
+                </a:path>
+              </a:pathLst>
+            </a:custGeom>
+          </p:spPr>
+          <p:txBody>
+            <a:bodyPr/>
+            <a:lstStyle/>
+            <a:p/>
+          </p:txBody>
+        </p:sp>
+        <p:sp>
+          <p:nvSpPr>
             <p:cNvPr id="22" name="pl22"/>
             <p:cNvSpPr/>
             <p:nvPr/>
           </p:nvSpPr>
           <p:spPr>
             <a:xfrm>
-              <a:off x="3174420" y="2073503"/>
-              <a:ext cx="4878927" cy="3313926"/>
+              <a:off x="1263567" y="2073503"/>
+              <a:ext cx="6999111" cy="3477921"/>
             </a:xfrm>
             <a:custGeom>
               <a:avLst/>
               <a:pathLst>
-                <a:path w="4878927" h="3313926">
+                <a:path w="6999111" h="3477921">
                   <a:moveTo>
+                    <a:pt x="6999111" y="3477921"/>
+                  </a:moveTo>
+                  <a:lnTo>
+                    <a:pt x="6927489" y="3477330"/>
+                  </a:lnTo>
+                  <a:lnTo>
+                    <a:pt x="6855866" y="3476679"/>
+                  </a:lnTo>
+                  <a:lnTo>
+                    <a:pt x="6784244" y="3475962"/>
+                  </a:lnTo>
+                  <a:lnTo>
+                    <a:pt x="6712621" y="3475172"/>
+                  </a:lnTo>
+                  <a:lnTo>
+                    <a:pt x="6640999" y="3474302"/>
+                  </a:lnTo>
+                  <a:lnTo>
+                    <a:pt x="6569376" y="3473344"/>
+                  </a:lnTo>
+                  <a:lnTo>
+                    <a:pt x="6497754" y="3472288"/>
+                  </a:lnTo>
+                  <a:lnTo>
+                    <a:pt x="6426131" y="3471125"/>
+                  </a:lnTo>
+                  <a:lnTo>
+                    <a:pt x="6354509" y="3469844"/>
+                  </a:lnTo>
+                  <a:lnTo>
+                    <a:pt x="6282886" y="3468434"/>
+                  </a:lnTo>
+                  <a:lnTo>
+                    <a:pt x="6211264" y="3466880"/>
+                  </a:lnTo>
+                  <a:lnTo>
+                    <a:pt x="6139641" y="3465168"/>
+                  </a:lnTo>
+                  <a:lnTo>
+                    <a:pt x="6068018" y="3463283"/>
+                  </a:lnTo>
+                  <a:lnTo>
+                    <a:pt x="5996396" y="3461207"/>
+                  </a:lnTo>
+                  <a:lnTo>
+                    <a:pt x="5924773" y="3458919"/>
+                  </a:lnTo>
+                  <a:lnTo>
+                    <a:pt x="5853151" y="3456400"/>
+                  </a:lnTo>
+                  <a:lnTo>
+                    <a:pt x="5781528" y="3453625"/>
+                  </a:lnTo>
+                  <a:lnTo>
+                    <a:pt x="5709906" y="3450568"/>
+                  </a:lnTo>
+                  <a:lnTo>
+                    <a:pt x="5638283" y="3447201"/>
+                  </a:lnTo>
+                  <a:lnTo>
+                    <a:pt x="5566661" y="3443493"/>
+                  </a:lnTo>
+                  <a:lnTo>
+                    <a:pt x="5495038" y="3439408"/>
+                  </a:lnTo>
+                  <a:lnTo>
+                    <a:pt x="5423416" y="3434909"/>
+                  </a:lnTo>
+                  <a:lnTo>
+                    <a:pt x="5351793" y="3429953"/>
+                  </a:lnTo>
+                  <a:lnTo>
+                    <a:pt x="5280171" y="3424494"/>
+                  </a:lnTo>
+                  <a:lnTo>
+                    <a:pt x="5208548" y="3418482"/>
+                  </a:lnTo>
+                  <a:lnTo>
+                    <a:pt x="5136926" y="3411859"/>
+                  </a:lnTo>
+                  <a:lnTo>
+                    <a:pt x="5065303" y="3404564"/>
+                  </a:lnTo>
+                  <a:lnTo>
+                    <a:pt x="4993681" y="3396529"/>
+                  </a:lnTo>
+                  <a:lnTo>
+                    <a:pt x="4922058" y="3387678"/>
+                  </a:lnTo>
+                  <a:lnTo>
+                    <a:pt x="4850436" y="3377930"/>
+                  </a:lnTo>
+                  <a:lnTo>
+                    <a:pt x="4778813" y="3367192"/>
+                  </a:lnTo>
+                  <a:lnTo>
+                    <a:pt x="4707190" y="3355364"/>
+                  </a:lnTo>
+                  <a:lnTo>
+                    <a:pt x="4635568" y="3342336"/>
+                  </a:lnTo>
+                  <a:lnTo>
+                    <a:pt x="4563945" y="3327987"/>
+                  </a:lnTo>
+                  <a:lnTo>
+                    <a:pt x="4492323" y="3312181"/>
+                  </a:lnTo>
+                  <a:lnTo>
+                    <a:pt x="4420700" y="3294771"/>
+                  </a:lnTo>
+                  <a:lnTo>
+                    <a:pt x="4349078" y="3275594"/>
+                  </a:lnTo>
+                  <a:lnTo>
+                    <a:pt x="4277455" y="3254472"/>
+                  </a:lnTo>
+                  <a:lnTo>
+                    <a:pt x="4205833" y="3231206"/>
+                  </a:lnTo>
+                  <a:lnTo>
+                    <a:pt x="4134210" y="3205579"/>
+                  </a:lnTo>
+                  <a:lnTo>
+                    <a:pt x="4062588" y="3177351"/>
+                  </a:lnTo>
+                  <a:lnTo>
+                    <a:pt x="3990965" y="3146260"/>
+                  </a:lnTo>
+                  <a:lnTo>
+                    <a:pt x="3919343" y="3112013"/>
+                  </a:lnTo>
+                  <a:lnTo>
+                    <a:pt x="3847720" y="3074290"/>
+                  </a:lnTo>
+                  <a:lnTo>
+                    <a:pt x="3776098" y="3032740"/>
+                  </a:lnTo>
+                  <a:lnTo>
+                    <a:pt x="3704475" y="2986974"/>
+                  </a:lnTo>
+                  <a:lnTo>
+                    <a:pt x="3632853" y="2936563"/>
+                  </a:lnTo>
+                  <a:lnTo>
+                    <a:pt x="3561230" y="2881037"/>
+                  </a:lnTo>
+                  <a:lnTo>
+                    <a:pt x="3489608" y="2819876"/>
+                  </a:lnTo>
+                  <a:lnTo>
+                    <a:pt x="3417985" y="2752509"/>
+                  </a:lnTo>
+                  <a:lnTo>
+                    <a:pt x="3346362" y="2678306"/>
+                  </a:lnTo>
+                  <a:lnTo>
+                    <a:pt x="3274740" y="2636244"/>
+                  </a:lnTo>
+                  <a:lnTo>
+                    <a:pt x="3203117" y="2609635"/>
+                  </a:lnTo>
+                  <a:lnTo>
+                    <a:pt x="3131495" y="2582191"/>
+                  </a:lnTo>
+                  <a:lnTo>
+                    <a:pt x="3059872" y="2553884"/>
+                  </a:lnTo>
+                  <a:lnTo>
+                    <a:pt x="2988250" y="2524689"/>
+                  </a:lnTo>
+                  <a:lnTo>
+                    <a:pt x="2916627" y="2494577"/>
+                  </a:lnTo>
+                  <a:lnTo>
+                    <a:pt x="2845005" y="2463520"/>
+                  </a:lnTo>
+                  <a:lnTo>
+                    <a:pt x="2773382" y="2431488"/>
+                  </a:lnTo>
+                  <a:lnTo>
+                    <a:pt x="2701760" y="2398450"/>
+                  </a:lnTo>
+                  <a:lnTo>
+                    <a:pt x="2630137" y="2364375"/>
+                  </a:lnTo>
+                  <a:lnTo>
+                    <a:pt x="2558515" y="2329230"/>
+                  </a:lnTo>
+                  <a:lnTo>
+                    <a:pt x="2486892" y="2292981"/>
+                  </a:lnTo>
+                  <a:lnTo>
+                    <a:pt x="2415270" y="2255594"/>
+                  </a:lnTo>
+                  <a:lnTo>
+                    <a:pt x="2343647" y="2217034"/>
+                  </a:lnTo>
+                  <a:lnTo>
+                    <a:pt x="2272025" y="2177262"/>
+                  </a:lnTo>
+                  <a:lnTo>
+                    <a:pt x="2200402" y="2136242"/>
+                  </a:lnTo>
+                  <a:lnTo>
+                    <a:pt x="2128780" y="2093935"/>
+                  </a:lnTo>
+                  <a:lnTo>
+                    <a:pt x="2057157" y="2050298"/>
+                  </a:lnTo>
+                  <a:lnTo>
+                    <a:pt x="1985534" y="2005292"/>
+                  </a:lnTo>
+                  <a:lnTo>
+                    <a:pt x="1913912" y="1958873"/>
+                  </a:lnTo>
+                  <a:lnTo>
+                    <a:pt x="1842289" y="1910996"/>
+                  </a:lnTo>
+                  <a:lnTo>
+                    <a:pt x="1770667" y="1861616"/>
+                  </a:lnTo>
+                  <a:lnTo>
+                    <a:pt x="1699044" y="1810686"/>
+                  </a:lnTo>
+                  <a:lnTo>
+                    <a:pt x="1627422" y="1758156"/>
+                  </a:lnTo>
+                  <a:lnTo>
+                    <a:pt x="1555799" y="1703977"/>
+                  </a:lnTo>
+                  <a:lnTo>
+                    <a:pt x="1484177" y="1648098"/>
+                  </a:lnTo>
+                  <a:lnTo>
+                    <a:pt x="1412554" y="1590463"/>
+                  </a:lnTo>
+                  <a:lnTo>
+                    <a:pt x="1340932" y="1531019"/>
+                  </a:lnTo>
+                  <a:lnTo>
+                    <a:pt x="1269309" y="1469709"/>
+                  </a:lnTo>
+                  <a:lnTo>
+                    <a:pt x="1197687" y="1406474"/>
+                  </a:lnTo>
+                  <a:lnTo>
+                    <a:pt x="1126064" y="1341253"/>
+                  </a:lnTo>
+                  <a:lnTo>
+                    <a:pt x="1054442" y="1273985"/>
+                  </a:lnTo>
+                  <a:lnTo>
+                    <a:pt x="982819" y="1204605"/>
+                  </a:lnTo>
+                  <a:lnTo>
+                    <a:pt x="911197" y="1133046"/>
+                  </a:lnTo>
+                  <a:lnTo>
+                    <a:pt x="839574" y="1059241"/>
+                  </a:lnTo>
+                  <a:lnTo>
+                    <a:pt x="767952" y="983118"/>
+                  </a:lnTo>
+                  <a:lnTo>
+                    <a:pt x="696329" y="904605"/>
+                  </a:lnTo>
+                  <a:lnTo>
+                    <a:pt x="624706" y="823627"/>
+                  </a:lnTo>
+                  <a:lnTo>
+                    <a:pt x="553084" y="740107"/>
+                  </a:lnTo>
+                  <a:lnTo>
+                    <a:pt x="481461" y="653964"/>
+                  </a:lnTo>
+                  <a:lnTo>
+                    <a:pt x="409839" y="565117"/>
+                  </a:lnTo>
+                  <a:lnTo>
+                    <a:pt x="338216" y="473480"/>
+                  </a:lnTo>
+                  <a:lnTo>
+                    <a:pt x="266594" y="378966"/>
+                  </a:lnTo>
+                  <a:lnTo>
+                    <a:pt x="194971" y="281485"/>
+                  </a:lnTo>
+                  <a:lnTo>
+                    <a:pt x="123349" y="180943"/>
+                  </a:lnTo>
+                  <a:lnTo>
+                    <a:pt x="51726" y="77244"/>
+                  </a:lnTo>
+                  <a:lnTo>
                     <a:pt x="0" y="0"/>
-                  </a:moveTo>
-                  <a:lnTo>
-                    <a:pt x="10766" y="50846"/>
-                  </a:lnTo>
-                  <a:lnTo>
-                    <a:pt x="84526" y="367111"/>
-                  </a:lnTo>
-                  <a:lnTo>
-                    <a:pt x="158286" y="654239"/>
-                  </a:lnTo>
-                  <a:lnTo>
-                    <a:pt x="232046" y="914915"/>
-                  </a:lnTo>
-                  <a:lnTo>
-                    <a:pt x="305806" y="1151575"/>
-                  </a:lnTo>
-                  <a:lnTo>
-                    <a:pt x="379566" y="1366432"/>
-                  </a:lnTo>
-                  <a:lnTo>
-                    <a:pt x="453326" y="1561495"/>
-                  </a:lnTo>
-                  <a:lnTo>
-                    <a:pt x="527086" y="1738588"/>
-                  </a:lnTo>
-                  <a:lnTo>
-                    <a:pt x="600846" y="1899365"/>
-                  </a:lnTo>
-                  <a:lnTo>
-                    <a:pt x="674606" y="2045330"/>
-                  </a:lnTo>
-                  <a:lnTo>
-                    <a:pt x="748366" y="2177848"/>
-                  </a:lnTo>
-                  <a:lnTo>
-                    <a:pt x="822126" y="2298157"/>
-                  </a:lnTo>
-                  <a:lnTo>
-                    <a:pt x="895886" y="2407383"/>
-                  </a:lnTo>
-                  <a:lnTo>
-                    <a:pt x="969646" y="2506546"/>
-                  </a:lnTo>
-                  <a:lnTo>
-                    <a:pt x="1043406" y="2596573"/>
-                  </a:lnTo>
-                  <a:lnTo>
-                    <a:pt x="1117166" y="2662044"/>
-                  </a:lnTo>
-                  <a:lnTo>
-                    <a:pt x="1190926" y="2687057"/>
-                  </a:lnTo>
-                  <a:lnTo>
-                    <a:pt x="1264686" y="2711310"/>
-                  </a:lnTo>
-                  <a:lnTo>
-                    <a:pt x="1338446" y="2734824"/>
-                  </a:lnTo>
-                  <a:lnTo>
-                    <a:pt x="1412206" y="2757622"/>
-                  </a:lnTo>
-                  <a:lnTo>
-                    <a:pt x="1485966" y="2779726"/>
-                  </a:lnTo>
-                  <a:lnTo>
-                    <a:pt x="1559726" y="2801158"/>
-                  </a:lnTo>
-                  <a:lnTo>
-                    <a:pt x="1633486" y="2821937"/>
-                  </a:lnTo>
-                  <a:lnTo>
-                    <a:pt x="1707246" y="2842083"/>
-                  </a:lnTo>
-                  <a:lnTo>
-                    <a:pt x="1781006" y="2861616"/>
-                  </a:lnTo>
-                  <a:lnTo>
-                    <a:pt x="1854766" y="2880555"/>
-                  </a:lnTo>
-                  <a:lnTo>
-                    <a:pt x="1928526" y="2898917"/>
-                  </a:lnTo>
-                  <a:lnTo>
-                    <a:pt x="2002286" y="2916720"/>
-                  </a:lnTo>
-                  <a:lnTo>
-                    <a:pt x="2076046" y="2933981"/>
-                  </a:lnTo>
-                  <a:lnTo>
-                    <a:pt x="2149806" y="2950717"/>
-                  </a:lnTo>
-                  <a:lnTo>
-                    <a:pt x="2223566" y="2966943"/>
-                  </a:lnTo>
-                  <a:lnTo>
-                    <a:pt x="2297326" y="2982675"/>
-                  </a:lnTo>
-                  <a:lnTo>
-                    <a:pt x="2371086" y="2997929"/>
-                  </a:lnTo>
-                  <a:lnTo>
-                    <a:pt x="2444846" y="3012718"/>
-                  </a:lnTo>
-                  <a:lnTo>
-                    <a:pt x="2518606" y="3027056"/>
-                  </a:lnTo>
-                  <a:lnTo>
-                    <a:pt x="2592366" y="3040959"/>
-                  </a:lnTo>
-                  <a:lnTo>
-                    <a:pt x="2666126" y="3054438"/>
-                  </a:lnTo>
-                  <a:lnTo>
-                    <a:pt x="2739887" y="3067507"/>
-                  </a:lnTo>
-                  <a:lnTo>
-                    <a:pt x="2813647" y="3080177"/>
-                  </a:lnTo>
-                  <a:lnTo>
-                    <a:pt x="2887407" y="3092463"/>
-                  </a:lnTo>
-                  <a:lnTo>
-                    <a:pt x="2961167" y="3104374"/>
-                  </a:lnTo>
-                  <a:lnTo>
-                    <a:pt x="3034927" y="3115923"/>
-                  </a:lnTo>
-                  <a:lnTo>
-                    <a:pt x="3108687" y="3127120"/>
-                  </a:lnTo>
-                  <a:lnTo>
-                    <a:pt x="3182447" y="3137976"/>
-                  </a:lnTo>
-                  <a:lnTo>
-                    <a:pt x="3256207" y="3148502"/>
-                  </a:lnTo>
-                  <a:lnTo>
-                    <a:pt x="3329967" y="3158707"/>
-                  </a:lnTo>
-                  <a:lnTo>
-                    <a:pt x="3403727" y="3168602"/>
-                  </a:lnTo>
-                  <a:lnTo>
-                    <a:pt x="3477487" y="3178195"/>
-                  </a:lnTo>
-                  <a:lnTo>
-                    <a:pt x="3551247" y="3187497"/>
-                  </a:lnTo>
-                  <a:lnTo>
-                    <a:pt x="3625007" y="3196515"/>
-                  </a:lnTo>
-                  <a:lnTo>
-                    <a:pt x="3698767" y="3205259"/>
-                  </a:lnTo>
-                  <a:lnTo>
-                    <a:pt x="3772527" y="3213736"/>
-                  </a:lnTo>
-                  <a:lnTo>
-                    <a:pt x="3846287" y="3221956"/>
-                  </a:lnTo>
-                  <a:lnTo>
-                    <a:pt x="3920047" y="3229925"/>
-                  </a:lnTo>
-                  <a:lnTo>
-                    <a:pt x="3993807" y="3237652"/>
-                  </a:lnTo>
-                  <a:lnTo>
-                    <a:pt x="4067567" y="3245143"/>
-                  </a:lnTo>
-                  <a:lnTo>
-                    <a:pt x="4141327" y="3252407"/>
-                  </a:lnTo>
-                  <a:lnTo>
-                    <a:pt x="4215087" y="3259449"/>
-                  </a:lnTo>
-                  <a:lnTo>
-                    <a:pt x="4288847" y="3266277"/>
-                  </a:lnTo>
-                  <a:lnTo>
-                    <a:pt x="4362607" y="3272897"/>
-                  </a:lnTo>
-                  <a:lnTo>
-                    <a:pt x="4436367" y="3279315"/>
-                  </a:lnTo>
-                  <a:lnTo>
-                    <a:pt x="4510127" y="3285539"/>
-                  </a:lnTo>
-                  <a:lnTo>
-                    <a:pt x="4583887" y="3291572"/>
-                  </a:lnTo>
-                  <a:lnTo>
-                    <a:pt x="4657647" y="3297422"/>
-                  </a:lnTo>
-                  <a:lnTo>
-                    <a:pt x="4731407" y="3303094"/>
-                  </a:lnTo>
-                  <a:lnTo>
-                    <a:pt x="4805167" y="3308594"/>
-                  </a:lnTo>
-                  <a:lnTo>
-                    <a:pt x="4878927" y="3313926"/>
                   </a:lnTo>
                 </a:path>
               </a:pathLst>
@@ -3763,559 +4042,237 @@
           </p:nvSpPr>
           <p:spPr>
             <a:xfrm>
-              <a:off x="845354" y="2073503"/>
-              <a:ext cx="7207992" cy="3477921"/>
+              <a:off x="2977042" y="2073503"/>
+              <a:ext cx="5285636" cy="3452295"/>
             </a:xfrm>
             <a:custGeom>
               <a:avLst/>
               <a:pathLst>
-                <a:path w="7207992" h="3477921">
-                  <a:moveTo>
-                    <a:pt x="7207992" y="3477921"/>
-                  </a:moveTo>
-                  <a:lnTo>
-                    <a:pt x="7134232" y="3477330"/>
-                  </a:lnTo>
-                  <a:lnTo>
-                    <a:pt x="7060472" y="3476679"/>
-                  </a:lnTo>
-                  <a:lnTo>
-                    <a:pt x="6986712" y="3475962"/>
-                  </a:lnTo>
-                  <a:lnTo>
-                    <a:pt x="6912952" y="3475172"/>
-                  </a:lnTo>
-                  <a:lnTo>
-                    <a:pt x="6839192" y="3474302"/>
-                  </a:lnTo>
-                  <a:lnTo>
-                    <a:pt x="6765432" y="3473344"/>
-                  </a:lnTo>
-                  <a:lnTo>
-                    <a:pt x="6691672" y="3472288"/>
-                  </a:lnTo>
-                  <a:lnTo>
-                    <a:pt x="6617912" y="3471125"/>
-                  </a:lnTo>
-                  <a:lnTo>
-                    <a:pt x="6544152" y="3469844"/>
-                  </a:lnTo>
-                  <a:lnTo>
-                    <a:pt x="6470392" y="3468434"/>
-                  </a:lnTo>
-                  <a:lnTo>
-                    <a:pt x="6396632" y="3466880"/>
-                  </a:lnTo>
-                  <a:lnTo>
-                    <a:pt x="6322872" y="3465168"/>
-                  </a:lnTo>
-                  <a:lnTo>
-                    <a:pt x="6249112" y="3463283"/>
-                  </a:lnTo>
-                  <a:lnTo>
-                    <a:pt x="6175352" y="3461207"/>
-                  </a:lnTo>
-                  <a:lnTo>
-                    <a:pt x="6101592" y="3458919"/>
-                  </a:lnTo>
-                  <a:lnTo>
-                    <a:pt x="6027832" y="3456400"/>
-                  </a:lnTo>
-                  <a:lnTo>
-                    <a:pt x="5954072" y="3453625"/>
-                  </a:lnTo>
-                  <a:lnTo>
-                    <a:pt x="5880312" y="3450568"/>
-                  </a:lnTo>
-                  <a:lnTo>
-                    <a:pt x="5806552" y="3447201"/>
-                  </a:lnTo>
-                  <a:lnTo>
-                    <a:pt x="5732792" y="3443493"/>
-                  </a:lnTo>
-                  <a:lnTo>
-                    <a:pt x="5659032" y="3439408"/>
-                  </a:lnTo>
-                  <a:lnTo>
-                    <a:pt x="5585272" y="3434909"/>
-                  </a:lnTo>
-                  <a:lnTo>
-                    <a:pt x="5511512" y="3429953"/>
-                  </a:lnTo>
-                  <a:lnTo>
-                    <a:pt x="5437752" y="3424494"/>
-                  </a:lnTo>
-                  <a:lnTo>
-                    <a:pt x="5363992" y="3418482"/>
-                  </a:lnTo>
-                  <a:lnTo>
-                    <a:pt x="5290232" y="3411859"/>
-                  </a:lnTo>
-                  <a:lnTo>
-                    <a:pt x="5216472" y="3404564"/>
-                  </a:lnTo>
-                  <a:lnTo>
-                    <a:pt x="5142712" y="3396529"/>
-                  </a:lnTo>
-                  <a:lnTo>
-                    <a:pt x="5068952" y="3387678"/>
-                  </a:lnTo>
-                  <a:lnTo>
-                    <a:pt x="4995192" y="3377930"/>
-                  </a:lnTo>
-                  <a:lnTo>
-                    <a:pt x="4921432" y="3367192"/>
-                  </a:lnTo>
-                  <a:lnTo>
-                    <a:pt x="4847672" y="3355364"/>
-                  </a:lnTo>
-                  <a:lnTo>
-                    <a:pt x="4773912" y="3342336"/>
-                  </a:lnTo>
-                  <a:lnTo>
-                    <a:pt x="4700152" y="3327987"/>
-                  </a:lnTo>
-                  <a:lnTo>
-                    <a:pt x="4626392" y="3312181"/>
-                  </a:lnTo>
-                  <a:lnTo>
-                    <a:pt x="4552632" y="3294771"/>
-                  </a:lnTo>
-                  <a:lnTo>
-                    <a:pt x="4478872" y="3275594"/>
-                  </a:lnTo>
-                  <a:lnTo>
-                    <a:pt x="4405111" y="3254472"/>
-                  </a:lnTo>
-                  <a:lnTo>
-                    <a:pt x="4331351" y="3231206"/>
-                  </a:lnTo>
-                  <a:lnTo>
-                    <a:pt x="4257591" y="3205579"/>
-                  </a:lnTo>
-                  <a:lnTo>
-                    <a:pt x="4183831" y="3177351"/>
-                  </a:lnTo>
-                  <a:lnTo>
-                    <a:pt x="4110071" y="3146260"/>
-                  </a:lnTo>
-                  <a:lnTo>
-                    <a:pt x="4036311" y="3112013"/>
-                  </a:lnTo>
-                  <a:lnTo>
-                    <a:pt x="3962551" y="3074290"/>
-                  </a:lnTo>
-                  <a:lnTo>
-                    <a:pt x="3888791" y="3032740"/>
-                  </a:lnTo>
-                  <a:lnTo>
-                    <a:pt x="3815031" y="2986974"/>
-                  </a:lnTo>
-                  <a:lnTo>
-                    <a:pt x="3741271" y="2936563"/>
-                  </a:lnTo>
-                  <a:lnTo>
-                    <a:pt x="3667511" y="2881037"/>
-                  </a:lnTo>
-                  <a:lnTo>
-                    <a:pt x="3593751" y="2819876"/>
-                  </a:lnTo>
-                  <a:lnTo>
-                    <a:pt x="3519991" y="2752509"/>
-                  </a:lnTo>
-                  <a:lnTo>
-                    <a:pt x="3446231" y="2678306"/>
-                  </a:lnTo>
-                  <a:lnTo>
-                    <a:pt x="3372471" y="2636244"/>
-                  </a:lnTo>
-                  <a:lnTo>
-                    <a:pt x="3298711" y="2609635"/>
-                  </a:lnTo>
-                  <a:lnTo>
-                    <a:pt x="3224951" y="2582191"/>
-                  </a:lnTo>
-                  <a:lnTo>
-                    <a:pt x="3151191" y="2553884"/>
-                  </a:lnTo>
-                  <a:lnTo>
-                    <a:pt x="3077431" y="2524689"/>
-                  </a:lnTo>
-                  <a:lnTo>
-                    <a:pt x="3003671" y="2494577"/>
-                  </a:lnTo>
-                  <a:lnTo>
-                    <a:pt x="2929911" y="2463520"/>
-                  </a:lnTo>
-                  <a:lnTo>
-                    <a:pt x="2856151" y="2431488"/>
-                  </a:lnTo>
-                  <a:lnTo>
-                    <a:pt x="2782391" y="2398450"/>
-                  </a:lnTo>
-                  <a:lnTo>
-                    <a:pt x="2708631" y="2364375"/>
-                  </a:lnTo>
-                  <a:lnTo>
-                    <a:pt x="2634871" y="2329230"/>
-                  </a:lnTo>
-                  <a:lnTo>
-                    <a:pt x="2561111" y="2292981"/>
-                  </a:lnTo>
-                  <a:lnTo>
-                    <a:pt x="2487351" y="2255594"/>
-                  </a:lnTo>
-                  <a:lnTo>
-                    <a:pt x="2413591" y="2217034"/>
-                  </a:lnTo>
-                  <a:lnTo>
-                    <a:pt x="2339831" y="2177262"/>
-                  </a:lnTo>
-                  <a:lnTo>
-                    <a:pt x="2266071" y="2136242"/>
-                  </a:lnTo>
-                  <a:lnTo>
-                    <a:pt x="2192311" y="2093935"/>
-                  </a:lnTo>
-                  <a:lnTo>
-                    <a:pt x="2118551" y="2050298"/>
-                  </a:lnTo>
-                  <a:lnTo>
-                    <a:pt x="2044791" y="2005292"/>
-                  </a:lnTo>
-                  <a:lnTo>
-                    <a:pt x="1971031" y="1958873"/>
-                  </a:lnTo>
-                  <a:lnTo>
-                    <a:pt x="1897271" y="1910996"/>
-                  </a:lnTo>
-                  <a:lnTo>
-                    <a:pt x="1823511" y="1861616"/>
-                  </a:lnTo>
-                  <a:lnTo>
-                    <a:pt x="1749751" y="1810686"/>
-                  </a:lnTo>
-                  <a:lnTo>
-                    <a:pt x="1675991" y="1758156"/>
-                  </a:lnTo>
-                  <a:lnTo>
-                    <a:pt x="1602231" y="1703977"/>
-                  </a:lnTo>
-                  <a:lnTo>
-                    <a:pt x="1528471" y="1648098"/>
-                  </a:lnTo>
-                  <a:lnTo>
-                    <a:pt x="1454710" y="1590463"/>
-                  </a:lnTo>
-                  <a:lnTo>
-                    <a:pt x="1380950" y="1531019"/>
-                  </a:lnTo>
-                  <a:lnTo>
-                    <a:pt x="1307190" y="1469709"/>
-                  </a:lnTo>
-                  <a:lnTo>
-                    <a:pt x="1233430" y="1406474"/>
-                  </a:lnTo>
-                  <a:lnTo>
-                    <a:pt x="1159670" y="1341253"/>
-                  </a:lnTo>
-                  <a:lnTo>
-                    <a:pt x="1085910" y="1273985"/>
-                  </a:lnTo>
-                  <a:lnTo>
-                    <a:pt x="1012150" y="1204605"/>
-                  </a:lnTo>
-                  <a:lnTo>
-                    <a:pt x="938390" y="1133046"/>
-                  </a:lnTo>
-                  <a:lnTo>
-                    <a:pt x="864630" y="1059241"/>
-                  </a:lnTo>
-                  <a:lnTo>
-                    <a:pt x="790870" y="983118"/>
-                  </a:lnTo>
-                  <a:lnTo>
-                    <a:pt x="717110" y="904605"/>
-                  </a:lnTo>
-                  <a:lnTo>
-                    <a:pt x="643350" y="823627"/>
-                  </a:lnTo>
-                  <a:lnTo>
-                    <a:pt x="569590" y="740107"/>
-                  </a:lnTo>
-                  <a:lnTo>
-                    <a:pt x="495830" y="653964"/>
-                  </a:lnTo>
-                  <a:lnTo>
-                    <a:pt x="422070" y="565117"/>
-                  </a:lnTo>
-                  <a:lnTo>
-                    <a:pt x="348310" y="473480"/>
-                  </a:lnTo>
-                  <a:lnTo>
-                    <a:pt x="274550" y="378966"/>
-                  </a:lnTo>
-                  <a:lnTo>
-                    <a:pt x="200790" y="281485"/>
-                  </a:lnTo>
-                  <a:lnTo>
-                    <a:pt x="127030" y="180943"/>
-                  </a:lnTo>
-                  <a:lnTo>
-                    <a:pt x="53270" y="77244"/>
-                  </a:lnTo>
-                  <a:lnTo>
-                    <a:pt x="0" y="0"/>
-                  </a:lnTo>
-                </a:path>
-              </a:pathLst>
-            </a:custGeom>
-          </p:spPr>
-          <p:txBody>
-            <a:bodyPr/>
-            <a:lstStyle/>
-            <a:p/>
-          </p:txBody>
-        </p:sp>
-        <p:sp>
-          <p:nvSpPr>
-            <p:cNvPr id="24" name="pl24"/>
-            <p:cNvSpPr/>
-            <p:nvPr/>
-          </p:nvSpPr>
-          <p:spPr>
-            <a:xfrm>
-              <a:off x="2609966" y="2073503"/>
-              <a:ext cx="5443381" cy="3452295"/>
-            </a:xfrm>
-            <a:custGeom>
-              <a:avLst/>
-              <a:pathLst>
-                <a:path w="5443381" h="3452295">
+                <a:path w="5285636" h="3452295">
                   <a:moveTo>
                     <a:pt x="0" y="0"/>
                   </a:moveTo>
                   <a:lnTo>
-                    <a:pt x="58899" y="174062"/>
-                  </a:lnTo>
-                  <a:lnTo>
-                    <a:pt x="132659" y="378572"/>
-                  </a:lnTo>
-                  <a:lnTo>
-                    <a:pt x="206419" y="570445"/>
-                  </a:lnTo>
-                  <a:lnTo>
-                    <a:pt x="280179" y="750461"/>
-                  </a:lnTo>
-                  <a:lnTo>
-                    <a:pt x="353939" y="919355"/>
-                  </a:lnTo>
-                  <a:lnTo>
-                    <a:pt x="427699" y="1077812"/>
-                  </a:lnTo>
-                  <a:lnTo>
-                    <a:pt x="501459" y="1226478"/>
-                  </a:lnTo>
-                  <a:lnTo>
-                    <a:pt x="575219" y="1365958"/>
-                  </a:lnTo>
-                  <a:lnTo>
-                    <a:pt x="648979" y="1496819"/>
-                  </a:lnTo>
-                  <a:lnTo>
-                    <a:pt x="722739" y="1619594"/>
-                  </a:lnTo>
-                  <a:lnTo>
-                    <a:pt x="796499" y="1734782"/>
-                  </a:lnTo>
-                  <a:lnTo>
-                    <a:pt x="870259" y="1842853"/>
-                  </a:lnTo>
-                  <a:lnTo>
-                    <a:pt x="944019" y="1944246"/>
-                  </a:lnTo>
-                  <a:lnTo>
-                    <a:pt x="1017779" y="2039374"/>
-                  </a:lnTo>
-                  <a:lnTo>
-                    <a:pt x="1091539" y="2128624"/>
-                  </a:lnTo>
-                  <a:lnTo>
-                    <a:pt x="1165299" y="2212358"/>
-                  </a:lnTo>
-                  <a:lnTo>
-                    <a:pt x="1239059" y="2290919"/>
-                  </a:lnTo>
-                  <a:lnTo>
-                    <a:pt x="1312819" y="2364626"/>
-                  </a:lnTo>
-                  <a:lnTo>
-                    <a:pt x="1386579" y="2433778"/>
-                  </a:lnTo>
-                  <a:lnTo>
-                    <a:pt x="1460339" y="2498657"/>
-                  </a:lnTo>
-                  <a:lnTo>
-                    <a:pt x="1534099" y="2559527"/>
-                  </a:lnTo>
-                  <a:lnTo>
-                    <a:pt x="1607859" y="2616635"/>
-                  </a:lnTo>
-                  <a:lnTo>
-                    <a:pt x="1681619" y="2670215"/>
-                  </a:lnTo>
-                  <a:lnTo>
-                    <a:pt x="1755379" y="2720485"/>
-                  </a:lnTo>
-                  <a:lnTo>
-                    <a:pt x="1829139" y="2767648"/>
-                  </a:lnTo>
-                  <a:lnTo>
-                    <a:pt x="1902900" y="2811896"/>
-                  </a:lnTo>
-                  <a:lnTo>
-                    <a:pt x="1976660" y="2853411"/>
-                  </a:lnTo>
-                  <a:lnTo>
-                    <a:pt x="2050420" y="2892360"/>
-                  </a:lnTo>
-                  <a:lnTo>
-                    <a:pt x="2124180" y="2928903"/>
-                  </a:lnTo>
-                  <a:lnTo>
-                    <a:pt x="2197940" y="2963187"/>
-                  </a:lnTo>
-                  <a:lnTo>
-                    <a:pt x="2271700" y="2995353"/>
-                  </a:lnTo>
-                  <a:lnTo>
-                    <a:pt x="2345460" y="3025532"/>
-                  </a:lnTo>
-                  <a:lnTo>
-                    <a:pt x="2419220" y="3053845"/>
-                  </a:lnTo>
-                  <a:lnTo>
-                    <a:pt x="2492980" y="3080410"/>
-                  </a:lnTo>
-                  <a:lnTo>
-                    <a:pt x="2566740" y="3105332"/>
-                  </a:lnTo>
-                  <a:lnTo>
-                    <a:pt x="2640500" y="3128715"/>
-                  </a:lnTo>
-                  <a:lnTo>
-                    <a:pt x="2714260" y="3150653"/>
-                  </a:lnTo>
-                  <a:lnTo>
-                    <a:pt x="2788020" y="3171235"/>
-                  </a:lnTo>
-                  <a:lnTo>
-                    <a:pt x="2861780" y="3190546"/>
-                  </a:lnTo>
-                  <a:lnTo>
-                    <a:pt x="2935540" y="3208663"/>
-                  </a:lnTo>
-                  <a:lnTo>
-                    <a:pt x="3009300" y="3225661"/>
-                  </a:lnTo>
-                  <a:lnTo>
-                    <a:pt x="3083060" y="3241608"/>
-                  </a:lnTo>
-                  <a:lnTo>
-                    <a:pt x="3156820" y="3256570"/>
-                  </a:lnTo>
-                  <a:lnTo>
-                    <a:pt x="3230580" y="3270608"/>
-                  </a:lnTo>
-                  <a:lnTo>
-                    <a:pt x="3304340" y="3283778"/>
-                  </a:lnTo>
-                  <a:lnTo>
-                    <a:pt x="3378100" y="3296134"/>
-                  </a:lnTo>
-                  <a:lnTo>
-                    <a:pt x="3451860" y="3307727"/>
-                  </a:lnTo>
-                  <a:lnTo>
-                    <a:pt x="3525620" y="3318604"/>
-                  </a:lnTo>
-                  <a:lnTo>
-                    <a:pt x="3599380" y="3328808"/>
-                  </a:lnTo>
-                  <a:lnTo>
-                    <a:pt x="3673140" y="3338382"/>
-                  </a:lnTo>
-                  <a:lnTo>
-                    <a:pt x="3746900" y="3347364"/>
-                  </a:lnTo>
-                  <a:lnTo>
-                    <a:pt x="3820660" y="3355791"/>
-                  </a:lnTo>
-                  <a:lnTo>
-                    <a:pt x="3894420" y="3363698"/>
-                  </a:lnTo>
-                  <a:lnTo>
-                    <a:pt x="3968180" y="3371116"/>
-                  </a:lnTo>
-                  <a:lnTo>
-                    <a:pt x="4041940" y="3378075"/>
-                  </a:lnTo>
-                  <a:lnTo>
-                    <a:pt x="4115700" y="3384605"/>
-                  </a:lnTo>
-                  <a:lnTo>
-                    <a:pt x="4189460" y="3390731"/>
-                  </a:lnTo>
-                  <a:lnTo>
-                    <a:pt x="4263220" y="3396479"/>
-                  </a:lnTo>
-                  <a:lnTo>
-                    <a:pt x="4336980" y="3401871"/>
-                  </a:lnTo>
-                  <a:lnTo>
-                    <a:pt x="4410740" y="3406930"/>
-                  </a:lnTo>
-                  <a:lnTo>
-                    <a:pt x="4484500" y="3411677"/>
-                  </a:lnTo>
-                  <a:lnTo>
-                    <a:pt x="4558260" y="3416130"/>
-                  </a:lnTo>
-                  <a:lnTo>
-                    <a:pt x="4632020" y="3420308"/>
-                  </a:lnTo>
-                  <a:lnTo>
-                    <a:pt x="4705780" y="3424228"/>
-                  </a:lnTo>
-                  <a:lnTo>
-                    <a:pt x="4779541" y="3427906"/>
-                  </a:lnTo>
-                  <a:lnTo>
-                    <a:pt x="4853301" y="3431356"/>
-                  </a:lnTo>
-                  <a:lnTo>
-                    <a:pt x="4927061" y="3434594"/>
-                  </a:lnTo>
-                  <a:lnTo>
-                    <a:pt x="5000821" y="3437631"/>
-                  </a:lnTo>
-                  <a:lnTo>
-                    <a:pt x="5074581" y="3440480"/>
-                  </a:lnTo>
-                  <a:lnTo>
-                    <a:pt x="5148341" y="3443154"/>
-                  </a:lnTo>
-                  <a:lnTo>
-                    <a:pt x="5222101" y="3445662"/>
-                  </a:lnTo>
-                  <a:lnTo>
-                    <a:pt x="5295861" y="3448015"/>
-                  </a:lnTo>
-                  <a:lnTo>
-                    <a:pt x="5369621" y="3450223"/>
-                  </a:lnTo>
-                  <a:lnTo>
-                    <a:pt x="5443381" y="3452295"/>
+                    <a:pt x="57192" y="174062"/>
+                  </a:lnTo>
+                  <a:lnTo>
+                    <a:pt x="128815" y="378572"/>
+                  </a:lnTo>
+                  <a:lnTo>
+                    <a:pt x="200437" y="570445"/>
+                  </a:lnTo>
+                  <a:lnTo>
+                    <a:pt x="272060" y="750461"/>
+                  </a:lnTo>
+                  <a:lnTo>
+                    <a:pt x="343682" y="919355"/>
+                  </a:lnTo>
+                  <a:lnTo>
+                    <a:pt x="415305" y="1077812"/>
+                  </a:lnTo>
+                  <a:lnTo>
+                    <a:pt x="486927" y="1226478"/>
+                  </a:lnTo>
+                  <a:lnTo>
+                    <a:pt x="558550" y="1365958"/>
+                  </a:lnTo>
+                  <a:lnTo>
+                    <a:pt x="630172" y="1496819"/>
+                  </a:lnTo>
+                  <a:lnTo>
+                    <a:pt x="701795" y="1619594"/>
+                  </a:lnTo>
+                  <a:lnTo>
+                    <a:pt x="773417" y="1734782"/>
+                  </a:lnTo>
+                  <a:lnTo>
+                    <a:pt x="845040" y="1842853"/>
+                  </a:lnTo>
+                  <a:lnTo>
+                    <a:pt x="916662" y="1944246"/>
+                  </a:lnTo>
+                  <a:lnTo>
+                    <a:pt x="988285" y="2039374"/>
+                  </a:lnTo>
+                  <a:lnTo>
+                    <a:pt x="1059907" y="2128624"/>
+                  </a:lnTo>
+                  <a:lnTo>
+                    <a:pt x="1131530" y="2212358"/>
+                  </a:lnTo>
+                  <a:lnTo>
+                    <a:pt x="1203152" y="2290919"/>
+                  </a:lnTo>
+                  <a:lnTo>
+                    <a:pt x="1274775" y="2364626"/>
+                  </a:lnTo>
+                  <a:lnTo>
+                    <a:pt x="1346398" y="2433778"/>
+                  </a:lnTo>
+                  <a:lnTo>
+                    <a:pt x="1418020" y="2498657"/>
+                  </a:lnTo>
+                  <a:lnTo>
+                    <a:pt x="1489643" y="2559527"/>
+                  </a:lnTo>
+                  <a:lnTo>
+                    <a:pt x="1561265" y="2616635"/>
+                  </a:lnTo>
+                  <a:lnTo>
+                    <a:pt x="1632888" y="2670215"/>
+                  </a:lnTo>
+                  <a:lnTo>
+                    <a:pt x="1704510" y="2720485"/>
+                  </a:lnTo>
+                  <a:lnTo>
+                    <a:pt x="1776133" y="2767648"/>
+                  </a:lnTo>
+                  <a:lnTo>
+                    <a:pt x="1847755" y="2811896"/>
+                  </a:lnTo>
+                  <a:lnTo>
+                    <a:pt x="1919378" y="2853411"/>
+                  </a:lnTo>
+                  <a:lnTo>
+                    <a:pt x="1991000" y="2892360"/>
+                  </a:lnTo>
+                  <a:lnTo>
+                    <a:pt x="2062623" y="2928903"/>
+                  </a:lnTo>
+                  <a:lnTo>
+                    <a:pt x="2134245" y="2963187"/>
+                  </a:lnTo>
+                  <a:lnTo>
+                    <a:pt x="2205868" y="2995353"/>
+                  </a:lnTo>
+                  <a:lnTo>
+                    <a:pt x="2277490" y="3025532"/>
+                  </a:lnTo>
+                  <a:lnTo>
+                    <a:pt x="2349113" y="3053845"/>
+                  </a:lnTo>
+                  <a:lnTo>
+                    <a:pt x="2420735" y="3080410"/>
+                  </a:lnTo>
+                  <a:lnTo>
+                    <a:pt x="2492358" y="3105332"/>
+                  </a:lnTo>
+                  <a:lnTo>
+                    <a:pt x="2563980" y="3128715"/>
+                  </a:lnTo>
+                  <a:lnTo>
+                    <a:pt x="2635603" y="3150653"/>
+                  </a:lnTo>
+                  <a:lnTo>
+                    <a:pt x="2707226" y="3171235"/>
+                  </a:lnTo>
+                  <a:lnTo>
+                    <a:pt x="2778848" y="3190546"/>
+                  </a:lnTo>
+                  <a:lnTo>
+                    <a:pt x="2850471" y="3208663"/>
+                  </a:lnTo>
+                  <a:lnTo>
+                    <a:pt x="2922093" y="3225661"/>
+                  </a:lnTo>
+                  <a:lnTo>
+                    <a:pt x="2993716" y="3241608"/>
+                  </a:lnTo>
+                  <a:lnTo>
+                    <a:pt x="3065338" y="3256570"/>
+                  </a:lnTo>
+                  <a:lnTo>
+                    <a:pt x="3136961" y="3270608"/>
+                  </a:lnTo>
+                  <a:lnTo>
+                    <a:pt x="3208583" y="3283778"/>
+                  </a:lnTo>
+                  <a:lnTo>
+                    <a:pt x="3280206" y="3296134"/>
+                  </a:lnTo>
+                  <a:lnTo>
+                    <a:pt x="3351828" y="3307727"/>
+                  </a:lnTo>
+                  <a:lnTo>
+                    <a:pt x="3423451" y="3318604"/>
+                  </a:lnTo>
+                  <a:lnTo>
+                    <a:pt x="3495073" y="3328808"/>
+                  </a:lnTo>
+                  <a:lnTo>
+                    <a:pt x="3566696" y="3338382"/>
+                  </a:lnTo>
+                  <a:lnTo>
+                    <a:pt x="3638318" y="3347364"/>
+                  </a:lnTo>
+                  <a:lnTo>
+                    <a:pt x="3709941" y="3355791"/>
+                  </a:lnTo>
+                  <a:lnTo>
+                    <a:pt x="3781563" y="3363698"/>
+                  </a:lnTo>
+                  <a:lnTo>
+                    <a:pt x="3853186" y="3371116"/>
+                  </a:lnTo>
+                  <a:lnTo>
+                    <a:pt x="3924808" y="3378075"/>
+                  </a:lnTo>
+                  <a:lnTo>
+                    <a:pt x="3996431" y="3384605"/>
+                  </a:lnTo>
+                  <a:lnTo>
+                    <a:pt x="4068053" y="3390731"/>
+                  </a:lnTo>
+                  <a:lnTo>
+                    <a:pt x="4139676" y="3396479"/>
+                  </a:lnTo>
+                  <a:lnTo>
+                    <a:pt x="4211299" y="3401871"/>
+                  </a:lnTo>
+                  <a:lnTo>
+                    <a:pt x="4282921" y="3406930"/>
+                  </a:lnTo>
+                  <a:lnTo>
+                    <a:pt x="4354544" y="3411677"/>
+                  </a:lnTo>
+                  <a:lnTo>
+                    <a:pt x="4426166" y="3416130"/>
+                  </a:lnTo>
+                  <a:lnTo>
+                    <a:pt x="4497789" y="3420308"/>
+                  </a:lnTo>
+                  <a:lnTo>
+                    <a:pt x="4569411" y="3424228"/>
+                  </a:lnTo>
+                  <a:lnTo>
+                    <a:pt x="4641034" y="3427906"/>
+                  </a:lnTo>
+                  <a:lnTo>
+                    <a:pt x="4712656" y="3431356"/>
+                  </a:lnTo>
+                  <a:lnTo>
+                    <a:pt x="4784279" y="3434594"/>
+                  </a:lnTo>
+                  <a:lnTo>
+                    <a:pt x="4855901" y="3437631"/>
+                  </a:lnTo>
+                  <a:lnTo>
+                    <a:pt x="4927524" y="3440480"/>
+                  </a:lnTo>
+                  <a:lnTo>
+                    <a:pt x="4999146" y="3443154"/>
+                  </a:lnTo>
+                  <a:lnTo>
+                    <a:pt x="5070769" y="3445662"/>
+                  </a:lnTo>
+                  <a:lnTo>
+                    <a:pt x="5142391" y="3448015"/>
+                  </a:lnTo>
+                  <a:lnTo>
+                    <a:pt x="5214014" y="3450223"/>
+                  </a:lnTo>
+                  <a:lnTo>
+                    <a:pt x="5285636" y="3452295"/>
                   </a:lnTo>
                 </a:path>
               </a:pathLst>
@@ -4338,7 +4295,7 @@
         </p:sp>
         <p:sp>
           <p:nvSpPr>
-            <p:cNvPr id="25" name="pl25"/>
+            <p:cNvPr id="24" name="pl24"/>
             <p:cNvSpPr/>
             <p:nvPr/>
           </p:nvSpPr>
@@ -4381,13 +4338,13 @@
         </p:sp>
         <p:sp>
           <p:nvSpPr>
-            <p:cNvPr id="26" name="pl26"/>
+            <p:cNvPr id="25" name="pl25"/>
             <p:cNvSpPr/>
             <p:nvPr/>
           </p:nvSpPr>
           <p:spPr>
             <a:xfrm>
-              <a:off x="4269157" y="2073503"/>
+              <a:off x="4588151" y="2073503"/>
               <a:ext cx="0" cy="3649639"/>
             </a:xfrm>
             <a:custGeom>
@@ -4424,7 +4381,7 @@
         </p:sp>
         <p:sp>
           <p:nvSpPr>
-            <p:cNvPr id="27" name="tx27"/>
+            <p:cNvPr id="26" name="tx26"/>
             <p:cNvSpPr/>
             <p:nvPr/>
           </p:nvSpPr>
@@ -4470,7 +4427,7 @@
         </p:sp>
         <p:sp>
           <p:nvSpPr>
-            <p:cNvPr id="28" name="tx28"/>
+            <p:cNvPr id="27" name="tx27"/>
             <p:cNvSpPr/>
             <p:nvPr/>
           </p:nvSpPr>
@@ -4516,7 +4473,7 @@
         </p:sp>
         <p:sp>
           <p:nvSpPr>
-            <p:cNvPr id="29" name="tx29"/>
+            <p:cNvPr id="28" name="tx28"/>
             <p:cNvSpPr/>
             <p:nvPr/>
           </p:nvSpPr>
@@ -4562,7 +4519,7 @@
         </p:sp>
         <p:sp>
           <p:nvSpPr>
-            <p:cNvPr id="30" name="tx30"/>
+            <p:cNvPr id="29" name="tx29"/>
             <p:cNvSpPr/>
             <p:nvPr/>
           </p:nvSpPr>
@@ -4608,7 +4565,7 @@
         </p:sp>
         <p:sp>
           <p:nvSpPr>
-            <p:cNvPr id="31" name="tx31"/>
+            <p:cNvPr id="30" name="tx30"/>
             <p:cNvSpPr/>
             <p:nvPr/>
           </p:nvSpPr>
@@ -4654,14 +4611,14 @@
         </p:sp>
         <p:sp>
           <p:nvSpPr>
-            <p:cNvPr id="32" name="tx32"/>
+            <p:cNvPr id="31" name="tx31"/>
             <p:cNvSpPr/>
             <p:nvPr/>
           </p:nvSpPr>
           <p:spPr>
             <a:xfrm>
-              <a:off x="2423864" y="5785772"/>
-              <a:ext cx="155356" cy="80101"/>
+              <a:off x="2360651" y="5785772"/>
+              <a:ext cx="161574" cy="80101"/>
             </a:xfrm>
             <a:prstGeom prst="rect">
               <a:avLst/>
@@ -4693,21 +4650,21 @@
                   <a:latin typeface="Helvetica"/>
                   <a:cs typeface="Helvetica"/>
                 </a:rPr>
-                <a:t>0.8</a:t>
+                <a:t>-25</a:t>
               </a:r>
             </a:p>
           </p:txBody>
         </p:sp>
         <p:sp>
           <p:nvSpPr>
-            <p:cNvPr id="33" name="tx33"/>
+            <p:cNvPr id="32" name="tx32"/>
             <p:cNvSpPr/>
             <p:nvPr/>
           </p:nvSpPr>
           <p:spPr>
             <a:xfrm>
-              <a:off x="4196521" y="5785772"/>
-              <a:ext cx="155356" cy="80101"/>
+              <a:off x="4561958" y="5785772"/>
+              <a:ext cx="62179" cy="80101"/>
             </a:xfrm>
             <a:prstGeom prst="rect">
               <a:avLst/>
@@ -4739,21 +4696,21 @@
                   <a:latin typeface="Helvetica"/>
                   <a:cs typeface="Helvetica"/>
                 </a:rPr>
-                <a:t>1.0</a:t>
+                <a:t>0</a:t>
               </a:r>
             </a:p>
           </p:txBody>
         </p:sp>
         <p:sp>
           <p:nvSpPr>
-            <p:cNvPr id="34" name="tx34"/>
+            <p:cNvPr id="33" name="tx33"/>
             <p:cNvSpPr/>
             <p:nvPr/>
           </p:nvSpPr>
           <p:spPr>
             <a:xfrm>
-              <a:off x="5969179" y="5785772"/>
-              <a:ext cx="155356" cy="80101"/>
+              <a:off x="6682478" y="5785772"/>
+              <a:ext cx="124358" cy="80101"/>
             </a:xfrm>
             <a:prstGeom prst="rect">
               <a:avLst/>
@@ -4785,67 +4742,21 @@
                   <a:latin typeface="Helvetica"/>
                   <a:cs typeface="Helvetica"/>
                 </a:rPr>
-                <a:t>1.2</a:t>
+                <a:t>25</a:t>
               </a:r>
             </a:p>
           </p:txBody>
         </p:sp>
         <p:sp>
           <p:nvSpPr>
-            <p:cNvPr id="35" name="tx35"/>
+            <p:cNvPr id="34" name="tx34"/>
             <p:cNvSpPr/>
             <p:nvPr/>
           </p:nvSpPr>
           <p:spPr>
             <a:xfrm>
-              <a:off x="7741836" y="5785772"/>
-              <a:ext cx="155356" cy="80101"/>
-            </a:xfrm>
-            <a:prstGeom prst="rect">
-              <a:avLst/>
-            </a:prstGeom>
-            <a:noFill/>
-          </p:spPr>
-          <p:txBody>
-            <a:bodyPr lIns="0" rIns="0" tIns="0" bIns="0" anchorCtr="1" anchor="ctr" wrap="none"/>
-            <a:lstStyle/>
-            <a:p>
-              <a:pPr algn="l" marL="0" marR="0" indent="0">
-                <a:lnSpc>
-                  <a:spcPts val="880"/>
-                </a:lnSpc>
-                <a:spcBef>
-                  <a:spcPts val="0"/>
-                </a:spcBef>
-                <a:spcAft>
-                  <a:spcPts val="0"/>
-                </a:spcAft>
-              </a:pPr>
-              <a:r>
-                <a:rPr sz="880">
-                  <a:solidFill>
-                    <a:srgbClr val="4D4D4D">
-                      <a:alpha val="100000"/>
-                    </a:srgbClr>
-                  </a:solidFill>
-                  <a:latin typeface="Helvetica"/>
-                  <a:cs typeface="Helvetica"/>
-                </a:rPr>
-                <a:t>1.4</a:t>
-              </a:r>
-            </a:p>
-          </p:txBody>
-        </p:sp>
-        <p:sp>
-          <p:nvSpPr>
-            <p:cNvPr id="36" name="tx36"/>
-            <p:cNvSpPr/>
-            <p:nvPr/>
-          </p:nvSpPr>
-          <p:spPr>
-            <a:xfrm>
-              <a:off x="3879271" y="5925448"/>
-              <a:ext cx="1676186" cy="100218"/>
+              <a:off x="2928340" y="5925448"/>
+              <a:ext cx="3578047" cy="100218"/>
             </a:xfrm>
             <a:prstGeom prst="rect">
               <a:avLst/>
@@ -4877,14 +4788,14 @@
                   <a:latin typeface="Helvetica"/>
                   <a:cs typeface="Helvetica"/>
                 </a:rPr>
-                <a:t>CKD-EPI Cr-Cys / CG ratio</a:t>
+                <a:t>eGFR difference (%): 100 × (CKD-EPI Cr-Cys − CG) / CG</a:t>
               </a:r>
             </a:p>
           </p:txBody>
         </p:sp>
         <p:sp>
           <p:nvSpPr>
-            <p:cNvPr id="37" name="tx37"/>
+            <p:cNvPr id="35" name="tx35"/>
             <p:cNvSpPr/>
             <p:nvPr/>
           </p:nvSpPr>
@@ -4930,14 +4841,14 @@
         </p:sp>
         <p:sp>
           <p:nvSpPr>
-            <p:cNvPr id="38" name="tx38"/>
+            <p:cNvPr id="36" name="tx36"/>
             <p:cNvSpPr/>
             <p:nvPr/>
           </p:nvSpPr>
           <p:spPr>
             <a:xfrm>
               <a:off x="817517" y="1896563"/>
-              <a:ext cx="6299667" cy="82021"/>
+              <a:ext cx="6451914" cy="82021"/>
             </a:xfrm>
             <a:prstGeom prst="rect">
               <a:avLst/>
@@ -4969,14 +4880,14 @@
                   <a:latin typeface="Helvetica"/>
                   <a:cs typeface="Helvetica"/>
                 </a:rPr>
-                <a:t>subHR per 0.1 ratio decline: 2.15 (1.45-3.19), p = &lt;0.001  |  per IQR decline (Δ = 0.29): 9.43 (2.97-29.95)  |  IQR: [0.85, 1.15]</a:t>
+                <a:t>subHR per 10 % decline: 2.15 (1.45-3.19), p = &lt;0.001  |  per IQR decline (Δ = 29.3 %): 9.43 (2.97-29.95)  |  IQR: [-14.6, 14.7] %</a:t>
               </a:r>
             </a:p>
           </p:txBody>
         </p:sp>
         <p:sp>
           <p:nvSpPr>
-            <p:cNvPr id="39" name="tx39"/>
+            <p:cNvPr id="37" name="tx37"/>
             <p:cNvSpPr/>
             <p:nvPr/>
           </p:nvSpPr>

--- a/docs/pptx/whole/jx-linsubhr-ratio-hosp3.pptx
+++ b/docs/pptx/whole/jx-linsubhr-ratio-hosp3.pptx
@@ -2265,34 +2265,26 @@
         </p:sp>
         <p:sp>
           <p:nvSpPr>
-            <p:cNvPr id="4" name="pl4"/>
+            <p:cNvPr id="4" name="rc4"/>
             <p:cNvSpPr/>
             <p:nvPr/>
           </p:nvSpPr>
           <p:spPr>
             <a:xfrm>
-              <a:off x="817517" y="5142518"/>
-              <a:ext cx="7799693" cy="0"/>
+              <a:off x="457200" y="1600200"/>
+              <a:ext cx="8229600" cy="4525962"/>
             </a:xfrm>
-            <a:custGeom>
+            <a:prstGeom prst="rect">
               <a:avLst/>
-              <a:pathLst>
-                <a:path w="7799693" h="0">
-                  <a:moveTo>
-                    <a:pt x="0" y="0"/>
-                  </a:moveTo>
-                  <a:lnTo>
-                    <a:pt x="7799693" y="0"/>
-                  </a:lnTo>
-                  <a:lnTo>
-                    <a:pt x="7799693" y="0"/>
-                  </a:lnTo>
-                </a:path>
-              </a:pathLst>
-            </a:custGeom>
-            <a:ln w="6775" cap="flat">
+            </a:prstGeom>
+            <a:solidFill>
+              <a:srgbClr val="FFFFFF">
+                <a:alpha val="100000"/>
+              </a:srgbClr>
+            </a:solidFill>
+            <a:ln w="13550" cap="rnd">
               <a:solidFill>
-                <a:srgbClr val="EBEBEB">
+                <a:srgbClr val="FFFFFF">
                   <a:alpha val="100000"/>
                 </a:srgbClr>
               </a:solidFill>
@@ -2314,21 +2306,21 @@
           </p:nvSpPr>
           <p:spPr>
             <a:xfrm>
-              <a:off x="817517" y="4313054"/>
-              <a:ext cx="7799693" cy="0"/>
+              <a:off x="887106" y="3250627"/>
+              <a:ext cx="7660515" cy="0"/>
             </a:xfrm>
             <a:custGeom>
               <a:avLst/>
               <a:pathLst>
-                <a:path w="7799693" h="0">
+                <a:path w="7660515" h="0">
                   <a:moveTo>
                     <a:pt x="0" y="0"/>
                   </a:moveTo>
                   <a:lnTo>
-                    <a:pt x="7799693" y="0"/>
-                  </a:lnTo>
-                  <a:lnTo>
-                    <a:pt x="7799693" y="0"/>
+                    <a:pt x="7660515" y="0"/>
+                  </a:lnTo>
+                  <a:lnTo>
+                    <a:pt x="7660515" y="0"/>
                   </a:lnTo>
                 </a:path>
               </a:pathLst>
@@ -2357,21 +2349,21 @@
           </p:nvSpPr>
           <p:spPr>
             <a:xfrm>
-              <a:off x="817517" y="3483591"/>
-              <a:ext cx="7799693" cy="0"/>
+              <a:off x="887106" y="2951293"/>
+              <a:ext cx="7660515" cy="0"/>
             </a:xfrm>
             <a:custGeom>
               <a:avLst/>
               <a:pathLst>
-                <a:path w="7799693" h="0">
+                <a:path w="7660515" h="0">
                   <a:moveTo>
                     <a:pt x="0" y="0"/>
                   </a:moveTo>
                   <a:lnTo>
-                    <a:pt x="7799693" y="0"/>
-                  </a:lnTo>
-                  <a:lnTo>
-                    <a:pt x="7799693" y="0"/>
+                    <a:pt x="7660515" y="0"/>
+                  </a:lnTo>
+                  <a:lnTo>
+                    <a:pt x="7660515" y="0"/>
                   </a:lnTo>
                 </a:path>
               </a:pathLst>
@@ -2400,21 +2392,21 @@
           </p:nvSpPr>
           <p:spPr>
             <a:xfrm>
-              <a:off x="817517" y="2654127"/>
-              <a:ext cx="7799693" cy="0"/>
+              <a:off x="887106" y="2651959"/>
+              <a:ext cx="7660515" cy="0"/>
             </a:xfrm>
             <a:custGeom>
               <a:avLst/>
               <a:pathLst>
-                <a:path w="7799693" h="0">
+                <a:path w="7660515" h="0">
                   <a:moveTo>
                     <a:pt x="0" y="0"/>
                   </a:moveTo>
                   <a:lnTo>
-                    <a:pt x="7799693" y="0"/>
-                  </a:lnTo>
-                  <a:lnTo>
-                    <a:pt x="7799693" y="0"/>
+                    <a:pt x="7660515" y="0"/>
+                  </a:lnTo>
+                  <a:lnTo>
+                    <a:pt x="7660515" y="0"/>
                   </a:lnTo>
                 </a:path>
               </a:pathLst>
@@ -2443,21 +2435,21 @@
           </p:nvSpPr>
           <p:spPr>
             <a:xfrm>
-              <a:off x="1365633" y="2073503"/>
-              <a:ext cx="0" cy="3649639"/>
+              <a:off x="887106" y="2352625"/>
+              <a:ext cx="7660515" cy="0"/>
             </a:xfrm>
             <a:custGeom>
               <a:avLst/>
               <a:pathLst>
-                <a:path w="0" h="3649639">
+                <a:path w="7660515" h="0">
                   <a:moveTo>
-                    <a:pt x="0" y="3649639"/>
+                    <a:pt x="0" y="0"/>
                   </a:moveTo>
                   <a:lnTo>
-                    <a:pt x="0" y="0"/>
-                  </a:lnTo>
-                  <a:lnTo>
-                    <a:pt x="0" y="0"/>
+                    <a:pt x="7660515" y="0"/>
+                  </a:lnTo>
+                  <a:lnTo>
+                    <a:pt x="7660515" y="0"/>
                   </a:lnTo>
                 </a:path>
               </a:pathLst>
@@ -2486,15 +2478,15 @@
           </p:nvSpPr>
           <p:spPr>
             <a:xfrm>
-              <a:off x="3517243" y="2073503"/>
-              <a:ext cx="0" cy="3649639"/>
+              <a:off x="1425442" y="2143092"/>
+              <a:ext cx="0" cy="1317069"/>
             </a:xfrm>
             <a:custGeom>
               <a:avLst/>
               <a:pathLst>
-                <a:path w="0" h="3649639">
+                <a:path w="0" h="1317069">
                   <a:moveTo>
-                    <a:pt x="0" y="3649639"/>
+                    <a:pt x="0" y="1317069"/>
                   </a:moveTo>
                   <a:lnTo>
                     <a:pt x="0" y="0"/>
@@ -2529,15 +2521,15 @@
           </p:nvSpPr>
           <p:spPr>
             <a:xfrm>
-              <a:off x="5668852" y="2073503"/>
-              <a:ext cx="0" cy="3649639"/>
+              <a:off x="3538658" y="2143092"/>
+              <a:ext cx="0" cy="1317069"/>
             </a:xfrm>
             <a:custGeom>
               <a:avLst/>
               <a:pathLst>
-                <a:path w="0" h="3649639">
+                <a:path w="0" h="1317069">
                   <a:moveTo>
-                    <a:pt x="0" y="3649639"/>
+                    <a:pt x="0" y="1317069"/>
                   </a:moveTo>
                   <a:lnTo>
                     <a:pt x="0" y="0"/>
@@ -2572,15 +2564,15 @@
           </p:nvSpPr>
           <p:spPr>
             <a:xfrm>
-              <a:off x="7820461" y="2073503"/>
-              <a:ext cx="0" cy="3649639"/>
+              <a:off x="5651874" y="2143092"/>
+              <a:ext cx="0" cy="1317069"/>
             </a:xfrm>
             <a:custGeom>
               <a:avLst/>
               <a:pathLst>
-                <a:path w="0" h="3649639">
+                <a:path w="0" h="1317069">
                   <a:moveTo>
-                    <a:pt x="0" y="3649639"/>
+                    <a:pt x="0" y="1317069"/>
                   </a:moveTo>
                   <a:lnTo>
                     <a:pt x="0" y="0"/>
@@ -2615,26 +2607,26 @@
           </p:nvSpPr>
           <p:spPr>
             <a:xfrm>
-              <a:off x="817517" y="5557249"/>
-              <a:ext cx="7799693" cy="0"/>
+              <a:off x="7765090" y="2143092"/>
+              <a:ext cx="0" cy="1317069"/>
             </a:xfrm>
             <a:custGeom>
               <a:avLst/>
               <a:pathLst>
-                <a:path w="7799693" h="0">
+                <a:path w="0" h="1317069">
                   <a:moveTo>
+                    <a:pt x="0" y="1317069"/>
+                  </a:moveTo>
+                  <a:lnTo>
                     <a:pt x="0" y="0"/>
-                  </a:moveTo>
-                  <a:lnTo>
-                    <a:pt x="7799693" y="0"/>
-                  </a:lnTo>
-                  <a:lnTo>
-                    <a:pt x="7799693" y="0"/>
+                  </a:lnTo>
+                  <a:lnTo>
+                    <a:pt x="0" y="0"/>
                   </a:lnTo>
                 </a:path>
               </a:pathLst>
             </a:custGeom>
-            <a:ln w="13550" cap="flat">
+            <a:ln w="6775" cap="flat">
               <a:solidFill>
                 <a:srgbClr val="EBEBEB">
                   <a:alpha val="100000"/>
@@ -2658,21 +2650,21 @@
           </p:nvSpPr>
           <p:spPr>
             <a:xfrm>
-              <a:off x="817517" y="4727786"/>
-              <a:ext cx="7799693" cy="0"/>
+              <a:off x="887106" y="3400294"/>
+              <a:ext cx="7660515" cy="0"/>
             </a:xfrm>
             <a:custGeom>
               <a:avLst/>
               <a:pathLst>
-                <a:path w="7799693" h="0">
+                <a:path w="7660515" h="0">
                   <a:moveTo>
                     <a:pt x="0" y="0"/>
                   </a:moveTo>
                   <a:lnTo>
-                    <a:pt x="7799693" y="0"/>
-                  </a:lnTo>
-                  <a:lnTo>
-                    <a:pt x="7799693" y="0"/>
+                    <a:pt x="7660515" y="0"/>
+                  </a:lnTo>
+                  <a:lnTo>
+                    <a:pt x="7660515" y="0"/>
                   </a:lnTo>
                 </a:path>
               </a:pathLst>
@@ -2701,21 +2693,21 @@
           </p:nvSpPr>
           <p:spPr>
             <a:xfrm>
-              <a:off x="817517" y="3898322"/>
-              <a:ext cx="7799693" cy="0"/>
+              <a:off x="887106" y="3100960"/>
+              <a:ext cx="7660515" cy="0"/>
             </a:xfrm>
             <a:custGeom>
               <a:avLst/>
               <a:pathLst>
-                <a:path w="7799693" h="0">
+                <a:path w="7660515" h="0">
                   <a:moveTo>
                     <a:pt x="0" y="0"/>
                   </a:moveTo>
                   <a:lnTo>
-                    <a:pt x="7799693" y="0"/>
-                  </a:lnTo>
-                  <a:lnTo>
-                    <a:pt x="7799693" y="0"/>
+                    <a:pt x="7660515" y="0"/>
+                  </a:lnTo>
+                  <a:lnTo>
+                    <a:pt x="7660515" y="0"/>
                   </a:lnTo>
                 </a:path>
               </a:pathLst>
@@ -2744,21 +2736,21 @@
           </p:nvSpPr>
           <p:spPr>
             <a:xfrm>
-              <a:off x="817517" y="3068859"/>
-              <a:ext cx="7799693" cy="0"/>
+              <a:off x="887106" y="2801626"/>
+              <a:ext cx="7660515" cy="0"/>
             </a:xfrm>
             <a:custGeom>
               <a:avLst/>
               <a:pathLst>
-                <a:path w="7799693" h="0">
+                <a:path w="7660515" h="0">
                   <a:moveTo>
                     <a:pt x="0" y="0"/>
                   </a:moveTo>
                   <a:lnTo>
-                    <a:pt x="7799693" y="0"/>
-                  </a:lnTo>
-                  <a:lnTo>
-                    <a:pt x="7799693" y="0"/>
+                    <a:pt x="7660515" y="0"/>
+                  </a:lnTo>
+                  <a:lnTo>
+                    <a:pt x="7660515" y="0"/>
                   </a:lnTo>
                 </a:path>
               </a:pathLst>
@@ -2787,21 +2779,21 @@
           </p:nvSpPr>
           <p:spPr>
             <a:xfrm>
-              <a:off x="817517" y="2239395"/>
-              <a:ext cx="7799693" cy="0"/>
+              <a:off x="887106" y="2502292"/>
+              <a:ext cx="7660515" cy="0"/>
             </a:xfrm>
             <a:custGeom>
               <a:avLst/>
               <a:pathLst>
-                <a:path w="7799693" h="0">
+                <a:path w="7660515" h="0">
                   <a:moveTo>
                     <a:pt x="0" y="0"/>
                   </a:moveTo>
                   <a:lnTo>
-                    <a:pt x="7799693" y="0"/>
-                  </a:lnTo>
-                  <a:lnTo>
-                    <a:pt x="7799693" y="0"/>
+                    <a:pt x="7660515" y="0"/>
+                  </a:lnTo>
+                  <a:lnTo>
+                    <a:pt x="7660515" y="0"/>
                   </a:lnTo>
                 </a:path>
               </a:pathLst>
@@ -2830,21 +2822,21 @@
           </p:nvSpPr>
           <p:spPr>
             <a:xfrm>
-              <a:off x="2441438" y="2073503"/>
-              <a:ext cx="0" cy="3649639"/>
+              <a:off x="887106" y="2202958"/>
+              <a:ext cx="7660515" cy="0"/>
             </a:xfrm>
             <a:custGeom>
               <a:avLst/>
               <a:pathLst>
-                <a:path w="0" h="3649639">
+                <a:path w="7660515" h="0">
                   <a:moveTo>
-                    <a:pt x="0" y="3649639"/>
+                    <a:pt x="0" y="0"/>
                   </a:moveTo>
                   <a:lnTo>
-                    <a:pt x="0" y="0"/>
-                  </a:lnTo>
-                  <a:lnTo>
-                    <a:pt x="0" y="0"/>
+                    <a:pt x="7660515" y="0"/>
+                  </a:lnTo>
+                  <a:lnTo>
+                    <a:pt x="7660515" y="0"/>
                   </a:lnTo>
                 </a:path>
               </a:pathLst>
@@ -2873,15 +2865,15 @@
           </p:nvSpPr>
           <p:spPr>
             <a:xfrm>
-              <a:off x="4593047" y="2073503"/>
-              <a:ext cx="0" cy="3649639"/>
+              <a:off x="2482050" y="2143092"/>
+              <a:ext cx="0" cy="1317069"/>
             </a:xfrm>
             <a:custGeom>
               <a:avLst/>
               <a:pathLst>
-                <a:path w="0" h="3649639">
+                <a:path w="0" h="1317069">
                   <a:moveTo>
-                    <a:pt x="0" y="3649639"/>
+                    <a:pt x="0" y="1317069"/>
                   </a:moveTo>
                   <a:lnTo>
                     <a:pt x="0" y="0"/>
@@ -2916,15 +2908,15 @@
           </p:nvSpPr>
           <p:spPr>
             <a:xfrm>
-              <a:off x="6744657" y="2073503"/>
-              <a:ext cx="0" cy="3649639"/>
+              <a:off x="4595266" y="2143092"/>
+              <a:ext cx="0" cy="1317069"/>
             </a:xfrm>
             <a:custGeom>
               <a:avLst/>
               <a:pathLst>
-                <a:path w="0" h="3649639">
+                <a:path w="0" h="1317069">
                   <a:moveTo>
-                    <a:pt x="0" y="3649639"/>
+                    <a:pt x="0" y="1317069"/>
                   </a:moveTo>
                   <a:lnTo>
                     <a:pt x="0" y="0"/>
@@ -2953,516 +2945,559 @@
         </p:sp>
         <p:sp>
           <p:nvSpPr>
-            <p:cNvPr id="20" name="pg20"/>
+            <p:cNvPr id="20" name="pl20"/>
             <p:cNvSpPr/>
             <p:nvPr/>
           </p:nvSpPr>
           <p:spPr>
             <a:xfrm>
-              <a:off x="1263567" y="2073503"/>
-              <a:ext cx="6999111" cy="3477921"/>
+              <a:off x="6708482" y="2143092"/>
+              <a:ext cx="0" cy="1317069"/>
             </a:xfrm>
             <a:custGeom>
               <a:avLst/>
               <a:pathLst>
-                <a:path w="6999111" h="3477921">
+                <a:path w="0" h="1317069">
                   <a:moveTo>
-                    <a:pt x="2261571" y="0"/>
+                    <a:pt x="0" y="1317069"/>
                   </a:moveTo>
                   <a:lnTo>
-                    <a:pt x="2272025" y="50846"/>
-                  </a:lnTo>
-                  <a:lnTo>
-                    <a:pt x="2343647" y="367111"/>
-                  </a:lnTo>
-                  <a:lnTo>
-                    <a:pt x="2415270" y="654239"/>
-                  </a:lnTo>
-                  <a:lnTo>
-                    <a:pt x="2486892" y="914915"/>
-                  </a:lnTo>
-                  <a:lnTo>
-                    <a:pt x="2558515" y="1151575"/>
-                  </a:lnTo>
-                  <a:lnTo>
-                    <a:pt x="2630137" y="1366432"/>
-                  </a:lnTo>
-                  <a:lnTo>
-                    <a:pt x="2701760" y="1561495"/>
-                  </a:lnTo>
-                  <a:lnTo>
-                    <a:pt x="2773382" y="1738588"/>
-                  </a:lnTo>
-                  <a:lnTo>
-                    <a:pt x="2845005" y="1899365"/>
-                  </a:lnTo>
-                  <a:lnTo>
-                    <a:pt x="2916627" y="2045330"/>
-                  </a:lnTo>
-                  <a:lnTo>
-                    <a:pt x="2988250" y="2177848"/>
-                  </a:lnTo>
-                  <a:lnTo>
-                    <a:pt x="3059872" y="2298157"/>
-                  </a:lnTo>
-                  <a:lnTo>
-                    <a:pt x="3131495" y="2407383"/>
-                  </a:lnTo>
-                  <a:lnTo>
-                    <a:pt x="3203117" y="2506546"/>
-                  </a:lnTo>
-                  <a:lnTo>
-                    <a:pt x="3274740" y="2596573"/>
-                  </a:lnTo>
-                  <a:lnTo>
-                    <a:pt x="3346362" y="2662044"/>
-                  </a:lnTo>
-                  <a:lnTo>
-                    <a:pt x="3417985" y="2687057"/>
-                  </a:lnTo>
-                  <a:lnTo>
-                    <a:pt x="3489608" y="2711310"/>
-                  </a:lnTo>
-                  <a:lnTo>
-                    <a:pt x="3561230" y="2734824"/>
-                  </a:lnTo>
-                  <a:lnTo>
-                    <a:pt x="3632853" y="2757622"/>
-                  </a:lnTo>
-                  <a:lnTo>
-                    <a:pt x="3704475" y="2779726"/>
-                  </a:lnTo>
-                  <a:lnTo>
-                    <a:pt x="3776098" y="2801158"/>
-                  </a:lnTo>
-                  <a:lnTo>
-                    <a:pt x="3847720" y="2821937"/>
-                  </a:lnTo>
-                  <a:lnTo>
-                    <a:pt x="3919343" y="2842083"/>
-                  </a:lnTo>
-                  <a:lnTo>
-                    <a:pt x="3990965" y="2861616"/>
-                  </a:lnTo>
-                  <a:lnTo>
-                    <a:pt x="4062588" y="2880555"/>
-                  </a:lnTo>
-                  <a:lnTo>
-                    <a:pt x="4134210" y="2898917"/>
-                  </a:lnTo>
-                  <a:lnTo>
-                    <a:pt x="4205833" y="2916720"/>
-                  </a:lnTo>
-                  <a:lnTo>
-                    <a:pt x="4277455" y="2933981"/>
-                  </a:lnTo>
-                  <a:lnTo>
-                    <a:pt x="4349078" y="2950717"/>
-                  </a:lnTo>
-                  <a:lnTo>
-                    <a:pt x="4420700" y="2966943"/>
-                  </a:lnTo>
-                  <a:lnTo>
-                    <a:pt x="4492323" y="2982675"/>
-                  </a:lnTo>
-                  <a:lnTo>
-                    <a:pt x="4563945" y="2997929"/>
-                  </a:lnTo>
-                  <a:lnTo>
-                    <a:pt x="4635568" y="3012718"/>
-                  </a:lnTo>
-                  <a:lnTo>
-                    <a:pt x="4707190" y="3027056"/>
-                  </a:lnTo>
-                  <a:lnTo>
-                    <a:pt x="4778813" y="3040959"/>
-                  </a:lnTo>
-                  <a:lnTo>
-                    <a:pt x="4850436" y="3054438"/>
-                  </a:lnTo>
-                  <a:lnTo>
-                    <a:pt x="4922058" y="3067507"/>
-                  </a:lnTo>
-                  <a:lnTo>
-                    <a:pt x="4993681" y="3080177"/>
-                  </a:lnTo>
-                  <a:lnTo>
-                    <a:pt x="5065303" y="3092463"/>
-                  </a:lnTo>
-                  <a:lnTo>
-                    <a:pt x="5136926" y="3104374"/>
-                  </a:lnTo>
-                  <a:lnTo>
-                    <a:pt x="5208548" y="3115923"/>
-                  </a:lnTo>
-                  <a:lnTo>
-                    <a:pt x="5280171" y="3127120"/>
-                  </a:lnTo>
-                  <a:lnTo>
-                    <a:pt x="5351793" y="3137976"/>
-                  </a:lnTo>
-                  <a:lnTo>
-                    <a:pt x="5423416" y="3148502"/>
-                  </a:lnTo>
-                  <a:lnTo>
-                    <a:pt x="5495038" y="3158707"/>
-                  </a:lnTo>
-                  <a:lnTo>
-                    <a:pt x="5566661" y="3168602"/>
-                  </a:lnTo>
-                  <a:lnTo>
-                    <a:pt x="5638283" y="3178195"/>
-                  </a:lnTo>
-                  <a:lnTo>
-                    <a:pt x="5709906" y="3187497"/>
-                  </a:lnTo>
-                  <a:lnTo>
-                    <a:pt x="5781528" y="3196515"/>
-                  </a:lnTo>
-                  <a:lnTo>
-                    <a:pt x="5853151" y="3205259"/>
-                  </a:lnTo>
-                  <a:lnTo>
-                    <a:pt x="5924773" y="3213736"/>
-                  </a:lnTo>
-                  <a:lnTo>
-                    <a:pt x="5996396" y="3221956"/>
-                  </a:lnTo>
-                  <a:lnTo>
-                    <a:pt x="6068018" y="3229925"/>
-                  </a:lnTo>
-                  <a:lnTo>
-                    <a:pt x="6139641" y="3237652"/>
-                  </a:lnTo>
-                  <a:lnTo>
-                    <a:pt x="6211264" y="3245143"/>
-                  </a:lnTo>
-                  <a:lnTo>
-                    <a:pt x="6282886" y="3252407"/>
-                  </a:lnTo>
-                  <a:lnTo>
-                    <a:pt x="6354509" y="3259449"/>
-                  </a:lnTo>
-                  <a:lnTo>
-                    <a:pt x="6426131" y="3266277"/>
-                  </a:lnTo>
-                  <a:lnTo>
-                    <a:pt x="6497754" y="3272897"/>
-                  </a:lnTo>
-                  <a:lnTo>
-                    <a:pt x="6569376" y="3279315"/>
-                  </a:lnTo>
-                  <a:lnTo>
-                    <a:pt x="6640999" y="3285539"/>
-                  </a:lnTo>
-                  <a:lnTo>
-                    <a:pt x="6712621" y="3291572"/>
-                  </a:lnTo>
-                  <a:lnTo>
-                    <a:pt x="6784244" y="3297422"/>
-                  </a:lnTo>
-                  <a:lnTo>
-                    <a:pt x="6855866" y="3303094"/>
-                  </a:lnTo>
-                  <a:lnTo>
-                    <a:pt x="6927489" y="3308594"/>
-                  </a:lnTo>
-                  <a:lnTo>
-                    <a:pt x="6999111" y="3313926"/>
-                  </a:lnTo>
-                  <a:lnTo>
-                    <a:pt x="6999111" y="3477921"/>
-                  </a:lnTo>
-                  <a:lnTo>
-                    <a:pt x="6927489" y="3477330"/>
-                  </a:lnTo>
-                  <a:lnTo>
-                    <a:pt x="6855866" y="3476679"/>
-                  </a:lnTo>
-                  <a:lnTo>
-                    <a:pt x="6784244" y="3475962"/>
-                  </a:lnTo>
-                  <a:lnTo>
-                    <a:pt x="6712621" y="3475172"/>
-                  </a:lnTo>
-                  <a:lnTo>
-                    <a:pt x="6640999" y="3474302"/>
-                  </a:lnTo>
-                  <a:lnTo>
-                    <a:pt x="6569376" y="3473344"/>
-                  </a:lnTo>
-                  <a:lnTo>
-                    <a:pt x="6497754" y="3472288"/>
-                  </a:lnTo>
-                  <a:lnTo>
-                    <a:pt x="6426131" y="3471125"/>
-                  </a:lnTo>
-                  <a:lnTo>
-                    <a:pt x="6354509" y="3469844"/>
-                  </a:lnTo>
-                  <a:lnTo>
-                    <a:pt x="6282886" y="3468434"/>
-                  </a:lnTo>
-                  <a:lnTo>
-                    <a:pt x="6211264" y="3466880"/>
-                  </a:lnTo>
-                  <a:lnTo>
-                    <a:pt x="6139641" y="3465168"/>
-                  </a:lnTo>
-                  <a:lnTo>
-                    <a:pt x="6068018" y="3463283"/>
-                  </a:lnTo>
-                  <a:lnTo>
-                    <a:pt x="5996396" y="3461207"/>
-                  </a:lnTo>
-                  <a:lnTo>
-                    <a:pt x="5924773" y="3458919"/>
-                  </a:lnTo>
-                  <a:lnTo>
-                    <a:pt x="5853151" y="3456400"/>
-                  </a:lnTo>
-                  <a:lnTo>
-                    <a:pt x="5781528" y="3453625"/>
-                  </a:lnTo>
-                  <a:lnTo>
-                    <a:pt x="5709906" y="3450568"/>
-                  </a:lnTo>
-                  <a:lnTo>
-                    <a:pt x="5638283" y="3447201"/>
-                  </a:lnTo>
-                  <a:lnTo>
-                    <a:pt x="5566661" y="3443493"/>
-                  </a:lnTo>
-                  <a:lnTo>
-                    <a:pt x="5495038" y="3439408"/>
-                  </a:lnTo>
-                  <a:lnTo>
-                    <a:pt x="5423416" y="3434909"/>
-                  </a:lnTo>
-                  <a:lnTo>
-                    <a:pt x="5351793" y="3429953"/>
-                  </a:lnTo>
-                  <a:lnTo>
-                    <a:pt x="5280171" y="3424494"/>
-                  </a:lnTo>
-                  <a:lnTo>
-                    <a:pt x="5208548" y="3418482"/>
-                  </a:lnTo>
-                  <a:lnTo>
-                    <a:pt x="5136926" y="3411859"/>
-                  </a:lnTo>
-                  <a:lnTo>
-                    <a:pt x="5065303" y="3404564"/>
-                  </a:lnTo>
-                  <a:lnTo>
-                    <a:pt x="4993681" y="3396529"/>
-                  </a:lnTo>
-                  <a:lnTo>
-                    <a:pt x="4922058" y="3387678"/>
-                  </a:lnTo>
-                  <a:lnTo>
-                    <a:pt x="4850436" y="3377930"/>
-                  </a:lnTo>
-                  <a:lnTo>
-                    <a:pt x="4778813" y="3367192"/>
-                  </a:lnTo>
-                  <a:lnTo>
-                    <a:pt x="4707190" y="3355364"/>
-                  </a:lnTo>
-                  <a:lnTo>
-                    <a:pt x="4635568" y="3342336"/>
-                  </a:lnTo>
-                  <a:lnTo>
-                    <a:pt x="4563945" y="3327987"/>
-                  </a:lnTo>
-                  <a:lnTo>
-                    <a:pt x="4492323" y="3312181"/>
-                  </a:lnTo>
-                  <a:lnTo>
-                    <a:pt x="4420700" y="3294771"/>
-                  </a:lnTo>
-                  <a:lnTo>
-                    <a:pt x="4349078" y="3275594"/>
-                  </a:lnTo>
-                  <a:lnTo>
-                    <a:pt x="4277455" y="3254472"/>
-                  </a:lnTo>
-                  <a:lnTo>
-                    <a:pt x="4205833" y="3231206"/>
-                  </a:lnTo>
-                  <a:lnTo>
-                    <a:pt x="4134210" y="3205579"/>
-                  </a:lnTo>
-                  <a:lnTo>
-                    <a:pt x="4062588" y="3177351"/>
-                  </a:lnTo>
-                  <a:lnTo>
-                    <a:pt x="3990965" y="3146260"/>
-                  </a:lnTo>
-                  <a:lnTo>
-                    <a:pt x="3919343" y="3112013"/>
-                  </a:lnTo>
-                  <a:lnTo>
-                    <a:pt x="3847720" y="3074290"/>
-                  </a:lnTo>
-                  <a:lnTo>
-                    <a:pt x="3776098" y="3032740"/>
-                  </a:lnTo>
-                  <a:lnTo>
-                    <a:pt x="3704475" y="2986974"/>
-                  </a:lnTo>
-                  <a:lnTo>
-                    <a:pt x="3632853" y="2936563"/>
-                  </a:lnTo>
-                  <a:lnTo>
-                    <a:pt x="3561230" y="2881037"/>
-                  </a:lnTo>
-                  <a:lnTo>
-                    <a:pt x="3489608" y="2819876"/>
-                  </a:lnTo>
-                  <a:lnTo>
-                    <a:pt x="3417985" y="2752509"/>
-                  </a:lnTo>
-                  <a:lnTo>
-                    <a:pt x="3346362" y="2678306"/>
-                  </a:lnTo>
-                  <a:lnTo>
-                    <a:pt x="3274740" y="2636244"/>
-                  </a:lnTo>
-                  <a:lnTo>
-                    <a:pt x="3203117" y="2609635"/>
-                  </a:lnTo>
-                  <a:lnTo>
-                    <a:pt x="3131495" y="2582191"/>
-                  </a:lnTo>
-                  <a:lnTo>
-                    <a:pt x="3059872" y="2553884"/>
-                  </a:lnTo>
-                  <a:lnTo>
-                    <a:pt x="2988250" y="2524689"/>
-                  </a:lnTo>
-                  <a:lnTo>
-                    <a:pt x="2916627" y="2494577"/>
-                  </a:lnTo>
-                  <a:lnTo>
-                    <a:pt x="2845005" y="2463520"/>
-                  </a:lnTo>
-                  <a:lnTo>
-                    <a:pt x="2773382" y="2431488"/>
-                  </a:lnTo>
-                  <a:lnTo>
-                    <a:pt x="2701760" y="2398450"/>
-                  </a:lnTo>
-                  <a:lnTo>
-                    <a:pt x="2630137" y="2364375"/>
-                  </a:lnTo>
-                  <a:lnTo>
-                    <a:pt x="2558515" y="2329230"/>
-                  </a:lnTo>
-                  <a:lnTo>
-                    <a:pt x="2486892" y="2292981"/>
-                  </a:lnTo>
-                  <a:lnTo>
-                    <a:pt x="2415270" y="2255594"/>
-                  </a:lnTo>
-                  <a:lnTo>
-                    <a:pt x="2343647" y="2217034"/>
-                  </a:lnTo>
-                  <a:lnTo>
-                    <a:pt x="2272025" y="2177262"/>
-                  </a:lnTo>
-                  <a:lnTo>
-                    <a:pt x="2200402" y="2136242"/>
-                  </a:lnTo>
-                  <a:lnTo>
-                    <a:pt x="2128780" y="2093935"/>
-                  </a:lnTo>
-                  <a:lnTo>
-                    <a:pt x="2057157" y="2050298"/>
-                  </a:lnTo>
-                  <a:lnTo>
-                    <a:pt x="1985534" y="2005292"/>
-                  </a:lnTo>
-                  <a:lnTo>
-                    <a:pt x="1913912" y="1958873"/>
-                  </a:lnTo>
-                  <a:lnTo>
-                    <a:pt x="1842289" y="1910996"/>
-                  </a:lnTo>
-                  <a:lnTo>
-                    <a:pt x="1770667" y="1861616"/>
-                  </a:lnTo>
-                  <a:lnTo>
-                    <a:pt x="1699044" y="1810686"/>
-                  </a:lnTo>
-                  <a:lnTo>
-                    <a:pt x="1627422" y="1758156"/>
-                  </a:lnTo>
-                  <a:lnTo>
-                    <a:pt x="1555799" y="1703977"/>
-                  </a:lnTo>
-                  <a:lnTo>
-                    <a:pt x="1484177" y="1648098"/>
-                  </a:lnTo>
-                  <a:lnTo>
-                    <a:pt x="1412554" y="1590463"/>
-                  </a:lnTo>
-                  <a:lnTo>
-                    <a:pt x="1340932" y="1531019"/>
-                  </a:lnTo>
-                  <a:lnTo>
-                    <a:pt x="1269309" y="1469709"/>
-                  </a:lnTo>
-                  <a:lnTo>
-                    <a:pt x="1197687" y="1406474"/>
-                  </a:lnTo>
-                  <a:lnTo>
-                    <a:pt x="1126064" y="1341253"/>
-                  </a:lnTo>
-                  <a:lnTo>
-                    <a:pt x="1054442" y="1273985"/>
-                  </a:lnTo>
-                  <a:lnTo>
-                    <a:pt x="982819" y="1204605"/>
-                  </a:lnTo>
-                  <a:lnTo>
-                    <a:pt x="911197" y="1133046"/>
-                  </a:lnTo>
-                  <a:lnTo>
-                    <a:pt x="839574" y="1059241"/>
-                  </a:lnTo>
-                  <a:lnTo>
-                    <a:pt x="767952" y="983118"/>
-                  </a:lnTo>
-                  <a:lnTo>
-                    <a:pt x="696329" y="904605"/>
-                  </a:lnTo>
-                  <a:lnTo>
-                    <a:pt x="624706" y="823627"/>
-                  </a:lnTo>
-                  <a:lnTo>
-                    <a:pt x="553084" y="740107"/>
-                  </a:lnTo>
-                  <a:lnTo>
-                    <a:pt x="481461" y="653964"/>
-                  </a:lnTo>
-                  <a:lnTo>
-                    <a:pt x="409839" y="565117"/>
-                  </a:lnTo>
-                  <a:lnTo>
-                    <a:pt x="338216" y="473480"/>
-                  </a:lnTo>
-                  <a:lnTo>
-                    <a:pt x="266594" y="378966"/>
-                  </a:lnTo>
-                  <a:lnTo>
-                    <a:pt x="194971" y="281485"/>
-                  </a:lnTo>
-                  <a:lnTo>
-                    <a:pt x="123349" y="180943"/>
-                  </a:lnTo>
-                  <a:lnTo>
-                    <a:pt x="51726" y="77244"/>
+                    <a:pt x="0" y="0"/>
+                  </a:lnTo>
+                  <a:lnTo>
+                    <a:pt x="0" y="0"/>
+                  </a:lnTo>
+                </a:path>
+              </a:pathLst>
+            </a:custGeom>
+            <a:ln w="13550" cap="flat">
+              <a:solidFill>
+                <a:srgbClr val="EBEBEB">
+                  <a:alpha val="100000"/>
+                </a:srgbClr>
+              </a:solidFill>
+              <a:prstDash val="solid"/>
+              <a:round/>
+            </a:ln>
+          </p:spPr>
+          <p:txBody>
+            <a:bodyPr/>
+            <a:lstStyle/>
+            <a:p/>
+          </p:txBody>
+        </p:sp>
+        <p:sp>
+          <p:nvSpPr>
+            <p:cNvPr id="21" name="pg21"/>
+            <p:cNvSpPr/>
+            <p:nvPr/>
+          </p:nvSpPr>
+          <p:spPr>
+            <a:xfrm>
+              <a:off x="1325197" y="2143092"/>
+              <a:ext cx="6874219" cy="1255100"/>
+            </a:xfrm>
+            <a:custGeom>
+              <a:avLst/>
+              <a:pathLst>
+                <a:path w="6874219" h="1255100">
+                  <a:moveTo>
+                    <a:pt x="2221215" y="0"/>
+                  </a:moveTo>
+                  <a:lnTo>
+                    <a:pt x="2231482" y="18349"/>
+                  </a:lnTo>
+                  <a:lnTo>
+                    <a:pt x="2301827" y="132481"/>
+                  </a:lnTo>
+                  <a:lnTo>
+                    <a:pt x="2372171" y="236099"/>
+                  </a:lnTo>
+                  <a:lnTo>
+                    <a:pt x="2442516" y="330171"/>
+                  </a:lnTo>
+                  <a:lnTo>
+                    <a:pt x="2512860" y="415576"/>
+                  </a:lnTo>
+                  <a:lnTo>
+                    <a:pt x="2583205" y="493113"/>
+                  </a:lnTo>
+                  <a:lnTo>
+                    <a:pt x="2653549" y="563507"/>
+                  </a:lnTo>
+                  <a:lnTo>
+                    <a:pt x="2723894" y="627415"/>
+                  </a:lnTo>
+                  <a:lnTo>
+                    <a:pt x="2794238" y="685436"/>
+                  </a:lnTo>
+                  <a:lnTo>
+                    <a:pt x="2864583" y="738111"/>
+                  </a:lnTo>
+                  <a:lnTo>
+                    <a:pt x="2934927" y="785934"/>
+                  </a:lnTo>
+                  <a:lnTo>
+                    <a:pt x="3005272" y="829351"/>
+                  </a:lnTo>
+                  <a:lnTo>
+                    <a:pt x="3075616" y="868767"/>
+                  </a:lnTo>
+                  <a:lnTo>
+                    <a:pt x="3145961" y="904553"/>
+                  </a:lnTo>
+                  <a:lnTo>
+                    <a:pt x="3216305" y="937042"/>
+                  </a:lnTo>
+                  <a:lnTo>
+                    <a:pt x="3286650" y="960669"/>
+                  </a:lnTo>
+                  <a:lnTo>
+                    <a:pt x="3356994" y="969696"/>
+                  </a:lnTo>
+                  <a:lnTo>
+                    <a:pt x="3427339" y="978448"/>
+                  </a:lnTo>
+                  <a:lnTo>
+                    <a:pt x="3497683" y="986933"/>
+                  </a:lnTo>
+                  <a:lnTo>
+                    <a:pt x="3568028" y="995161"/>
+                  </a:lnTo>
+                  <a:lnTo>
+                    <a:pt x="3638372" y="1003138"/>
+                  </a:lnTo>
+                  <a:lnTo>
+                    <a:pt x="3708717" y="1010872"/>
+                  </a:lnTo>
+                  <a:lnTo>
+                    <a:pt x="3779061" y="1018370"/>
+                  </a:lnTo>
+                  <a:lnTo>
+                    <a:pt x="3849406" y="1025641"/>
+                  </a:lnTo>
+                  <a:lnTo>
+                    <a:pt x="3919750" y="1032690"/>
+                  </a:lnTo>
+                  <a:lnTo>
+                    <a:pt x="3990095" y="1039524"/>
+                  </a:lnTo>
+                  <a:lnTo>
+                    <a:pt x="4060439" y="1046151"/>
+                  </a:lnTo>
+                  <a:lnTo>
+                    <a:pt x="4130784" y="1052575"/>
+                  </a:lnTo>
+                  <a:lnTo>
+                    <a:pt x="4201128" y="1058804"/>
+                  </a:lnTo>
+                  <a:lnTo>
+                    <a:pt x="4271473" y="1064844"/>
+                  </a:lnTo>
+                  <a:lnTo>
+                    <a:pt x="4341817" y="1070700"/>
+                  </a:lnTo>
+                  <a:lnTo>
+                    <a:pt x="4412162" y="1076377"/>
+                  </a:lnTo>
+                  <a:lnTo>
+                    <a:pt x="4482506" y="1081882"/>
+                  </a:lnTo>
+                  <a:lnTo>
+                    <a:pt x="4552851" y="1087219"/>
+                  </a:lnTo>
+                  <a:lnTo>
+                    <a:pt x="4623195" y="1092393"/>
+                  </a:lnTo>
+                  <a:lnTo>
+                    <a:pt x="4693540" y="1097410"/>
+                  </a:lnTo>
+                  <a:lnTo>
+                    <a:pt x="4763884" y="1102274"/>
+                  </a:lnTo>
+                  <a:lnTo>
+                    <a:pt x="4834229" y="1106991"/>
+                  </a:lnTo>
+                  <a:lnTo>
+                    <a:pt x="4904573" y="1111563"/>
+                  </a:lnTo>
+                  <a:lnTo>
+                    <a:pt x="4974918" y="1115997"/>
+                  </a:lnTo>
+                  <a:lnTo>
+                    <a:pt x="5045262" y="1120295"/>
+                  </a:lnTo>
+                  <a:lnTo>
+                    <a:pt x="5115607" y="1124463"/>
+                  </a:lnTo>
+                  <a:lnTo>
+                    <a:pt x="5185951" y="1128504"/>
+                  </a:lnTo>
+                  <a:lnTo>
+                    <a:pt x="5256296" y="1132421"/>
+                  </a:lnTo>
+                  <a:lnTo>
+                    <a:pt x="5326640" y="1136220"/>
+                  </a:lnTo>
+                  <a:lnTo>
+                    <a:pt x="5396985" y="1139903"/>
+                  </a:lnTo>
+                  <a:lnTo>
+                    <a:pt x="5467329" y="1143473"/>
+                  </a:lnTo>
+                  <a:lnTo>
+                    <a:pt x="5537674" y="1146936"/>
+                  </a:lnTo>
+                  <a:lnTo>
+                    <a:pt x="5608018" y="1150292"/>
+                  </a:lnTo>
+                  <a:lnTo>
+                    <a:pt x="5678363" y="1153547"/>
+                  </a:lnTo>
+                  <a:lnTo>
+                    <a:pt x="5748707" y="1156702"/>
+                  </a:lnTo>
+                  <a:lnTo>
+                    <a:pt x="5819051" y="1159761"/>
+                  </a:lnTo>
+                  <a:lnTo>
+                    <a:pt x="5889396" y="1162728"/>
+                  </a:lnTo>
+                  <a:lnTo>
+                    <a:pt x="5959740" y="1165604"/>
+                  </a:lnTo>
+                  <a:lnTo>
+                    <a:pt x="6030085" y="1168392"/>
+                  </a:lnTo>
+                  <a:lnTo>
+                    <a:pt x="6100429" y="1171095"/>
+                  </a:lnTo>
+                  <a:lnTo>
+                    <a:pt x="6170774" y="1173717"/>
+                  </a:lnTo>
+                  <a:lnTo>
+                    <a:pt x="6241118" y="1176258"/>
+                  </a:lnTo>
+                  <a:lnTo>
+                    <a:pt x="6311463" y="1178722"/>
+                  </a:lnTo>
+                  <a:lnTo>
+                    <a:pt x="6381807" y="1181111"/>
+                  </a:lnTo>
+                  <a:lnTo>
+                    <a:pt x="6452152" y="1183427"/>
+                  </a:lnTo>
+                  <a:lnTo>
+                    <a:pt x="6522496" y="1185673"/>
+                  </a:lnTo>
+                  <a:lnTo>
+                    <a:pt x="6592841" y="1187851"/>
+                  </a:lnTo>
+                  <a:lnTo>
+                    <a:pt x="6663185" y="1189962"/>
+                  </a:lnTo>
+                  <a:lnTo>
+                    <a:pt x="6733530" y="1192009"/>
+                  </a:lnTo>
+                  <a:lnTo>
+                    <a:pt x="6803874" y="1193993"/>
+                  </a:lnTo>
+                  <a:lnTo>
+                    <a:pt x="6874219" y="1195917"/>
+                  </a:lnTo>
+                  <a:lnTo>
+                    <a:pt x="6874219" y="1255100"/>
+                  </a:lnTo>
+                  <a:lnTo>
+                    <a:pt x="6803874" y="1254886"/>
+                  </a:lnTo>
+                  <a:lnTo>
+                    <a:pt x="6733530" y="1254651"/>
+                  </a:lnTo>
+                  <a:lnTo>
+                    <a:pt x="6663185" y="1254393"/>
+                  </a:lnTo>
+                  <a:lnTo>
+                    <a:pt x="6592841" y="1254108"/>
+                  </a:lnTo>
+                  <a:lnTo>
+                    <a:pt x="6522496" y="1253794"/>
+                  </a:lnTo>
+                  <a:lnTo>
+                    <a:pt x="6452152" y="1253448"/>
+                  </a:lnTo>
+                  <a:lnTo>
+                    <a:pt x="6381807" y="1253067"/>
+                  </a:lnTo>
+                  <a:lnTo>
+                    <a:pt x="6311463" y="1252647"/>
+                  </a:lnTo>
+                  <a:lnTo>
+                    <a:pt x="6241118" y="1252185"/>
+                  </a:lnTo>
+                  <a:lnTo>
+                    <a:pt x="6170774" y="1251676"/>
+                  </a:lnTo>
+                  <a:lnTo>
+                    <a:pt x="6100429" y="1251115"/>
+                  </a:lnTo>
+                  <a:lnTo>
+                    <a:pt x="6030085" y="1250497"/>
+                  </a:lnTo>
+                  <a:lnTo>
+                    <a:pt x="5959740" y="1249817"/>
+                  </a:lnTo>
+                  <a:lnTo>
+                    <a:pt x="5889396" y="1249068"/>
+                  </a:lnTo>
+                  <a:lnTo>
+                    <a:pt x="5819051" y="1248242"/>
+                  </a:lnTo>
+                  <a:lnTo>
+                    <a:pt x="5748707" y="1247333"/>
+                  </a:lnTo>
+                  <a:lnTo>
+                    <a:pt x="5678363" y="1246332"/>
+                  </a:lnTo>
+                  <a:lnTo>
+                    <a:pt x="5608018" y="1245229"/>
+                  </a:lnTo>
+                  <a:lnTo>
+                    <a:pt x="5537674" y="1244014"/>
+                  </a:lnTo>
+                  <a:lnTo>
+                    <a:pt x="5467329" y="1242675"/>
+                  </a:lnTo>
+                  <a:lnTo>
+                    <a:pt x="5396985" y="1241201"/>
+                  </a:lnTo>
+                  <a:lnTo>
+                    <a:pt x="5326640" y="1239578"/>
+                  </a:lnTo>
+                  <a:lnTo>
+                    <a:pt x="5256296" y="1237789"/>
+                  </a:lnTo>
+                  <a:lnTo>
+                    <a:pt x="5185951" y="1235819"/>
+                  </a:lnTo>
+                  <a:lnTo>
+                    <a:pt x="5115607" y="1233649"/>
+                  </a:lnTo>
+                  <a:lnTo>
+                    <a:pt x="5045262" y="1231259"/>
+                  </a:lnTo>
+                  <a:lnTo>
+                    <a:pt x="4974918" y="1228627"/>
+                  </a:lnTo>
+                  <a:lnTo>
+                    <a:pt x="4904573" y="1225727"/>
+                  </a:lnTo>
+                  <a:lnTo>
+                    <a:pt x="4834229" y="1222533"/>
+                  </a:lnTo>
+                  <a:lnTo>
+                    <a:pt x="4763884" y="1219015"/>
+                  </a:lnTo>
+                  <a:lnTo>
+                    <a:pt x="4693540" y="1215140"/>
+                  </a:lnTo>
+                  <a:lnTo>
+                    <a:pt x="4623195" y="1210872"/>
+                  </a:lnTo>
+                  <a:lnTo>
+                    <a:pt x="4552851" y="1206170"/>
+                  </a:lnTo>
+                  <a:lnTo>
+                    <a:pt x="4482506" y="1200992"/>
+                  </a:lnTo>
+                  <a:lnTo>
+                    <a:pt x="4412162" y="1195288"/>
+                  </a:lnTo>
+                  <a:lnTo>
+                    <a:pt x="4341817" y="1189005"/>
+                  </a:lnTo>
+                  <a:lnTo>
+                    <a:pt x="4271473" y="1182085"/>
+                  </a:lnTo>
+                  <a:lnTo>
+                    <a:pt x="4201128" y="1174462"/>
+                  </a:lnTo>
+                  <a:lnTo>
+                    <a:pt x="4130784" y="1166066"/>
+                  </a:lnTo>
+                  <a:lnTo>
+                    <a:pt x="4060439" y="1156818"/>
+                  </a:lnTo>
+                  <a:lnTo>
+                    <a:pt x="3990095" y="1146631"/>
+                  </a:lnTo>
+                  <a:lnTo>
+                    <a:pt x="3919750" y="1135411"/>
+                  </a:lnTo>
+                  <a:lnTo>
+                    <a:pt x="3849406" y="1123052"/>
+                  </a:lnTo>
+                  <a:lnTo>
+                    <a:pt x="3779061" y="1109439"/>
+                  </a:lnTo>
+                  <a:lnTo>
+                    <a:pt x="3708717" y="1094444"/>
+                  </a:lnTo>
+                  <a:lnTo>
+                    <a:pt x="3638372" y="1077928"/>
+                  </a:lnTo>
+                  <a:lnTo>
+                    <a:pt x="3568028" y="1059736"/>
+                  </a:lnTo>
+                  <a:lnTo>
+                    <a:pt x="3497683" y="1039698"/>
+                  </a:lnTo>
+                  <a:lnTo>
+                    <a:pt x="3427339" y="1017627"/>
+                  </a:lnTo>
+                  <a:lnTo>
+                    <a:pt x="3356994" y="993315"/>
+                  </a:lnTo>
+                  <a:lnTo>
+                    <a:pt x="3286650" y="966537"/>
+                  </a:lnTo>
+                  <a:lnTo>
+                    <a:pt x="3216305" y="951358"/>
+                  </a:lnTo>
+                  <a:lnTo>
+                    <a:pt x="3145961" y="941756"/>
+                  </a:lnTo>
+                  <a:lnTo>
+                    <a:pt x="3075616" y="931852"/>
+                  </a:lnTo>
+                  <a:lnTo>
+                    <a:pt x="3005272" y="921636"/>
+                  </a:lnTo>
+                  <a:lnTo>
+                    <a:pt x="2934927" y="911101"/>
+                  </a:lnTo>
+                  <a:lnTo>
+                    <a:pt x="2864583" y="900234"/>
+                  </a:lnTo>
+                  <a:lnTo>
+                    <a:pt x="2794238" y="889026"/>
+                  </a:lnTo>
+                  <a:lnTo>
+                    <a:pt x="2723894" y="877467"/>
+                  </a:lnTo>
+                  <a:lnTo>
+                    <a:pt x="2653549" y="865544"/>
+                  </a:lnTo>
+                  <a:lnTo>
+                    <a:pt x="2583205" y="853247"/>
+                  </a:lnTo>
+                  <a:lnTo>
+                    <a:pt x="2512860" y="840564"/>
+                  </a:lnTo>
+                  <a:lnTo>
+                    <a:pt x="2442516" y="827483"/>
+                  </a:lnTo>
+                  <a:lnTo>
+                    <a:pt x="2372171" y="813991"/>
+                  </a:lnTo>
+                  <a:lnTo>
+                    <a:pt x="2301827" y="800075"/>
+                  </a:lnTo>
+                  <a:lnTo>
+                    <a:pt x="2231482" y="785722"/>
+                  </a:lnTo>
+                  <a:lnTo>
+                    <a:pt x="2161138" y="770919"/>
+                  </a:lnTo>
+                  <a:lnTo>
+                    <a:pt x="2090793" y="755651"/>
+                  </a:lnTo>
+                  <a:lnTo>
+                    <a:pt x="2020449" y="739904"/>
+                  </a:lnTo>
+                  <a:lnTo>
+                    <a:pt x="1950105" y="723662"/>
+                  </a:lnTo>
+                  <a:lnTo>
+                    <a:pt x="1879760" y="706911"/>
+                  </a:lnTo>
+                  <a:lnTo>
+                    <a:pt x="1809416" y="689633"/>
+                  </a:lnTo>
+                  <a:lnTo>
+                    <a:pt x="1739071" y="671813"/>
+                  </a:lnTo>
+                  <a:lnTo>
+                    <a:pt x="1668727" y="653433"/>
+                  </a:lnTo>
+                  <a:lnTo>
+                    <a:pt x="1598382" y="634477"/>
+                  </a:lnTo>
+                  <a:lnTo>
+                    <a:pt x="1528038" y="614925"/>
+                  </a:lnTo>
+                  <a:lnTo>
+                    <a:pt x="1457693" y="594759"/>
+                  </a:lnTo>
+                  <a:lnTo>
+                    <a:pt x="1387349" y="573960"/>
+                  </a:lnTo>
+                  <a:lnTo>
+                    <a:pt x="1317004" y="552509"/>
+                  </a:lnTo>
+                  <a:lnTo>
+                    <a:pt x="1246660" y="530383"/>
+                  </a:lnTo>
+                  <a:lnTo>
+                    <a:pt x="1176315" y="507563"/>
+                  </a:lnTo>
+                  <a:lnTo>
+                    <a:pt x="1105971" y="484027"/>
+                  </a:lnTo>
+                  <a:lnTo>
+                    <a:pt x="1035626" y="459751"/>
+                  </a:lnTo>
+                  <a:lnTo>
+                    <a:pt x="965282" y="434713"/>
+                  </a:lnTo>
+                  <a:lnTo>
+                    <a:pt x="894937" y="408889"/>
+                  </a:lnTo>
+                  <a:lnTo>
+                    <a:pt x="824593" y="382255"/>
+                  </a:lnTo>
+                  <a:lnTo>
+                    <a:pt x="754248" y="354784"/>
+                  </a:lnTo>
+                  <a:lnTo>
+                    <a:pt x="683904" y="326450"/>
+                  </a:lnTo>
+                  <a:lnTo>
+                    <a:pt x="613559" y="297227"/>
+                  </a:lnTo>
+                  <a:lnTo>
+                    <a:pt x="543215" y="267087"/>
+                  </a:lnTo>
+                  <a:lnTo>
+                    <a:pt x="472870" y="236000"/>
+                  </a:lnTo>
+                  <a:lnTo>
+                    <a:pt x="402526" y="203937"/>
+                  </a:lnTo>
+                  <a:lnTo>
+                    <a:pt x="332181" y="170868"/>
+                  </a:lnTo>
+                  <a:lnTo>
+                    <a:pt x="261837" y="136760"/>
+                  </a:lnTo>
+                  <a:lnTo>
+                    <a:pt x="191492" y="101581"/>
+                  </a:lnTo>
+                  <a:lnTo>
+                    <a:pt x="121148" y="65298"/>
+                  </a:lnTo>
+                  <a:lnTo>
+                    <a:pt x="50803" y="27875"/>
                   </a:lnTo>
                   <a:lnTo>
                     <a:pt x="0" y="0"/>
@@ -3485,544 +3520,222 @@
         </p:sp>
         <p:sp>
           <p:nvSpPr>
-            <p:cNvPr id="21" name="pl21"/>
-            <p:cNvSpPr/>
-            <p:nvPr/>
-          </p:nvSpPr>
-          <p:spPr>
-            <a:xfrm>
-              <a:off x="3525138" y="2073503"/>
-              <a:ext cx="4737540" cy="3313926"/>
-            </a:xfrm>
-            <a:custGeom>
-              <a:avLst/>
-              <a:pathLst>
-                <a:path w="4737540" h="3313926">
-                  <a:moveTo>
-                    <a:pt x="0" y="0"/>
-                  </a:moveTo>
-                  <a:lnTo>
-                    <a:pt x="10454" y="50846"/>
-                  </a:lnTo>
-                  <a:lnTo>
-                    <a:pt x="82076" y="367111"/>
-                  </a:lnTo>
-                  <a:lnTo>
-                    <a:pt x="153699" y="654239"/>
-                  </a:lnTo>
-                  <a:lnTo>
-                    <a:pt x="225321" y="914915"/>
-                  </a:lnTo>
-                  <a:lnTo>
-                    <a:pt x="296944" y="1151575"/>
-                  </a:lnTo>
-                  <a:lnTo>
-                    <a:pt x="368566" y="1366432"/>
-                  </a:lnTo>
-                  <a:lnTo>
-                    <a:pt x="440189" y="1561495"/>
-                  </a:lnTo>
-                  <a:lnTo>
-                    <a:pt x="511811" y="1738588"/>
-                  </a:lnTo>
-                  <a:lnTo>
-                    <a:pt x="583434" y="1899365"/>
-                  </a:lnTo>
-                  <a:lnTo>
-                    <a:pt x="655056" y="2045330"/>
-                  </a:lnTo>
-                  <a:lnTo>
-                    <a:pt x="726679" y="2177848"/>
-                  </a:lnTo>
-                  <a:lnTo>
-                    <a:pt x="798301" y="2298157"/>
-                  </a:lnTo>
-                  <a:lnTo>
-                    <a:pt x="869924" y="2407383"/>
-                  </a:lnTo>
-                  <a:lnTo>
-                    <a:pt x="941546" y="2506546"/>
-                  </a:lnTo>
-                  <a:lnTo>
-                    <a:pt x="1013169" y="2596573"/>
-                  </a:lnTo>
-                  <a:lnTo>
-                    <a:pt x="1084791" y="2662044"/>
-                  </a:lnTo>
-                  <a:lnTo>
-                    <a:pt x="1156414" y="2687057"/>
-                  </a:lnTo>
-                  <a:lnTo>
-                    <a:pt x="1228037" y="2711310"/>
-                  </a:lnTo>
-                  <a:lnTo>
-                    <a:pt x="1299659" y="2734824"/>
-                  </a:lnTo>
-                  <a:lnTo>
-                    <a:pt x="1371282" y="2757622"/>
-                  </a:lnTo>
-                  <a:lnTo>
-                    <a:pt x="1442904" y="2779726"/>
-                  </a:lnTo>
-                  <a:lnTo>
-                    <a:pt x="1514527" y="2801158"/>
-                  </a:lnTo>
-                  <a:lnTo>
-                    <a:pt x="1586149" y="2821937"/>
-                  </a:lnTo>
-                  <a:lnTo>
-                    <a:pt x="1657772" y="2842083"/>
-                  </a:lnTo>
-                  <a:lnTo>
-                    <a:pt x="1729394" y="2861616"/>
-                  </a:lnTo>
-                  <a:lnTo>
-                    <a:pt x="1801017" y="2880555"/>
-                  </a:lnTo>
-                  <a:lnTo>
-                    <a:pt x="1872639" y="2898917"/>
-                  </a:lnTo>
-                  <a:lnTo>
-                    <a:pt x="1944262" y="2916720"/>
-                  </a:lnTo>
-                  <a:lnTo>
-                    <a:pt x="2015884" y="2933981"/>
-                  </a:lnTo>
-                  <a:lnTo>
-                    <a:pt x="2087507" y="2950717"/>
-                  </a:lnTo>
-                  <a:lnTo>
-                    <a:pt x="2159129" y="2966943"/>
-                  </a:lnTo>
-                  <a:lnTo>
-                    <a:pt x="2230752" y="2982675"/>
-                  </a:lnTo>
-                  <a:lnTo>
-                    <a:pt x="2302374" y="2997929"/>
-                  </a:lnTo>
-                  <a:lnTo>
-                    <a:pt x="2373997" y="3012718"/>
-                  </a:lnTo>
-                  <a:lnTo>
-                    <a:pt x="2445619" y="3027056"/>
-                  </a:lnTo>
-                  <a:lnTo>
-                    <a:pt x="2517242" y="3040959"/>
-                  </a:lnTo>
-                  <a:lnTo>
-                    <a:pt x="2588865" y="3054438"/>
-                  </a:lnTo>
-                  <a:lnTo>
-                    <a:pt x="2660487" y="3067507"/>
-                  </a:lnTo>
-                  <a:lnTo>
-                    <a:pt x="2732110" y="3080177"/>
-                  </a:lnTo>
-                  <a:lnTo>
-                    <a:pt x="2803732" y="3092463"/>
-                  </a:lnTo>
-                  <a:lnTo>
-                    <a:pt x="2875355" y="3104374"/>
-                  </a:lnTo>
-                  <a:lnTo>
-                    <a:pt x="2946977" y="3115923"/>
-                  </a:lnTo>
-                  <a:lnTo>
-                    <a:pt x="3018600" y="3127120"/>
-                  </a:lnTo>
-                  <a:lnTo>
-                    <a:pt x="3090222" y="3137976"/>
-                  </a:lnTo>
-                  <a:lnTo>
-                    <a:pt x="3161845" y="3148502"/>
-                  </a:lnTo>
-                  <a:lnTo>
-                    <a:pt x="3233467" y="3158707"/>
-                  </a:lnTo>
-                  <a:lnTo>
-                    <a:pt x="3305090" y="3168602"/>
-                  </a:lnTo>
-                  <a:lnTo>
-                    <a:pt x="3376712" y="3178195"/>
-                  </a:lnTo>
-                  <a:lnTo>
-                    <a:pt x="3448335" y="3187497"/>
-                  </a:lnTo>
-                  <a:lnTo>
-                    <a:pt x="3519957" y="3196515"/>
-                  </a:lnTo>
-                  <a:lnTo>
-                    <a:pt x="3591580" y="3205259"/>
-                  </a:lnTo>
-                  <a:lnTo>
-                    <a:pt x="3663202" y="3213736"/>
-                  </a:lnTo>
-                  <a:lnTo>
-                    <a:pt x="3734825" y="3221956"/>
-                  </a:lnTo>
-                  <a:lnTo>
-                    <a:pt x="3806447" y="3229925"/>
-                  </a:lnTo>
-                  <a:lnTo>
-                    <a:pt x="3878070" y="3237652"/>
-                  </a:lnTo>
-                  <a:lnTo>
-                    <a:pt x="3949693" y="3245143"/>
-                  </a:lnTo>
-                  <a:lnTo>
-                    <a:pt x="4021315" y="3252407"/>
-                  </a:lnTo>
-                  <a:lnTo>
-                    <a:pt x="4092938" y="3259449"/>
-                  </a:lnTo>
-                  <a:lnTo>
-                    <a:pt x="4164560" y="3266277"/>
-                  </a:lnTo>
-                  <a:lnTo>
-                    <a:pt x="4236183" y="3272897"/>
-                  </a:lnTo>
-                  <a:lnTo>
-                    <a:pt x="4307805" y="3279315"/>
-                  </a:lnTo>
-                  <a:lnTo>
-                    <a:pt x="4379428" y="3285539"/>
-                  </a:lnTo>
-                  <a:lnTo>
-                    <a:pt x="4451050" y="3291572"/>
-                  </a:lnTo>
-                  <a:lnTo>
-                    <a:pt x="4522673" y="3297422"/>
-                  </a:lnTo>
-                  <a:lnTo>
-                    <a:pt x="4594295" y="3303094"/>
-                  </a:lnTo>
-                  <a:lnTo>
-                    <a:pt x="4665918" y="3308594"/>
-                  </a:lnTo>
-                  <a:lnTo>
-                    <a:pt x="4737540" y="3313926"/>
-                  </a:lnTo>
-                </a:path>
-              </a:pathLst>
-            </a:custGeom>
-          </p:spPr>
-          <p:txBody>
-            <a:bodyPr/>
-            <a:lstStyle/>
-            <a:p/>
-          </p:txBody>
-        </p:sp>
-        <p:sp>
-          <p:nvSpPr>
             <p:cNvPr id="22" name="pl22"/>
             <p:cNvSpPr/>
             <p:nvPr/>
           </p:nvSpPr>
           <p:spPr>
             <a:xfrm>
-              <a:off x="1263567" y="2073503"/>
-              <a:ext cx="6999111" cy="3477921"/>
+              <a:off x="3546412" y="2143092"/>
+              <a:ext cx="4653003" cy="1195917"/>
             </a:xfrm>
             <a:custGeom>
               <a:avLst/>
               <a:pathLst>
-                <a:path w="6999111" h="3477921">
+                <a:path w="4653003" h="1195917">
                   <a:moveTo>
-                    <a:pt x="6999111" y="3477921"/>
+                    <a:pt x="0" y="0"/>
                   </a:moveTo>
                   <a:lnTo>
-                    <a:pt x="6927489" y="3477330"/>
-                  </a:lnTo>
-                  <a:lnTo>
-                    <a:pt x="6855866" y="3476679"/>
-                  </a:lnTo>
-                  <a:lnTo>
-                    <a:pt x="6784244" y="3475962"/>
-                  </a:lnTo>
-                  <a:lnTo>
-                    <a:pt x="6712621" y="3475172"/>
-                  </a:lnTo>
-                  <a:lnTo>
-                    <a:pt x="6640999" y="3474302"/>
-                  </a:lnTo>
-                  <a:lnTo>
-                    <a:pt x="6569376" y="3473344"/>
-                  </a:lnTo>
-                  <a:lnTo>
-                    <a:pt x="6497754" y="3472288"/>
-                  </a:lnTo>
-                  <a:lnTo>
-                    <a:pt x="6426131" y="3471125"/>
-                  </a:lnTo>
-                  <a:lnTo>
-                    <a:pt x="6354509" y="3469844"/>
-                  </a:lnTo>
-                  <a:lnTo>
-                    <a:pt x="6282886" y="3468434"/>
-                  </a:lnTo>
-                  <a:lnTo>
-                    <a:pt x="6211264" y="3466880"/>
-                  </a:lnTo>
-                  <a:lnTo>
-                    <a:pt x="6139641" y="3465168"/>
-                  </a:lnTo>
-                  <a:lnTo>
-                    <a:pt x="6068018" y="3463283"/>
-                  </a:lnTo>
-                  <a:lnTo>
-                    <a:pt x="5996396" y="3461207"/>
-                  </a:lnTo>
-                  <a:lnTo>
-                    <a:pt x="5924773" y="3458919"/>
-                  </a:lnTo>
-                  <a:lnTo>
-                    <a:pt x="5853151" y="3456400"/>
-                  </a:lnTo>
-                  <a:lnTo>
-                    <a:pt x="5781528" y="3453625"/>
-                  </a:lnTo>
-                  <a:lnTo>
-                    <a:pt x="5709906" y="3450568"/>
-                  </a:lnTo>
-                  <a:lnTo>
-                    <a:pt x="5638283" y="3447201"/>
-                  </a:lnTo>
-                  <a:lnTo>
-                    <a:pt x="5566661" y="3443493"/>
-                  </a:lnTo>
-                  <a:lnTo>
-                    <a:pt x="5495038" y="3439408"/>
-                  </a:lnTo>
-                  <a:lnTo>
-                    <a:pt x="5423416" y="3434909"/>
-                  </a:lnTo>
-                  <a:lnTo>
-                    <a:pt x="5351793" y="3429953"/>
-                  </a:lnTo>
-                  <a:lnTo>
-                    <a:pt x="5280171" y="3424494"/>
-                  </a:lnTo>
-                  <a:lnTo>
-                    <a:pt x="5208548" y="3418482"/>
-                  </a:lnTo>
-                  <a:lnTo>
-                    <a:pt x="5136926" y="3411859"/>
-                  </a:lnTo>
-                  <a:lnTo>
-                    <a:pt x="5065303" y="3404564"/>
-                  </a:lnTo>
-                  <a:lnTo>
-                    <a:pt x="4993681" y="3396529"/>
-                  </a:lnTo>
-                  <a:lnTo>
-                    <a:pt x="4922058" y="3387678"/>
-                  </a:lnTo>
-                  <a:lnTo>
-                    <a:pt x="4850436" y="3377930"/>
-                  </a:lnTo>
-                  <a:lnTo>
-                    <a:pt x="4778813" y="3367192"/>
-                  </a:lnTo>
-                  <a:lnTo>
-                    <a:pt x="4707190" y="3355364"/>
-                  </a:lnTo>
-                  <a:lnTo>
-                    <a:pt x="4635568" y="3342336"/>
-                  </a:lnTo>
-                  <a:lnTo>
-                    <a:pt x="4563945" y="3327987"/>
-                  </a:lnTo>
-                  <a:lnTo>
-                    <a:pt x="4492323" y="3312181"/>
-                  </a:lnTo>
-                  <a:lnTo>
-                    <a:pt x="4420700" y="3294771"/>
-                  </a:lnTo>
-                  <a:lnTo>
-                    <a:pt x="4349078" y="3275594"/>
-                  </a:lnTo>
-                  <a:lnTo>
-                    <a:pt x="4277455" y="3254472"/>
-                  </a:lnTo>
-                  <a:lnTo>
-                    <a:pt x="4205833" y="3231206"/>
-                  </a:lnTo>
-                  <a:lnTo>
-                    <a:pt x="4134210" y="3205579"/>
-                  </a:lnTo>
-                  <a:lnTo>
-                    <a:pt x="4062588" y="3177351"/>
-                  </a:lnTo>
-                  <a:lnTo>
-                    <a:pt x="3990965" y="3146260"/>
-                  </a:lnTo>
-                  <a:lnTo>
-                    <a:pt x="3919343" y="3112013"/>
-                  </a:lnTo>
-                  <a:lnTo>
-                    <a:pt x="3847720" y="3074290"/>
-                  </a:lnTo>
-                  <a:lnTo>
-                    <a:pt x="3776098" y="3032740"/>
-                  </a:lnTo>
-                  <a:lnTo>
-                    <a:pt x="3704475" y="2986974"/>
-                  </a:lnTo>
-                  <a:lnTo>
-                    <a:pt x="3632853" y="2936563"/>
-                  </a:lnTo>
-                  <a:lnTo>
-                    <a:pt x="3561230" y="2881037"/>
-                  </a:lnTo>
-                  <a:lnTo>
-                    <a:pt x="3489608" y="2819876"/>
-                  </a:lnTo>
-                  <a:lnTo>
-                    <a:pt x="3417985" y="2752509"/>
-                  </a:lnTo>
-                  <a:lnTo>
-                    <a:pt x="3346362" y="2678306"/>
-                  </a:lnTo>
-                  <a:lnTo>
-                    <a:pt x="3274740" y="2636244"/>
-                  </a:lnTo>
-                  <a:lnTo>
-                    <a:pt x="3203117" y="2609635"/>
-                  </a:lnTo>
-                  <a:lnTo>
-                    <a:pt x="3131495" y="2582191"/>
-                  </a:lnTo>
-                  <a:lnTo>
-                    <a:pt x="3059872" y="2553884"/>
-                  </a:lnTo>
-                  <a:lnTo>
-                    <a:pt x="2988250" y="2524689"/>
-                  </a:lnTo>
-                  <a:lnTo>
-                    <a:pt x="2916627" y="2494577"/>
-                  </a:lnTo>
-                  <a:lnTo>
-                    <a:pt x="2845005" y="2463520"/>
-                  </a:lnTo>
-                  <a:lnTo>
-                    <a:pt x="2773382" y="2431488"/>
-                  </a:lnTo>
-                  <a:lnTo>
-                    <a:pt x="2701760" y="2398450"/>
-                  </a:lnTo>
-                  <a:lnTo>
-                    <a:pt x="2630137" y="2364375"/>
-                  </a:lnTo>
-                  <a:lnTo>
-                    <a:pt x="2558515" y="2329230"/>
-                  </a:lnTo>
-                  <a:lnTo>
-                    <a:pt x="2486892" y="2292981"/>
-                  </a:lnTo>
-                  <a:lnTo>
-                    <a:pt x="2415270" y="2255594"/>
-                  </a:lnTo>
-                  <a:lnTo>
-                    <a:pt x="2343647" y="2217034"/>
-                  </a:lnTo>
-                  <a:lnTo>
-                    <a:pt x="2272025" y="2177262"/>
-                  </a:lnTo>
-                  <a:lnTo>
-                    <a:pt x="2200402" y="2136242"/>
-                  </a:lnTo>
-                  <a:lnTo>
-                    <a:pt x="2128780" y="2093935"/>
-                  </a:lnTo>
-                  <a:lnTo>
-                    <a:pt x="2057157" y="2050298"/>
-                  </a:lnTo>
-                  <a:lnTo>
-                    <a:pt x="1985534" y="2005292"/>
-                  </a:lnTo>
-                  <a:lnTo>
-                    <a:pt x="1913912" y="1958873"/>
-                  </a:lnTo>
-                  <a:lnTo>
-                    <a:pt x="1842289" y="1910996"/>
-                  </a:lnTo>
-                  <a:lnTo>
-                    <a:pt x="1770667" y="1861616"/>
-                  </a:lnTo>
-                  <a:lnTo>
-                    <a:pt x="1699044" y="1810686"/>
-                  </a:lnTo>
-                  <a:lnTo>
-                    <a:pt x="1627422" y="1758156"/>
-                  </a:lnTo>
-                  <a:lnTo>
-                    <a:pt x="1555799" y="1703977"/>
-                  </a:lnTo>
-                  <a:lnTo>
-                    <a:pt x="1484177" y="1648098"/>
-                  </a:lnTo>
-                  <a:lnTo>
-                    <a:pt x="1412554" y="1590463"/>
-                  </a:lnTo>
-                  <a:lnTo>
-                    <a:pt x="1340932" y="1531019"/>
-                  </a:lnTo>
-                  <a:lnTo>
-                    <a:pt x="1269309" y="1469709"/>
-                  </a:lnTo>
-                  <a:lnTo>
-                    <a:pt x="1197687" y="1406474"/>
-                  </a:lnTo>
-                  <a:lnTo>
-                    <a:pt x="1126064" y="1341253"/>
-                  </a:lnTo>
-                  <a:lnTo>
-                    <a:pt x="1054442" y="1273985"/>
-                  </a:lnTo>
-                  <a:lnTo>
-                    <a:pt x="982819" y="1204605"/>
-                  </a:lnTo>
-                  <a:lnTo>
-                    <a:pt x="911197" y="1133046"/>
-                  </a:lnTo>
-                  <a:lnTo>
-                    <a:pt x="839574" y="1059241"/>
-                  </a:lnTo>
-                  <a:lnTo>
-                    <a:pt x="767952" y="983118"/>
-                  </a:lnTo>
-                  <a:lnTo>
-                    <a:pt x="696329" y="904605"/>
-                  </a:lnTo>
-                  <a:lnTo>
-                    <a:pt x="624706" y="823627"/>
-                  </a:lnTo>
-                  <a:lnTo>
-                    <a:pt x="553084" y="740107"/>
-                  </a:lnTo>
-                  <a:lnTo>
-                    <a:pt x="481461" y="653964"/>
-                  </a:lnTo>
-                  <a:lnTo>
-                    <a:pt x="409839" y="565117"/>
-                  </a:lnTo>
-                  <a:lnTo>
-                    <a:pt x="338216" y="473480"/>
-                  </a:lnTo>
-                  <a:lnTo>
-                    <a:pt x="266594" y="378966"/>
-                  </a:lnTo>
-                  <a:lnTo>
-                    <a:pt x="194971" y="281485"/>
-                  </a:lnTo>
-                  <a:lnTo>
-                    <a:pt x="123349" y="180943"/>
-                  </a:lnTo>
-                  <a:lnTo>
-                    <a:pt x="51726" y="77244"/>
-                  </a:lnTo>
-                  <a:lnTo>
-                    <a:pt x="0" y="0"/>
+                    <a:pt x="10267" y="18349"/>
+                  </a:lnTo>
+                  <a:lnTo>
+                    <a:pt x="80612" y="132481"/>
+                  </a:lnTo>
+                  <a:lnTo>
+                    <a:pt x="150956" y="236099"/>
+                  </a:lnTo>
+                  <a:lnTo>
+                    <a:pt x="221301" y="330171"/>
+                  </a:lnTo>
+                  <a:lnTo>
+                    <a:pt x="291645" y="415576"/>
+                  </a:lnTo>
+                  <a:lnTo>
+                    <a:pt x="361989" y="493113"/>
+                  </a:lnTo>
+                  <a:lnTo>
+                    <a:pt x="432334" y="563507"/>
+                  </a:lnTo>
+                  <a:lnTo>
+                    <a:pt x="502678" y="627415"/>
+                  </a:lnTo>
+                  <a:lnTo>
+                    <a:pt x="573023" y="685436"/>
+                  </a:lnTo>
+                  <a:lnTo>
+                    <a:pt x="643367" y="738111"/>
+                  </a:lnTo>
+                  <a:lnTo>
+                    <a:pt x="713712" y="785934"/>
+                  </a:lnTo>
+                  <a:lnTo>
+                    <a:pt x="784056" y="829351"/>
+                  </a:lnTo>
+                  <a:lnTo>
+                    <a:pt x="854401" y="868767"/>
+                  </a:lnTo>
+                  <a:lnTo>
+                    <a:pt x="924745" y="904553"/>
+                  </a:lnTo>
+                  <a:lnTo>
+                    <a:pt x="995090" y="937042"/>
+                  </a:lnTo>
+                  <a:lnTo>
+                    <a:pt x="1065434" y="960669"/>
+                  </a:lnTo>
+                  <a:lnTo>
+                    <a:pt x="1135779" y="969696"/>
+                  </a:lnTo>
+                  <a:lnTo>
+                    <a:pt x="1206123" y="978448"/>
+                  </a:lnTo>
+                  <a:lnTo>
+                    <a:pt x="1276468" y="986933"/>
+                  </a:lnTo>
+                  <a:lnTo>
+                    <a:pt x="1346812" y="995161"/>
+                  </a:lnTo>
+                  <a:lnTo>
+                    <a:pt x="1417157" y="1003138"/>
+                  </a:lnTo>
+                  <a:lnTo>
+                    <a:pt x="1487501" y="1010872"/>
+                  </a:lnTo>
+                  <a:lnTo>
+                    <a:pt x="1557846" y="1018370"/>
+                  </a:lnTo>
+                  <a:lnTo>
+                    <a:pt x="1628190" y="1025641"/>
+                  </a:lnTo>
+                  <a:lnTo>
+                    <a:pt x="1698535" y="1032690"/>
+                  </a:lnTo>
+                  <a:lnTo>
+                    <a:pt x="1768879" y="1039524"/>
+                  </a:lnTo>
+                  <a:lnTo>
+                    <a:pt x="1839224" y="1046151"/>
+                  </a:lnTo>
+                  <a:lnTo>
+                    <a:pt x="1909568" y="1052575"/>
+                  </a:lnTo>
+                  <a:lnTo>
+                    <a:pt x="1979913" y="1058804"/>
+                  </a:lnTo>
+                  <a:lnTo>
+                    <a:pt x="2050257" y="1064844"/>
+                  </a:lnTo>
+                  <a:lnTo>
+                    <a:pt x="2120602" y="1070700"/>
+                  </a:lnTo>
+                  <a:lnTo>
+                    <a:pt x="2190946" y="1076377"/>
+                  </a:lnTo>
+                  <a:lnTo>
+                    <a:pt x="2261291" y="1081882"/>
+                  </a:lnTo>
+                  <a:lnTo>
+                    <a:pt x="2331635" y="1087219"/>
+                  </a:lnTo>
+                  <a:lnTo>
+                    <a:pt x="2401980" y="1092393"/>
+                  </a:lnTo>
+                  <a:lnTo>
+                    <a:pt x="2472324" y="1097410"/>
+                  </a:lnTo>
+                  <a:lnTo>
+                    <a:pt x="2542669" y="1102274"/>
+                  </a:lnTo>
+                  <a:lnTo>
+                    <a:pt x="2613013" y="1106991"/>
+                  </a:lnTo>
+                  <a:lnTo>
+                    <a:pt x="2683358" y="1111563"/>
+                  </a:lnTo>
+                  <a:lnTo>
+                    <a:pt x="2753702" y="1115997"/>
+                  </a:lnTo>
+                  <a:lnTo>
+                    <a:pt x="2824047" y="1120295"/>
+                  </a:lnTo>
+                  <a:lnTo>
+                    <a:pt x="2894391" y="1124463"/>
+                  </a:lnTo>
+                  <a:lnTo>
+                    <a:pt x="2964736" y="1128504"/>
+                  </a:lnTo>
+                  <a:lnTo>
+                    <a:pt x="3035080" y="1132421"/>
+                  </a:lnTo>
+                  <a:lnTo>
+                    <a:pt x="3105425" y="1136220"/>
+                  </a:lnTo>
+                  <a:lnTo>
+                    <a:pt x="3175769" y="1139903"/>
+                  </a:lnTo>
+                  <a:lnTo>
+                    <a:pt x="3246114" y="1143473"/>
+                  </a:lnTo>
+                  <a:lnTo>
+                    <a:pt x="3316458" y="1146936"/>
+                  </a:lnTo>
+                  <a:lnTo>
+                    <a:pt x="3386803" y="1150292"/>
+                  </a:lnTo>
+                  <a:lnTo>
+                    <a:pt x="3457147" y="1153547"/>
+                  </a:lnTo>
+                  <a:lnTo>
+                    <a:pt x="3527492" y="1156702"/>
+                  </a:lnTo>
+                  <a:lnTo>
+                    <a:pt x="3597836" y="1159761"/>
+                  </a:lnTo>
+                  <a:lnTo>
+                    <a:pt x="3668181" y="1162728"/>
+                  </a:lnTo>
+                  <a:lnTo>
+                    <a:pt x="3738525" y="1165604"/>
+                  </a:lnTo>
+                  <a:lnTo>
+                    <a:pt x="3808870" y="1168392"/>
+                  </a:lnTo>
+                  <a:lnTo>
+                    <a:pt x="3879214" y="1171095"/>
+                  </a:lnTo>
+                  <a:lnTo>
+                    <a:pt x="3949559" y="1173717"/>
+                  </a:lnTo>
+                  <a:lnTo>
+                    <a:pt x="4019903" y="1176258"/>
+                  </a:lnTo>
+                  <a:lnTo>
+                    <a:pt x="4090247" y="1178722"/>
+                  </a:lnTo>
+                  <a:lnTo>
+                    <a:pt x="4160592" y="1181111"/>
+                  </a:lnTo>
+                  <a:lnTo>
+                    <a:pt x="4230936" y="1183427"/>
+                  </a:lnTo>
+                  <a:lnTo>
+                    <a:pt x="4301281" y="1185673"/>
+                  </a:lnTo>
+                  <a:lnTo>
+                    <a:pt x="4371625" y="1187851"/>
+                  </a:lnTo>
+                  <a:lnTo>
+                    <a:pt x="4441970" y="1189962"/>
+                  </a:lnTo>
+                  <a:lnTo>
+                    <a:pt x="4512314" y="1192009"/>
+                  </a:lnTo>
+                  <a:lnTo>
+                    <a:pt x="4582659" y="1193993"/>
+                  </a:lnTo>
+                  <a:lnTo>
+                    <a:pt x="4653003" y="1195917"/>
                   </a:lnTo>
                 </a:path>
               </a:pathLst>
@@ -4042,237 +3755,559 @@
           </p:nvSpPr>
           <p:spPr>
             <a:xfrm>
-              <a:off x="2977042" y="2073503"/>
-              <a:ext cx="5285636" cy="3452295"/>
+              <a:off x="1325197" y="2143092"/>
+              <a:ext cx="6874219" cy="1255100"/>
             </a:xfrm>
             <a:custGeom>
               <a:avLst/>
               <a:pathLst>
-                <a:path w="5285636" h="3452295">
+                <a:path w="6874219" h="1255100">
+                  <a:moveTo>
+                    <a:pt x="6874219" y="1255100"/>
+                  </a:moveTo>
+                  <a:lnTo>
+                    <a:pt x="6803874" y="1254886"/>
+                  </a:lnTo>
+                  <a:lnTo>
+                    <a:pt x="6733530" y="1254651"/>
+                  </a:lnTo>
+                  <a:lnTo>
+                    <a:pt x="6663185" y="1254393"/>
+                  </a:lnTo>
+                  <a:lnTo>
+                    <a:pt x="6592841" y="1254108"/>
+                  </a:lnTo>
+                  <a:lnTo>
+                    <a:pt x="6522496" y="1253794"/>
+                  </a:lnTo>
+                  <a:lnTo>
+                    <a:pt x="6452152" y="1253448"/>
+                  </a:lnTo>
+                  <a:lnTo>
+                    <a:pt x="6381807" y="1253067"/>
+                  </a:lnTo>
+                  <a:lnTo>
+                    <a:pt x="6311463" y="1252647"/>
+                  </a:lnTo>
+                  <a:lnTo>
+                    <a:pt x="6241118" y="1252185"/>
+                  </a:lnTo>
+                  <a:lnTo>
+                    <a:pt x="6170774" y="1251676"/>
+                  </a:lnTo>
+                  <a:lnTo>
+                    <a:pt x="6100429" y="1251115"/>
+                  </a:lnTo>
+                  <a:lnTo>
+                    <a:pt x="6030085" y="1250497"/>
+                  </a:lnTo>
+                  <a:lnTo>
+                    <a:pt x="5959740" y="1249817"/>
+                  </a:lnTo>
+                  <a:lnTo>
+                    <a:pt x="5889396" y="1249068"/>
+                  </a:lnTo>
+                  <a:lnTo>
+                    <a:pt x="5819051" y="1248242"/>
+                  </a:lnTo>
+                  <a:lnTo>
+                    <a:pt x="5748707" y="1247333"/>
+                  </a:lnTo>
+                  <a:lnTo>
+                    <a:pt x="5678363" y="1246332"/>
+                  </a:lnTo>
+                  <a:lnTo>
+                    <a:pt x="5608018" y="1245229"/>
+                  </a:lnTo>
+                  <a:lnTo>
+                    <a:pt x="5537674" y="1244014"/>
+                  </a:lnTo>
+                  <a:lnTo>
+                    <a:pt x="5467329" y="1242675"/>
+                  </a:lnTo>
+                  <a:lnTo>
+                    <a:pt x="5396985" y="1241201"/>
+                  </a:lnTo>
+                  <a:lnTo>
+                    <a:pt x="5326640" y="1239578"/>
+                  </a:lnTo>
+                  <a:lnTo>
+                    <a:pt x="5256296" y="1237789"/>
+                  </a:lnTo>
+                  <a:lnTo>
+                    <a:pt x="5185951" y="1235819"/>
+                  </a:lnTo>
+                  <a:lnTo>
+                    <a:pt x="5115607" y="1233649"/>
+                  </a:lnTo>
+                  <a:lnTo>
+                    <a:pt x="5045262" y="1231259"/>
+                  </a:lnTo>
+                  <a:lnTo>
+                    <a:pt x="4974918" y="1228627"/>
+                  </a:lnTo>
+                  <a:lnTo>
+                    <a:pt x="4904573" y="1225727"/>
+                  </a:lnTo>
+                  <a:lnTo>
+                    <a:pt x="4834229" y="1222533"/>
+                  </a:lnTo>
+                  <a:lnTo>
+                    <a:pt x="4763884" y="1219015"/>
+                  </a:lnTo>
+                  <a:lnTo>
+                    <a:pt x="4693540" y="1215140"/>
+                  </a:lnTo>
+                  <a:lnTo>
+                    <a:pt x="4623195" y="1210872"/>
+                  </a:lnTo>
+                  <a:lnTo>
+                    <a:pt x="4552851" y="1206170"/>
+                  </a:lnTo>
+                  <a:lnTo>
+                    <a:pt x="4482506" y="1200992"/>
+                  </a:lnTo>
+                  <a:lnTo>
+                    <a:pt x="4412162" y="1195288"/>
+                  </a:lnTo>
+                  <a:lnTo>
+                    <a:pt x="4341817" y="1189005"/>
+                  </a:lnTo>
+                  <a:lnTo>
+                    <a:pt x="4271473" y="1182085"/>
+                  </a:lnTo>
+                  <a:lnTo>
+                    <a:pt x="4201128" y="1174462"/>
+                  </a:lnTo>
+                  <a:lnTo>
+                    <a:pt x="4130784" y="1166066"/>
+                  </a:lnTo>
+                  <a:lnTo>
+                    <a:pt x="4060439" y="1156818"/>
+                  </a:lnTo>
+                  <a:lnTo>
+                    <a:pt x="3990095" y="1146631"/>
+                  </a:lnTo>
+                  <a:lnTo>
+                    <a:pt x="3919750" y="1135411"/>
+                  </a:lnTo>
+                  <a:lnTo>
+                    <a:pt x="3849406" y="1123052"/>
+                  </a:lnTo>
+                  <a:lnTo>
+                    <a:pt x="3779061" y="1109439"/>
+                  </a:lnTo>
+                  <a:lnTo>
+                    <a:pt x="3708717" y="1094444"/>
+                  </a:lnTo>
+                  <a:lnTo>
+                    <a:pt x="3638372" y="1077928"/>
+                  </a:lnTo>
+                  <a:lnTo>
+                    <a:pt x="3568028" y="1059736"/>
+                  </a:lnTo>
+                  <a:lnTo>
+                    <a:pt x="3497683" y="1039698"/>
+                  </a:lnTo>
+                  <a:lnTo>
+                    <a:pt x="3427339" y="1017627"/>
+                  </a:lnTo>
+                  <a:lnTo>
+                    <a:pt x="3356994" y="993315"/>
+                  </a:lnTo>
+                  <a:lnTo>
+                    <a:pt x="3286650" y="966537"/>
+                  </a:lnTo>
+                  <a:lnTo>
+                    <a:pt x="3216305" y="951358"/>
+                  </a:lnTo>
+                  <a:lnTo>
+                    <a:pt x="3145961" y="941756"/>
+                  </a:lnTo>
+                  <a:lnTo>
+                    <a:pt x="3075616" y="931852"/>
+                  </a:lnTo>
+                  <a:lnTo>
+                    <a:pt x="3005272" y="921636"/>
+                  </a:lnTo>
+                  <a:lnTo>
+                    <a:pt x="2934927" y="911101"/>
+                  </a:lnTo>
+                  <a:lnTo>
+                    <a:pt x="2864583" y="900234"/>
+                  </a:lnTo>
+                  <a:lnTo>
+                    <a:pt x="2794238" y="889026"/>
+                  </a:lnTo>
+                  <a:lnTo>
+                    <a:pt x="2723894" y="877467"/>
+                  </a:lnTo>
+                  <a:lnTo>
+                    <a:pt x="2653549" y="865544"/>
+                  </a:lnTo>
+                  <a:lnTo>
+                    <a:pt x="2583205" y="853247"/>
+                  </a:lnTo>
+                  <a:lnTo>
+                    <a:pt x="2512860" y="840564"/>
+                  </a:lnTo>
+                  <a:lnTo>
+                    <a:pt x="2442516" y="827483"/>
+                  </a:lnTo>
+                  <a:lnTo>
+                    <a:pt x="2372171" y="813991"/>
+                  </a:lnTo>
+                  <a:lnTo>
+                    <a:pt x="2301827" y="800075"/>
+                  </a:lnTo>
+                  <a:lnTo>
+                    <a:pt x="2231482" y="785722"/>
+                  </a:lnTo>
+                  <a:lnTo>
+                    <a:pt x="2161138" y="770919"/>
+                  </a:lnTo>
+                  <a:lnTo>
+                    <a:pt x="2090793" y="755651"/>
+                  </a:lnTo>
+                  <a:lnTo>
+                    <a:pt x="2020449" y="739904"/>
+                  </a:lnTo>
+                  <a:lnTo>
+                    <a:pt x="1950105" y="723662"/>
+                  </a:lnTo>
+                  <a:lnTo>
+                    <a:pt x="1879760" y="706911"/>
+                  </a:lnTo>
+                  <a:lnTo>
+                    <a:pt x="1809416" y="689633"/>
+                  </a:lnTo>
+                  <a:lnTo>
+                    <a:pt x="1739071" y="671813"/>
+                  </a:lnTo>
+                  <a:lnTo>
+                    <a:pt x="1668727" y="653433"/>
+                  </a:lnTo>
+                  <a:lnTo>
+                    <a:pt x="1598382" y="634477"/>
+                  </a:lnTo>
+                  <a:lnTo>
+                    <a:pt x="1528038" y="614925"/>
+                  </a:lnTo>
+                  <a:lnTo>
+                    <a:pt x="1457693" y="594759"/>
+                  </a:lnTo>
+                  <a:lnTo>
+                    <a:pt x="1387349" y="573960"/>
+                  </a:lnTo>
+                  <a:lnTo>
+                    <a:pt x="1317004" y="552509"/>
+                  </a:lnTo>
+                  <a:lnTo>
+                    <a:pt x="1246660" y="530383"/>
+                  </a:lnTo>
+                  <a:lnTo>
+                    <a:pt x="1176315" y="507563"/>
+                  </a:lnTo>
+                  <a:lnTo>
+                    <a:pt x="1105971" y="484027"/>
+                  </a:lnTo>
+                  <a:lnTo>
+                    <a:pt x="1035626" y="459751"/>
+                  </a:lnTo>
+                  <a:lnTo>
+                    <a:pt x="965282" y="434713"/>
+                  </a:lnTo>
+                  <a:lnTo>
+                    <a:pt x="894937" y="408889"/>
+                  </a:lnTo>
+                  <a:lnTo>
+                    <a:pt x="824593" y="382255"/>
+                  </a:lnTo>
+                  <a:lnTo>
+                    <a:pt x="754248" y="354784"/>
+                  </a:lnTo>
+                  <a:lnTo>
+                    <a:pt x="683904" y="326450"/>
+                  </a:lnTo>
+                  <a:lnTo>
+                    <a:pt x="613559" y="297227"/>
+                  </a:lnTo>
+                  <a:lnTo>
+                    <a:pt x="543215" y="267087"/>
+                  </a:lnTo>
+                  <a:lnTo>
+                    <a:pt x="472870" y="236000"/>
+                  </a:lnTo>
+                  <a:lnTo>
+                    <a:pt x="402526" y="203937"/>
+                  </a:lnTo>
+                  <a:lnTo>
+                    <a:pt x="332181" y="170868"/>
+                  </a:lnTo>
+                  <a:lnTo>
+                    <a:pt x="261837" y="136760"/>
+                  </a:lnTo>
+                  <a:lnTo>
+                    <a:pt x="191492" y="101581"/>
+                  </a:lnTo>
+                  <a:lnTo>
+                    <a:pt x="121148" y="65298"/>
+                  </a:lnTo>
+                  <a:lnTo>
+                    <a:pt x="50803" y="27875"/>
+                  </a:lnTo>
+                  <a:lnTo>
+                    <a:pt x="0" y="0"/>
+                  </a:lnTo>
+                </a:path>
+              </a:pathLst>
+            </a:custGeom>
+          </p:spPr>
+          <p:txBody>
+            <a:bodyPr/>
+            <a:lstStyle/>
+            <a:p/>
+          </p:txBody>
+        </p:sp>
+        <p:sp>
+          <p:nvSpPr>
+            <p:cNvPr id="24" name="pl24"/>
+            <p:cNvSpPr/>
+            <p:nvPr/>
+          </p:nvSpPr>
+          <p:spPr>
+            <a:xfrm>
+              <a:off x="3008096" y="2143092"/>
+              <a:ext cx="5191319" cy="1245852"/>
+            </a:xfrm>
+            <a:custGeom>
+              <a:avLst/>
+              <a:pathLst>
+                <a:path w="5191319" h="1245852">
                   <a:moveTo>
                     <a:pt x="0" y="0"/>
                   </a:moveTo>
                   <a:lnTo>
-                    <a:pt x="57192" y="174062"/>
-                  </a:lnTo>
-                  <a:lnTo>
-                    <a:pt x="128815" y="378572"/>
-                  </a:lnTo>
-                  <a:lnTo>
-                    <a:pt x="200437" y="570445"/>
-                  </a:lnTo>
-                  <a:lnTo>
-                    <a:pt x="272060" y="750461"/>
-                  </a:lnTo>
-                  <a:lnTo>
-                    <a:pt x="343682" y="919355"/>
-                  </a:lnTo>
-                  <a:lnTo>
-                    <a:pt x="415305" y="1077812"/>
-                  </a:lnTo>
-                  <a:lnTo>
-                    <a:pt x="486927" y="1226478"/>
-                  </a:lnTo>
-                  <a:lnTo>
-                    <a:pt x="558550" y="1365958"/>
-                  </a:lnTo>
-                  <a:lnTo>
-                    <a:pt x="630172" y="1496819"/>
-                  </a:lnTo>
-                  <a:lnTo>
-                    <a:pt x="701795" y="1619594"/>
-                  </a:lnTo>
-                  <a:lnTo>
-                    <a:pt x="773417" y="1734782"/>
-                  </a:lnTo>
-                  <a:lnTo>
-                    <a:pt x="845040" y="1842853"/>
-                  </a:lnTo>
-                  <a:lnTo>
-                    <a:pt x="916662" y="1944246"/>
-                  </a:lnTo>
-                  <a:lnTo>
-                    <a:pt x="988285" y="2039374"/>
-                  </a:lnTo>
-                  <a:lnTo>
-                    <a:pt x="1059907" y="2128624"/>
-                  </a:lnTo>
-                  <a:lnTo>
-                    <a:pt x="1131530" y="2212358"/>
-                  </a:lnTo>
-                  <a:lnTo>
-                    <a:pt x="1203152" y="2290919"/>
-                  </a:lnTo>
-                  <a:lnTo>
-                    <a:pt x="1274775" y="2364626"/>
-                  </a:lnTo>
-                  <a:lnTo>
-                    <a:pt x="1346398" y="2433778"/>
-                  </a:lnTo>
-                  <a:lnTo>
-                    <a:pt x="1418020" y="2498657"/>
-                  </a:lnTo>
-                  <a:lnTo>
-                    <a:pt x="1489643" y="2559527"/>
-                  </a:lnTo>
-                  <a:lnTo>
-                    <a:pt x="1561265" y="2616635"/>
-                  </a:lnTo>
-                  <a:lnTo>
-                    <a:pt x="1632888" y="2670215"/>
-                  </a:lnTo>
-                  <a:lnTo>
-                    <a:pt x="1704510" y="2720485"/>
-                  </a:lnTo>
-                  <a:lnTo>
-                    <a:pt x="1776133" y="2767648"/>
-                  </a:lnTo>
-                  <a:lnTo>
-                    <a:pt x="1847755" y="2811896"/>
-                  </a:lnTo>
-                  <a:lnTo>
-                    <a:pt x="1919378" y="2853411"/>
-                  </a:lnTo>
-                  <a:lnTo>
-                    <a:pt x="1991000" y="2892360"/>
-                  </a:lnTo>
-                  <a:lnTo>
-                    <a:pt x="2062623" y="2928903"/>
-                  </a:lnTo>
-                  <a:lnTo>
-                    <a:pt x="2134245" y="2963187"/>
-                  </a:lnTo>
-                  <a:lnTo>
-                    <a:pt x="2205868" y="2995353"/>
-                  </a:lnTo>
-                  <a:lnTo>
-                    <a:pt x="2277490" y="3025532"/>
-                  </a:lnTo>
-                  <a:lnTo>
-                    <a:pt x="2349113" y="3053845"/>
-                  </a:lnTo>
-                  <a:lnTo>
-                    <a:pt x="2420735" y="3080410"/>
-                  </a:lnTo>
-                  <a:lnTo>
-                    <a:pt x="2492358" y="3105332"/>
-                  </a:lnTo>
-                  <a:lnTo>
-                    <a:pt x="2563980" y="3128715"/>
-                  </a:lnTo>
-                  <a:lnTo>
-                    <a:pt x="2635603" y="3150653"/>
-                  </a:lnTo>
-                  <a:lnTo>
-                    <a:pt x="2707226" y="3171235"/>
-                  </a:lnTo>
-                  <a:lnTo>
-                    <a:pt x="2778848" y="3190546"/>
-                  </a:lnTo>
-                  <a:lnTo>
-                    <a:pt x="2850471" y="3208663"/>
-                  </a:lnTo>
-                  <a:lnTo>
-                    <a:pt x="2922093" y="3225661"/>
-                  </a:lnTo>
-                  <a:lnTo>
-                    <a:pt x="2993716" y="3241608"/>
-                  </a:lnTo>
-                  <a:lnTo>
-                    <a:pt x="3065338" y="3256570"/>
-                  </a:lnTo>
-                  <a:lnTo>
-                    <a:pt x="3136961" y="3270608"/>
-                  </a:lnTo>
-                  <a:lnTo>
-                    <a:pt x="3208583" y="3283778"/>
-                  </a:lnTo>
-                  <a:lnTo>
-                    <a:pt x="3280206" y="3296134"/>
-                  </a:lnTo>
-                  <a:lnTo>
-                    <a:pt x="3351828" y="3307727"/>
-                  </a:lnTo>
-                  <a:lnTo>
-                    <a:pt x="3423451" y="3318604"/>
-                  </a:lnTo>
-                  <a:lnTo>
-                    <a:pt x="3495073" y="3328808"/>
-                  </a:lnTo>
-                  <a:lnTo>
-                    <a:pt x="3566696" y="3338382"/>
-                  </a:lnTo>
-                  <a:lnTo>
-                    <a:pt x="3638318" y="3347364"/>
-                  </a:lnTo>
-                  <a:lnTo>
-                    <a:pt x="3709941" y="3355791"/>
-                  </a:lnTo>
-                  <a:lnTo>
-                    <a:pt x="3781563" y="3363698"/>
-                  </a:lnTo>
-                  <a:lnTo>
-                    <a:pt x="3853186" y="3371116"/>
-                  </a:lnTo>
-                  <a:lnTo>
-                    <a:pt x="3924808" y="3378075"/>
-                  </a:lnTo>
-                  <a:lnTo>
-                    <a:pt x="3996431" y="3384605"/>
-                  </a:lnTo>
-                  <a:lnTo>
-                    <a:pt x="4068053" y="3390731"/>
-                  </a:lnTo>
-                  <a:lnTo>
-                    <a:pt x="4139676" y="3396479"/>
-                  </a:lnTo>
-                  <a:lnTo>
-                    <a:pt x="4211299" y="3401871"/>
-                  </a:lnTo>
-                  <a:lnTo>
-                    <a:pt x="4282921" y="3406930"/>
-                  </a:lnTo>
-                  <a:lnTo>
-                    <a:pt x="4354544" y="3411677"/>
-                  </a:lnTo>
-                  <a:lnTo>
-                    <a:pt x="4426166" y="3416130"/>
-                  </a:lnTo>
-                  <a:lnTo>
-                    <a:pt x="4497789" y="3420308"/>
-                  </a:lnTo>
-                  <a:lnTo>
-                    <a:pt x="4569411" y="3424228"/>
-                  </a:lnTo>
-                  <a:lnTo>
-                    <a:pt x="4641034" y="3427906"/>
-                  </a:lnTo>
-                  <a:lnTo>
-                    <a:pt x="4712656" y="3431356"/>
-                  </a:lnTo>
-                  <a:lnTo>
-                    <a:pt x="4784279" y="3434594"/>
-                  </a:lnTo>
-                  <a:lnTo>
-                    <a:pt x="4855901" y="3437631"/>
-                  </a:lnTo>
-                  <a:lnTo>
-                    <a:pt x="4927524" y="3440480"/>
-                  </a:lnTo>
-                  <a:lnTo>
-                    <a:pt x="4999146" y="3443154"/>
-                  </a:lnTo>
-                  <a:lnTo>
-                    <a:pt x="5070769" y="3445662"/>
-                  </a:lnTo>
-                  <a:lnTo>
-                    <a:pt x="5142391" y="3448015"/>
-                  </a:lnTo>
-                  <a:lnTo>
-                    <a:pt x="5214014" y="3450223"/>
-                  </a:lnTo>
-                  <a:lnTo>
-                    <a:pt x="5285636" y="3452295"/>
+                    <a:pt x="56171" y="62814"/>
+                  </a:lnTo>
+                  <a:lnTo>
+                    <a:pt x="126516" y="136617"/>
+                  </a:lnTo>
+                  <a:lnTo>
+                    <a:pt x="196860" y="205860"/>
+                  </a:lnTo>
+                  <a:lnTo>
+                    <a:pt x="267205" y="270824"/>
+                  </a:lnTo>
+                  <a:lnTo>
+                    <a:pt x="337549" y="331773"/>
+                  </a:lnTo>
+                  <a:lnTo>
+                    <a:pt x="407894" y="388957"/>
+                  </a:lnTo>
+                  <a:lnTo>
+                    <a:pt x="478238" y="442607"/>
+                  </a:lnTo>
+                  <a:lnTo>
+                    <a:pt x="548583" y="492942"/>
+                  </a:lnTo>
+                  <a:lnTo>
+                    <a:pt x="618927" y="540166"/>
+                  </a:lnTo>
+                  <a:lnTo>
+                    <a:pt x="689272" y="584473"/>
+                  </a:lnTo>
+                  <a:lnTo>
+                    <a:pt x="759616" y="626042"/>
+                  </a:lnTo>
+                  <a:lnTo>
+                    <a:pt x="829961" y="665042"/>
+                  </a:lnTo>
+                  <a:lnTo>
+                    <a:pt x="900305" y="701632"/>
+                  </a:lnTo>
+                  <a:lnTo>
+                    <a:pt x="970650" y="735962"/>
+                  </a:lnTo>
+                  <a:lnTo>
+                    <a:pt x="1040994" y="768170"/>
+                  </a:lnTo>
+                  <a:lnTo>
+                    <a:pt x="1111339" y="798388"/>
+                  </a:lnTo>
+                  <a:lnTo>
+                    <a:pt x="1181683" y="826739"/>
+                  </a:lnTo>
+                  <a:lnTo>
+                    <a:pt x="1252028" y="853337"/>
+                  </a:lnTo>
+                  <a:lnTo>
+                    <a:pt x="1322372" y="878293"/>
+                  </a:lnTo>
+                  <a:lnTo>
+                    <a:pt x="1392717" y="901706"/>
+                  </a:lnTo>
+                  <a:lnTo>
+                    <a:pt x="1463061" y="923673"/>
+                  </a:lnTo>
+                  <a:lnTo>
+                    <a:pt x="1533406" y="944282"/>
+                  </a:lnTo>
+                  <a:lnTo>
+                    <a:pt x="1603750" y="963618"/>
+                  </a:lnTo>
+                  <a:lnTo>
+                    <a:pt x="1674095" y="981759"/>
+                  </a:lnTo>
+                  <a:lnTo>
+                    <a:pt x="1744439" y="998779"/>
+                  </a:lnTo>
+                  <a:lnTo>
+                    <a:pt x="1814784" y="1014747"/>
+                  </a:lnTo>
+                  <a:lnTo>
+                    <a:pt x="1885128" y="1029729"/>
+                  </a:lnTo>
+                  <a:lnTo>
+                    <a:pt x="1955473" y="1043784"/>
+                  </a:lnTo>
+                  <a:lnTo>
+                    <a:pt x="2025817" y="1056972"/>
+                  </a:lnTo>
+                  <a:lnTo>
+                    <a:pt x="2096162" y="1069344"/>
+                  </a:lnTo>
+                  <a:lnTo>
+                    <a:pt x="2166506" y="1080952"/>
+                  </a:lnTo>
+                  <a:lnTo>
+                    <a:pt x="2236851" y="1091843"/>
+                  </a:lnTo>
+                  <a:lnTo>
+                    <a:pt x="2307195" y="1102061"/>
+                  </a:lnTo>
+                  <a:lnTo>
+                    <a:pt x="2377540" y="1111647"/>
+                  </a:lnTo>
+                  <a:lnTo>
+                    <a:pt x="2447884" y="1120641"/>
+                  </a:lnTo>
+                  <a:lnTo>
+                    <a:pt x="2518229" y="1129079"/>
+                  </a:lnTo>
+                  <a:lnTo>
+                    <a:pt x="2588573" y="1136996"/>
+                  </a:lnTo>
+                  <a:lnTo>
+                    <a:pt x="2658918" y="1144424"/>
+                  </a:lnTo>
+                  <a:lnTo>
+                    <a:pt x="2729262" y="1151393"/>
+                  </a:lnTo>
+                  <a:lnTo>
+                    <a:pt x="2799607" y="1157931"/>
+                  </a:lnTo>
+                  <a:lnTo>
+                    <a:pt x="2869951" y="1164065"/>
+                  </a:lnTo>
+                  <a:lnTo>
+                    <a:pt x="2940296" y="1169820"/>
+                  </a:lnTo>
+                  <a:lnTo>
+                    <a:pt x="3010640" y="1175219"/>
+                  </a:lnTo>
+                  <a:lnTo>
+                    <a:pt x="3080985" y="1180285"/>
+                  </a:lnTo>
+                  <a:lnTo>
+                    <a:pt x="3151329" y="1185038"/>
+                  </a:lnTo>
+                  <a:lnTo>
+                    <a:pt x="3221674" y="1189497"/>
+                  </a:lnTo>
+                  <a:lnTo>
+                    <a:pt x="3292018" y="1193681"/>
+                  </a:lnTo>
+                  <a:lnTo>
+                    <a:pt x="3362363" y="1197606"/>
+                  </a:lnTo>
+                  <a:lnTo>
+                    <a:pt x="3432707" y="1201288"/>
+                  </a:lnTo>
+                  <a:lnTo>
+                    <a:pt x="3503052" y="1204743"/>
+                  </a:lnTo>
+                  <a:lnTo>
+                    <a:pt x="3573396" y="1207985"/>
+                  </a:lnTo>
+                  <a:lnTo>
+                    <a:pt x="3643741" y="1211026"/>
+                  </a:lnTo>
+                  <a:lnTo>
+                    <a:pt x="3714085" y="1213879"/>
+                  </a:lnTo>
+                  <a:lnTo>
+                    <a:pt x="3784429" y="1216556"/>
+                  </a:lnTo>
+                  <a:lnTo>
+                    <a:pt x="3854774" y="1219068"/>
+                  </a:lnTo>
+                  <a:lnTo>
+                    <a:pt x="3925118" y="1221424"/>
+                  </a:lnTo>
+                  <a:lnTo>
+                    <a:pt x="3995463" y="1223635"/>
+                  </a:lnTo>
+                  <a:lnTo>
+                    <a:pt x="4065807" y="1225709"/>
+                  </a:lnTo>
+                  <a:lnTo>
+                    <a:pt x="4136152" y="1227655"/>
+                  </a:lnTo>
+                  <a:lnTo>
+                    <a:pt x="4206496" y="1229481"/>
+                  </a:lnTo>
+                  <a:lnTo>
+                    <a:pt x="4276841" y="1231194"/>
+                  </a:lnTo>
+                  <a:lnTo>
+                    <a:pt x="4347185" y="1232801"/>
+                  </a:lnTo>
+                  <a:lnTo>
+                    <a:pt x="4417530" y="1234308"/>
+                  </a:lnTo>
+                  <a:lnTo>
+                    <a:pt x="4487874" y="1235723"/>
+                  </a:lnTo>
+                  <a:lnTo>
+                    <a:pt x="4558219" y="1237050"/>
+                  </a:lnTo>
+                  <a:lnTo>
+                    <a:pt x="4628563" y="1238295"/>
+                  </a:lnTo>
+                  <a:lnTo>
+                    <a:pt x="4698908" y="1239464"/>
+                  </a:lnTo>
+                  <a:lnTo>
+                    <a:pt x="4769252" y="1240560"/>
+                  </a:lnTo>
+                  <a:lnTo>
+                    <a:pt x="4839597" y="1241588"/>
+                  </a:lnTo>
+                  <a:lnTo>
+                    <a:pt x="4909941" y="1242553"/>
+                  </a:lnTo>
+                  <a:lnTo>
+                    <a:pt x="4980286" y="1243458"/>
+                  </a:lnTo>
+                  <a:lnTo>
+                    <a:pt x="5050630" y="1244307"/>
+                  </a:lnTo>
+                  <a:lnTo>
+                    <a:pt x="5120975" y="1245104"/>
+                  </a:lnTo>
+                  <a:lnTo>
+                    <a:pt x="5191319" y="1245852"/>
                   </a:lnTo>
                 </a:path>
               </a:pathLst>
@@ -4295,27 +4330,27 @@
         </p:sp>
         <p:sp>
           <p:nvSpPr>
-            <p:cNvPr id="24" name="pl24"/>
+            <p:cNvPr id="25" name="pl25"/>
             <p:cNvSpPr/>
             <p:nvPr/>
           </p:nvSpPr>
           <p:spPr>
             <a:xfrm>
-              <a:off x="817517" y="4727786"/>
-              <a:ext cx="7799693" cy="0"/>
+              <a:off x="887106" y="3100960"/>
+              <a:ext cx="7660515" cy="0"/>
             </a:xfrm>
             <a:custGeom>
               <a:avLst/>
               <a:pathLst>
-                <a:path w="7799693" h="0">
+                <a:path w="7660515" h="0">
                   <a:moveTo>
                     <a:pt x="0" y="0"/>
                   </a:moveTo>
                   <a:lnTo>
-                    <a:pt x="7799693" y="0"/>
-                  </a:lnTo>
-                  <a:lnTo>
-                    <a:pt x="7799693" y="0"/>
+                    <a:pt x="7660515" y="0"/>
+                  </a:lnTo>
+                  <a:lnTo>
+                    <a:pt x="7660515" y="0"/>
                   </a:lnTo>
                 </a:path>
               </a:pathLst>
@@ -4338,21 +4373,21 @@
         </p:sp>
         <p:sp>
           <p:nvSpPr>
-            <p:cNvPr id="25" name="pl25"/>
+            <p:cNvPr id="26" name="pl26"/>
             <p:cNvSpPr/>
             <p:nvPr/>
           </p:nvSpPr>
           <p:spPr>
             <a:xfrm>
-              <a:off x="4588151" y="2073503"/>
-              <a:ext cx="0" cy="3649639"/>
+              <a:off x="4590457" y="2143092"/>
+              <a:ext cx="0" cy="1317069"/>
             </a:xfrm>
             <a:custGeom>
               <a:avLst/>
               <a:pathLst>
-                <a:path w="0" h="3649639">
+                <a:path w="0" h="1317069">
                   <a:moveTo>
-                    <a:pt x="0" y="3649639"/>
+                    <a:pt x="0" y="1317069"/>
                   </a:moveTo>
                   <a:lnTo>
                     <a:pt x="0" y="0"/>
@@ -4381,13 +4416,13 @@
         </p:sp>
         <p:sp>
           <p:nvSpPr>
-            <p:cNvPr id="26" name="tx26"/>
+            <p:cNvPr id="27" name="tx27"/>
             <p:cNvSpPr/>
             <p:nvPr/>
           </p:nvSpPr>
           <p:spPr>
             <a:xfrm>
-              <a:off x="692708" y="5517199"/>
+              <a:off x="762297" y="3360243"/>
               <a:ext cx="62179" cy="80101"/>
             </a:xfrm>
             <a:prstGeom prst="rect">
@@ -4427,13 +4462,13 @@
         </p:sp>
         <p:sp>
           <p:nvSpPr>
-            <p:cNvPr id="27" name="tx27"/>
+            <p:cNvPr id="28" name="tx28"/>
             <p:cNvSpPr/>
             <p:nvPr/>
           </p:nvSpPr>
           <p:spPr>
             <a:xfrm>
-              <a:off x="692708" y="4687735"/>
+              <a:off x="762297" y="3060909"/>
               <a:ext cx="62179" cy="80101"/>
             </a:xfrm>
             <a:prstGeom prst="rect">
@@ -4473,13 +4508,13 @@
         </p:sp>
         <p:sp>
           <p:nvSpPr>
-            <p:cNvPr id="28" name="tx28"/>
+            <p:cNvPr id="29" name="tx29"/>
             <p:cNvSpPr/>
             <p:nvPr/>
           </p:nvSpPr>
           <p:spPr>
             <a:xfrm>
-              <a:off x="692708" y="3858272"/>
+              <a:off x="762297" y="2761575"/>
               <a:ext cx="62179" cy="80101"/>
             </a:xfrm>
             <a:prstGeom prst="rect">
@@ -4519,13 +4554,13 @@
         </p:sp>
         <p:sp>
           <p:nvSpPr>
-            <p:cNvPr id="29" name="tx29"/>
+            <p:cNvPr id="30" name="tx30"/>
             <p:cNvSpPr/>
             <p:nvPr/>
           </p:nvSpPr>
           <p:spPr>
             <a:xfrm>
-              <a:off x="692708" y="3028808"/>
+              <a:off x="762297" y="2462242"/>
               <a:ext cx="62179" cy="80101"/>
             </a:xfrm>
             <a:prstGeom prst="rect">
@@ -4565,13 +4600,13 @@
         </p:sp>
         <p:sp>
           <p:nvSpPr>
-            <p:cNvPr id="30" name="tx30"/>
+            <p:cNvPr id="31" name="tx31"/>
             <p:cNvSpPr/>
             <p:nvPr/>
           </p:nvSpPr>
           <p:spPr>
             <a:xfrm>
-              <a:off x="692708" y="2199345"/>
+              <a:off x="762297" y="2162908"/>
               <a:ext cx="62179" cy="80101"/>
             </a:xfrm>
             <a:prstGeom prst="rect">
@@ -4611,13 +4646,13 @@
         </p:sp>
         <p:sp>
           <p:nvSpPr>
-            <p:cNvPr id="31" name="tx31"/>
+            <p:cNvPr id="32" name="tx32"/>
             <p:cNvSpPr/>
             <p:nvPr/>
           </p:nvSpPr>
           <p:spPr>
             <a:xfrm>
-              <a:off x="2360651" y="5785772"/>
+              <a:off x="2401262" y="3522791"/>
               <a:ext cx="161574" cy="80101"/>
             </a:xfrm>
             <a:prstGeom prst="rect">
@@ -4657,13 +4692,13 @@
         </p:sp>
         <p:sp>
           <p:nvSpPr>
-            <p:cNvPr id="32" name="tx32"/>
+            <p:cNvPr id="33" name="tx33"/>
             <p:cNvSpPr/>
             <p:nvPr/>
           </p:nvSpPr>
           <p:spPr>
             <a:xfrm>
-              <a:off x="4561958" y="5785772"/>
+              <a:off x="4564176" y="3522791"/>
               <a:ext cx="62179" cy="80101"/>
             </a:xfrm>
             <a:prstGeom prst="rect">
@@ -4703,13 +4738,13 @@
         </p:sp>
         <p:sp>
           <p:nvSpPr>
-            <p:cNvPr id="33" name="tx33"/>
+            <p:cNvPr id="34" name="tx34"/>
             <p:cNvSpPr/>
             <p:nvPr/>
           </p:nvSpPr>
           <p:spPr>
             <a:xfrm>
-              <a:off x="6682478" y="5785772"/>
+              <a:off x="6646302" y="3522791"/>
               <a:ext cx="124358" cy="80101"/>
             </a:xfrm>
             <a:prstGeom prst="rect">
@@ -4749,13 +4784,13 @@
         </p:sp>
         <p:sp>
           <p:nvSpPr>
-            <p:cNvPr id="34" name="tx34"/>
+            <p:cNvPr id="35" name="tx35"/>
             <p:cNvSpPr/>
             <p:nvPr/>
           </p:nvSpPr>
           <p:spPr>
             <a:xfrm>
-              <a:off x="2928340" y="5925448"/>
+              <a:off x="2928340" y="3662467"/>
               <a:ext cx="3578047" cy="100218"/>
             </a:xfrm>
             <a:prstGeom prst="rect">
@@ -4795,13 +4830,13 @@
         </p:sp>
         <p:sp>
           <p:nvSpPr>
-            <p:cNvPr id="35" name="tx35"/>
+            <p:cNvPr id="36" name="tx36"/>
             <p:cNvSpPr/>
             <p:nvPr/>
           </p:nvSpPr>
           <p:spPr>
             <a:xfrm rot="-5400000">
-              <a:off x="68446" y="3848213"/>
+              <a:off x="138035" y="2751517"/>
               <a:ext cx="1016904" cy="100218"/>
             </a:xfrm>
             <a:prstGeom prst="rect">
@@ -4841,13 +4876,13 @@
         </p:sp>
         <p:sp>
           <p:nvSpPr>
-            <p:cNvPr id="36" name="tx36"/>
+            <p:cNvPr id="37" name="tx37"/>
             <p:cNvSpPr/>
             <p:nvPr/>
           </p:nvSpPr>
           <p:spPr>
             <a:xfrm>
-              <a:off x="817517" y="1896563"/>
+              <a:off x="887106" y="1966152"/>
               <a:ext cx="6451914" cy="82021"/>
             </a:xfrm>
             <a:prstGeom prst="rect">
@@ -4887,13 +4922,3430 @@
         </p:sp>
         <p:sp>
           <p:nvSpPr>
-            <p:cNvPr id="37" name="tx37"/>
+            <p:cNvPr id="38" name="tx38"/>
             <p:cNvSpPr/>
             <p:nvPr/>
           </p:nvSpPr>
           <p:spPr>
             <a:xfrm>
-              <a:off x="817517" y="1669789"/>
+              <a:off x="887106" y="1739378"/>
+              <a:ext cx="270022" cy="120152"/>
+            </a:xfrm>
+            <a:prstGeom prst="rect">
+              <a:avLst/>
+            </a:prstGeom>
+            <a:noFill/>
+          </p:spPr>
+          <p:txBody>
+            <a:bodyPr lIns="0" rIns="0" tIns="0" bIns="0" anchorCtr="1" anchor="ctr" wrap="none"/>
+            <a:lstStyle/>
+            <a:p>
+              <a:pPr algn="l" marL="0" marR="0" indent="0">
+                <a:lnSpc>
+                  <a:spcPts val="1320"/>
+                </a:lnSpc>
+                <a:spcBef>
+                  <a:spcPts val="0"/>
+                </a:spcBef>
+                <a:spcAft>
+                  <a:spcPts val="0"/>
+                </a:spcAft>
+              </a:pPr>
+              <a:r>
+                <a:rPr sz="1320">
+                  <a:solidFill>
+                    <a:srgbClr val="000000">
+                      <a:alpha val="100000"/>
+                    </a:srgbClr>
+                  </a:solidFill>
+                  <a:latin typeface="Helvetica"/>
+                  <a:cs typeface="Helvetica"/>
+                </a:rPr>
+                <a:t>AKI</a:t>
+              </a:r>
+            </a:p>
+          </p:txBody>
+        </p:sp>
+        <p:sp>
+          <p:nvSpPr>
+            <p:cNvPr id="39" name="pl39"/>
+            <p:cNvSpPr/>
+            <p:nvPr/>
+          </p:nvSpPr>
+          <p:spPr>
+            <a:xfrm>
+              <a:off x="887106" y="5444019"/>
+              <a:ext cx="7660515" cy="0"/>
+            </a:xfrm>
+            <a:custGeom>
+              <a:avLst/>
+              <a:pathLst>
+                <a:path w="7660515" h="0">
+                  <a:moveTo>
+                    <a:pt x="0" y="0"/>
+                  </a:moveTo>
+                  <a:lnTo>
+                    <a:pt x="7660515" y="0"/>
+                  </a:lnTo>
+                  <a:lnTo>
+                    <a:pt x="7660515" y="0"/>
+                  </a:lnTo>
+                </a:path>
+              </a:pathLst>
+            </a:custGeom>
+            <a:ln w="6775" cap="flat">
+              <a:solidFill>
+                <a:srgbClr val="EBEBEB">
+                  <a:alpha val="100000"/>
+                </a:srgbClr>
+              </a:solidFill>
+              <a:prstDash val="solid"/>
+              <a:round/>
+            </a:ln>
+          </p:spPr>
+          <p:txBody>
+            <a:bodyPr/>
+            <a:lstStyle/>
+            <a:p/>
+          </p:txBody>
+        </p:sp>
+        <p:sp>
+          <p:nvSpPr>
+            <p:cNvPr id="40" name="pl40"/>
+            <p:cNvSpPr/>
+            <p:nvPr/>
+          </p:nvSpPr>
+          <p:spPr>
+            <a:xfrm>
+              <a:off x="887106" y="5144686"/>
+              <a:ext cx="7660515" cy="0"/>
+            </a:xfrm>
+            <a:custGeom>
+              <a:avLst/>
+              <a:pathLst>
+                <a:path w="7660515" h="0">
+                  <a:moveTo>
+                    <a:pt x="0" y="0"/>
+                  </a:moveTo>
+                  <a:lnTo>
+                    <a:pt x="7660515" y="0"/>
+                  </a:lnTo>
+                  <a:lnTo>
+                    <a:pt x="7660515" y="0"/>
+                  </a:lnTo>
+                </a:path>
+              </a:pathLst>
+            </a:custGeom>
+            <a:ln w="6775" cap="flat">
+              <a:solidFill>
+                <a:srgbClr val="EBEBEB">
+                  <a:alpha val="100000"/>
+                </a:srgbClr>
+              </a:solidFill>
+              <a:prstDash val="solid"/>
+              <a:round/>
+            </a:ln>
+          </p:spPr>
+          <p:txBody>
+            <a:bodyPr/>
+            <a:lstStyle/>
+            <a:p/>
+          </p:txBody>
+        </p:sp>
+        <p:sp>
+          <p:nvSpPr>
+            <p:cNvPr id="41" name="pl41"/>
+            <p:cNvSpPr/>
+            <p:nvPr/>
+          </p:nvSpPr>
+          <p:spPr>
+            <a:xfrm>
+              <a:off x="887106" y="4845352"/>
+              <a:ext cx="7660515" cy="0"/>
+            </a:xfrm>
+            <a:custGeom>
+              <a:avLst/>
+              <a:pathLst>
+                <a:path w="7660515" h="0">
+                  <a:moveTo>
+                    <a:pt x="0" y="0"/>
+                  </a:moveTo>
+                  <a:lnTo>
+                    <a:pt x="7660515" y="0"/>
+                  </a:lnTo>
+                  <a:lnTo>
+                    <a:pt x="7660515" y="0"/>
+                  </a:lnTo>
+                </a:path>
+              </a:pathLst>
+            </a:custGeom>
+            <a:ln w="6775" cap="flat">
+              <a:solidFill>
+                <a:srgbClr val="EBEBEB">
+                  <a:alpha val="100000"/>
+                </a:srgbClr>
+              </a:solidFill>
+              <a:prstDash val="solid"/>
+              <a:round/>
+            </a:ln>
+          </p:spPr>
+          <p:txBody>
+            <a:bodyPr/>
+            <a:lstStyle/>
+            <a:p/>
+          </p:txBody>
+        </p:sp>
+        <p:sp>
+          <p:nvSpPr>
+            <p:cNvPr id="42" name="pl42"/>
+            <p:cNvSpPr/>
+            <p:nvPr/>
+          </p:nvSpPr>
+          <p:spPr>
+            <a:xfrm>
+              <a:off x="887106" y="4546018"/>
+              <a:ext cx="7660515" cy="0"/>
+            </a:xfrm>
+            <a:custGeom>
+              <a:avLst/>
+              <a:pathLst>
+                <a:path w="7660515" h="0">
+                  <a:moveTo>
+                    <a:pt x="0" y="0"/>
+                  </a:moveTo>
+                  <a:lnTo>
+                    <a:pt x="7660515" y="0"/>
+                  </a:lnTo>
+                  <a:lnTo>
+                    <a:pt x="7660515" y="0"/>
+                  </a:lnTo>
+                </a:path>
+              </a:pathLst>
+            </a:custGeom>
+            <a:ln w="6775" cap="flat">
+              <a:solidFill>
+                <a:srgbClr val="EBEBEB">
+                  <a:alpha val="100000"/>
+                </a:srgbClr>
+              </a:solidFill>
+              <a:prstDash val="solid"/>
+              <a:round/>
+            </a:ln>
+          </p:spPr>
+          <p:txBody>
+            <a:bodyPr/>
+            <a:lstStyle/>
+            <a:p/>
+          </p:txBody>
+        </p:sp>
+        <p:sp>
+          <p:nvSpPr>
+            <p:cNvPr id="43" name="pl43"/>
+            <p:cNvSpPr/>
+            <p:nvPr/>
+          </p:nvSpPr>
+          <p:spPr>
+            <a:xfrm>
+              <a:off x="1636763" y="4336484"/>
+              <a:ext cx="0" cy="1317069"/>
+            </a:xfrm>
+            <a:custGeom>
+              <a:avLst/>
+              <a:pathLst>
+                <a:path w="0" h="1317069">
+                  <a:moveTo>
+                    <a:pt x="0" y="1317069"/>
+                  </a:moveTo>
+                  <a:lnTo>
+                    <a:pt x="0" y="0"/>
+                  </a:lnTo>
+                  <a:lnTo>
+                    <a:pt x="0" y="0"/>
+                  </a:lnTo>
+                </a:path>
+              </a:pathLst>
+            </a:custGeom>
+            <a:ln w="6775" cap="flat">
+              <a:solidFill>
+                <a:srgbClr val="EBEBEB">
+                  <a:alpha val="100000"/>
+                </a:srgbClr>
+              </a:solidFill>
+              <a:prstDash val="solid"/>
+              <a:round/>
+            </a:ln>
+          </p:spPr>
+          <p:txBody>
+            <a:bodyPr/>
+            <a:lstStyle/>
+            <a:p/>
+          </p:txBody>
+        </p:sp>
+        <p:sp>
+          <p:nvSpPr>
+            <p:cNvPr id="44" name="pl44"/>
+            <p:cNvSpPr/>
+            <p:nvPr/>
+          </p:nvSpPr>
+          <p:spPr>
+            <a:xfrm>
+              <a:off x="2482050" y="4336484"/>
+              <a:ext cx="0" cy="1317069"/>
+            </a:xfrm>
+            <a:custGeom>
+              <a:avLst/>
+              <a:pathLst>
+                <a:path w="0" h="1317069">
+                  <a:moveTo>
+                    <a:pt x="0" y="1317069"/>
+                  </a:moveTo>
+                  <a:lnTo>
+                    <a:pt x="0" y="0"/>
+                  </a:lnTo>
+                  <a:lnTo>
+                    <a:pt x="0" y="0"/>
+                  </a:lnTo>
+                </a:path>
+              </a:pathLst>
+            </a:custGeom>
+            <a:ln w="6775" cap="flat">
+              <a:solidFill>
+                <a:srgbClr val="EBEBEB">
+                  <a:alpha val="100000"/>
+                </a:srgbClr>
+              </a:solidFill>
+              <a:prstDash val="solid"/>
+              <a:round/>
+            </a:ln>
+          </p:spPr>
+          <p:txBody>
+            <a:bodyPr/>
+            <a:lstStyle/>
+            <a:p/>
+          </p:txBody>
+        </p:sp>
+        <p:sp>
+          <p:nvSpPr>
+            <p:cNvPr id="45" name="pl45"/>
+            <p:cNvSpPr/>
+            <p:nvPr/>
+          </p:nvSpPr>
+          <p:spPr>
+            <a:xfrm>
+              <a:off x="3327336" y="4336484"/>
+              <a:ext cx="0" cy="1317069"/>
+            </a:xfrm>
+            <a:custGeom>
+              <a:avLst/>
+              <a:pathLst>
+                <a:path w="0" h="1317069">
+                  <a:moveTo>
+                    <a:pt x="0" y="1317069"/>
+                  </a:moveTo>
+                  <a:lnTo>
+                    <a:pt x="0" y="0"/>
+                  </a:lnTo>
+                  <a:lnTo>
+                    <a:pt x="0" y="0"/>
+                  </a:lnTo>
+                </a:path>
+              </a:pathLst>
+            </a:custGeom>
+            <a:ln w="6775" cap="flat">
+              <a:solidFill>
+                <a:srgbClr val="EBEBEB">
+                  <a:alpha val="100000"/>
+                </a:srgbClr>
+              </a:solidFill>
+              <a:prstDash val="solid"/>
+              <a:round/>
+            </a:ln>
+          </p:spPr>
+          <p:txBody>
+            <a:bodyPr/>
+            <a:lstStyle/>
+            <a:p/>
+          </p:txBody>
+        </p:sp>
+        <p:sp>
+          <p:nvSpPr>
+            <p:cNvPr id="46" name="pl46"/>
+            <p:cNvSpPr/>
+            <p:nvPr/>
+          </p:nvSpPr>
+          <p:spPr>
+            <a:xfrm>
+              <a:off x="4172622" y="4336484"/>
+              <a:ext cx="0" cy="1317069"/>
+            </a:xfrm>
+            <a:custGeom>
+              <a:avLst/>
+              <a:pathLst>
+                <a:path w="0" h="1317069">
+                  <a:moveTo>
+                    <a:pt x="0" y="1317069"/>
+                  </a:moveTo>
+                  <a:lnTo>
+                    <a:pt x="0" y="0"/>
+                  </a:lnTo>
+                  <a:lnTo>
+                    <a:pt x="0" y="0"/>
+                  </a:lnTo>
+                </a:path>
+              </a:pathLst>
+            </a:custGeom>
+            <a:ln w="6775" cap="flat">
+              <a:solidFill>
+                <a:srgbClr val="EBEBEB">
+                  <a:alpha val="100000"/>
+                </a:srgbClr>
+              </a:solidFill>
+              <a:prstDash val="solid"/>
+              <a:round/>
+            </a:ln>
+          </p:spPr>
+          <p:txBody>
+            <a:bodyPr/>
+            <a:lstStyle/>
+            <a:p/>
+          </p:txBody>
+        </p:sp>
+        <p:sp>
+          <p:nvSpPr>
+            <p:cNvPr id="47" name="pl47"/>
+            <p:cNvSpPr/>
+            <p:nvPr/>
+          </p:nvSpPr>
+          <p:spPr>
+            <a:xfrm>
+              <a:off x="5017909" y="4336484"/>
+              <a:ext cx="0" cy="1317069"/>
+            </a:xfrm>
+            <a:custGeom>
+              <a:avLst/>
+              <a:pathLst>
+                <a:path w="0" h="1317069">
+                  <a:moveTo>
+                    <a:pt x="0" y="1317069"/>
+                  </a:moveTo>
+                  <a:lnTo>
+                    <a:pt x="0" y="0"/>
+                  </a:lnTo>
+                  <a:lnTo>
+                    <a:pt x="0" y="0"/>
+                  </a:lnTo>
+                </a:path>
+              </a:pathLst>
+            </a:custGeom>
+            <a:ln w="6775" cap="flat">
+              <a:solidFill>
+                <a:srgbClr val="EBEBEB">
+                  <a:alpha val="100000"/>
+                </a:srgbClr>
+              </a:solidFill>
+              <a:prstDash val="solid"/>
+              <a:round/>
+            </a:ln>
+          </p:spPr>
+          <p:txBody>
+            <a:bodyPr/>
+            <a:lstStyle/>
+            <a:p/>
+          </p:txBody>
+        </p:sp>
+        <p:sp>
+          <p:nvSpPr>
+            <p:cNvPr id="48" name="pl48"/>
+            <p:cNvSpPr/>
+            <p:nvPr/>
+          </p:nvSpPr>
+          <p:spPr>
+            <a:xfrm>
+              <a:off x="5863195" y="4336484"/>
+              <a:ext cx="0" cy="1317069"/>
+            </a:xfrm>
+            <a:custGeom>
+              <a:avLst/>
+              <a:pathLst>
+                <a:path w="0" h="1317069">
+                  <a:moveTo>
+                    <a:pt x="0" y="1317069"/>
+                  </a:moveTo>
+                  <a:lnTo>
+                    <a:pt x="0" y="0"/>
+                  </a:lnTo>
+                  <a:lnTo>
+                    <a:pt x="0" y="0"/>
+                  </a:lnTo>
+                </a:path>
+              </a:pathLst>
+            </a:custGeom>
+            <a:ln w="6775" cap="flat">
+              <a:solidFill>
+                <a:srgbClr val="EBEBEB">
+                  <a:alpha val="100000"/>
+                </a:srgbClr>
+              </a:solidFill>
+              <a:prstDash val="solid"/>
+              <a:round/>
+            </a:ln>
+          </p:spPr>
+          <p:txBody>
+            <a:bodyPr/>
+            <a:lstStyle/>
+            <a:p/>
+          </p:txBody>
+        </p:sp>
+        <p:sp>
+          <p:nvSpPr>
+            <p:cNvPr id="49" name="pl49"/>
+            <p:cNvSpPr/>
+            <p:nvPr/>
+          </p:nvSpPr>
+          <p:spPr>
+            <a:xfrm>
+              <a:off x="6708482" y="4336484"/>
+              <a:ext cx="0" cy="1317069"/>
+            </a:xfrm>
+            <a:custGeom>
+              <a:avLst/>
+              <a:pathLst>
+                <a:path w="0" h="1317069">
+                  <a:moveTo>
+                    <a:pt x="0" y="1317069"/>
+                  </a:moveTo>
+                  <a:lnTo>
+                    <a:pt x="0" y="0"/>
+                  </a:lnTo>
+                  <a:lnTo>
+                    <a:pt x="0" y="0"/>
+                  </a:lnTo>
+                </a:path>
+              </a:pathLst>
+            </a:custGeom>
+            <a:ln w="6775" cap="flat">
+              <a:solidFill>
+                <a:srgbClr val="EBEBEB">
+                  <a:alpha val="100000"/>
+                </a:srgbClr>
+              </a:solidFill>
+              <a:prstDash val="solid"/>
+              <a:round/>
+            </a:ln>
+          </p:spPr>
+          <p:txBody>
+            <a:bodyPr/>
+            <a:lstStyle/>
+            <a:p/>
+          </p:txBody>
+        </p:sp>
+        <p:sp>
+          <p:nvSpPr>
+            <p:cNvPr id="50" name="pl50"/>
+            <p:cNvSpPr/>
+            <p:nvPr/>
+          </p:nvSpPr>
+          <p:spPr>
+            <a:xfrm>
+              <a:off x="7553768" y="4336484"/>
+              <a:ext cx="0" cy="1317069"/>
+            </a:xfrm>
+            <a:custGeom>
+              <a:avLst/>
+              <a:pathLst>
+                <a:path w="0" h="1317069">
+                  <a:moveTo>
+                    <a:pt x="0" y="1317069"/>
+                  </a:moveTo>
+                  <a:lnTo>
+                    <a:pt x="0" y="0"/>
+                  </a:lnTo>
+                  <a:lnTo>
+                    <a:pt x="0" y="0"/>
+                  </a:lnTo>
+                </a:path>
+              </a:pathLst>
+            </a:custGeom>
+            <a:ln w="6775" cap="flat">
+              <a:solidFill>
+                <a:srgbClr val="EBEBEB">
+                  <a:alpha val="100000"/>
+                </a:srgbClr>
+              </a:solidFill>
+              <a:prstDash val="solid"/>
+              <a:round/>
+            </a:ln>
+          </p:spPr>
+          <p:txBody>
+            <a:bodyPr/>
+            <a:lstStyle/>
+            <a:p/>
+          </p:txBody>
+        </p:sp>
+        <p:sp>
+          <p:nvSpPr>
+            <p:cNvPr id="51" name="pl51"/>
+            <p:cNvSpPr/>
+            <p:nvPr/>
+          </p:nvSpPr>
+          <p:spPr>
+            <a:xfrm>
+              <a:off x="8399054" y="4336484"/>
+              <a:ext cx="0" cy="1317069"/>
+            </a:xfrm>
+            <a:custGeom>
+              <a:avLst/>
+              <a:pathLst>
+                <a:path w="0" h="1317069">
+                  <a:moveTo>
+                    <a:pt x="0" y="1317069"/>
+                  </a:moveTo>
+                  <a:lnTo>
+                    <a:pt x="0" y="0"/>
+                  </a:lnTo>
+                  <a:lnTo>
+                    <a:pt x="0" y="0"/>
+                  </a:lnTo>
+                </a:path>
+              </a:pathLst>
+            </a:custGeom>
+            <a:ln w="6775" cap="flat">
+              <a:solidFill>
+                <a:srgbClr val="EBEBEB">
+                  <a:alpha val="100000"/>
+                </a:srgbClr>
+              </a:solidFill>
+              <a:prstDash val="solid"/>
+              <a:round/>
+            </a:ln>
+          </p:spPr>
+          <p:txBody>
+            <a:bodyPr/>
+            <a:lstStyle/>
+            <a:p/>
+          </p:txBody>
+        </p:sp>
+        <p:sp>
+          <p:nvSpPr>
+            <p:cNvPr id="52" name="pl52"/>
+            <p:cNvSpPr/>
+            <p:nvPr/>
+          </p:nvSpPr>
+          <p:spPr>
+            <a:xfrm>
+              <a:off x="887106" y="5593686"/>
+              <a:ext cx="7660515" cy="0"/>
+            </a:xfrm>
+            <a:custGeom>
+              <a:avLst/>
+              <a:pathLst>
+                <a:path w="7660515" h="0">
+                  <a:moveTo>
+                    <a:pt x="0" y="0"/>
+                  </a:moveTo>
+                  <a:lnTo>
+                    <a:pt x="7660515" y="0"/>
+                  </a:lnTo>
+                  <a:lnTo>
+                    <a:pt x="7660515" y="0"/>
+                  </a:lnTo>
+                </a:path>
+              </a:pathLst>
+            </a:custGeom>
+            <a:ln w="13550" cap="flat">
+              <a:solidFill>
+                <a:srgbClr val="EBEBEB">
+                  <a:alpha val="100000"/>
+                </a:srgbClr>
+              </a:solidFill>
+              <a:prstDash val="solid"/>
+              <a:round/>
+            </a:ln>
+          </p:spPr>
+          <p:txBody>
+            <a:bodyPr/>
+            <a:lstStyle/>
+            <a:p/>
+          </p:txBody>
+        </p:sp>
+        <p:sp>
+          <p:nvSpPr>
+            <p:cNvPr id="53" name="pl53"/>
+            <p:cNvSpPr/>
+            <p:nvPr/>
+          </p:nvSpPr>
+          <p:spPr>
+            <a:xfrm>
+              <a:off x="887106" y="5294352"/>
+              <a:ext cx="7660515" cy="0"/>
+            </a:xfrm>
+            <a:custGeom>
+              <a:avLst/>
+              <a:pathLst>
+                <a:path w="7660515" h="0">
+                  <a:moveTo>
+                    <a:pt x="0" y="0"/>
+                  </a:moveTo>
+                  <a:lnTo>
+                    <a:pt x="7660515" y="0"/>
+                  </a:lnTo>
+                  <a:lnTo>
+                    <a:pt x="7660515" y="0"/>
+                  </a:lnTo>
+                </a:path>
+              </a:pathLst>
+            </a:custGeom>
+            <a:ln w="13550" cap="flat">
+              <a:solidFill>
+                <a:srgbClr val="EBEBEB">
+                  <a:alpha val="100000"/>
+                </a:srgbClr>
+              </a:solidFill>
+              <a:prstDash val="solid"/>
+              <a:round/>
+            </a:ln>
+          </p:spPr>
+          <p:txBody>
+            <a:bodyPr/>
+            <a:lstStyle/>
+            <a:p/>
+          </p:txBody>
+        </p:sp>
+        <p:sp>
+          <p:nvSpPr>
+            <p:cNvPr id="54" name="pl54"/>
+            <p:cNvSpPr/>
+            <p:nvPr/>
+          </p:nvSpPr>
+          <p:spPr>
+            <a:xfrm>
+              <a:off x="887106" y="4995019"/>
+              <a:ext cx="7660515" cy="0"/>
+            </a:xfrm>
+            <a:custGeom>
+              <a:avLst/>
+              <a:pathLst>
+                <a:path w="7660515" h="0">
+                  <a:moveTo>
+                    <a:pt x="0" y="0"/>
+                  </a:moveTo>
+                  <a:lnTo>
+                    <a:pt x="7660515" y="0"/>
+                  </a:lnTo>
+                  <a:lnTo>
+                    <a:pt x="7660515" y="0"/>
+                  </a:lnTo>
+                </a:path>
+              </a:pathLst>
+            </a:custGeom>
+            <a:ln w="13550" cap="flat">
+              <a:solidFill>
+                <a:srgbClr val="EBEBEB">
+                  <a:alpha val="100000"/>
+                </a:srgbClr>
+              </a:solidFill>
+              <a:prstDash val="solid"/>
+              <a:round/>
+            </a:ln>
+          </p:spPr>
+          <p:txBody>
+            <a:bodyPr/>
+            <a:lstStyle/>
+            <a:p/>
+          </p:txBody>
+        </p:sp>
+        <p:sp>
+          <p:nvSpPr>
+            <p:cNvPr id="55" name="pl55"/>
+            <p:cNvSpPr/>
+            <p:nvPr/>
+          </p:nvSpPr>
+          <p:spPr>
+            <a:xfrm>
+              <a:off x="887106" y="4695685"/>
+              <a:ext cx="7660515" cy="0"/>
+            </a:xfrm>
+            <a:custGeom>
+              <a:avLst/>
+              <a:pathLst>
+                <a:path w="7660515" h="0">
+                  <a:moveTo>
+                    <a:pt x="0" y="0"/>
+                  </a:moveTo>
+                  <a:lnTo>
+                    <a:pt x="7660515" y="0"/>
+                  </a:lnTo>
+                  <a:lnTo>
+                    <a:pt x="7660515" y="0"/>
+                  </a:lnTo>
+                </a:path>
+              </a:pathLst>
+            </a:custGeom>
+            <a:ln w="13550" cap="flat">
+              <a:solidFill>
+                <a:srgbClr val="EBEBEB">
+                  <a:alpha val="100000"/>
+                </a:srgbClr>
+              </a:solidFill>
+              <a:prstDash val="solid"/>
+              <a:round/>
+            </a:ln>
+          </p:spPr>
+          <p:txBody>
+            <a:bodyPr/>
+            <a:lstStyle/>
+            <a:p/>
+          </p:txBody>
+        </p:sp>
+        <p:sp>
+          <p:nvSpPr>
+            <p:cNvPr id="56" name="pl56"/>
+            <p:cNvSpPr/>
+            <p:nvPr/>
+          </p:nvSpPr>
+          <p:spPr>
+            <a:xfrm>
+              <a:off x="887106" y="4396351"/>
+              <a:ext cx="7660515" cy="0"/>
+            </a:xfrm>
+            <a:custGeom>
+              <a:avLst/>
+              <a:pathLst>
+                <a:path w="7660515" h="0">
+                  <a:moveTo>
+                    <a:pt x="0" y="0"/>
+                  </a:moveTo>
+                  <a:lnTo>
+                    <a:pt x="7660515" y="0"/>
+                  </a:lnTo>
+                  <a:lnTo>
+                    <a:pt x="7660515" y="0"/>
+                  </a:lnTo>
+                </a:path>
+              </a:pathLst>
+            </a:custGeom>
+            <a:ln w="13550" cap="flat">
+              <a:solidFill>
+                <a:srgbClr val="EBEBEB">
+                  <a:alpha val="100000"/>
+                </a:srgbClr>
+              </a:solidFill>
+              <a:prstDash val="solid"/>
+              <a:round/>
+            </a:ln>
+          </p:spPr>
+          <p:txBody>
+            <a:bodyPr/>
+            <a:lstStyle/>
+            <a:p/>
+          </p:txBody>
+        </p:sp>
+        <p:sp>
+          <p:nvSpPr>
+            <p:cNvPr id="57" name="pl57"/>
+            <p:cNvSpPr/>
+            <p:nvPr/>
+          </p:nvSpPr>
+          <p:spPr>
+            <a:xfrm>
+              <a:off x="1214120" y="4336484"/>
+              <a:ext cx="0" cy="1317069"/>
+            </a:xfrm>
+            <a:custGeom>
+              <a:avLst/>
+              <a:pathLst>
+                <a:path w="0" h="1317069">
+                  <a:moveTo>
+                    <a:pt x="0" y="1317069"/>
+                  </a:moveTo>
+                  <a:lnTo>
+                    <a:pt x="0" y="0"/>
+                  </a:lnTo>
+                  <a:lnTo>
+                    <a:pt x="0" y="0"/>
+                  </a:lnTo>
+                </a:path>
+              </a:pathLst>
+            </a:custGeom>
+            <a:ln w="13550" cap="flat">
+              <a:solidFill>
+                <a:srgbClr val="EBEBEB">
+                  <a:alpha val="100000"/>
+                </a:srgbClr>
+              </a:solidFill>
+              <a:prstDash val="solid"/>
+              <a:round/>
+            </a:ln>
+          </p:spPr>
+          <p:txBody>
+            <a:bodyPr/>
+            <a:lstStyle/>
+            <a:p/>
+          </p:txBody>
+        </p:sp>
+        <p:sp>
+          <p:nvSpPr>
+            <p:cNvPr id="58" name="pl58"/>
+            <p:cNvSpPr/>
+            <p:nvPr/>
+          </p:nvSpPr>
+          <p:spPr>
+            <a:xfrm>
+              <a:off x="2059406" y="4336484"/>
+              <a:ext cx="0" cy="1317069"/>
+            </a:xfrm>
+            <a:custGeom>
+              <a:avLst/>
+              <a:pathLst>
+                <a:path w="0" h="1317069">
+                  <a:moveTo>
+                    <a:pt x="0" y="1317069"/>
+                  </a:moveTo>
+                  <a:lnTo>
+                    <a:pt x="0" y="0"/>
+                  </a:lnTo>
+                  <a:lnTo>
+                    <a:pt x="0" y="0"/>
+                  </a:lnTo>
+                </a:path>
+              </a:pathLst>
+            </a:custGeom>
+            <a:ln w="13550" cap="flat">
+              <a:solidFill>
+                <a:srgbClr val="EBEBEB">
+                  <a:alpha val="100000"/>
+                </a:srgbClr>
+              </a:solidFill>
+              <a:prstDash val="solid"/>
+              <a:round/>
+            </a:ln>
+          </p:spPr>
+          <p:txBody>
+            <a:bodyPr/>
+            <a:lstStyle/>
+            <a:p/>
+          </p:txBody>
+        </p:sp>
+        <p:sp>
+          <p:nvSpPr>
+            <p:cNvPr id="59" name="pl59"/>
+            <p:cNvSpPr/>
+            <p:nvPr/>
+          </p:nvSpPr>
+          <p:spPr>
+            <a:xfrm>
+              <a:off x="2904693" y="4336484"/>
+              <a:ext cx="0" cy="1317069"/>
+            </a:xfrm>
+            <a:custGeom>
+              <a:avLst/>
+              <a:pathLst>
+                <a:path w="0" h="1317069">
+                  <a:moveTo>
+                    <a:pt x="0" y="1317069"/>
+                  </a:moveTo>
+                  <a:lnTo>
+                    <a:pt x="0" y="0"/>
+                  </a:lnTo>
+                  <a:lnTo>
+                    <a:pt x="0" y="0"/>
+                  </a:lnTo>
+                </a:path>
+              </a:pathLst>
+            </a:custGeom>
+            <a:ln w="13550" cap="flat">
+              <a:solidFill>
+                <a:srgbClr val="EBEBEB">
+                  <a:alpha val="100000"/>
+                </a:srgbClr>
+              </a:solidFill>
+              <a:prstDash val="solid"/>
+              <a:round/>
+            </a:ln>
+          </p:spPr>
+          <p:txBody>
+            <a:bodyPr/>
+            <a:lstStyle/>
+            <a:p/>
+          </p:txBody>
+        </p:sp>
+        <p:sp>
+          <p:nvSpPr>
+            <p:cNvPr id="60" name="pl60"/>
+            <p:cNvSpPr/>
+            <p:nvPr/>
+          </p:nvSpPr>
+          <p:spPr>
+            <a:xfrm>
+              <a:off x="3749979" y="4336484"/>
+              <a:ext cx="0" cy="1317069"/>
+            </a:xfrm>
+            <a:custGeom>
+              <a:avLst/>
+              <a:pathLst>
+                <a:path w="0" h="1317069">
+                  <a:moveTo>
+                    <a:pt x="0" y="1317069"/>
+                  </a:moveTo>
+                  <a:lnTo>
+                    <a:pt x="0" y="0"/>
+                  </a:lnTo>
+                  <a:lnTo>
+                    <a:pt x="0" y="0"/>
+                  </a:lnTo>
+                </a:path>
+              </a:pathLst>
+            </a:custGeom>
+            <a:ln w="13550" cap="flat">
+              <a:solidFill>
+                <a:srgbClr val="EBEBEB">
+                  <a:alpha val="100000"/>
+                </a:srgbClr>
+              </a:solidFill>
+              <a:prstDash val="solid"/>
+              <a:round/>
+            </a:ln>
+          </p:spPr>
+          <p:txBody>
+            <a:bodyPr/>
+            <a:lstStyle/>
+            <a:p/>
+          </p:txBody>
+        </p:sp>
+        <p:sp>
+          <p:nvSpPr>
+            <p:cNvPr id="61" name="pl61"/>
+            <p:cNvSpPr/>
+            <p:nvPr/>
+          </p:nvSpPr>
+          <p:spPr>
+            <a:xfrm>
+              <a:off x="4595266" y="4336484"/>
+              <a:ext cx="0" cy="1317069"/>
+            </a:xfrm>
+            <a:custGeom>
+              <a:avLst/>
+              <a:pathLst>
+                <a:path w="0" h="1317069">
+                  <a:moveTo>
+                    <a:pt x="0" y="1317069"/>
+                  </a:moveTo>
+                  <a:lnTo>
+                    <a:pt x="0" y="0"/>
+                  </a:lnTo>
+                  <a:lnTo>
+                    <a:pt x="0" y="0"/>
+                  </a:lnTo>
+                </a:path>
+              </a:pathLst>
+            </a:custGeom>
+            <a:ln w="13550" cap="flat">
+              <a:solidFill>
+                <a:srgbClr val="EBEBEB">
+                  <a:alpha val="100000"/>
+                </a:srgbClr>
+              </a:solidFill>
+              <a:prstDash val="solid"/>
+              <a:round/>
+            </a:ln>
+          </p:spPr>
+          <p:txBody>
+            <a:bodyPr/>
+            <a:lstStyle/>
+            <a:p/>
+          </p:txBody>
+        </p:sp>
+        <p:sp>
+          <p:nvSpPr>
+            <p:cNvPr id="62" name="pl62"/>
+            <p:cNvSpPr/>
+            <p:nvPr/>
+          </p:nvSpPr>
+          <p:spPr>
+            <a:xfrm>
+              <a:off x="5440552" y="4336484"/>
+              <a:ext cx="0" cy="1317069"/>
+            </a:xfrm>
+            <a:custGeom>
+              <a:avLst/>
+              <a:pathLst>
+                <a:path w="0" h="1317069">
+                  <a:moveTo>
+                    <a:pt x="0" y="1317069"/>
+                  </a:moveTo>
+                  <a:lnTo>
+                    <a:pt x="0" y="0"/>
+                  </a:lnTo>
+                  <a:lnTo>
+                    <a:pt x="0" y="0"/>
+                  </a:lnTo>
+                </a:path>
+              </a:pathLst>
+            </a:custGeom>
+            <a:ln w="13550" cap="flat">
+              <a:solidFill>
+                <a:srgbClr val="EBEBEB">
+                  <a:alpha val="100000"/>
+                </a:srgbClr>
+              </a:solidFill>
+              <a:prstDash val="solid"/>
+              <a:round/>
+            </a:ln>
+          </p:spPr>
+          <p:txBody>
+            <a:bodyPr/>
+            <a:lstStyle/>
+            <a:p/>
+          </p:txBody>
+        </p:sp>
+        <p:sp>
+          <p:nvSpPr>
+            <p:cNvPr id="63" name="pl63"/>
+            <p:cNvSpPr/>
+            <p:nvPr/>
+          </p:nvSpPr>
+          <p:spPr>
+            <a:xfrm>
+              <a:off x="6285838" y="4336484"/>
+              <a:ext cx="0" cy="1317069"/>
+            </a:xfrm>
+            <a:custGeom>
+              <a:avLst/>
+              <a:pathLst>
+                <a:path w="0" h="1317069">
+                  <a:moveTo>
+                    <a:pt x="0" y="1317069"/>
+                  </a:moveTo>
+                  <a:lnTo>
+                    <a:pt x="0" y="0"/>
+                  </a:lnTo>
+                  <a:lnTo>
+                    <a:pt x="0" y="0"/>
+                  </a:lnTo>
+                </a:path>
+              </a:pathLst>
+            </a:custGeom>
+            <a:ln w="13550" cap="flat">
+              <a:solidFill>
+                <a:srgbClr val="EBEBEB">
+                  <a:alpha val="100000"/>
+                </a:srgbClr>
+              </a:solidFill>
+              <a:prstDash val="solid"/>
+              <a:round/>
+            </a:ln>
+          </p:spPr>
+          <p:txBody>
+            <a:bodyPr/>
+            <a:lstStyle/>
+            <a:p/>
+          </p:txBody>
+        </p:sp>
+        <p:sp>
+          <p:nvSpPr>
+            <p:cNvPr id="64" name="pl64"/>
+            <p:cNvSpPr/>
+            <p:nvPr/>
+          </p:nvSpPr>
+          <p:spPr>
+            <a:xfrm>
+              <a:off x="7131125" y="4336484"/>
+              <a:ext cx="0" cy="1317069"/>
+            </a:xfrm>
+            <a:custGeom>
+              <a:avLst/>
+              <a:pathLst>
+                <a:path w="0" h="1317069">
+                  <a:moveTo>
+                    <a:pt x="0" y="1317069"/>
+                  </a:moveTo>
+                  <a:lnTo>
+                    <a:pt x="0" y="0"/>
+                  </a:lnTo>
+                  <a:lnTo>
+                    <a:pt x="0" y="0"/>
+                  </a:lnTo>
+                </a:path>
+              </a:pathLst>
+            </a:custGeom>
+            <a:ln w="13550" cap="flat">
+              <a:solidFill>
+                <a:srgbClr val="EBEBEB">
+                  <a:alpha val="100000"/>
+                </a:srgbClr>
+              </a:solidFill>
+              <a:prstDash val="solid"/>
+              <a:round/>
+            </a:ln>
+          </p:spPr>
+          <p:txBody>
+            <a:bodyPr/>
+            <a:lstStyle/>
+            <a:p/>
+          </p:txBody>
+        </p:sp>
+        <p:sp>
+          <p:nvSpPr>
+            <p:cNvPr id="65" name="pl65"/>
+            <p:cNvSpPr/>
+            <p:nvPr/>
+          </p:nvSpPr>
+          <p:spPr>
+            <a:xfrm>
+              <a:off x="7976411" y="4336484"/>
+              <a:ext cx="0" cy="1317069"/>
+            </a:xfrm>
+            <a:custGeom>
+              <a:avLst/>
+              <a:pathLst>
+                <a:path w="0" h="1317069">
+                  <a:moveTo>
+                    <a:pt x="0" y="1317069"/>
+                  </a:moveTo>
+                  <a:lnTo>
+                    <a:pt x="0" y="0"/>
+                  </a:lnTo>
+                  <a:lnTo>
+                    <a:pt x="0" y="0"/>
+                  </a:lnTo>
+                </a:path>
+              </a:pathLst>
+            </a:custGeom>
+            <a:ln w="13550" cap="flat">
+              <a:solidFill>
+                <a:srgbClr val="EBEBEB">
+                  <a:alpha val="100000"/>
+                </a:srgbClr>
+              </a:solidFill>
+              <a:prstDash val="solid"/>
+              <a:round/>
+            </a:ln>
+          </p:spPr>
+          <p:txBody>
+            <a:bodyPr/>
+            <a:lstStyle/>
+            <a:p/>
+          </p:txBody>
+        </p:sp>
+        <p:sp>
+          <p:nvSpPr>
+            <p:cNvPr id="66" name="pg66"/>
+            <p:cNvSpPr/>
+            <p:nvPr/>
+          </p:nvSpPr>
+          <p:spPr>
+            <a:xfrm>
+              <a:off x="1325197" y="4336484"/>
+              <a:ext cx="6874219" cy="1255100"/>
+            </a:xfrm>
+            <a:custGeom>
+              <a:avLst/>
+              <a:pathLst>
+                <a:path w="6874219" h="1255100">
+                  <a:moveTo>
+                    <a:pt x="2221215" y="0"/>
+                  </a:moveTo>
+                  <a:lnTo>
+                    <a:pt x="2231482" y="18349"/>
+                  </a:lnTo>
+                  <a:lnTo>
+                    <a:pt x="2301827" y="132481"/>
+                  </a:lnTo>
+                  <a:lnTo>
+                    <a:pt x="2372171" y="236099"/>
+                  </a:lnTo>
+                  <a:lnTo>
+                    <a:pt x="2442516" y="330171"/>
+                  </a:lnTo>
+                  <a:lnTo>
+                    <a:pt x="2512860" y="415576"/>
+                  </a:lnTo>
+                  <a:lnTo>
+                    <a:pt x="2583205" y="493113"/>
+                  </a:lnTo>
+                  <a:lnTo>
+                    <a:pt x="2653549" y="563507"/>
+                  </a:lnTo>
+                  <a:lnTo>
+                    <a:pt x="2723894" y="627415"/>
+                  </a:lnTo>
+                  <a:lnTo>
+                    <a:pt x="2794238" y="685436"/>
+                  </a:lnTo>
+                  <a:lnTo>
+                    <a:pt x="2864583" y="738111"/>
+                  </a:lnTo>
+                  <a:lnTo>
+                    <a:pt x="2934927" y="785934"/>
+                  </a:lnTo>
+                  <a:lnTo>
+                    <a:pt x="3005272" y="829351"/>
+                  </a:lnTo>
+                  <a:lnTo>
+                    <a:pt x="3075616" y="868767"/>
+                  </a:lnTo>
+                  <a:lnTo>
+                    <a:pt x="3145961" y="904553"/>
+                  </a:lnTo>
+                  <a:lnTo>
+                    <a:pt x="3216305" y="937042"/>
+                  </a:lnTo>
+                  <a:lnTo>
+                    <a:pt x="3286650" y="960669"/>
+                  </a:lnTo>
+                  <a:lnTo>
+                    <a:pt x="3356994" y="969696"/>
+                  </a:lnTo>
+                  <a:lnTo>
+                    <a:pt x="3427339" y="978448"/>
+                  </a:lnTo>
+                  <a:lnTo>
+                    <a:pt x="3497683" y="986933"/>
+                  </a:lnTo>
+                  <a:lnTo>
+                    <a:pt x="3568028" y="995161"/>
+                  </a:lnTo>
+                  <a:lnTo>
+                    <a:pt x="3638372" y="1003138"/>
+                  </a:lnTo>
+                  <a:lnTo>
+                    <a:pt x="3708717" y="1010872"/>
+                  </a:lnTo>
+                  <a:lnTo>
+                    <a:pt x="3779061" y="1018370"/>
+                  </a:lnTo>
+                  <a:lnTo>
+                    <a:pt x="3849406" y="1025641"/>
+                  </a:lnTo>
+                  <a:lnTo>
+                    <a:pt x="3919750" y="1032690"/>
+                  </a:lnTo>
+                  <a:lnTo>
+                    <a:pt x="3990095" y="1039524"/>
+                  </a:lnTo>
+                  <a:lnTo>
+                    <a:pt x="4060439" y="1046151"/>
+                  </a:lnTo>
+                  <a:lnTo>
+                    <a:pt x="4130784" y="1052575"/>
+                  </a:lnTo>
+                  <a:lnTo>
+                    <a:pt x="4201128" y="1058804"/>
+                  </a:lnTo>
+                  <a:lnTo>
+                    <a:pt x="4271473" y="1064844"/>
+                  </a:lnTo>
+                  <a:lnTo>
+                    <a:pt x="4341817" y="1070700"/>
+                  </a:lnTo>
+                  <a:lnTo>
+                    <a:pt x="4412162" y="1076377"/>
+                  </a:lnTo>
+                  <a:lnTo>
+                    <a:pt x="4482506" y="1081882"/>
+                  </a:lnTo>
+                  <a:lnTo>
+                    <a:pt x="4552851" y="1087219"/>
+                  </a:lnTo>
+                  <a:lnTo>
+                    <a:pt x="4623195" y="1092393"/>
+                  </a:lnTo>
+                  <a:lnTo>
+                    <a:pt x="4693540" y="1097410"/>
+                  </a:lnTo>
+                  <a:lnTo>
+                    <a:pt x="4763884" y="1102274"/>
+                  </a:lnTo>
+                  <a:lnTo>
+                    <a:pt x="4834229" y="1106991"/>
+                  </a:lnTo>
+                  <a:lnTo>
+                    <a:pt x="4904573" y="1111563"/>
+                  </a:lnTo>
+                  <a:lnTo>
+                    <a:pt x="4974918" y="1115997"/>
+                  </a:lnTo>
+                  <a:lnTo>
+                    <a:pt x="5045262" y="1120295"/>
+                  </a:lnTo>
+                  <a:lnTo>
+                    <a:pt x="5115607" y="1124463"/>
+                  </a:lnTo>
+                  <a:lnTo>
+                    <a:pt x="5185951" y="1128504"/>
+                  </a:lnTo>
+                  <a:lnTo>
+                    <a:pt x="5256296" y="1132421"/>
+                  </a:lnTo>
+                  <a:lnTo>
+                    <a:pt x="5326640" y="1136220"/>
+                  </a:lnTo>
+                  <a:lnTo>
+                    <a:pt x="5396985" y="1139903"/>
+                  </a:lnTo>
+                  <a:lnTo>
+                    <a:pt x="5467329" y="1143473"/>
+                  </a:lnTo>
+                  <a:lnTo>
+                    <a:pt x="5537674" y="1146936"/>
+                  </a:lnTo>
+                  <a:lnTo>
+                    <a:pt x="5608018" y="1150292"/>
+                  </a:lnTo>
+                  <a:lnTo>
+                    <a:pt x="5678363" y="1153547"/>
+                  </a:lnTo>
+                  <a:lnTo>
+                    <a:pt x="5748707" y="1156702"/>
+                  </a:lnTo>
+                  <a:lnTo>
+                    <a:pt x="5819051" y="1159761"/>
+                  </a:lnTo>
+                  <a:lnTo>
+                    <a:pt x="5889396" y="1162728"/>
+                  </a:lnTo>
+                  <a:lnTo>
+                    <a:pt x="5959740" y="1165604"/>
+                  </a:lnTo>
+                  <a:lnTo>
+                    <a:pt x="6030085" y="1168392"/>
+                  </a:lnTo>
+                  <a:lnTo>
+                    <a:pt x="6100429" y="1171095"/>
+                  </a:lnTo>
+                  <a:lnTo>
+                    <a:pt x="6170774" y="1173717"/>
+                  </a:lnTo>
+                  <a:lnTo>
+                    <a:pt x="6241118" y="1176258"/>
+                  </a:lnTo>
+                  <a:lnTo>
+                    <a:pt x="6311463" y="1178722"/>
+                  </a:lnTo>
+                  <a:lnTo>
+                    <a:pt x="6381807" y="1181111"/>
+                  </a:lnTo>
+                  <a:lnTo>
+                    <a:pt x="6452152" y="1183427"/>
+                  </a:lnTo>
+                  <a:lnTo>
+                    <a:pt x="6522496" y="1185673"/>
+                  </a:lnTo>
+                  <a:lnTo>
+                    <a:pt x="6592841" y="1187851"/>
+                  </a:lnTo>
+                  <a:lnTo>
+                    <a:pt x="6663185" y="1189962"/>
+                  </a:lnTo>
+                  <a:lnTo>
+                    <a:pt x="6733530" y="1192009"/>
+                  </a:lnTo>
+                  <a:lnTo>
+                    <a:pt x="6803874" y="1193993"/>
+                  </a:lnTo>
+                  <a:lnTo>
+                    <a:pt x="6874219" y="1195917"/>
+                  </a:lnTo>
+                  <a:lnTo>
+                    <a:pt x="6874219" y="1255100"/>
+                  </a:lnTo>
+                  <a:lnTo>
+                    <a:pt x="6803874" y="1254886"/>
+                  </a:lnTo>
+                  <a:lnTo>
+                    <a:pt x="6733530" y="1254651"/>
+                  </a:lnTo>
+                  <a:lnTo>
+                    <a:pt x="6663185" y="1254393"/>
+                  </a:lnTo>
+                  <a:lnTo>
+                    <a:pt x="6592841" y="1254108"/>
+                  </a:lnTo>
+                  <a:lnTo>
+                    <a:pt x="6522496" y="1253794"/>
+                  </a:lnTo>
+                  <a:lnTo>
+                    <a:pt x="6452152" y="1253448"/>
+                  </a:lnTo>
+                  <a:lnTo>
+                    <a:pt x="6381807" y="1253067"/>
+                  </a:lnTo>
+                  <a:lnTo>
+                    <a:pt x="6311463" y="1252647"/>
+                  </a:lnTo>
+                  <a:lnTo>
+                    <a:pt x="6241118" y="1252185"/>
+                  </a:lnTo>
+                  <a:lnTo>
+                    <a:pt x="6170774" y="1251676"/>
+                  </a:lnTo>
+                  <a:lnTo>
+                    <a:pt x="6100429" y="1251115"/>
+                  </a:lnTo>
+                  <a:lnTo>
+                    <a:pt x="6030085" y="1250497"/>
+                  </a:lnTo>
+                  <a:lnTo>
+                    <a:pt x="5959740" y="1249817"/>
+                  </a:lnTo>
+                  <a:lnTo>
+                    <a:pt x="5889396" y="1249068"/>
+                  </a:lnTo>
+                  <a:lnTo>
+                    <a:pt x="5819051" y="1248242"/>
+                  </a:lnTo>
+                  <a:lnTo>
+                    <a:pt x="5748707" y="1247333"/>
+                  </a:lnTo>
+                  <a:lnTo>
+                    <a:pt x="5678363" y="1246332"/>
+                  </a:lnTo>
+                  <a:lnTo>
+                    <a:pt x="5608018" y="1245229"/>
+                  </a:lnTo>
+                  <a:lnTo>
+                    <a:pt x="5537674" y="1244014"/>
+                  </a:lnTo>
+                  <a:lnTo>
+                    <a:pt x="5467329" y="1242675"/>
+                  </a:lnTo>
+                  <a:lnTo>
+                    <a:pt x="5396985" y="1241201"/>
+                  </a:lnTo>
+                  <a:lnTo>
+                    <a:pt x="5326640" y="1239578"/>
+                  </a:lnTo>
+                  <a:lnTo>
+                    <a:pt x="5256296" y="1237789"/>
+                  </a:lnTo>
+                  <a:lnTo>
+                    <a:pt x="5185951" y="1235819"/>
+                  </a:lnTo>
+                  <a:lnTo>
+                    <a:pt x="5115607" y="1233649"/>
+                  </a:lnTo>
+                  <a:lnTo>
+                    <a:pt x="5045262" y="1231259"/>
+                  </a:lnTo>
+                  <a:lnTo>
+                    <a:pt x="4974918" y="1228627"/>
+                  </a:lnTo>
+                  <a:lnTo>
+                    <a:pt x="4904573" y="1225727"/>
+                  </a:lnTo>
+                  <a:lnTo>
+                    <a:pt x="4834229" y="1222533"/>
+                  </a:lnTo>
+                  <a:lnTo>
+                    <a:pt x="4763884" y="1219015"/>
+                  </a:lnTo>
+                  <a:lnTo>
+                    <a:pt x="4693540" y="1215140"/>
+                  </a:lnTo>
+                  <a:lnTo>
+                    <a:pt x="4623195" y="1210872"/>
+                  </a:lnTo>
+                  <a:lnTo>
+                    <a:pt x="4552851" y="1206170"/>
+                  </a:lnTo>
+                  <a:lnTo>
+                    <a:pt x="4482506" y="1200992"/>
+                  </a:lnTo>
+                  <a:lnTo>
+                    <a:pt x="4412162" y="1195288"/>
+                  </a:lnTo>
+                  <a:lnTo>
+                    <a:pt x="4341817" y="1189005"/>
+                  </a:lnTo>
+                  <a:lnTo>
+                    <a:pt x="4271473" y="1182085"/>
+                  </a:lnTo>
+                  <a:lnTo>
+                    <a:pt x="4201128" y="1174462"/>
+                  </a:lnTo>
+                  <a:lnTo>
+                    <a:pt x="4130784" y="1166066"/>
+                  </a:lnTo>
+                  <a:lnTo>
+                    <a:pt x="4060439" y="1156818"/>
+                  </a:lnTo>
+                  <a:lnTo>
+                    <a:pt x="3990095" y="1146631"/>
+                  </a:lnTo>
+                  <a:lnTo>
+                    <a:pt x="3919750" y="1135411"/>
+                  </a:lnTo>
+                  <a:lnTo>
+                    <a:pt x="3849406" y="1123052"/>
+                  </a:lnTo>
+                  <a:lnTo>
+                    <a:pt x="3779061" y="1109439"/>
+                  </a:lnTo>
+                  <a:lnTo>
+                    <a:pt x="3708717" y="1094444"/>
+                  </a:lnTo>
+                  <a:lnTo>
+                    <a:pt x="3638372" y="1077928"/>
+                  </a:lnTo>
+                  <a:lnTo>
+                    <a:pt x="3568028" y="1059736"/>
+                  </a:lnTo>
+                  <a:lnTo>
+                    <a:pt x="3497683" y="1039698"/>
+                  </a:lnTo>
+                  <a:lnTo>
+                    <a:pt x="3427339" y="1017627"/>
+                  </a:lnTo>
+                  <a:lnTo>
+                    <a:pt x="3356994" y="993315"/>
+                  </a:lnTo>
+                  <a:lnTo>
+                    <a:pt x="3286650" y="966537"/>
+                  </a:lnTo>
+                  <a:lnTo>
+                    <a:pt x="3216305" y="951358"/>
+                  </a:lnTo>
+                  <a:lnTo>
+                    <a:pt x="3145961" y="941756"/>
+                  </a:lnTo>
+                  <a:lnTo>
+                    <a:pt x="3075616" y="931852"/>
+                  </a:lnTo>
+                  <a:lnTo>
+                    <a:pt x="3005272" y="921636"/>
+                  </a:lnTo>
+                  <a:lnTo>
+                    <a:pt x="2934927" y="911101"/>
+                  </a:lnTo>
+                  <a:lnTo>
+                    <a:pt x="2864583" y="900234"/>
+                  </a:lnTo>
+                  <a:lnTo>
+                    <a:pt x="2794238" y="889026"/>
+                  </a:lnTo>
+                  <a:lnTo>
+                    <a:pt x="2723894" y="877467"/>
+                  </a:lnTo>
+                  <a:lnTo>
+                    <a:pt x="2653549" y="865544"/>
+                  </a:lnTo>
+                  <a:lnTo>
+                    <a:pt x="2583205" y="853247"/>
+                  </a:lnTo>
+                  <a:lnTo>
+                    <a:pt x="2512860" y="840564"/>
+                  </a:lnTo>
+                  <a:lnTo>
+                    <a:pt x="2442516" y="827483"/>
+                  </a:lnTo>
+                  <a:lnTo>
+                    <a:pt x="2372171" y="813991"/>
+                  </a:lnTo>
+                  <a:lnTo>
+                    <a:pt x="2301827" y="800075"/>
+                  </a:lnTo>
+                  <a:lnTo>
+                    <a:pt x="2231482" y="785722"/>
+                  </a:lnTo>
+                  <a:lnTo>
+                    <a:pt x="2161138" y="770919"/>
+                  </a:lnTo>
+                  <a:lnTo>
+                    <a:pt x="2090793" y="755651"/>
+                  </a:lnTo>
+                  <a:lnTo>
+                    <a:pt x="2020449" y="739904"/>
+                  </a:lnTo>
+                  <a:lnTo>
+                    <a:pt x="1950105" y="723662"/>
+                  </a:lnTo>
+                  <a:lnTo>
+                    <a:pt x="1879760" y="706911"/>
+                  </a:lnTo>
+                  <a:lnTo>
+                    <a:pt x="1809416" y="689633"/>
+                  </a:lnTo>
+                  <a:lnTo>
+                    <a:pt x="1739071" y="671813"/>
+                  </a:lnTo>
+                  <a:lnTo>
+                    <a:pt x="1668727" y="653433"/>
+                  </a:lnTo>
+                  <a:lnTo>
+                    <a:pt x="1598382" y="634477"/>
+                  </a:lnTo>
+                  <a:lnTo>
+                    <a:pt x="1528038" y="614925"/>
+                  </a:lnTo>
+                  <a:lnTo>
+                    <a:pt x="1457693" y="594759"/>
+                  </a:lnTo>
+                  <a:lnTo>
+                    <a:pt x="1387349" y="573960"/>
+                  </a:lnTo>
+                  <a:lnTo>
+                    <a:pt x="1317004" y="552509"/>
+                  </a:lnTo>
+                  <a:lnTo>
+                    <a:pt x="1246660" y="530383"/>
+                  </a:lnTo>
+                  <a:lnTo>
+                    <a:pt x="1176315" y="507563"/>
+                  </a:lnTo>
+                  <a:lnTo>
+                    <a:pt x="1105971" y="484027"/>
+                  </a:lnTo>
+                  <a:lnTo>
+                    <a:pt x="1035626" y="459751"/>
+                  </a:lnTo>
+                  <a:lnTo>
+                    <a:pt x="965282" y="434713"/>
+                  </a:lnTo>
+                  <a:lnTo>
+                    <a:pt x="894937" y="408889"/>
+                  </a:lnTo>
+                  <a:lnTo>
+                    <a:pt x="824593" y="382255"/>
+                  </a:lnTo>
+                  <a:lnTo>
+                    <a:pt x="754248" y="354784"/>
+                  </a:lnTo>
+                  <a:lnTo>
+                    <a:pt x="683904" y="326450"/>
+                  </a:lnTo>
+                  <a:lnTo>
+                    <a:pt x="613559" y="297227"/>
+                  </a:lnTo>
+                  <a:lnTo>
+                    <a:pt x="543215" y="267087"/>
+                  </a:lnTo>
+                  <a:lnTo>
+                    <a:pt x="472870" y="236000"/>
+                  </a:lnTo>
+                  <a:lnTo>
+                    <a:pt x="402526" y="203937"/>
+                  </a:lnTo>
+                  <a:lnTo>
+                    <a:pt x="332181" y="170868"/>
+                  </a:lnTo>
+                  <a:lnTo>
+                    <a:pt x="261837" y="136760"/>
+                  </a:lnTo>
+                  <a:lnTo>
+                    <a:pt x="191492" y="101581"/>
+                  </a:lnTo>
+                  <a:lnTo>
+                    <a:pt x="121148" y="65298"/>
+                  </a:lnTo>
+                  <a:lnTo>
+                    <a:pt x="50803" y="27875"/>
+                  </a:lnTo>
+                  <a:lnTo>
+                    <a:pt x="0" y="0"/>
+                  </a:lnTo>
+                  <a:close/>
+                </a:path>
+              </a:pathLst>
+            </a:custGeom>
+            <a:solidFill>
+              <a:srgbClr val="FF8C00">
+                <a:alpha val="20000"/>
+              </a:srgbClr>
+            </a:solidFill>
+          </p:spPr>
+          <p:txBody>
+            <a:bodyPr/>
+            <a:lstStyle/>
+            <a:p/>
+          </p:txBody>
+        </p:sp>
+        <p:sp>
+          <p:nvSpPr>
+            <p:cNvPr id="67" name="pl67"/>
+            <p:cNvSpPr/>
+            <p:nvPr/>
+          </p:nvSpPr>
+          <p:spPr>
+            <a:xfrm>
+              <a:off x="3546412" y="4336484"/>
+              <a:ext cx="4653003" cy="1195917"/>
+            </a:xfrm>
+            <a:custGeom>
+              <a:avLst/>
+              <a:pathLst>
+                <a:path w="4653003" h="1195917">
+                  <a:moveTo>
+                    <a:pt x="0" y="0"/>
+                  </a:moveTo>
+                  <a:lnTo>
+                    <a:pt x="10267" y="18349"/>
+                  </a:lnTo>
+                  <a:lnTo>
+                    <a:pt x="80612" y="132481"/>
+                  </a:lnTo>
+                  <a:lnTo>
+                    <a:pt x="150956" y="236099"/>
+                  </a:lnTo>
+                  <a:lnTo>
+                    <a:pt x="221301" y="330171"/>
+                  </a:lnTo>
+                  <a:lnTo>
+                    <a:pt x="291645" y="415576"/>
+                  </a:lnTo>
+                  <a:lnTo>
+                    <a:pt x="361989" y="493113"/>
+                  </a:lnTo>
+                  <a:lnTo>
+                    <a:pt x="432334" y="563507"/>
+                  </a:lnTo>
+                  <a:lnTo>
+                    <a:pt x="502678" y="627415"/>
+                  </a:lnTo>
+                  <a:lnTo>
+                    <a:pt x="573023" y="685436"/>
+                  </a:lnTo>
+                  <a:lnTo>
+                    <a:pt x="643367" y="738111"/>
+                  </a:lnTo>
+                  <a:lnTo>
+                    <a:pt x="713712" y="785934"/>
+                  </a:lnTo>
+                  <a:lnTo>
+                    <a:pt x="784056" y="829351"/>
+                  </a:lnTo>
+                  <a:lnTo>
+                    <a:pt x="854401" y="868767"/>
+                  </a:lnTo>
+                  <a:lnTo>
+                    <a:pt x="924745" y="904553"/>
+                  </a:lnTo>
+                  <a:lnTo>
+                    <a:pt x="995090" y="937042"/>
+                  </a:lnTo>
+                  <a:lnTo>
+                    <a:pt x="1065434" y="960669"/>
+                  </a:lnTo>
+                  <a:lnTo>
+                    <a:pt x="1135779" y="969696"/>
+                  </a:lnTo>
+                  <a:lnTo>
+                    <a:pt x="1206123" y="978448"/>
+                  </a:lnTo>
+                  <a:lnTo>
+                    <a:pt x="1276468" y="986933"/>
+                  </a:lnTo>
+                  <a:lnTo>
+                    <a:pt x="1346812" y="995161"/>
+                  </a:lnTo>
+                  <a:lnTo>
+                    <a:pt x="1417157" y="1003138"/>
+                  </a:lnTo>
+                  <a:lnTo>
+                    <a:pt x="1487501" y="1010872"/>
+                  </a:lnTo>
+                  <a:lnTo>
+                    <a:pt x="1557846" y="1018370"/>
+                  </a:lnTo>
+                  <a:lnTo>
+                    <a:pt x="1628190" y="1025641"/>
+                  </a:lnTo>
+                  <a:lnTo>
+                    <a:pt x="1698535" y="1032690"/>
+                  </a:lnTo>
+                  <a:lnTo>
+                    <a:pt x="1768879" y="1039524"/>
+                  </a:lnTo>
+                  <a:lnTo>
+                    <a:pt x="1839224" y="1046151"/>
+                  </a:lnTo>
+                  <a:lnTo>
+                    <a:pt x="1909568" y="1052575"/>
+                  </a:lnTo>
+                  <a:lnTo>
+                    <a:pt x="1979913" y="1058804"/>
+                  </a:lnTo>
+                  <a:lnTo>
+                    <a:pt x="2050257" y="1064844"/>
+                  </a:lnTo>
+                  <a:lnTo>
+                    <a:pt x="2120602" y="1070700"/>
+                  </a:lnTo>
+                  <a:lnTo>
+                    <a:pt x="2190946" y="1076377"/>
+                  </a:lnTo>
+                  <a:lnTo>
+                    <a:pt x="2261291" y="1081882"/>
+                  </a:lnTo>
+                  <a:lnTo>
+                    <a:pt x="2331635" y="1087219"/>
+                  </a:lnTo>
+                  <a:lnTo>
+                    <a:pt x="2401980" y="1092393"/>
+                  </a:lnTo>
+                  <a:lnTo>
+                    <a:pt x="2472324" y="1097410"/>
+                  </a:lnTo>
+                  <a:lnTo>
+                    <a:pt x="2542669" y="1102274"/>
+                  </a:lnTo>
+                  <a:lnTo>
+                    <a:pt x="2613013" y="1106991"/>
+                  </a:lnTo>
+                  <a:lnTo>
+                    <a:pt x="2683358" y="1111563"/>
+                  </a:lnTo>
+                  <a:lnTo>
+                    <a:pt x="2753702" y="1115997"/>
+                  </a:lnTo>
+                  <a:lnTo>
+                    <a:pt x="2824047" y="1120295"/>
+                  </a:lnTo>
+                  <a:lnTo>
+                    <a:pt x="2894391" y="1124463"/>
+                  </a:lnTo>
+                  <a:lnTo>
+                    <a:pt x="2964736" y="1128504"/>
+                  </a:lnTo>
+                  <a:lnTo>
+                    <a:pt x="3035080" y="1132421"/>
+                  </a:lnTo>
+                  <a:lnTo>
+                    <a:pt x="3105425" y="1136220"/>
+                  </a:lnTo>
+                  <a:lnTo>
+                    <a:pt x="3175769" y="1139903"/>
+                  </a:lnTo>
+                  <a:lnTo>
+                    <a:pt x="3246114" y="1143473"/>
+                  </a:lnTo>
+                  <a:lnTo>
+                    <a:pt x="3316458" y="1146936"/>
+                  </a:lnTo>
+                  <a:lnTo>
+                    <a:pt x="3386803" y="1150292"/>
+                  </a:lnTo>
+                  <a:lnTo>
+                    <a:pt x="3457147" y="1153547"/>
+                  </a:lnTo>
+                  <a:lnTo>
+                    <a:pt x="3527492" y="1156702"/>
+                  </a:lnTo>
+                  <a:lnTo>
+                    <a:pt x="3597836" y="1159761"/>
+                  </a:lnTo>
+                  <a:lnTo>
+                    <a:pt x="3668181" y="1162728"/>
+                  </a:lnTo>
+                  <a:lnTo>
+                    <a:pt x="3738525" y="1165604"/>
+                  </a:lnTo>
+                  <a:lnTo>
+                    <a:pt x="3808870" y="1168392"/>
+                  </a:lnTo>
+                  <a:lnTo>
+                    <a:pt x="3879214" y="1171095"/>
+                  </a:lnTo>
+                  <a:lnTo>
+                    <a:pt x="3949559" y="1173717"/>
+                  </a:lnTo>
+                  <a:lnTo>
+                    <a:pt x="4019903" y="1176258"/>
+                  </a:lnTo>
+                  <a:lnTo>
+                    <a:pt x="4090247" y="1178722"/>
+                  </a:lnTo>
+                  <a:lnTo>
+                    <a:pt x="4160592" y="1181111"/>
+                  </a:lnTo>
+                  <a:lnTo>
+                    <a:pt x="4230936" y="1183427"/>
+                  </a:lnTo>
+                  <a:lnTo>
+                    <a:pt x="4301281" y="1185673"/>
+                  </a:lnTo>
+                  <a:lnTo>
+                    <a:pt x="4371625" y="1187851"/>
+                  </a:lnTo>
+                  <a:lnTo>
+                    <a:pt x="4441970" y="1189962"/>
+                  </a:lnTo>
+                  <a:lnTo>
+                    <a:pt x="4512314" y="1192009"/>
+                  </a:lnTo>
+                  <a:lnTo>
+                    <a:pt x="4582659" y="1193993"/>
+                  </a:lnTo>
+                  <a:lnTo>
+                    <a:pt x="4653003" y="1195917"/>
+                  </a:lnTo>
+                </a:path>
+              </a:pathLst>
+            </a:custGeom>
+          </p:spPr>
+          <p:txBody>
+            <a:bodyPr/>
+            <a:lstStyle/>
+            <a:p/>
+          </p:txBody>
+        </p:sp>
+        <p:sp>
+          <p:nvSpPr>
+            <p:cNvPr id="68" name="pl68"/>
+            <p:cNvSpPr/>
+            <p:nvPr/>
+          </p:nvSpPr>
+          <p:spPr>
+            <a:xfrm>
+              <a:off x="1325197" y="4336484"/>
+              <a:ext cx="6874219" cy="1255100"/>
+            </a:xfrm>
+            <a:custGeom>
+              <a:avLst/>
+              <a:pathLst>
+                <a:path w="6874219" h="1255100">
+                  <a:moveTo>
+                    <a:pt x="6874219" y="1255100"/>
+                  </a:moveTo>
+                  <a:lnTo>
+                    <a:pt x="6803874" y="1254886"/>
+                  </a:lnTo>
+                  <a:lnTo>
+                    <a:pt x="6733530" y="1254651"/>
+                  </a:lnTo>
+                  <a:lnTo>
+                    <a:pt x="6663185" y="1254393"/>
+                  </a:lnTo>
+                  <a:lnTo>
+                    <a:pt x="6592841" y="1254108"/>
+                  </a:lnTo>
+                  <a:lnTo>
+                    <a:pt x="6522496" y="1253794"/>
+                  </a:lnTo>
+                  <a:lnTo>
+                    <a:pt x="6452152" y="1253448"/>
+                  </a:lnTo>
+                  <a:lnTo>
+                    <a:pt x="6381807" y="1253067"/>
+                  </a:lnTo>
+                  <a:lnTo>
+                    <a:pt x="6311463" y="1252647"/>
+                  </a:lnTo>
+                  <a:lnTo>
+                    <a:pt x="6241118" y="1252185"/>
+                  </a:lnTo>
+                  <a:lnTo>
+                    <a:pt x="6170774" y="1251676"/>
+                  </a:lnTo>
+                  <a:lnTo>
+                    <a:pt x="6100429" y="1251115"/>
+                  </a:lnTo>
+                  <a:lnTo>
+                    <a:pt x="6030085" y="1250497"/>
+                  </a:lnTo>
+                  <a:lnTo>
+                    <a:pt x="5959740" y="1249817"/>
+                  </a:lnTo>
+                  <a:lnTo>
+                    <a:pt x="5889396" y="1249068"/>
+                  </a:lnTo>
+                  <a:lnTo>
+                    <a:pt x="5819051" y="1248242"/>
+                  </a:lnTo>
+                  <a:lnTo>
+                    <a:pt x="5748707" y="1247333"/>
+                  </a:lnTo>
+                  <a:lnTo>
+                    <a:pt x="5678363" y="1246332"/>
+                  </a:lnTo>
+                  <a:lnTo>
+                    <a:pt x="5608018" y="1245229"/>
+                  </a:lnTo>
+                  <a:lnTo>
+                    <a:pt x="5537674" y="1244014"/>
+                  </a:lnTo>
+                  <a:lnTo>
+                    <a:pt x="5467329" y="1242675"/>
+                  </a:lnTo>
+                  <a:lnTo>
+                    <a:pt x="5396985" y="1241201"/>
+                  </a:lnTo>
+                  <a:lnTo>
+                    <a:pt x="5326640" y="1239578"/>
+                  </a:lnTo>
+                  <a:lnTo>
+                    <a:pt x="5256296" y="1237789"/>
+                  </a:lnTo>
+                  <a:lnTo>
+                    <a:pt x="5185951" y="1235819"/>
+                  </a:lnTo>
+                  <a:lnTo>
+                    <a:pt x="5115607" y="1233649"/>
+                  </a:lnTo>
+                  <a:lnTo>
+                    <a:pt x="5045262" y="1231259"/>
+                  </a:lnTo>
+                  <a:lnTo>
+                    <a:pt x="4974918" y="1228627"/>
+                  </a:lnTo>
+                  <a:lnTo>
+                    <a:pt x="4904573" y="1225727"/>
+                  </a:lnTo>
+                  <a:lnTo>
+                    <a:pt x="4834229" y="1222533"/>
+                  </a:lnTo>
+                  <a:lnTo>
+                    <a:pt x="4763884" y="1219015"/>
+                  </a:lnTo>
+                  <a:lnTo>
+                    <a:pt x="4693540" y="1215140"/>
+                  </a:lnTo>
+                  <a:lnTo>
+                    <a:pt x="4623195" y="1210872"/>
+                  </a:lnTo>
+                  <a:lnTo>
+                    <a:pt x="4552851" y="1206170"/>
+                  </a:lnTo>
+                  <a:lnTo>
+                    <a:pt x="4482506" y="1200992"/>
+                  </a:lnTo>
+                  <a:lnTo>
+                    <a:pt x="4412162" y="1195288"/>
+                  </a:lnTo>
+                  <a:lnTo>
+                    <a:pt x="4341817" y="1189005"/>
+                  </a:lnTo>
+                  <a:lnTo>
+                    <a:pt x="4271473" y="1182085"/>
+                  </a:lnTo>
+                  <a:lnTo>
+                    <a:pt x="4201128" y="1174462"/>
+                  </a:lnTo>
+                  <a:lnTo>
+                    <a:pt x="4130784" y="1166066"/>
+                  </a:lnTo>
+                  <a:lnTo>
+                    <a:pt x="4060439" y="1156818"/>
+                  </a:lnTo>
+                  <a:lnTo>
+                    <a:pt x="3990095" y="1146631"/>
+                  </a:lnTo>
+                  <a:lnTo>
+                    <a:pt x="3919750" y="1135411"/>
+                  </a:lnTo>
+                  <a:lnTo>
+                    <a:pt x="3849406" y="1123052"/>
+                  </a:lnTo>
+                  <a:lnTo>
+                    <a:pt x="3779061" y="1109439"/>
+                  </a:lnTo>
+                  <a:lnTo>
+                    <a:pt x="3708717" y="1094444"/>
+                  </a:lnTo>
+                  <a:lnTo>
+                    <a:pt x="3638372" y="1077928"/>
+                  </a:lnTo>
+                  <a:lnTo>
+                    <a:pt x="3568028" y="1059736"/>
+                  </a:lnTo>
+                  <a:lnTo>
+                    <a:pt x="3497683" y="1039698"/>
+                  </a:lnTo>
+                  <a:lnTo>
+                    <a:pt x="3427339" y="1017627"/>
+                  </a:lnTo>
+                  <a:lnTo>
+                    <a:pt x="3356994" y="993315"/>
+                  </a:lnTo>
+                  <a:lnTo>
+                    <a:pt x="3286650" y="966537"/>
+                  </a:lnTo>
+                  <a:lnTo>
+                    <a:pt x="3216305" y="951358"/>
+                  </a:lnTo>
+                  <a:lnTo>
+                    <a:pt x="3145961" y="941756"/>
+                  </a:lnTo>
+                  <a:lnTo>
+                    <a:pt x="3075616" y="931852"/>
+                  </a:lnTo>
+                  <a:lnTo>
+                    <a:pt x="3005272" y="921636"/>
+                  </a:lnTo>
+                  <a:lnTo>
+                    <a:pt x="2934927" y="911101"/>
+                  </a:lnTo>
+                  <a:lnTo>
+                    <a:pt x="2864583" y="900234"/>
+                  </a:lnTo>
+                  <a:lnTo>
+                    <a:pt x="2794238" y="889026"/>
+                  </a:lnTo>
+                  <a:lnTo>
+                    <a:pt x="2723894" y="877467"/>
+                  </a:lnTo>
+                  <a:lnTo>
+                    <a:pt x="2653549" y="865544"/>
+                  </a:lnTo>
+                  <a:lnTo>
+                    <a:pt x="2583205" y="853247"/>
+                  </a:lnTo>
+                  <a:lnTo>
+                    <a:pt x="2512860" y="840564"/>
+                  </a:lnTo>
+                  <a:lnTo>
+                    <a:pt x="2442516" y="827483"/>
+                  </a:lnTo>
+                  <a:lnTo>
+                    <a:pt x="2372171" y="813991"/>
+                  </a:lnTo>
+                  <a:lnTo>
+                    <a:pt x="2301827" y="800075"/>
+                  </a:lnTo>
+                  <a:lnTo>
+                    <a:pt x="2231482" y="785722"/>
+                  </a:lnTo>
+                  <a:lnTo>
+                    <a:pt x="2161138" y="770919"/>
+                  </a:lnTo>
+                  <a:lnTo>
+                    <a:pt x="2090793" y="755651"/>
+                  </a:lnTo>
+                  <a:lnTo>
+                    <a:pt x="2020449" y="739904"/>
+                  </a:lnTo>
+                  <a:lnTo>
+                    <a:pt x="1950105" y="723662"/>
+                  </a:lnTo>
+                  <a:lnTo>
+                    <a:pt x="1879760" y="706911"/>
+                  </a:lnTo>
+                  <a:lnTo>
+                    <a:pt x="1809416" y="689633"/>
+                  </a:lnTo>
+                  <a:lnTo>
+                    <a:pt x="1739071" y="671813"/>
+                  </a:lnTo>
+                  <a:lnTo>
+                    <a:pt x="1668727" y="653433"/>
+                  </a:lnTo>
+                  <a:lnTo>
+                    <a:pt x="1598382" y="634477"/>
+                  </a:lnTo>
+                  <a:lnTo>
+                    <a:pt x="1528038" y="614925"/>
+                  </a:lnTo>
+                  <a:lnTo>
+                    <a:pt x="1457693" y="594759"/>
+                  </a:lnTo>
+                  <a:lnTo>
+                    <a:pt x="1387349" y="573960"/>
+                  </a:lnTo>
+                  <a:lnTo>
+                    <a:pt x="1317004" y="552509"/>
+                  </a:lnTo>
+                  <a:lnTo>
+                    <a:pt x="1246660" y="530383"/>
+                  </a:lnTo>
+                  <a:lnTo>
+                    <a:pt x="1176315" y="507563"/>
+                  </a:lnTo>
+                  <a:lnTo>
+                    <a:pt x="1105971" y="484027"/>
+                  </a:lnTo>
+                  <a:lnTo>
+                    <a:pt x="1035626" y="459751"/>
+                  </a:lnTo>
+                  <a:lnTo>
+                    <a:pt x="965282" y="434713"/>
+                  </a:lnTo>
+                  <a:lnTo>
+                    <a:pt x="894937" y="408889"/>
+                  </a:lnTo>
+                  <a:lnTo>
+                    <a:pt x="824593" y="382255"/>
+                  </a:lnTo>
+                  <a:lnTo>
+                    <a:pt x="754248" y="354784"/>
+                  </a:lnTo>
+                  <a:lnTo>
+                    <a:pt x="683904" y="326450"/>
+                  </a:lnTo>
+                  <a:lnTo>
+                    <a:pt x="613559" y="297227"/>
+                  </a:lnTo>
+                  <a:lnTo>
+                    <a:pt x="543215" y="267087"/>
+                  </a:lnTo>
+                  <a:lnTo>
+                    <a:pt x="472870" y="236000"/>
+                  </a:lnTo>
+                  <a:lnTo>
+                    <a:pt x="402526" y="203937"/>
+                  </a:lnTo>
+                  <a:lnTo>
+                    <a:pt x="332181" y="170868"/>
+                  </a:lnTo>
+                  <a:lnTo>
+                    <a:pt x="261837" y="136760"/>
+                  </a:lnTo>
+                  <a:lnTo>
+                    <a:pt x="191492" y="101581"/>
+                  </a:lnTo>
+                  <a:lnTo>
+                    <a:pt x="121148" y="65298"/>
+                  </a:lnTo>
+                  <a:lnTo>
+                    <a:pt x="50803" y="27875"/>
+                  </a:lnTo>
+                  <a:lnTo>
+                    <a:pt x="0" y="0"/>
+                  </a:lnTo>
+                </a:path>
+              </a:pathLst>
+            </a:custGeom>
+          </p:spPr>
+          <p:txBody>
+            <a:bodyPr/>
+            <a:lstStyle/>
+            <a:p/>
+          </p:txBody>
+        </p:sp>
+        <p:sp>
+          <p:nvSpPr>
+            <p:cNvPr id="69" name="pl69"/>
+            <p:cNvSpPr/>
+            <p:nvPr/>
+          </p:nvSpPr>
+          <p:spPr>
+            <a:xfrm>
+              <a:off x="3008096" y="4336484"/>
+              <a:ext cx="5191319" cy="1245852"/>
+            </a:xfrm>
+            <a:custGeom>
+              <a:avLst/>
+              <a:pathLst>
+                <a:path w="5191319" h="1245852">
+                  <a:moveTo>
+                    <a:pt x="0" y="0"/>
+                  </a:moveTo>
+                  <a:lnTo>
+                    <a:pt x="56171" y="62814"/>
+                  </a:lnTo>
+                  <a:lnTo>
+                    <a:pt x="126516" y="136617"/>
+                  </a:lnTo>
+                  <a:lnTo>
+                    <a:pt x="196860" y="205860"/>
+                  </a:lnTo>
+                  <a:lnTo>
+                    <a:pt x="267205" y="270824"/>
+                  </a:lnTo>
+                  <a:lnTo>
+                    <a:pt x="337549" y="331773"/>
+                  </a:lnTo>
+                  <a:lnTo>
+                    <a:pt x="407894" y="388957"/>
+                  </a:lnTo>
+                  <a:lnTo>
+                    <a:pt x="478238" y="442607"/>
+                  </a:lnTo>
+                  <a:lnTo>
+                    <a:pt x="548583" y="492942"/>
+                  </a:lnTo>
+                  <a:lnTo>
+                    <a:pt x="618927" y="540166"/>
+                  </a:lnTo>
+                  <a:lnTo>
+                    <a:pt x="689272" y="584473"/>
+                  </a:lnTo>
+                  <a:lnTo>
+                    <a:pt x="759616" y="626042"/>
+                  </a:lnTo>
+                  <a:lnTo>
+                    <a:pt x="829961" y="665042"/>
+                  </a:lnTo>
+                  <a:lnTo>
+                    <a:pt x="900305" y="701632"/>
+                  </a:lnTo>
+                  <a:lnTo>
+                    <a:pt x="970650" y="735962"/>
+                  </a:lnTo>
+                  <a:lnTo>
+                    <a:pt x="1040994" y="768170"/>
+                  </a:lnTo>
+                  <a:lnTo>
+                    <a:pt x="1111339" y="798388"/>
+                  </a:lnTo>
+                  <a:lnTo>
+                    <a:pt x="1181683" y="826739"/>
+                  </a:lnTo>
+                  <a:lnTo>
+                    <a:pt x="1252028" y="853337"/>
+                  </a:lnTo>
+                  <a:lnTo>
+                    <a:pt x="1322372" y="878293"/>
+                  </a:lnTo>
+                  <a:lnTo>
+                    <a:pt x="1392717" y="901706"/>
+                  </a:lnTo>
+                  <a:lnTo>
+                    <a:pt x="1463061" y="923673"/>
+                  </a:lnTo>
+                  <a:lnTo>
+                    <a:pt x="1533406" y="944282"/>
+                  </a:lnTo>
+                  <a:lnTo>
+                    <a:pt x="1603750" y="963618"/>
+                  </a:lnTo>
+                  <a:lnTo>
+                    <a:pt x="1674095" y="981759"/>
+                  </a:lnTo>
+                  <a:lnTo>
+                    <a:pt x="1744439" y="998779"/>
+                  </a:lnTo>
+                  <a:lnTo>
+                    <a:pt x="1814784" y="1014747"/>
+                  </a:lnTo>
+                  <a:lnTo>
+                    <a:pt x="1885128" y="1029729"/>
+                  </a:lnTo>
+                  <a:lnTo>
+                    <a:pt x="1955473" y="1043784"/>
+                  </a:lnTo>
+                  <a:lnTo>
+                    <a:pt x="2025817" y="1056972"/>
+                  </a:lnTo>
+                  <a:lnTo>
+                    <a:pt x="2096162" y="1069344"/>
+                  </a:lnTo>
+                  <a:lnTo>
+                    <a:pt x="2166506" y="1080952"/>
+                  </a:lnTo>
+                  <a:lnTo>
+                    <a:pt x="2236851" y="1091843"/>
+                  </a:lnTo>
+                  <a:lnTo>
+                    <a:pt x="2307195" y="1102061"/>
+                  </a:lnTo>
+                  <a:lnTo>
+                    <a:pt x="2377540" y="1111647"/>
+                  </a:lnTo>
+                  <a:lnTo>
+                    <a:pt x="2447884" y="1120641"/>
+                  </a:lnTo>
+                  <a:lnTo>
+                    <a:pt x="2518229" y="1129079"/>
+                  </a:lnTo>
+                  <a:lnTo>
+                    <a:pt x="2588573" y="1136996"/>
+                  </a:lnTo>
+                  <a:lnTo>
+                    <a:pt x="2658918" y="1144424"/>
+                  </a:lnTo>
+                  <a:lnTo>
+                    <a:pt x="2729262" y="1151393"/>
+                  </a:lnTo>
+                  <a:lnTo>
+                    <a:pt x="2799607" y="1157931"/>
+                  </a:lnTo>
+                  <a:lnTo>
+                    <a:pt x="2869951" y="1164065"/>
+                  </a:lnTo>
+                  <a:lnTo>
+                    <a:pt x="2940296" y="1169820"/>
+                  </a:lnTo>
+                  <a:lnTo>
+                    <a:pt x="3010640" y="1175219"/>
+                  </a:lnTo>
+                  <a:lnTo>
+                    <a:pt x="3080985" y="1180285"/>
+                  </a:lnTo>
+                  <a:lnTo>
+                    <a:pt x="3151329" y="1185038"/>
+                  </a:lnTo>
+                  <a:lnTo>
+                    <a:pt x="3221674" y="1189497"/>
+                  </a:lnTo>
+                  <a:lnTo>
+                    <a:pt x="3292018" y="1193681"/>
+                  </a:lnTo>
+                  <a:lnTo>
+                    <a:pt x="3362363" y="1197606"/>
+                  </a:lnTo>
+                  <a:lnTo>
+                    <a:pt x="3432707" y="1201288"/>
+                  </a:lnTo>
+                  <a:lnTo>
+                    <a:pt x="3503052" y="1204743"/>
+                  </a:lnTo>
+                  <a:lnTo>
+                    <a:pt x="3573396" y="1207985"/>
+                  </a:lnTo>
+                  <a:lnTo>
+                    <a:pt x="3643741" y="1211026"/>
+                  </a:lnTo>
+                  <a:lnTo>
+                    <a:pt x="3714085" y="1213879"/>
+                  </a:lnTo>
+                  <a:lnTo>
+                    <a:pt x="3784429" y="1216556"/>
+                  </a:lnTo>
+                  <a:lnTo>
+                    <a:pt x="3854774" y="1219068"/>
+                  </a:lnTo>
+                  <a:lnTo>
+                    <a:pt x="3925118" y="1221424"/>
+                  </a:lnTo>
+                  <a:lnTo>
+                    <a:pt x="3995463" y="1223635"/>
+                  </a:lnTo>
+                  <a:lnTo>
+                    <a:pt x="4065807" y="1225709"/>
+                  </a:lnTo>
+                  <a:lnTo>
+                    <a:pt x="4136152" y="1227655"/>
+                  </a:lnTo>
+                  <a:lnTo>
+                    <a:pt x="4206496" y="1229481"/>
+                  </a:lnTo>
+                  <a:lnTo>
+                    <a:pt x="4276841" y="1231194"/>
+                  </a:lnTo>
+                  <a:lnTo>
+                    <a:pt x="4347185" y="1232801"/>
+                  </a:lnTo>
+                  <a:lnTo>
+                    <a:pt x="4417530" y="1234308"/>
+                  </a:lnTo>
+                  <a:lnTo>
+                    <a:pt x="4487874" y="1235723"/>
+                  </a:lnTo>
+                  <a:lnTo>
+                    <a:pt x="4558219" y="1237050"/>
+                  </a:lnTo>
+                  <a:lnTo>
+                    <a:pt x="4628563" y="1238295"/>
+                  </a:lnTo>
+                  <a:lnTo>
+                    <a:pt x="4698908" y="1239464"/>
+                  </a:lnTo>
+                  <a:lnTo>
+                    <a:pt x="4769252" y="1240560"/>
+                  </a:lnTo>
+                  <a:lnTo>
+                    <a:pt x="4839597" y="1241588"/>
+                  </a:lnTo>
+                  <a:lnTo>
+                    <a:pt x="4909941" y="1242553"/>
+                  </a:lnTo>
+                  <a:lnTo>
+                    <a:pt x="4980286" y="1243458"/>
+                  </a:lnTo>
+                  <a:lnTo>
+                    <a:pt x="5050630" y="1244307"/>
+                  </a:lnTo>
+                  <a:lnTo>
+                    <a:pt x="5120975" y="1245104"/>
+                  </a:lnTo>
+                  <a:lnTo>
+                    <a:pt x="5191319" y="1245852"/>
+                  </a:lnTo>
+                </a:path>
+              </a:pathLst>
+            </a:custGeom>
+            <a:ln w="27101" cap="flat">
+              <a:solidFill>
+                <a:srgbClr val="FF8C00">
+                  <a:alpha val="100000"/>
+                </a:srgbClr>
+              </a:solidFill>
+              <a:prstDash val="solid"/>
+              <a:round/>
+            </a:ln>
+          </p:spPr>
+          <p:txBody>
+            <a:bodyPr/>
+            <a:lstStyle/>
+            <a:p/>
+          </p:txBody>
+        </p:sp>
+        <p:sp>
+          <p:nvSpPr>
+            <p:cNvPr id="70" name="pl70"/>
+            <p:cNvSpPr/>
+            <p:nvPr/>
+          </p:nvSpPr>
+          <p:spPr>
+            <a:xfrm>
+              <a:off x="887106" y="5294352"/>
+              <a:ext cx="7660515" cy="0"/>
+            </a:xfrm>
+            <a:custGeom>
+              <a:avLst/>
+              <a:pathLst>
+                <a:path w="7660515" h="0">
+                  <a:moveTo>
+                    <a:pt x="0" y="0"/>
+                  </a:moveTo>
+                  <a:lnTo>
+                    <a:pt x="7660515" y="0"/>
+                  </a:lnTo>
+                  <a:lnTo>
+                    <a:pt x="7660515" y="0"/>
+                  </a:lnTo>
+                </a:path>
+              </a:pathLst>
+            </a:custGeom>
+            <a:ln w="13550" cap="flat">
+              <a:solidFill>
+                <a:srgbClr val="7F7F7F">
+                  <a:alpha val="100000"/>
+                </a:srgbClr>
+              </a:solidFill>
+              <a:prstDash val="dash"/>
+              <a:round/>
+            </a:ln>
+          </p:spPr>
+          <p:txBody>
+            <a:bodyPr/>
+            <a:lstStyle/>
+            <a:p/>
+          </p:txBody>
+        </p:sp>
+        <p:sp>
+          <p:nvSpPr>
+            <p:cNvPr id="71" name="pl71"/>
+            <p:cNvSpPr/>
+            <p:nvPr/>
+          </p:nvSpPr>
+          <p:spPr>
+            <a:xfrm>
+              <a:off x="4590457" y="4336484"/>
+              <a:ext cx="0" cy="1317069"/>
+            </a:xfrm>
+            <a:custGeom>
+              <a:avLst/>
+              <a:pathLst>
+                <a:path w="0" h="1317069">
+                  <a:moveTo>
+                    <a:pt x="0" y="1317069"/>
+                  </a:moveTo>
+                  <a:lnTo>
+                    <a:pt x="0" y="0"/>
+                  </a:lnTo>
+                  <a:lnTo>
+                    <a:pt x="0" y="0"/>
+                  </a:lnTo>
+                </a:path>
+              </a:pathLst>
+            </a:custGeom>
+            <a:ln w="13550" cap="flat">
+              <a:solidFill>
+                <a:srgbClr val="666666">
+                  <a:alpha val="100000"/>
+                </a:srgbClr>
+              </a:solidFill>
+              <a:prstDash val="dot"/>
+              <a:round/>
+            </a:ln>
+          </p:spPr>
+          <p:txBody>
+            <a:bodyPr/>
+            <a:lstStyle/>
+            <a:p/>
+          </p:txBody>
+        </p:sp>
+        <p:sp>
+          <p:nvSpPr>
+            <p:cNvPr id="72" name="tx72"/>
+            <p:cNvSpPr/>
+            <p:nvPr/>
+          </p:nvSpPr>
+          <p:spPr>
+            <a:xfrm>
+              <a:off x="762297" y="5553636"/>
+              <a:ext cx="62179" cy="80101"/>
+            </a:xfrm>
+            <a:prstGeom prst="rect">
+              <a:avLst/>
+            </a:prstGeom>
+            <a:noFill/>
+          </p:spPr>
+          <p:txBody>
+            <a:bodyPr lIns="0" rIns="0" tIns="0" bIns="0" anchorCtr="1" anchor="ctr" wrap="none"/>
+            <a:lstStyle/>
+            <a:p>
+              <a:pPr algn="l" marL="0" marR="0" indent="0">
+                <a:lnSpc>
+                  <a:spcPts val="880"/>
+                </a:lnSpc>
+                <a:spcBef>
+                  <a:spcPts val="0"/>
+                </a:spcBef>
+                <a:spcAft>
+                  <a:spcPts val="0"/>
+                </a:spcAft>
+              </a:pPr>
+              <a:r>
+                <a:rPr sz="880">
+                  <a:solidFill>
+                    <a:srgbClr val="4D4D4D">
+                      <a:alpha val="100000"/>
+                    </a:srgbClr>
+                  </a:solidFill>
+                  <a:latin typeface="Helvetica"/>
+                  <a:cs typeface="Helvetica"/>
+                </a:rPr>
+                <a:t>0</a:t>
+              </a:r>
+            </a:p>
+          </p:txBody>
+        </p:sp>
+        <p:sp>
+          <p:nvSpPr>
+            <p:cNvPr id="73" name="tx73"/>
+            <p:cNvSpPr/>
+            <p:nvPr/>
+          </p:nvSpPr>
+          <p:spPr>
+            <a:xfrm>
+              <a:off x="762297" y="5254302"/>
+              <a:ext cx="62179" cy="80101"/>
+            </a:xfrm>
+            <a:prstGeom prst="rect">
+              <a:avLst/>
+            </a:prstGeom>
+            <a:noFill/>
+          </p:spPr>
+          <p:txBody>
+            <a:bodyPr lIns="0" rIns="0" tIns="0" bIns="0" anchorCtr="1" anchor="ctr" wrap="none"/>
+            <a:lstStyle/>
+            <a:p>
+              <a:pPr algn="l" marL="0" marR="0" indent="0">
+                <a:lnSpc>
+                  <a:spcPts val="880"/>
+                </a:lnSpc>
+                <a:spcBef>
+                  <a:spcPts val="0"/>
+                </a:spcBef>
+                <a:spcAft>
+                  <a:spcPts val="0"/>
+                </a:spcAft>
+              </a:pPr>
+              <a:r>
+                <a:rPr sz="880">
+                  <a:solidFill>
+                    <a:srgbClr val="4D4D4D">
+                      <a:alpha val="100000"/>
+                    </a:srgbClr>
+                  </a:solidFill>
+                  <a:latin typeface="Helvetica"/>
+                  <a:cs typeface="Helvetica"/>
+                </a:rPr>
+                <a:t>1</a:t>
+              </a:r>
+            </a:p>
+          </p:txBody>
+        </p:sp>
+        <p:sp>
+          <p:nvSpPr>
+            <p:cNvPr id="74" name="tx74"/>
+            <p:cNvSpPr/>
+            <p:nvPr/>
+          </p:nvSpPr>
+          <p:spPr>
+            <a:xfrm>
+              <a:off x="762297" y="4954968"/>
+              <a:ext cx="62179" cy="80101"/>
+            </a:xfrm>
+            <a:prstGeom prst="rect">
+              <a:avLst/>
+            </a:prstGeom>
+            <a:noFill/>
+          </p:spPr>
+          <p:txBody>
+            <a:bodyPr lIns="0" rIns="0" tIns="0" bIns="0" anchorCtr="1" anchor="ctr" wrap="none"/>
+            <a:lstStyle/>
+            <a:p>
+              <a:pPr algn="l" marL="0" marR="0" indent="0">
+                <a:lnSpc>
+                  <a:spcPts val="880"/>
+                </a:lnSpc>
+                <a:spcBef>
+                  <a:spcPts val="0"/>
+                </a:spcBef>
+                <a:spcAft>
+                  <a:spcPts val="0"/>
+                </a:spcAft>
+              </a:pPr>
+              <a:r>
+                <a:rPr sz="880">
+                  <a:solidFill>
+                    <a:srgbClr val="4D4D4D">
+                      <a:alpha val="100000"/>
+                    </a:srgbClr>
+                  </a:solidFill>
+                  <a:latin typeface="Helvetica"/>
+                  <a:cs typeface="Helvetica"/>
+                </a:rPr>
+                <a:t>2</a:t>
+              </a:r>
+            </a:p>
+          </p:txBody>
+        </p:sp>
+        <p:sp>
+          <p:nvSpPr>
+            <p:cNvPr id="75" name="tx75"/>
+            <p:cNvSpPr/>
+            <p:nvPr/>
+          </p:nvSpPr>
+          <p:spPr>
+            <a:xfrm>
+              <a:off x="762297" y="4655634"/>
+              <a:ext cx="62179" cy="80101"/>
+            </a:xfrm>
+            <a:prstGeom prst="rect">
+              <a:avLst/>
+            </a:prstGeom>
+            <a:noFill/>
+          </p:spPr>
+          <p:txBody>
+            <a:bodyPr lIns="0" rIns="0" tIns="0" bIns="0" anchorCtr="1" anchor="ctr" wrap="none"/>
+            <a:lstStyle/>
+            <a:p>
+              <a:pPr algn="l" marL="0" marR="0" indent="0">
+                <a:lnSpc>
+                  <a:spcPts val="880"/>
+                </a:lnSpc>
+                <a:spcBef>
+                  <a:spcPts val="0"/>
+                </a:spcBef>
+                <a:spcAft>
+                  <a:spcPts val="0"/>
+                </a:spcAft>
+              </a:pPr>
+              <a:r>
+                <a:rPr sz="880">
+                  <a:solidFill>
+                    <a:srgbClr val="4D4D4D">
+                      <a:alpha val="100000"/>
+                    </a:srgbClr>
+                  </a:solidFill>
+                  <a:latin typeface="Helvetica"/>
+                  <a:cs typeface="Helvetica"/>
+                </a:rPr>
+                <a:t>3</a:t>
+              </a:r>
+            </a:p>
+          </p:txBody>
+        </p:sp>
+        <p:sp>
+          <p:nvSpPr>
+            <p:cNvPr id="76" name="tx76"/>
+            <p:cNvSpPr/>
+            <p:nvPr/>
+          </p:nvSpPr>
+          <p:spPr>
+            <a:xfrm>
+              <a:off x="762297" y="4356300"/>
+              <a:ext cx="62179" cy="80101"/>
+            </a:xfrm>
+            <a:prstGeom prst="rect">
+              <a:avLst/>
+            </a:prstGeom>
+            <a:noFill/>
+          </p:spPr>
+          <p:txBody>
+            <a:bodyPr lIns="0" rIns="0" tIns="0" bIns="0" anchorCtr="1" anchor="ctr" wrap="none"/>
+            <a:lstStyle/>
+            <a:p>
+              <a:pPr algn="l" marL="0" marR="0" indent="0">
+                <a:lnSpc>
+                  <a:spcPts val="880"/>
+                </a:lnSpc>
+                <a:spcBef>
+                  <a:spcPts val="0"/>
+                </a:spcBef>
+                <a:spcAft>
+                  <a:spcPts val="0"/>
+                </a:spcAft>
+              </a:pPr>
+              <a:r>
+                <a:rPr sz="880">
+                  <a:solidFill>
+                    <a:srgbClr val="4D4D4D">
+                      <a:alpha val="100000"/>
+                    </a:srgbClr>
+                  </a:solidFill>
+                  <a:latin typeface="Helvetica"/>
+                  <a:cs typeface="Helvetica"/>
+                </a:rPr>
+                <a:t>4</a:t>
+              </a:r>
+            </a:p>
+          </p:txBody>
+        </p:sp>
+        <p:sp>
+          <p:nvSpPr>
+            <p:cNvPr id="77" name="tx77"/>
+            <p:cNvSpPr/>
+            <p:nvPr/>
+          </p:nvSpPr>
+          <p:spPr>
+            <a:xfrm>
+              <a:off x="1133333" y="5716183"/>
+              <a:ext cx="161574" cy="80101"/>
+            </a:xfrm>
+            <a:prstGeom prst="rect">
+              <a:avLst/>
+            </a:prstGeom>
+            <a:noFill/>
+          </p:spPr>
+          <p:txBody>
+            <a:bodyPr lIns="0" rIns="0" tIns="0" bIns="0" anchorCtr="1" anchor="ctr" wrap="none"/>
+            <a:lstStyle/>
+            <a:p>
+              <a:pPr algn="l" marL="0" marR="0" indent="0">
+                <a:lnSpc>
+                  <a:spcPts val="880"/>
+                </a:lnSpc>
+                <a:spcBef>
+                  <a:spcPts val="0"/>
+                </a:spcBef>
+                <a:spcAft>
+                  <a:spcPts val="0"/>
+                </a:spcAft>
+              </a:pPr>
+              <a:r>
+                <a:rPr sz="880">
+                  <a:solidFill>
+                    <a:srgbClr val="4D4D4D">
+                      <a:alpha val="100000"/>
+                    </a:srgbClr>
+                  </a:solidFill>
+                  <a:latin typeface="Helvetica"/>
+                  <a:cs typeface="Helvetica"/>
+                </a:rPr>
+                <a:t>-40</a:t>
+              </a:r>
+            </a:p>
+          </p:txBody>
+        </p:sp>
+        <p:sp>
+          <p:nvSpPr>
+            <p:cNvPr id="78" name="tx78"/>
+            <p:cNvSpPr/>
+            <p:nvPr/>
+          </p:nvSpPr>
+          <p:spPr>
+            <a:xfrm>
+              <a:off x="1978619" y="5716183"/>
+              <a:ext cx="161574" cy="80101"/>
+            </a:xfrm>
+            <a:prstGeom prst="rect">
+              <a:avLst/>
+            </a:prstGeom>
+            <a:noFill/>
+          </p:spPr>
+          <p:txBody>
+            <a:bodyPr lIns="0" rIns="0" tIns="0" bIns="0" anchorCtr="1" anchor="ctr" wrap="none"/>
+            <a:lstStyle/>
+            <a:p>
+              <a:pPr algn="l" marL="0" marR="0" indent="0">
+                <a:lnSpc>
+                  <a:spcPts val="880"/>
+                </a:lnSpc>
+                <a:spcBef>
+                  <a:spcPts val="0"/>
+                </a:spcBef>
+                <a:spcAft>
+                  <a:spcPts val="0"/>
+                </a:spcAft>
+              </a:pPr>
+              <a:r>
+                <a:rPr sz="880">
+                  <a:solidFill>
+                    <a:srgbClr val="4D4D4D">
+                      <a:alpha val="100000"/>
+                    </a:srgbClr>
+                  </a:solidFill>
+                  <a:latin typeface="Helvetica"/>
+                  <a:cs typeface="Helvetica"/>
+                </a:rPr>
+                <a:t>-30</a:t>
+              </a:r>
+            </a:p>
+          </p:txBody>
+        </p:sp>
+        <p:sp>
+          <p:nvSpPr>
+            <p:cNvPr id="79" name="tx79"/>
+            <p:cNvSpPr/>
+            <p:nvPr/>
+          </p:nvSpPr>
+          <p:spPr>
+            <a:xfrm>
+              <a:off x="2823906" y="5716183"/>
+              <a:ext cx="161574" cy="80101"/>
+            </a:xfrm>
+            <a:prstGeom prst="rect">
+              <a:avLst/>
+            </a:prstGeom>
+            <a:noFill/>
+          </p:spPr>
+          <p:txBody>
+            <a:bodyPr lIns="0" rIns="0" tIns="0" bIns="0" anchorCtr="1" anchor="ctr" wrap="none"/>
+            <a:lstStyle/>
+            <a:p>
+              <a:pPr algn="l" marL="0" marR="0" indent="0">
+                <a:lnSpc>
+                  <a:spcPts val="880"/>
+                </a:lnSpc>
+                <a:spcBef>
+                  <a:spcPts val="0"/>
+                </a:spcBef>
+                <a:spcAft>
+                  <a:spcPts val="0"/>
+                </a:spcAft>
+              </a:pPr>
+              <a:r>
+                <a:rPr sz="880">
+                  <a:solidFill>
+                    <a:srgbClr val="4D4D4D">
+                      <a:alpha val="100000"/>
+                    </a:srgbClr>
+                  </a:solidFill>
+                  <a:latin typeface="Helvetica"/>
+                  <a:cs typeface="Helvetica"/>
+                </a:rPr>
+                <a:t>-20</a:t>
+              </a:r>
+            </a:p>
+          </p:txBody>
+        </p:sp>
+        <p:sp>
+          <p:nvSpPr>
+            <p:cNvPr id="80" name="tx80"/>
+            <p:cNvSpPr/>
+            <p:nvPr/>
+          </p:nvSpPr>
+          <p:spPr>
+            <a:xfrm>
+              <a:off x="3669192" y="5716183"/>
+              <a:ext cx="161574" cy="80101"/>
+            </a:xfrm>
+            <a:prstGeom prst="rect">
+              <a:avLst/>
+            </a:prstGeom>
+            <a:noFill/>
+          </p:spPr>
+          <p:txBody>
+            <a:bodyPr lIns="0" rIns="0" tIns="0" bIns="0" anchorCtr="1" anchor="ctr" wrap="none"/>
+            <a:lstStyle/>
+            <a:p>
+              <a:pPr algn="l" marL="0" marR="0" indent="0">
+                <a:lnSpc>
+                  <a:spcPts val="880"/>
+                </a:lnSpc>
+                <a:spcBef>
+                  <a:spcPts val="0"/>
+                </a:spcBef>
+                <a:spcAft>
+                  <a:spcPts val="0"/>
+                </a:spcAft>
+              </a:pPr>
+              <a:r>
+                <a:rPr sz="880">
+                  <a:solidFill>
+                    <a:srgbClr val="4D4D4D">
+                      <a:alpha val="100000"/>
+                    </a:srgbClr>
+                  </a:solidFill>
+                  <a:latin typeface="Helvetica"/>
+                  <a:cs typeface="Helvetica"/>
+                </a:rPr>
+                <a:t>-10</a:t>
+              </a:r>
+            </a:p>
+          </p:txBody>
+        </p:sp>
+        <p:sp>
+          <p:nvSpPr>
+            <p:cNvPr id="81" name="tx81"/>
+            <p:cNvSpPr/>
+            <p:nvPr/>
+          </p:nvSpPr>
+          <p:spPr>
+            <a:xfrm>
+              <a:off x="4564176" y="5716183"/>
+              <a:ext cx="62179" cy="80101"/>
+            </a:xfrm>
+            <a:prstGeom prst="rect">
+              <a:avLst/>
+            </a:prstGeom>
+            <a:noFill/>
+          </p:spPr>
+          <p:txBody>
+            <a:bodyPr lIns="0" rIns="0" tIns="0" bIns="0" anchorCtr="1" anchor="ctr" wrap="none"/>
+            <a:lstStyle/>
+            <a:p>
+              <a:pPr algn="l" marL="0" marR="0" indent="0">
+                <a:lnSpc>
+                  <a:spcPts val="880"/>
+                </a:lnSpc>
+                <a:spcBef>
+                  <a:spcPts val="0"/>
+                </a:spcBef>
+                <a:spcAft>
+                  <a:spcPts val="0"/>
+                </a:spcAft>
+              </a:pPr>
+              <a:r>
+                <a:rPr sz="880">
+                  <a:solidFill>
+                    <a:srgbClr val="4D4D4D">
+                      <a:alpha val="100000"/>
+                    </a:srgbClr>
+                  </a:solidFill>
+                  <a:latin typeface="Helvetica"/>
+                  <a:cs typeface="Helvetica"/>
+                </a:rPr>
+                <a:t>0</a:t>
+              </a:r>
+            </a:p>
+          </p:txBody>
+        </p:sp>
+        <p:sp>
+          <p:nvSpPr>
+            <p:cNvPr id="82" name="tx82"/>
+            <p:cNvSpPr/>
+            <p:nvPr/>
+          </p:nvSpPr>
+          <p:spPr>
+            <a:xfrm>
+              <a:off x="5378373" y="5716183"/>
+              <a:ext cx="124358" cy="80101"/>
+            </a:xfrm>
+            <a:prstGeom prst="rect">
+              <a:avLst/>
+            </a:prstGeom>
+            <a:noFill/>
+          </p:spPr>
+          <p:txBody>
+            <a:bodyPr lIns="0" rIns="0" tIns="0" bIns="0" anchorCtr="1" anchor="ctr" wrap="none"/>
+            <a:lstStyle/>
+            <a:p>
+              <a:pPr algn="l" marL="0" marR="0" indent="0">
+                <a:lnSpc>
+                  <a:spcPts val="880"/>
+                </a:lnSpc>
+                <a:spcBef>
+                  <a:spcPts val="0"/>
+                </a:spcBef>
+                <a:spcAft>
+                  <a:spcPts val="0"/>
+                </a:spcAft>
+              </a:pPr>
+              <a:r>
+                <a:rPr sz="880">
+                  <a:solidFill>
+                    <a:srgbClr val="4D4D4D">
+                      <a:alpha val="100000"/>
+                    </a:srgbClr>
+                  </a:solidFill>
+                  <a:latin typeface="Helvetica"/>
+                  <a:cs typeface="Helvetica"/>
+                </a:rPr>
+                <a:t>10</a:t>
+              </a:r>
+            </a:p>
+          </p:txBody>
+        </p:sp>
+        <p:sp>
+          <p:nvSpPr>
+            <p:cNvPr id="83" name="tx83"/>
+            <p:cNvSpPr/>
+            <p:nvPr/>
+          </p:nvSpPr>
+          <p:spPr>
+            <a:xfrm>
+              <a:off x="6223659" y="5716183"/>
+              <a:ext cx="124358" cy="80101"/>
+            </a:xfrm>
+            <a:prstGeom prst="rect">
+              <a:avLst/>
+            </a:prstGeom>
+            <a:noFill/>
+          </p:spPr>
+          <p:txBody>
+            <a:bodyPr lIns="0" rIns="0" tIns="0" bIns="0" anchorCtr="1" anchor="ctr" wrap="none"/>
+            <a:lstStyle/>
+            <a:p>
+              <a:pPr algn="l" marL="0" marR="0" indent="0">
+                <a:lnSpc>
+                  <a:spcPts val="880"/>
+                </a:lnSpc>
+                <a:spcBef>
+                  <a:spcPts val="0"/>
+                </a:spcBef>
+                <a:spcAft>
+                  <a:spcPts val="0"/>
+                </a:spcAft>
+              </a:pPr>
+              <a:r>
+                <a:rPr sz="880">
+                  <a:solidFill>
+                    <a:srgbClr val="4D4D4D">
+                      <a:alpha val="100000"/>
+                    </a:srgbClr>
+                  </a:solidFill>
+                  <a:latin typeface="Helvetica"/>
+                  <a:cs typeface="Helvetica"/>
+                </a:rPr>
+                <a:t>20</a:t>
+              </a:r>
+            </a:p>
+          </p:txBody>
+        </p:sp>
+        <p:sp>
+          <p:nvSpPr>
+            <p:cNvPr id="84" name="tx84"/>
+            <p:cNvSpPr/>
+            <p:nvPr/>
+          </p:nvSpPr>
+          <p:spPr>
+            <a:xfrm>
+              <a:off x="7068946" y="5716183"/>
+              <a:ext cx="124358" cy="80101"/>
+            </a:xfrm>
+            <a:prstGeom prst="rect">
+              <a:avLst/>
+            </a:prstGeom>
+            <a:noFill/>
+          </p:spPr>
+          <p:txBody>
+            <a:bodyPr lIns="0" rIns="0" tIns="0" bIns="0" anchorCtr="1" anchor="ctr" wrap="none"/>
+            <a:lstStyle/>
+            <a:p>
+              <a:pPr algn="l" marL="0" marR="0" indent="0">
+                <a:lnSpc>
+                  <a:spcPts val="880"/>
+                </a:lnSpc>
+                <a:spcBef>
+                  <a:spcPts val="0"/>
+                </a:spcBef>
+                <a:spcAft>
+                  <a:spcPts val="0"/>
+                </a:spcAft>
+              </a:pPr>
+              <a:r>
+                <a:rPr sz="880">
+                  <a:solidFill>
+                    <a:srgbClr val="4D4D4D">
+                      <a:alpha val="100000"/>
+                    </a:srgbClr>
+                  </a:solidFill>
+                  <a:latin typeface="Helvetica"/>
+                  <a:cs typeface="Helvetica"/>
+                </a:rPr>
+                <a:t>30</a:t>
+              </a:r>
+            </a:p>
+          </p:txBody>
+        </p:sp>
+        <p:sp>
+          <p:nvSpPr>
+            <p:cNvPr id="85" name="tx85"/>
+            <p:cNvSpPr/>
+            <p:nvPr/>
+          </p:nvSpPr>
+          <p:spPr>
+            <a:xfrm>
+              <a:off x="7914232" y="5716183"/>
+              <a:ext cx="124358" cy="80101"/>
+            </a:xfrm>
+            <a:prstGeom prst="rect">
+              <a:avLst/>
+            </a:prstGeom>
+            <a:noFill/>
+          </p:spPr>
+          <p:txBody>
+            <a:bodyPr lIns="0" rIns="0" tIns="0" bIns="0" anchorCtr="1" anchor="ctr" wrap="none"/>
+            <a:lstStyle/>
+            <a:p>
+              <a:pPr algn="l" marL="0" marR="0" indent="0">
+                <a:lnSpc>
+                  <a:spcPts val="880"/>
+                </a:lnSpc>
+                <a:spcBef>
+                  <a:spcPts val="0"/>
+                </a:spcBef>
+                <a:spcAft>
+                  <a:spcPts val="0"/>
+                </a:spcAft>
+              </a:pPr>
+              <a:r>
+                <a:rPr sz="880">
+                  <a:solidFill>
+                    <a:srgbClr val="4D4D4D">
+                      <a:alpha val="100000"/>
+                    </a:srgbClr>
+                  </a:solidFill>
+                  <a:latin typeface="Helvetica"/>
+                  <a:cs typeface="Helvetica"/>
+                </a:rPr>
+                <a:t>40</a:t>
+              </a:r>
+            </a:p>
+          </p:txBody>
+        </p:sp>
+        <p:sp>
+          <p:nvSpPr>
+            <p:cNvPr id="86" name="tx86"/>
+            <p:cNvSpPr/>
+            <p:nvPr/>
+          </p:nvSpPr>
+          <p:spPr>
+            <a:xfrm>
+              <a:off x="2928340" y="5855859"/>
+              <a:ext cx="3578047" cy="100218"/>
+            </a:xfrm>
+            <a:prstGeom prst="rect">
+              <a:avLst/>
+            </a:prstGeom>
+            <a:noFill/>
+          </p:spPr>
+          <p:txBody>
+            <a:bodyPr lIns="0" rIns="0" tIns="0" bIns="0" anchorCtr="1" anchor="ctr" wrap="none"/>
+            <a:lstStyle/>
+            <a:p>
+              <a:pPr algn="l" marL="0" marR="0" indent="0">
+                <a:lnSpc>
+                  <a:spcPts val="1100"/>
+                </a:lnSpc>
+                <a:spcBef>
+                  <a:spcPts val="0"/>
+                </a:spcBef>
+                <a:spcAft>
+                  <a:spcPts val="0"/>
+                </a:spcAft>
+              </a:pPr>
+              <a:r>
+                <a:rPr sz="1100">
+                  <a:solidFill>
+                    <a:srgbClr val="000000">
+                      <a:alpha val="100000"/>
+                    </a:srgbClr>
+                  </a:solidFill>
+                  <a:latin typeface="Helvetica"/>
+                  <a:cs typeface="Helvetica"/>
+                </a:rPr>
+                <a:t>eGFR difference (%): 100 × (CKD-EPI Cr-Cys − CG) / CG</a:t>
+              </a:r>
+            </a:p>
+          </p:txBody>
+        </p:sp>
+        <p:sp>
+          <p:nvSpPr>
+            <p:cNvPr id="87" name="tx87"/>
+            <p:cNvSpPr/>
+            <p:nvPr/>
+          </p:nvSpPr>
+          <p:spPr>
+            <a:xfrm rot="-5400000">
+              <a:off x="138035" y="4944909"/>
+              <a:ext cx="1016904" cy="100218"/>
+            </a:xfrm>
+            <a:prstGeom prst="rect">
+              <a:avLst/>
+            </a:prstGeom>
+            <a:noFill/>
+          </p:spPr>
+          <p:txBody>
+            <a:bodyPr lIns="0" rIns="0" tIns="0" bIns="0" anchorCtr="1" anchor="ctr" wrap="none"/>
+            <a:lstStyle/>
+            <a:p>
+              <a:pPr algn="l" marL="0" marR="0" indent="0">
+                <a:lnSpc>
+                  <a:spcPts val="1100"/>
+                </a:lnSpc>
+                <a:spcBef>
+                  <a:spcPts val="0"/>
+                </a:spcBef>
+                <a:spcAft>
+                  <a:spcPts val="0"/>
+                </a:spcAft>
+              </a:pPr>
+              <a:r>
+                <a:rPr sz="1100">
+                  <a:solidFill>
+                    <a:srgbClr val="000000">
+                      <a:alpha val="100000"/>
+                    </a:srgbClr>
+                  </a:solidFill>
+                  <a:latin typeface="Helvetica"/>
+                  <a:cs typeface="Helvetica"/>
+                </a:rPr>
+                <a:t>subHR (95% CI)</a:t>
+              </a:r>
+            </a:p>
+          </p:txBody>
+        </p:sp>
+        <p:sp>
+          <p:nvSpPr>
+            <p:cNvPr id="88" name="tx88"/>
+            <p:cNvSpPr/>
+            <p:nvPr/>
+          </p:nvSpPr>
+          <p:spPr>
+            <a:xfrm>
+              <a:off x="887106" y="4159544"/>
+              <a:ext cx="6451914" cy="82021"/>
+            </a:xfrm>
+            <a:prstGeom prst="rect">
+              <a:avLst/>
+            </a:prstGeom>
+            <a:noFill/>
+          </p:spPr>
+          <p:txBody>
+            <a:bodyPr lIns="0" rIns="0" tIns="0" bIns="0" anchorCtr="1" anchor="ctr" wrap="none"/>
+            <a:lstStyle/>
+            <a:p>
+              <a:pPr algn="l" marL="0" marR="0" indent="0">
+                <a:lnSpc>
+                  <a:spcPts val="900"/>
+                </a:lnSpc>
+                <a:spcBef>
+                  <a:spcPts val="0"/>
+                </a:spcBef>
+                <a:spcAft>
+                  <a:spcPts val="0"/>
+                </a:spcAft>
+              </a:pPr>
+              <a:r>
+                <a:rPr sz="900">
+                  <a:solidFill>
+                    <a:srgbClr val="404040">
+                      <a:alpha val="100000"/>
+                    </a:srgbClr>
+                  </a:solidFill>
+                  <a:latin typeface="Helvetica"/>
+                  <a:cs typeface="Helvetica"/>
+                </a:rPr>
+                <a:t>subHR per 10 % decline: 2.15 (1.45-3.19), p = &lt;0.001  |  per IQR decline (Δ = 29.3 %): 9.43 (2.97-29.95)  |  IQR: [-14.6, 14.7] %</a:t>
+              </a:r>
+            </a:p>
+          </p:txBody>
+        </p:sp>
+        <p:sp>
+          <p:nvSpPr>
+            <p:cNvPr id="89" name="tx89"/>
+            <p:cNvSpPr/>
+            <p:nvPr/>
+          </p:nvSpPr>
+          <p:spPr>
+            <a:xfrm>
+              <a:off x="887106" y="3932770"/>
               <a:ext cx="270022" cy="120152"/>
             </a:xfrm>
             <a:prstGeom prst="rect">
